--- a/en/files/slides/Session_5_EN.pptx
+++ b/en/files/slides/Session_5_EN.pptx
@@ -11899,7 +11899,7 @@
                 <a:latin typeface="Century Gothic"/>
                 <a:cs typeface="Century Gothic"/>
               </a:rPr>
-              <a:t>5.2 [Level 2] Meet the course dataset FLUID-ICU  |  25 minutes</a:t>
+              <a:t>5.2 Meet the course dataset FLUID-ICU  |  25 minutes</a:t>
             </a:r>
           </a:p>
         </p:txBody>
@@ -21504,7 +21504,7 @@
                 <a:latin typeface="Century Gothic"/>
                 <a:cs typeface="Century Gothic"/>
               </a:rPr>
-              <a:t>5.4 [Level 2] Describe the course dataset  |  25 minutes</a:t>
+              <a:t>5.4 Describe the course dataset  |  25 minutes</a:t>
             </a:r>
           </a:p>
         </p:txBody>

--- a/en/files/slides/Session_5_EN.pptx
+++ b/en/files/slides/Session_5_EN.pptx
@@ -737,7 +737,7 @@
           <a:p>
             <a:r>
               <a:rPr lang="en-US" sz="1400" b="0" dirty="0"/>
-              <a:t>Welcome to Weekend 3. Sessions 1-4 asked a question, found the evidence and chose a design. This weekend we MEASURE and ANALYSE: today (Session 5) the data, tomorrow (Session 6) the analysis.</a:t>
+              <a:t>Welcome to Week 5. Sessions 1-4 asked a question, found the evidence and chose a design. Over these two Saturdays we MEASURE and ANALYSE: today (Session 5) the data, next Saturday (Session 6) the analysis.</a:t>
             </a:r>
           </a:p>
           <a:p>
@@ -749,7 +749,7 @@
           <a:p>
             <a:r>
               <a:rPr lang="en-US" sz="1400" b="0" dirty="0"/>
-              <a:t>New this weekend: the course dataset FLUID-ICU, a realistic (simulated) cohort of about 600 adults with sepsis. You will see it cleaned and described live in R, and each group gets one research question and a results pack that becomes its manuscript in Weekend 4.</a:t>
+              <a:t>New in Weeks 5-6: the course dataset FLUID-ICU, a realistic (simulated) cohort of about 600 adults with sepsis. You will see it cleaned and described live in R, and each group gets one research question and a results pack that becomes its manuscript in Weeks 7-8.</a:t>
             </a:r>
           </a:p>
           <a:p>
@@ -1130,7 +1130,7 @@
           <a:p>
             <a:r>
               <a:rPr lang="en-US" sz="1400" b="0" dirty="0"/>
-              <a:t>Tomorrow (Session 6, 6.4) we name the mechanisms (MCAR, MAR, MNAR) and see the idea of multiple imputation. But statistical fixes are always second best to prevention.</a:t>
+              <a:t>Next Saturday (Session 6, 6.4) we name the mechanisms (MCAR, MAR, MNAR) and see the idea of multiple imputation. But statistical fixes are always second best to prevention.</a:t>
             </a:r>
           </a:p>
           <a:p>
@@ -1586,7 +1586,7 @@
           <a:p>
             <a:r>
               <a:rPr lang="en-US" sz="1400" b="0" dirty="0"/>
-              <a:t>Ask: from what you know of Saturday 2 and Paper 2, which patients do you expect to have a positive balance? Expected: the sickest ones. Keep that in mind for Table 1 and Session 6.</a:t>
+              <a:t>Ask: from what you know of Sessions 3-4 and Paper 2, which patients do you expect to have a positive balance? Expected: the sickest ones. Keep that in mind for Table 1 and Session 6.</a:t>
             </a:r>
           </a:p>
         </p:txBody>
@@ -2141,7 +2141,7 @@
           <a:p>
             <a:r>
               <a:rPr lang="en-US" sz="1400" b="0" dirty="0"/>
-              <a:t>What is left after cleaning is REAL missing data: lactate 93 of 620 (15.0%), every other variable 1% or less. These gaps are the subject of 6.4 tomorrow.</a:t>
+              <a:t>What is left after cleaning is REAL missing data: lactate 93 of 620 (15.0%), every other variable 1% or less. These gaps are the subject of 6.4 next Saturday.</a:t>
             </a:r>
           </a:p>
           <a:p>
@@ -2276,7 +2276,7 @@
           <a:p>
             <a:r>
               <a:rPr lang="en-US" sz="1400" b="0" dirty="0"/>
-              <a:t>Assign the questions now (or confirm the assignment made before the weekend).</a:t>
+              <a:t>Assign the questions now (or confirm the assignment made before the session).</a:t>
             </a:r>
           </a:p>
         </p:txBody>
@@ -4676,7 +4676,7 @@
           <a:p>
             <a:r>
               <a:rPr lang="en-US" sz="1400" b="0" dirty="0"/>
-              <a:t>Tomorrow (Session 6) the groups add the sample size, the analysis plan and the missing-data plan.</a:t>
+              <a:t>Next Saturday (Session 6) the groups add the sample size, the analysis plan and the missing-data plan.</a:t>
             </a:r>
           </a:p>
         </p:txBody>
@@ -5003,7 +5003,7 @@
           <a:p>
             <a:r>
               <a:rPr lang="en-US" sz="1400" b="0" dirty="0"/>
-              <a:t>Tomorrow (Session 6): from the sample to an answer: confidence intervals, p-values, tests, regression, survival and missing data, all run live on FLUID-ICU.</a:t>
+              <a:t>Next Saturday (Session 6): from the sample to an answer: confidence intervals, p-values, tests, regression, survival and missing data, all run live on FLUID-ICU.</a:t>
             </a:r>
           </a:p>
         </p:txBody>
@@ -5102,7 +5102,7 @@
           <a:p>
             <a:r>
               <a:rPr lang="en-US" sz="1400" b="0" dirty="0"/>
-              <a:t>Thank the room: today was a lot of new vocabulary; tomorrow builds directly on it.</a:t>
+              <a:t>Thank the room: today was a lot of new vocabulary; next Saturday builds directly on it.</a:t>
             </a:r>
           </a:p>
         </p:txBody>
@@ -9256,7 +9256,7 @@
                 <a:latin typeface="Century Gothic"/>
                 <a:cs typeface="Century Gothic"/>
               </a:rPr>
-              <a:t>Weekend 3 · Saturday</a:t>
+              <a:t>Week 5 · Saturday</a:t>
             </a:r>
           </a:p>
           <a:p>
@@ -15499,7 +15499,7 @@
                 <a:latin typeface="Century Gothic"/>
                 <a:cs typeface="Century Gothic"/>
               </a:rPr>
-              <a:t>Each group answers one question and writes it up as a manuscript in Weekend 4.</a:t>
+              <a:t>Each group answers one question and writes it up as a manuscript in Weeks 7-8.</a:t>
             </a:r>
           </a:p>
         </p:txBody>
@@ -27563,7 +27563,7 @@
                 <a:latin typeface="Century Gothic"/>
                 <a:cs typeface="Century Gothic"/>
               </a:rPr>
-              <a:t>Tomorrow: Session 6</a:t>
+              <a:t>Next Saturday: Session 6</a:t>
             </a:r>
           </a:p>
           <a:p>

--- a/en/files/slides/Session_5_EN.pptx
+++ b/en/files/slides/Session_5_EN.pptx
@@ -1106,7 +1106,7 @@
           <a:p>
             <a:r>
               <a:rPr lang="en-US" sz="1400" b="0" dirty="0"/>
-              <a:t>Teaching point: missing data do not just reduce the number of patients; they can give the WRONG answer.</a:t>
+              <a:t>Teaching point: missing data reduce the number of patients, and they can also give the WRONG answer.</a:t>
             </a:r>
           </a:p>
           <a:p>
@@ -1457,7 +1457,7 @@
           <a:p>
             <a:r>
               <a:rPr lang="en-US" sz="1400" b="0" dirty="0"/>
-              <a:t>Key message: from now on you do not only read other people's studies: your group will analyse and write up a realistic study. FLUID-ICU is SIMULATED: invented by computer, no real patient, hospital or country. But it behaves like real ICU data, including its problems.</a:t>
+              <a:t>Key message: from now on your group will analyse and write up a realistic study, as well as reading other people's. FLUID-ICU is SIMULATED: invented by computer, no real patient, hospital or country. But it behaves like real ICU data, including its problems.</a:t>
             </a:r>
           </a:p>
           <a:p>
@@ -1901,7 +1901,7 @@
           <a:p>
             <a:r>
               <a:rPr lang="en-US" sz="1400" b="0" dirty="0"/>
-              <a:t>Show: the raw data read as text; 623 rows -&gt; 620 after removing the 3 duplicates; the table of sex spellings before and after; the three date formats; the lactate medians by ICU (ICU C about 9 times higher) and the conversion; impossible values set to missing; the final check that the cleaned file is identical to the reference clean file.</a:t>
+              <a:t>Show: the raw data read as text; 623 rows reduced to 620 by removing the 3 duplicates; the table of sex spellings before and after; the three date formats; the lactate medians by ICU (ICU C about 9 times higher) and the conversion; impossible values set to missing; the final check that the cleaned file is identical to the reference clean file.</a:t>
             </a:r>
           </a:p>
           <a:p>
@@ -3239,7 +3239,7 @@
           <a:p>
             <a:r>
               <a:rPr lang="en-US" sz="1400" b="0" dirty="0"/>
-              <a:t>Key message: most problems in clinical research are not in the analysis, they are in the data. A statistician cannot fix a blank box, a missing unit or an impossible value six months later.</a:t>
+              <a:t>Key message: most problems in clinical research lie in the data rather than in the analysis. A statistician cannot fix a blank box, a missing unit or an impossible value six months later.</a:t>
             </a:r>
           </a:p>
           <a:p>
@@ -3338,7 +3338,7 @@
           <a:p>
             <a:r>
               <a:rPr lang="en-US" sz="1400" b="0" dirty="0"/>
-              <a:t>Teaching point: four graphs cover most of what you need to describe data. (Survival curves - Kaplan-Meier - are introduced in Session 6, when we analyse time-to-event outcomes.)</a:t>
+              <a:t>Teaching point: four graphs cover most of what you need to describe data. Survival curves (Kaplan-Meier) come in Session 6, when we analyse time-to-event outcomes.</a:t>
             </a:r>
           </a:p>
           <a:p>
@@ -3923,7 +3923,7 @@
           <a:p>
             <a:r>
               <a:rPr lang="en-US" sz="1400" b="0" dirty="0"/>
-              <a:t>Show: the shape of age (roughly symmetric -&gt; mean, SD) vs lactate and ICU stay (right-skewed -&gt; median, IQR); the Table 1 by fluid-balance group with overall, negative (n = 245) and positive (n = 373) columns and the number missing per variable; the histogram of fluid balance, the SOFA boxplot by group, the sorted bar chart of infection source.</a:t>
+              <a:t>Show: the shape of age (roughly symmetric, so mean and SD) vs lactate and ICU stay (right-skewed, so median and IQR); the Table 1 by fluid-balance group with overall, negative (n = 245) and positive (n = 373) columns and the number missing per variable; the histogram of fluid balance, the SOFA boxplot by group, the sorted bar chart of infection source.</a:t>
             </a:r>
           </a:p>
           <a:p>
@@ -5498,7 +5498,7 @@
           <a:p>
             <a:r>
               <a:rPr lang="en-US" sz="1400" b="0" dirty="0"/>
-              <a:t>Copyright slide - leave on screen while participants leave.</a:t>
+              <a:t>Copyright slide. Leave on screen while participants leave.</a:t>
             </a:r>
           </a:p>
         </p:txBody>
@@ -15033,7 +15033,7 @@
                 <a:latin typeface="Century Gothic"/>
                 <a:cs typeface="Century Gothic"/>
               </a:rPr>
-              <a:t>Impossible values -&gt;</a:t>
+              <a:t>Impossible values →</a:t>
             </a:r>
           </a:p>
           <a:p>
@@ -19143,7 +19143,7 @@
                 <a:latin typeface="Century Gothic"/>
                 <a:cs typeface="Century Gothic"/>
               </a:rPr>
-              <a:t>Most clinical measurements cluster around a typical value or have a long tail - check which.</a:t>
+              <a:t>Most clinical data cluster around a typical value or have a long tail. Check which.</a:t>
             </a:r>
           </a:p>
         </p:txBody>
@@ -27898,7 +27898,7 @@
                 <a:latin typeface="Century Gothic"/>
                 <a:cs typeface="Century Gothic"/>
               </a:rPr>
-              <a:t>Extra slides — Session 5</a:t>
+              <a:t>Extra slides: Session 5</a:t>
             </a:r>
           </a:p>
         </p:txBody>

--- a/en/files/slides/Session_5_EN.pptx
+++ b/en/files/slides/Session_5_EN.pptx
@@ -9185,8 +9185,8 @@
                 <a:solidFill>
                   <a:srgbClr val="0D7377"/>
                 </a:solidFill>
-                <a:latin typeface="Century Gothic"/>
-                <a:cs typeface="Century Gothic"/>
+                <a:latin typeface="Arial"/>
+                <a:cs typeface="Arial"/>
               </a:rPr>
               <a:t>Session 5 · Data: collect it well, describe it honestly</a:t>
             </a:r>
@@ -9253,8 +9253,8 @@
                 <a:solidFill>
                   <a:srgbClr val="0070C0"/>
                 </a:solidFill>
-                <a:latin typeface="Century Gothic"/>
-                <a:cs typeface="Century Gothic"/>
+                <a:latin typeface="Arial"/>
+                <a:cs typeface="Arial"/>
               </a:rPr>
               <a:t>Week 5 · Saturday</a:t>
             </a:r>
@@ -9278,8 +9278,8 @@
                 <a:solidFill>
                   <a:srgbClr val="000000"/>
                 </a:solidFill>
-                <a:latin typeface="Century Gothic"/>
-                <a:cs typeface="Century Gothic"/>
+                <a:latin typeface="Arial"/>
+                <a:cs typeface="Arial"/>
               </a:rPr>
               <a:t>Recap quiz on Sessions 3-4 (10 min)</a:t>
             </a:r>
@@ -9297,8 +9297,8 @@
                 <a:solidFill>
                   <a:srgbClr val="000000"/>
                 </a:solidFill>
-                <a:latin typeface="Century Gothic"/>
-                <a:cs typeface="Century Gothic"/>
+                <a:latin typeface="Arial"/>
+                <a:cs typeface="Arial"/>
               </a:rPr>
               <a:t>5.1 Good data by design: variables, CRF, data dictionary, checks, data management</a:t>
             </a:r>
@@ -9316,8 +9316,8 @@
                 <a:solidFill>
                   <a:srgbClr val="000000"/>
                 </a:solidFill>
-                <a:latin typeface="Century Gothic"/>
-                <a:cs typeface="Century Gothic"/>
+                <a:latin typeface="Arial"/>
+                <a:cs typeface="Arial"/>
               </a:rPr>
               <a:t>5.2 Meet the course dataset FLUID-ICU (live R cleaning demo)</a:t>
             </a:r>
@@ -9335,8 +9335,8 @@
                 <a:solidFill>
                   <a:srgbClr val="000000"/>
                 </a:solidFill>
-                <a:latin typeface="Century Gothic"/>
-                <a:cs typeface="Century Gothic"/>
+                <a:latin typeface="Arial"/>
+                <a:cs typeface="Arial"/>
               </a:rPr>
               <a:t>5.3 Describing and showing data: summaries, figures, tables</a:t>
             </a:r>
@@ -9354,8 +9354,8 @@
                 <a:solidFill>
                   <a:srgbClr val="000000"/>
                 </a:solidFill>
-                <a:latin typeface="Century Gothic"/>
-                <a:cs typeface="Century Gothic"/>
+                <a:latin typeface="Arial"/>
+                <a:cs typeface="Arial"/>
               </a:rPr>
               <a:t>5.4 Describe the course dataset: Table 1 and figures</a:t>
             </a:r>
@@ -9373,8 +9373,8 @@
                 <a:solidFill>
                   <a:srgbClr val="000000"/>
                 </a:solidFill>
-                <a:latin typeface="Century Gothic"/>
-                <a:cs typeface="Century Gothic"/>
+                <a:latin typeface="Arial"/>
+                <a:cs typeface="Arial"/>
               </a:rPr>
               <a:t>Proposal builder 5: variables, mini-CRF, data dictionary, data management</a:t>
             </a:r>
@@ -9411,7 +9411,7 @@
                     <a:lumMod val="50000"/>
                   </a:schemeClr>
                 </a:solidFill>
-                <a:latin typeface="Verdana"/>
+                <a:latin typeface="Arial"/>
               </a:rPr>
               <a:t>Neudata | #ClearDataClearImpact</a:t>
             </a:r>
@@ -9541,8 +9541,8 @@
                 <a:solidFill>
                   <a:srgbClr val="0D7377"/>
                 </a:solidFill>
-                <a:latin typeface="Century Gothic"/>
-                <a:cs typeface="Century Gothic"/>
+                <a:latin typeface="Arial"/>
+                <a:cs typeface="Arial"/>
               </a:rPr>
               <a:t>Data validation: let the rules catch the errors</a:t>
             </a:r>
@@ -9638,8 +9638,8 @@
                 <a:solidFill>
                   <a:srgbClr val="FFFFFF"/>
                 </a:solidFill>
-                <a:latin typeface="Century Gothic"/>
-                <a:cs typeface="Century Gothic"/>
+                <a:latin typeface="Arial"/>
+                <a:cs typeface="Arial"/>
               </a:rPr>
               <a:t>KEY MESSAGE   </a:t>
             </a:r>
@@ -9648,8 +9648,8 @@
                 <a:solidFill>
                   <a:srgbClr val="FFFFFF"/>
                 </a:solidFill>
-                <a:latin typeface="Century Gothic"/>
-                <a:cs typeface="Century Gothic"/>
+                <a:latin typeface="Arial"/>
+                <a:cs typeface="Arial"/>
               </a:rPr>
               <a:t>Check data while the patient is still in the unit, not a year later.</a:t>
             </a:r>
@@ -9686,7 +9686,7 @@
                     <a:lumMod val="50000"/>
                   </a:schemeClr>
                 </a:solidFill>
-                <a:latin typeface="Verdana"/>
+                <a:latin typeface="Arial"/>
               </a:rPr>
               <a:t>Neudata | #ClearDataClearImpact</a:t>
             </a:r>
@@ -9816,8 +9816,8 @@
                 <a:solidFill>
                   <a:srgbClr val="0D7377"/>
                 </a:solidFill>
-                <a:latin typeface="Century Gothic"/>
-                <a:cs typeface="Century Gothic"/>
+                <a:latin typeface="Arial"/>
+                <a:cs typeface="Arial"/>
               </a:rPr>
               <a:t>Data management in practice: from bedside to database</a:t>
             </a:r>
@@ -9913,8 +9913,8 @@
                 <a:solidFill>
                   <a:srgbClr val="FFFFFF"/>
                 </a:solidFill>
-                <a:latin typeface="Century Gothic"/>
-                <a:cs typeface="Century Gothic"/>
+                <a:latin typeface="Arial"/>
+                <a:cs typeface="Arial"/>
               </a:rPr>
               <a:t>KEY MESSAGE   </a:t>
             </a:r>
@@ -9923,8 +9923,8 @@
                 <a:solidFill>
                   <a:srgbClr val="FFFFFF"/>
                 </a:solidFill>
-                <a:latin typeface="Century Gothic"/>
-                <a:cs typeface="Century Gothic"/>
+                <a:latin typeface="Arial"/>
+                <a:cs typeface="Arial"/>
               </a:rPr>
               <a:t>Check at entry, enter twice if on paper, and log every change.</a:t>
             </a:r>
@@ -9961,7 +9961,7 @@
                     <a:lumMod val="50000"/>
                   </a:schemeClr>
                 </a:solidFill>
-                <a:latin typeface="Verdana"/>
+                <a:latin typeface="Arial"/>
               </a:rPr>
               <a:t>Neudata | #ClearDataClearImpact</a:t>
             </a:r>
@@ -10091,8 +10091,8 @@
                 <a:solidFill>
                   <a:srgbClr val="0D7377"/>
                 </a:solidFill>
-                <a:latin typeface="Century Gothic"/>
-                <a:cs typeface="Century Gothic"/>
+                <a:latin typeface="Arial"/>
+                <a:cs typeface="Arial"/>
               </a:rPr>
               <a:t>Missing data: why it matters</a:t>
             </a:r>
@@ -10188,8 +10188,8 @@
                 <a:solidFill>
                   <a:srgbClr val="FFFFFF"/>
                 </a:solidFill>
-                <a:latin typeface="Century Gothic"/>
-                <a:cs typeface="Century Gothic"/>
+                <a:latin typeface="Arial"/>
+                <a:cs typeface="Arial"/>
               </a:rPr>
               <a:t>KEY MESSAGE   </a:t>
             </a:r>
@@ -10198,8 +10198,8 @@
                 <a:solidFill>
                   <a:srgbClr val="FFFFFF"/>
                 </a:solidFill>
-                <a:latin typeface="Century Gothic"/>
-                <a:cs typeface="Century Gothic"/>
+                <a:latin typeface="Arial"/>
+                <a:cs typeface="Arial"/>
               </a:rPr>
               <a:t>Missing data are rarely random: the sickest patients go missing first.</a:t>
             </a:r>
@@ -10236,7 +10236,7 @@
                     <a:lumMod val="50000"/>
                   </a:schemeClr>
                 </a:solidFill>
-                <a:latin typeface="Verdana"/>
+                <a:latin typeface="Arial"/>
               </a:rPr>
               <a:t>Neudata | #ClearDataClearImpact</a:t>
             </a:r>
@@ -10366,8 +10366,8 @@
                 <a:solidFill>
                   <a:srgbClr val="0D7377"/>
                 </a:solidFill>
-                <a:latin typeface="Century Gothic"/>
-                <a:cs typeface="Century Gothic"/>
+                <a:latin typeface="Arial"/>
+                <a:cs typeface="Arial"/>
               </a:rPr>
               <a:t>Missing data: how to prevent it</a:t>
             </a:r>
@@ -10433,8 +10433,8 @@
                 <a:solidFill>
                   <a:srgbClr val="595959"/>
                 </a:solidFill>
-                <a:latin typeface="Century Gothic"/>
-                <a:cs typeface="Century Gothic"/>
+                <a:latin typeface="Arial"/>
+                <a:cs typeface="Arial"/>
               </a:rPr>
               <a:t>Prevention is the only reliable cure.</a:t>
             </a:r>
@@ -10478,8 +10478,8 @@
                 <a:solidFill>
                   <a:srgbClr val="FFFFFF"/>
                 </a:solidFill>
-                <a:latin typeface="Century Gothic"/>
-                <a:cs typeface="Century Gothic"/>
+                <a:latin typeface="Arial"/>
+                <a:cs typeface="Arial"/>
               </a:rPr>
               <a:t>Fewer items</a:t>
             </a:r>
@@ -10527,8 +10527,8 @@
                 <a:solidFill>
                   <a:srgbClr val="000000"/>
                 </a:solidFill>
-                <a:latin typeface="Century Gothic"/>
-                <a:cs typeface="Century Gothic"/>
+                <a:latin typeface="Arial"/>
+                <a:cs typeface="Arial"/>
               </a:rPr>
               <a:t>Collect only what you need</a:t>
             </a:r>
@@ -10548,8 +10548,8 @@
                 <a:solidFill>
                   <a:srgbClr val="000000"/>
                 </a:solidFill>
-                <a:latin typeface="Century Gothic"/>
-                <a:cs typeface="Century Gothic"/>
+                <a:latin typeface="Arial"/>
+                <a:cs typeface="Arial"/>
               </a:rPr>
               <a:t>Short forms get finished</a:t>
             </a:r>
@@ -10593,8 +10593,8 @@
                 <a:solidFill>
                   <a:srgbClr val="FFFFFF"/>
                 </a:solidFill>
-                <a:latin typeface="Century Gothic"/>
-                <a:cs typeface="Century Gothic"/>
+                <a:latin typeface="Arial"/>
+                <a:cs typeface="Arial"/>
               </a:rPr>
               <a:t>Clear form</a:t>
             </a:r>
@@ -10642,8 +10642,8 @@
                 <a:solidFill>
                   <a:srgbClr val="000000"/>
                 </a:solidFill>
-                <a:latin typeface="Century Gothic"/>
-                <a:cs typeface="Century Gothic"/>
+                <a:latin typeface="Arial"/>
+                <a:cs typeface="Arial"/>
               </a:rPr>
               <a:t>Required fields marked</a:t>
             </a:r>
@@ -10663,8 +10663,8 @@
                 <a:solidFill>
                   <a:srgbClr val="000000"/>
                 </a:solidFill>
-                <a:latin typeface="Century Gothic"/>
-                <a:cs typeface="Century Gothic"/>
+                <a:latin typeface="Arial"/>
+                <a:cs typeface="Arial"/>
               </a:rPr>
               <a:t>'Not done' and 'unknown' options</a:t>
             </a:r>
@@ -10708,8 +10708,8 @@
                 <a:solidFill>
                   <a:srgbClr val="FFFFFF"/>
                 </a:solidFill>
-                <a:latin typeface="Century Gothic"/>
-                <a:cs typeface="Century Gothic"/>
+                <a:latin typeface="Arial"/>
+                <a:cs typeface="Arial"/>
               </a:rPr>
               <a:t>Train</a:t>
             </a:r>
@@ -10757,8 +10757,8 @@
                 <a:solidFill>
                   <a:srgbClr val="000000"/>
                 </a:solidFill>
-                <a:latin typeface="Century Gothic"/>
-                <a:cs typeface="Century Gothic"/>
+                <a:latin typeface="Arial"/>
+                <a:cs typeface="Arial"/>
               </a:rPr>
               <a:t>Train every data collector</a:t>
             </a:r>
@@ -10778,8 +10778,8 @@
                 <a:solidFill>
                   <a:srgbClr val="000000"/>
                 </a:solidFill>
-                <a:latin typeface="Century Gothic"/>
-                <a:cs typeface="Century Gothic"/>
+                <a:latin typeface="Arial"/>
+                <a:cs typeface="Arial"/>
               </a:rPr>
               <a:t>Same rules, same definitions</a:t>
             </a:r>
@@ -10823,8 +10823,8 @@
                 <a:solidFill>
                   <a:srgbClr val="FFFFFF"/>
                 </a:solidFill>
-                <a:latin typeface="Century Gothic"/>
-                <a:cs typeface="Century Gothic"/>
+                <a:latin typeface="Arial"/>
+                <a:cs typeface="Arial"/>
               </a:rPr>
               <a:t>Check weekly</a:t>
             </a:r>
@@ -10872,8 +10872,8 @@
                 <a:solidFill>
                   <a:srgbClr val="000000"/>
                 </a:solidFill>
-                <a:latin typeface="Century Gothic"/>
-                <a:cs typeface="Century Gothic"/>
+                <a:latin typeface="Arial"/>
+                <a:cs typeface="Arial"/>
               </a:rPr>
               <a:t>Completeness report</a:t>
             </a:r>
@@ -10893,8 +10893,8 @@
                 <a:solidFill>
                   <a:srgbClr val="000000"/>
                 </a:solidFill>
-                <a:latin typeface="Century Gothic"/>
-                <a:cs typeface="Century Gothic"/>
+                <a:latin typeface="Arial"/>
+                <a:cs typeface="Arial"/>
               </a:rPr>
               <a:t>Who and what is missing?</a:t>
             </a:r>
@@ -10938,8 +10938,8 @@
                 <a:solidFill>
                   <a:srgbClr val="FFFFFF"/>
                 </a:solidFill>
-                <a:latin typeface="Century Gothic"/>
-                <a:cs typeface="Century Gothic"/>
+                <a:latin typeface="Arial"/>
+                <a:cs typeface="Arial"/>
               </a:rPr>
               <a:t>Chase early</a:t>
             </a:r>
@@ -10987,8 +10987,8 @@
                 <a:solidFill>
                   <a:srgbClr val="000000"/>
                 </a:solidFill>
-                <a:latin typeface="Century Gothic"/>
-                <a:cs typeface="Century Gothic"/>
+                <a:latin typeface="Arial"/>
+                <a:cs typeface="Arial"/>
               </a:rPr>
               <a:t>Fix while the chart is on the ward</a:t>
             </a:r>
@@ -11008,8 +11008,8 @@
                 <a:solidFill>
                   <a:srgbClr val="000000"/>
                 </a:solidFill>
-                <a:latin typeface="Century Gothic"/>
-                <a:cs typeface="Century Gothic"/>
+                <a:latin typeface="Arial"/>
+                <a:cs typeface="Arial"/>
               </a:rPr>
               <a:t>Plan follow-up for transfers</a:t>
             </a:r>
@@ -11053,8 +11053,8 @@
                 <a:solidFill>
                   <a:srgbClr val="FFFFFF"/>
                 </a:solidFill>
-                <a:latin typeface="Century Gothic"/>
-                <a:cs typeface="Century Gothic"/>
+                <a:latin typeface="Arial"/>
+                <a:cs typeface="Arial"/>
               </a:rPr>
               <a:t>KEY MESSAGE   </a:t>
             </a:r>
@@ -11063,8 +11063,8 @@
                 <a:solidFill>
                   <a:srgbClr val="FFFFFF"/>
                 </a:solidFill>
-                <a:latin typeface="Century Gothic"/>
-                <a:cs typeface="Century Gothic"/>
+                <a:latin typeface="Arial"/>
+                <a:cs typeface="Arial"/>
               </a:rPr>
               <a:t>Plan who completes, checks and chases each form before you start.</a:t>
             </a:r>
@@ -11101,7 +11101,7 @@
                     <a:lumMod val="50000"/>
                   </a:schemeClr>
                 </a:solidFill>
-                <a:latin typeface="Verdana"/>
+                <a:latin typeface="Arial"/>
               </a:rPr>
               <a:t>Neudata | #ClearDataClearImpact</a:t>
             </a:r>
@@ -11231,8 +11231,8 @@
                 <a:solidFill>
                   <a:srgbClr val="0D7377"/>
                 </a:solidFill>
-                <a:latin typeface="Century Gothic"/>
-                <a:cs typeface="Century Gothic"/>
+                <a:latin typeface="Arial"/>
+                <a:cs typeface="Arial"/>
               </a:rPr>
               <a:t>Pair task: sort the variables, fix the CRF</a:t>
             </a:r>
@@ -11302,8 +11302,8 @@
                 <a:solidFill>
                   <a:srgbClr val="FFFFFF"/>
                 </a:solidFill>
-                <a:latin typeface="Century Gothic"/>
-                <a:cs typeface="Century Gothic"/>
+                <a:latin typeface="Arial"/>
+                <a:cs typeface="Arial"/>
               </a:rPr>
               <a:t>GROUP WORK   |   7 min</a:t>
             </a:r>
@@ -11340,25 +11340,19 @@
               <a:spcBef>
                 <a:spcPts val="450"/>
               </a:spcBef>
-              <a:buNone/>
-            </a:pPr>
-            <a:r>
-              <a:rPr lang="en-US" sz="1650" b="1" dirty="0">
-                <a:solidFill>
-                  <a:srgbClr val="0D7377"/>
-                </a:solidFill>
-                <a:latin typeface="Century Gothic"/>
-                <a:cs typeface="Century Gothic"/>
-              </a:rPr>
-              <a:t>1.  </a:t>
-            </a:r>
+              <a:buClr>
+                <a:srgbClr val="0D7377"/>
+              </a:buClr>
+              <a:buFont typeface="Arial"/>
+              <a:buChar char="•"/>
+            </a:pPr>
             <a:r>
               <a:rPr lang="en-US" sz="1650" dirty="0">
                 <a:solidFill>
                   <a:srgbClr val="000000"/>
                 </a:solidFill>
-                <a:latin typeface="Century Gothic"/>
-                <a:cs typeface="Century Gothic"/>
+                <a:latin typeface="Arial"/>
+                <a:cs typeface="Arial"/>
               </a:rPr>
               <a:t>Work with your neighbour, worksheet 'Session 5, exercises 1 and 2'</a:t>
             </a:r>
@@ -11371,25 +11365,19 @@
               <a:spcBef>
                 <a:spcPts val="450"/>
               </a:spcBef>
-              <a:buNone/>
-            </a:pPr>
-            <a:r>
-              <a:rPr lang="en-US" sz="1650" b="1" dirty="0">
-                <a:solidFill>
-                  <a:srgbClr val="0D7377"/>
-                </a:solidFill>
-                <a:latin typeface="Century Gothic"/>
-                <a:cs typeface="Century Gothic"/>
-              </a:rPr>
-              <a:t>2.  </a:t>
-            </a:r>
+              <a:buClr>
+                <a:srgbClr val="0D7377"/>
+              </a:buClr>
+              <a:buFont typeface="Arial"/>
+              <a:buChar char="•"/>
+            </a:pPr>
             <a:r>
               <a:rPr lang="en-US" sz="1650" dirty="0">
                 <a:solidFill>
                   <a:srgbClr val="000000"/>
                 </a:solidFill>
-                <a:latin typeface="Century Gothic"/>
-                <a:cs typeface="Century Gothic"/>
+                <a:latin typeface="Arial"/>
+                <a:cs typeface="Arial"/>
               </a:rPr>
               <a:t>Exercise 1: classify 10 ICU variables (continuous, count, binary, nominal, ordinal, time-to-event)</a:t>
             </a:r>
@@ -11402,25 +11390,19 @@
               <a:spcBef>
                 <a:spcPts val="450"/>
               </a:spcBef>
-              <a:buNone/>
-            </a:pPr>
-            <a:r>
-              <a:rPr lang="en-US" sz="1650" b="1" dirty="0">
-                <a:solidFill>
-                  <a:srgbClr val="0D7377"/>
-                </a:solidFill>
-                <a:latin typeface="Century Gothic"/>
-                <a:cs typeface="Century Gothic"/>
-              </a:rPr>
-              <a:t>3.  </a:t>
-            </a:r>
+              <a:buClr>
+                <a:srgbClr val="0D7377"/>
+              </a:buClr>
+              <a:buFont typeface="Arial"/>
+              <a:buChar char="•"/>
+            </a:pPr>
             <a:r>
               <a:rPr lang="en-US" sz="1650" dirty="0">
                 <a:solidFill>
                   <a:srgbClr val="000000"/>
                 </a:solidFill>
-                <a:latin typeface="Century Gothic"/>
-                <a:cs typeface="Century Gothic"/>
+                <a:latin typeface="Arial"/>
+                <a:cs typeface="Arial"/>
               </a:rPr>
               <a:t>Exercise 2: rewrite 4 bad CRF items so they have only one reading</a:t>
             </a:r>
@@ -11433,25 +11415,19 @@
               <a:spcBef>
                 <a:spcPts val="450"/>
               </a:spcBef>
-              <a:buNone/>
-            </a:pPr>
-            <a:r>
-              <a:rPr lang="en-US" sz="1650" b="1" dirty="0">
-                <a:solidFill>
-                  <a:srgbClr val="0D7377"/>
-                </a:solidFill>
-                <a:latin typeface="Century Gothic"/>
-                <a:cs typeface="Century Gothic"/>
-              </a:rPr>
-              <a:t>4.  </a:t>
-            </a:r>
+              <a:buClr>
+                <a:srgbClr val="0D7377"/>
+              </a:buClr>
+              <a:buFont typeface="Arial"/>
+              <a:buChar char="•"/>
+            </a:pPr>
             <a:r>
               <a:rPr lang="en-US" sz="1650" dirty="0">
                 <a:solidFill>
                   <a:srgbClr val="000000"/>
                 </a:solidFill>
-                <a:latin typeface="Century Gothic"/>
-                <a:cs typeface="Century Gothic"/>
+                <a:latin typeface="Arial"/>
+                <a:cs typeface="Arial"/>
               </a:rPr>
               <a:t>Be ready to read out one rewritten item</a:t>
             </a:r>
@@ -11495,8 +11471,8 @@
                 <a:solidFill>
                   <a:srgbClr val="0D7377"/>
                 </a:solidFill>
-                <a:latin typeface="Century Gothic"/>
-                <a:cs typeface="Century Gothic"/>
+                <a:latin typeface="Arial"/>
+                <a:cs typeface="Arial"/>
               </a:rPr>
               <a:t>Check yourself</a:t>
             </a:r>
@@ -11517,8 +11493,8 @@
                 <a:solidFill>
                   <a:srgbClr val="000000"/>
                 </a:solidFill>
-                <a:latin typeface="Century Gothic"/>
-                <a:cs typeface="Century Gothic"/>
+                <a:latin typeface="Arial"/>
+                <a:cs typeface="Arial"/>
               </a:rPr>
               <a:t>Unit in the question?</a:t>
             </a:r>
@@ -11539,8 +11515,8 @@
                 <a:solidFill>
                   <a:srgbClr val="000000"/>
                 </a:solidFill>
-                <a:latin typeface="Century Gothic"/>
-                <a:cs typeface="Century Gothic"/>
+                <a:latin typeface="Arial"/>
+                <a:cs typeface="Arial"/>
               </a:rPr>
               <a:t>Time point in the question?</a:t>
             </a:r>
@@ -11561,8 +11537,8 @@
                 <a:solidFill>
                   <a:srgbClr val="000000"/>
                 </a:solidFill>
-                <a:latin typeface="Century Gothic"/>
-                <a:cs typeface="Century Gothic"/>
+                <a:latin typeface="Arial"/>
+                <a:cs typeface="Arial"/>
               </a:rPr>
               <a:t>One answer only?</a:t>
             </a:r>
@@ -11583,8 +11559,8 @@
                 <a:solidFill>
                   <a:srgbClr val="000000"/>
                 </a:solidFill>
-                <a:latin typeface="Century Gothic"/>
-                <a:cs typeface="Century Gothic"/>
+                <a:latin typeface="Arial"/>
+                <a:cs typeface="Arial"/>
               </a:rPr>
               <a:t>'Unknown' option?</a:t>
             </a:r>
@@ -11630,8 +11606,8 @@
                 <a:solidFill>
                   <a:srgbClr val="0D7377"/>
                 </a:solidFill>
-                <a:latin typeface="Century Gothic"/>
-                <a:cs typeface="Century Gothic"/>
+                <a:latin typeface="Arial"/>
+                <a:cs typeface="Arial"/>
               </a:rPr>
               <a:t>OUTPUT   </a:t>
             </a:r>
@@ -11640,8 +11616,8 @@
                 <a:solidFill>
                   <a:srgbClr val="000000"/>
                 </a:solidFill>
-                <a:latin typeface="Century Gothic"/>
-                <a:cs typeface="Century Gothic"/>
+                <a:latin typeface="Arial"/>
+                <a:cs typeface="Arial"/>
               </a:rPr>
               <a:t>10 classified variables and 4 rewritten CRF items</a:t>
             </a:r>
@@ -11678,7 +11654,7 @@
                     <a:lumMod val="50000"/>
                   </a:schemeClr>
                 </a:solidFill>
-                <a:latin typeface="Verdana"/>
+                <a:latin typeface="Arial"/>
               </a:rPr>
               <a:t>Neudata | #ClearDataClearImpact</a:t>
             </a:r>
@@ -11808,8 +11784,8 @@
                 <a:solidFill>
                   <a:srgbClr val="0D7377"/>
                 </a:solidFill>
-                <a:latin typeface="Century Gothic"/>
-                <a:cs typeface="Century Gothic"/>
+                <a:latin typeface="Arial"/>
+                <a:cs typeface="Arial"/>
               </a:rPr>
               <a:t>5.2 Meet the course dataset</a:t>
             </a:r>
@@ -11878,8 +11854,8 @@
                 <a:solidFill>
                   <a:srgbClr val="0D7377"/>
                 </a:solidFill>
-                <a:latin typeface="Century Gothic"/>
-                <a:cs typeface="Century Gothic"/>
+                <a:latin typeface="Arial"/>
+                <a:cs typeface="Arial"/>
               </a:rPr>
               <a:t>One realistic dataset, five research questions, five manuscripts.</a:t>
             </a:r>
@@ -11896,8 +11872,8 @@
                 <a:solidFill>
                   <a:srgbClr val="595959"/>
                 </a:solidFill>
-                <a:latin typeface="Century Gothic"/>
-                <a:cs typeface="Century Gothic"/>
+                <a:latin typeface="Arial"/>
+                <a:cs typeface="Arial"/>
               </a:rPr>
               <a:t>5.2 Meet the course dataset FLUID-ICU  |  25 minutes</a:t>
             </a:r>
@@ -11934,7 +11910,7 @@
                     <a:lumMod val="50000"/>
                   </a:schemeClr>
                 </a:solidFill>
-                <a:latin typeface="Verdana"/>
+                <a:latin typeface="Arial"/>
               </a:rPr>
               <a:t>Neudata | #ClearDataClearImpact</a:t>
             </a:r>
@@ -12064,8 +12040,8 @@
                 <a:solidFill>
                   <a:srgbClr val="0D7377"/>
                 </a:solidFill>
-                <a:latin typeface="Century Gothic"/>
-                <a:cs typeface="Century Gothic"/>
+                <a:latin typeface="Arial"/>
+                <a:cs typeface="Arial"/>
               </a:rPr>
               <a:t>FLUID-ICU at a glance (simulated cohort)</a:t>
             </a:r>
@@ -12131,8 +12107,8 @@
                 <a:solidFill>
                   <a:srgbClr val="595959"/>
                 </a:solidFill>
-                <a:latin typeface="Century Gothic"/>
-                <a:cs typeface="Century Gothic"/>
+                <a:latin typeface="Arial"/>
+                <a:cs typeface="Arial"/>
               </a:rPr>
               <a:t>A multicentre prospective cohort: 4 ICUs, January 2023 to December 2024.</a:t>
             </a:r>
@@ -12174,8 +12150,8 @@
                 <a:solidFill>
                   <a:srgbClr val="FFFFFF"/>
                 </a:solidFill>
-                <a:latin typeface="Century Gothic"/>
-                <a:cs typeface="Century Gothic"/>
+                <a:latin typeface="Arial"/>
+                <a:cs typeface="Arial"/>
               </a:rPr>
               <a:t>Who</a:t>
             </a:r>
@@ -12223,8 +12199,8 @@
                 <a:solidFill>
                   <a:srgbClr val="000000"/>
                 </a:solidFill>
-                <a:latin typeface="Century Gothic"/>
-                <a:cs typeface="Century Gothic"/>
+                <a:latin typeface="Arial"/>
+                <a:cs typeface="Arial"/>
               </a:rPr>
               <a:t>620 adults with sepsis</a:t>
             </a:r>
@@ -12244,8 +12220,8 @@
                 <a:solidFill>
                   <a:srgbClr val="000000"/>
                 </a:solidFill>
-                <a:latin typeface="Century Gothic"/>
-                <a:cs typeface="Century Gothic"/>
+                <a:latin typeface="Arial"/>
+                <a:cs typeface="Arial"/>
               </a:rPr>
               <a:t>ICU A 191, B 164,</a:t>
             </a:r>
@@ -12265,8 +12241,8 @@
                 <a:solidFill>
                   <a:srgbClr val="000000"/>
                 </a:solidFill>
-                <a:latin typeface="Century Gothic"/>
-                <a:cs typeface="Century Gothic"/>
+                <a:latin typeface="Arial"/>
+                <a:cs typeface="Arial"/>
               </a:rPr>
               <a:t>C 147, D 118</a:t>
             </a:r>
@@ -12308,8 +12284,8 @@
                 <a:solidFill>
                   <a:srgbClr val="FFFFFF"/>
                 </a:solidFill>
-                <a:latin typeface="Century Gothic"/>
-                <a:cs typeface="Century Gothic"/>
+                <a:latin typeface="Arial"/>
+                <a:cs typeface="Arial"/>
               </a:rPr>
               <a:t>Exposure</a:t>
             </a:r>
@@ -12357,8 +12333,8 @@
                 <a:solidFill>
                   <a:srgbClr val="000000"/>
                 </a:solidFill>
-                <a:latin typeface="Century Gothic"/>
-                <a:cs typeface="Century Gothic"/>
+                <a:latin typeface="Arial"/>
+                <a:cs typeface="Arial"/>
               </a:rPr>
               <a:t>Cumulative fluid balance</a:t>
             </a:r>
@@ -12378,8 +12354,8 @@
                 <a:solidFill>
                   <a:srgbClr val="000000"/>
                 </a:solidFill>
-                <a:latin typeface="Century Gothic"/>
-                <a:cs typeface="Century Gothic"/>
+                <a:latin typeface="Arial"/>
+                <a:cs typeface="Arial"/>
               </a:rPr>
               <a:t>by day 3 (ml/kg)</a:t>
             </a:r>
@@ -12399,8 +12375,8 @@
                 <a:solidFill>
                   <a:srgbClr val="000000"/>
                 </a:solidFill>
-                <a:latin typeface="Century Gothic"/>
-                <a:cs typeface="Century Gothic"/>
+                <a:latin typeface="Arial"/>
+                <a:cs typeface="Arial"/>
               </a:rPr>
               <a:t>Positive: 373/618 (60.4%)</a:t>
             </a:r>
@@ -12442,8 +12418,8 @@
                 <a:solidFill>
                   <a:srgbClr val="FFFFFF"/>
                 </a:solidFill>
-                <a:latin typeface="Century Gothic"/>
-                <a:cs typeface="Century Gothic"/>
+                <a:latin typeface="Arial"/>
+                <a:cs typeface="Arial"/>
               </a:rPr>
               <a:t>Primary outcome</a:t>
             </a:r>
@@ -12491,8 +12467,8 @@
                 <a:solidFill>
                   <a:srgbClr val="000000"/>
                 </a:solidFill>
-                <a:latin typeface="Century Gothic"/>
-                <a:cs typeface="Century Gothic"/>
+                <a:latin typeface="Arial"/>
+                <a:cs typeface="Arial"/>
               </a:rPr>
               <a:t>Death by day 28</a:t>
             </a:r>
@@ -12512,8 +12488,8 @@
                 <a:solidFill>
                   <a:srgbClr val="000000"/>
                 </a:solidFill>
-                <a:latin typeface="Century Gothic"/>
-                <a:cs typeface="Century Gothic"/>
+                <a:latin typeface="Arial"/>
+                <a:cs typeface="Arial"/>
               </a:rPr>
               <a:t>179/620 (28.9%)</a:t>
             </a:r>
@@ -12533,8 +12509,8 @@
                 <a:solidFill>
                   <a:srgbClr val="000000"/>
                 </a:solidFill>
-                <a:latin typeface="Century Gothic"/>
-                <a:cs typeface="Century Gothic"/>
+                <a:latin typeface="Arial"/>
+                <a:cs typeface="Arial"/>
               </a:rPr>
               <a:t>+ time to death</a:t>
             </a:r>
@@ -12576,8 +12552,8 @@
                 <a:solidFill>
                   <a:srgbClr val="FFFFFF"/>
                 </a:solidFill>
-                <a:latin typeface="Century Gothic"/>
-                <a:cs typeface="Century Gothic"/>
+                <a:latin typeface="Arial"/>
+                <a:cs typeface="Arial"/>
               </a:rPr>
               <a:t>Also recorded</a:t>
             </a:r>
@@ -12625,8 +12601,8 @@
                 <a:solidFill>
                   <a:srgbClr val="000000"/>
                 </a:solidFill>
-                <a:latin typeface="Century Gothic"/>
-                <a:cs typeface="Century Gothic"/>
+                <a:latin typeface="Arial"/>
+                <a:cs typeface="Arial"/>
               </a:rPr>
               <a:t>SOFA, APACHE II, lactate</a:t>
             </a:r>
@@ -12646,8 +12622,8 @@
                 <a:solidFill>
                   <a:srgbClr val="000000"/>
                 </a:solidFill>
-                <a:latin typeface="Century Gothic"/>
-                <a:cs typeface="Century Gothic"/>
+                <a:latin typeface="Arial"/>
+                <a:cs typeface="Arial"/>
               </a:rPr>
               <a:t>AKI, ventilator-free days</a:t>
             </a:r>
@@ -12667,8 +12643,8 @@
                 <a:solidFill>
                   <a:srgbClr val="000000"/>
                 </a:solidFill>
-                <a:latin typeface="Century Gothic"/>
-                <a:cs typeface="Century Gothic"/>
+                <a:latin typeface="Arial"/>
+                <a:cs typeface="Arial"/>
               </a:rPr>
               <a:t>ICU length of stay</a:t>
             </a:r>
@@ -12712,8 +12688,8 @@
                 <a:solidFill>
                   <a:srgbClr val="FFFFFF"/>
                 </a:solidFill>
-                <a:latin typeface="Century Gothic"/>
-                <a:cs typeface="Century Gothic"/>
+                <a:latin typeface="Arial"/>
+                <a:cs typeface="Arial"/>
               </a:rPr>
               <a:t>KEY MESSAGE   </a:t>
             </a:r>
@@ -12722,8 +12698,8 @@
                 <a:solidFill>
                   <a:srgbClr val="FFFFFF"/>
                 </a:solidFill>
-                <a:latin typeface="Century Gothic"/>
-                <a:cs typeface="Century Gothic"/>
+                <a:latin typeface="Arial"/>
+                <a:cs typeface="Arial"/>
               </a:rPr>
               <a:t>Question: is a positive fluid balance by day 3 associated with 28-day death?</a:t>
             </a:r>
@@ -12760,7 +12736,7 @@
                     <a:lumMod val="50000"/>
                   </a:schemeClr>
                 </a:solidFill>
-                <a:latin typeface="Verdana"/>
+                <a:latin typeface="Arial"/>
               </a:rPr>
               <a:t>Neudata | #ClearDataClearImpact</a:t>
             </a:r>
@@ -12890,8 +12866,8 @@
                 <a:solidFill>
                   <a:srgbClr val="0D7377"/>
                 </a:solidFill>
-                <a:latin typeface="Century Gothic"/>
-                <a:cs typeface="Century Gothic"/>
+                <a:latin typeface="Arial"/>
+                <a:cs typeface="Arial"/>
               </a:rPr>
               <a:t>From 623 rows to 527 complete cases</a:t>
             </a:r>
@@ -12987,8 +12963,8 @@
                 <a:solidFill>
                   <a:srgbClr val="FFFFFF"/>
                 </a:solidFill>
-                <a:latin typeface="Century Gothic"/>
-                <a:cs typeface="Century Gothic"/>
+                <a:latin typeface="Arial"/>
+                <a:cs typeface="Arial"/>
               </a:rPr>
               <a:t>KEY MESSAGE   </a:t>
             </a:r>
@@ -12997,8 +12973,8 @@
                 <a:solidFill>
                   <a:srgbClr val="FFFFFF"/>
                 </a:solidFill>
-                <a:latin typeface="Century Gothic"/>
-                <a:cs typeface="Century Gothic"/>
+                <a:latin typeface="Arial"/>
+                <a:cs typeface="Arial"/>
               </a:rPr>
               <a:t>Every paper reports this flow: who was included at each step, and why not.</a:t>
             </a:r>
@@ -13035,7 +13011,7 @@
                     <a:lumMod val="50000"/>
                   </a:schemeClr>
                 </a:solidFill>
-                <a:latin typeface="Verdana"/>
+                <a:latin typeface="Arial"/>
               </a:rPr>
               <a:t>Neudata | #ClearDataClearImpact</a:t>
             </a:r>
@@ -13165,8 +13141,8 @@
                 <a:solidFill>
                   <a:srgbClr val="0D7377"/>
                 </a:solidFill>
-                <a:latin typeface="Century Gothic"/>
-                <a:cs typeface="Century Gothic"/>
+                <a:latin typeface="Arial"/>
+                <a:cs typeface="Arial"/>
               </a:rPr>
               <a:t>Raw vs clean: what the four ICUs actually sent</a:t>
             </a:r>
@@ -13262,8 +13238,8 @@
                 <a:solidFill>
                   <a:srgbClr val="FFFFFF"/>
                 </a:solidFill>
-                <a:latin typeface="Century Gothic"/>
-                <a:cs typeface="Century Gothic"/>
+                <a:latin typeface="Arial"/>
+                <a:cs typeface="Arial"/>
               </a:rPr>
               <a:t>KEY MESSAGE   </a:t>
             </a:r>
@@ -13272,8 +13248,8 @@
                 <a:solidFill>
                   <a:srgbClr val="FFFFFF"/>
                 </a:solidFill>
-                <a:latin typeface="Century Gothic"/>
-                <a:cs typeface="Century Gothic"/>
+                <a:latin typeface="Arial"/>
+                <a:cs typeface="Arial"/>
               </a:rPr>
               <a:t>Real data arrive messy: clean them with a script, never by hand.</a:t>
             </a:r>
@@ -13310,7 +13286,7 @@
                     <a:lumMod val="50000"/>
                   </a:schemeClr>
                 </a:solidFill>
-                <a:latin typeface="Verdana"/>
+                <a:latin typeface="Arial"/>
               </a:rPr>
               <a:t>Neudata | #ClearDataClearImpact</a:t>
             </a:r>
@@ -13440,8 +13416,8 @@
                 <a:solidFill>
                   <a:srgbClr val="0D7377"/>
                 </a:solidFill>
-                <a:latin typeface="Century Gothic"/>
-                <a:cs typeface="Century Gothic"/>
+                <a:latin typeface="Arial"/>
+                <a:cs typeface="Arial"/>
               </a:rPr>
               <a:t>Live demo: cleaning FLUID-ICU in R</a:t>
             </a:r>
@@ -13511,8 +13487,8 @@
                 <a:solidFill>
                   <a:srgbClr val="FFFFFF"/>
                 </a:solidFill>
-                <a:latin typeface="Century Gothic"/>
-                <a:cs typeface="Century Gothic"/>
+                <a:latin typeface="Arial"/>
+                <a:cs typeface="Arial"/>
               </a:rPr>
               <a:t>LIVE DEMO   |   8 min</a:t>
             </a:r>
@@ -13549,25 +13525,19 @@
               <a:spcBef>
                 <a:spcPts val="450"/>
               </a:spcBef>
-              <a:buNone/>
-            </a:pPr>
-            <a:r>
-              <a:rPr lang="en-US" sz="1650" b="1" dirty="0">
-                <a:solidFill>
-                  <a:srgbClr val="B5651D"/>
-                </a:solidFill>
-                <a:latin typeface="Century Gothic"/>
-                <a:cs typeface="Century Gothic"/>
-              </a:rPr>
-              <a:t>1.  </a:t>
-            </a:r>
+              <a:buClr>
+                <a:srgbClr val="B5651D"/>
+              </a:buClr>
+              <a:buFont typeface="Arial"/>
+              <a:buChar char="•"/>
+            </a:pPr>
             <a:r>
               <a:rPr lang="en-US" sz="1650" dirty="0">
                 <a:solidFill>
                   <a:srgbClr val="000000"/>
                 </a:solidFill>
-                <a:latin typeface="Century Gothic"/>
-                <a:cs typeface="Century Gothic"/>
+                <a:latin typeface="Arial"/>
+                <a:cs typeface="Arial"/>
               </a:rPr>
               <a:t>Open FLUID-ICU.Rproj and the script 01_clean.R</a:t>
             </a:r>
@@ -13580,25 +13550,19 @@
               <a:spcBef>
                 <a:spcPts val="450"/>
               </a:spcBef>
-              <a:buNone/>
-            </a:pPr>
-            <a:r>
-              <a:rPr lang="en-US" sz="1650" b="1" dirty="0">
-                <a:solidFill>
-                  <a:srgbClr val="B5651D"/>
-                </a:solidFill>
-                <a:latin typeface="Century Gothic"/>
-                <a:cs typeface="Century Gothic"/>
-              </a:rPr>
-              <a:t>2.  </a:t>
-            </a:r>
+              <a:buClr>
+                <a:srgbClr val="B5651D"/>
+              </a:buClr>
+              <a:buFont typeface="Arial"/>
+              <a:buChar char="•"/>
+            </a:pPr>
             <a:r>
               <a:rPr lang="en-US" sz="1650" dirty="0">
                 <a:solidFill>
                   <a:srgbClr val="000000"/>
                 </a:solidFill>
-                <a:latin typeface="Century Gothic"/>
-                <a:cs typeface="Century Gothic"/>
+                <a:latin typeface="Arial"/>
+                <a:cs typeface="Arial"/>
               </a:rPr>
               <a:t>Read the raw file as text and look at it</a:t>
             </a:r>
@@ -13611,25 +13575,19 @@
               <a:spcBef>
                 <a:spcPts val="450"/>
               </a:spcBef>
-              <a:buNone/>
-            </a:pPr>
-            <a:r>
-              <a:rPr lang="en-US" sz="1650" b="1" dirty="0">
-                <a:solidFill>
-                  <a:srgbClr val="B5651D"/>
-                </a:solidFill>
-                <a:latin typeface="Century Gothic"/>
-                <a:cs typeface="Century Gothic"/>
-              </a:rPr>
-              <a:t>3.  </a:t>
-            </a:r>
+              <a:buClr>
+                <a:srgbClr val="B5651D"/>
+              </a:buClr>
+              <a:buFont typeface="Arial"/>
+              <a:buChar char="•"/>
+            </a:pPr>
             <a:r>
               <a:rPr lang="en-US" sz="1650" dirty="0">
                 <a:solidFill>
                   <a:srgbClr val="000000"/>
                 </a:solidFill>
-                <a:latin typeface="Century Gothic"/>
-                <a:cs typeface="Century Gothic"/>
+                <a:latin typeface="Arial"/>
+                <a:cs typeface="Arial"/>
               </a:rPr>
               <a:t>Run one block per problem: names, duplicates, sites, dates, codes</a:t>
             </a:r>
@@ -13642,25 +13600,19 @@
               <a:spcBef>
                 <a:spcPts val="450"/>
               </a:spcBef>
-              <a:buNone/>
-            </a:pPr>
-            <a:r>
-              <a:rPr lang="en-US" sz="1650" b="1" dirty="0">
-                <a:solidFill>
-                  <a:srgbClr val="B5651D"/>
-                </a:solidFill>
-                <a:latin typeface="Century Gothic"/>
-                <a:cs typeface="Century Gothic"/>
-              </a:rPr>
-              <a:t>4.  </a:t>
-            </a:r>
+              <a:buClr>
+                <a:srgbClr val="B5651D"/>
+              </a:buClr>
+              <a:buFont typeface="Arial"/>
+              <a:buChar char="•"/>
+            </a:pPr>
             <a:r>
               <a:rPr lang="en-US" sz="1650" dirty="0">
                 <a:solidFill>
                   <a:srgbClr val="000000"/>
                 </a:solidFill>
-                <a:latin typeface="Century Gothic"/>
-                <a:cs typeface="Century Gothic"/>
+                <a:latin typeface="Arial"/>
+                <a:cs typeface="Arial"/>
               </a:rPr>
               <a:t>Find the lactate unit problem with a summary by ICU</a:t>
             </a:r>
@@ -13673,25 +13625,19 @@
               <a:spcBef>
                 <a:spcPts val="450"/>
               </a:spcBef>
-              <a:buNone/>
-            </a:pPr>
-            <a:r>
-              <a:rPr lang="en-US" sz="1650" b="1" dirty="0">
-                <a:solidFill>
-                  <a:srgbClr val="B5651D"/>
-                </a:solidFill>
-                <a:latin typeface="Century Gothic"/>
-                <a:cs typeface="Century Gothic"/>
-              </a:rPr>
-              <a:t>5.  </a:t>
-            </a:r>
+              <a:buClr>
+                <a:srgbClr val="B5651D"/>
+              </a:buClr>
+              <a:buFont typeface="Arial"/>
+              <a:buChar char="•"/>
+            </a:pPr>
             <a:r>
               <a:rPr lang="en-US" sz="1650" dirty="0">
                 <a:solidFill>
                   <a:srgbClr val="000000"/>
                 </a:solidFill>
-                <a:latin typeface="Century Gothic"/>
-                <a:cs typeface="Century Gothic"/>
+                <a:latin typeface="Arial"/>
+                <a:cs typeface="Arial"/>
               </a:rPr>
               <a:t>Last block: the cleaned file is identical to the reference file</a:t>
             </a:r>
@@ -13735,8 +13681,8 @@
                 <a:solidFill>
                   <a:srgbClr val="B5651D"/>
                 </a:solidFill>
-                <a:latin typeface="Century Gothic"/>
-                <a:cs typeface="Century Gothic"/>
+                <a:latin typeface="Arial"/>
+                <a:cs typeface="Arial"/>
               </a:rPr>
               <a:t>Watch for</a:t>
             </a:r>
@@ -13757,8 +13703,8 @@
                 <a:solidFill>
                   <a:srgbClr val="000000"/>
                 </a:solidFill>
-                <a:latin typeface="Century Gothic"/>
-                <a:cs typeface="Century Gothic"/>
+                <a:latin typeface="Arial"/>
+                <a:cs typeface="Arial"/>
               </a:rPr>
               <a:t>One problem, one block</a:t>
             </a:r>
@@ -13779,8 +13725,8 @@
                 <a:solidFill>
                   <a:srgbClr val="000000"/>
                 </a:solidFill>
-                <a:latin typeface="Century Gothic"/>
-                <a:cs typeface="Century Gothic"/>
+                <a:latin typeface="Arial"/>
+                <a:cs typeface="Arial"/>
               </a:rPr>
               <a:t>The raw file is never changed</a:t>
             </a:r>
@@ -13801,8 +13747,8 @@
                 <a:solidFill>
                   <a:srgbClr val="000000"/>
                 </a:solidFill>
-                <a:latin typeface="Century Gothic"/>
-                <a:cs typeface="Century Gothic"/>
+                <a:latin typeface="Arial"/>
+                <a:cs typeface="Arial"/>
               </a:rPr>
               <a:t>Every step goes in the log</a:t>
             </a:r>
@@ -13823,8 +13769,8 @@
                 <a:solidFill>
                   <a:srgbClr val="000000"/>
                 </a:solidFill>
-                <a:latin typeface="Century Gothic"/>
-                <a:cs typeface="Century Gothic"/>
+                <a:latin typeface="Arial"/>
+                <a:cs typeface="Arial"/>
               </a:rPr>
               <a:t>Re-run = same result</a:t>
             </a:r>
@@ -13870,8 +13816,8 @@
                 <a:solidFill>
                   <a:srgbClr val="B5651D"/>
                 </a:solidFill>
-                <a:latin typeface="Century Gothic"/>
-                <a:cs typeface="Century Gothic"/>
+                <a:latin typeface="Arial"/>
+                <a:cs typeface="Arial"/>
               </a:rPr>
               <a:t>OUTPUT   </a:t>
             </a:r>
@@ -13880,8 +13826,8 @@
                 <a:solidFill>
                   <a:srgbClr val="000000"/>
                 </a:solidFill>
-                <a:latin typeface="Century Gothic"/>
-                <a:cs typeface="Century Gothic"/>
+                <a:latin typeface="Arial"/>
+                <a:cs typeface="Arial"/>
               </a:rPr>
               <a:t>Everyone has seen raw data become clean, reproducibly</a:t>
             </a:r>
@@ -13918,7 +13864,7 @@
                     <a:lumMod val="50000"/>
                   </a:schemeClr>
                 </a:solidFill>
-                <a:latin typeface="Verdana"/>
+                <a:latin typeface="Arial"/>
               </a:rPr>
               <a:t>Neudata | #ClearDataClearImpact</a:t>
             </a:r>
@@ -14048,8 +13994,8 @@
                 <a:solidFill>
                   <a:srgbClr val="0D7377"/>
                 </a:solidFill>
-                <a:latin typeface="Century Gothic"/>
-                <a:cs typeface="Century Gothic"/>
+                <a:latin typeface="Arial"/>
+                <a:cs typeface="Arial"/>
               </a:rPr>
               <a:t>Recap quiz: Sessions 3-4 in three questions</a:t>
             </a:r>
@@ -14119,8 +14065,8 @@
                 <a:solidFill>
                   <a:srgbClr val="FFFFFF"/>
                 </a:solidFill>
-                <a:latin typeface="Century Gothic"/>
-                <a:cs typeface="Century Gothic"/>
+                <a:latin typeface="Arial"/>
+                <a:cs typeface="Arial"/>
               </a:rPr>
               <a:t>QUICK QUIZ   |   10 min</a:t>
             </a:r>
@@ -14157,25 +14103,19 @@
               <a:spcBef>
                 <a:spcPts val="450"/>
               </a:spcBef>
-              <a:buNone/>
-            </a:pPr>
-            <a:r>
-              <a:rPr lang="en-US" sz="1650" b="1" dirty="0">
-                <a:solidFill>
-                  <a:srgbClr val="6C3483"/>
-                </a:solidFill>
-                <a:latin typeface="Century Gothic"/>
-                <a:cs typeface="Century Gothic"/>
-              </a:rPr>
-              <a:t>1.  </a:t>
-            </a:r>
+              <a:buClr>
+                <a:srgbClr val="6C3483"/>
+              </a:buClr>
+              <a:buFont typeface="Arial"/>
+              <a:buChar char="•"/>
+            </a:pPr>
             <a:r>
               <a:rPr lang="en-US" sz="1650" dirty="0">
                 <a:solidFill>
                   <a:srgbClr val="000000"/>
                 </a:solidFill>
-                <a:latin typeface="Century Gothic"/>
-                <a:cs typeface="Century Gothic"/>
+                <a:latin typeface="Arial"/>
+                <a:cs typeface="Arial"/>
               </a:rPr>
               <a:t>Q1. Patients who smoke are followed for 10 years to see who develops a stroke. Which design?</a:t>
             </a:r>
@@ -14188,25 +14128,19 @@
               <a:spcBef>
                 <a:spcPts val="450"/>
               </a:spcBef>
-              <a:buNone/>
-            </a:pPr>
-            <a:r>
-              <a:rPr lang="en-US" sz="1650" b="1" dirty="0">
-                <a:solidFill>
-                  <a:srgbClr val="6C3483"/>
-                </a:solidFill>
-                <a:latin typeface="Century Gothic"/>
-                <a:cs typeface="Century Gothic"/>
-              </a:rPr>
-              <a:t>2.  </a:t>
-            </a:r>
+              <a:buClr>
+                <a:srgbClr val="6C3483"/>
+              </a:buClr>
+              <a:buFont typeface="Arial"/>
+              <a:buChar char="•"/>
+            </a:pPr>
             <a:r>
               <a:rPr lang="en-US" sz="1650" dirty="0">
                 <a:solidFill>
                   <a:srgbClr val="000000"/>
                 </a:solidFill>
-                <a:latin typeface="Century Gothic"/>
-                <a:cs typeface="Century Gothic"/>
+                <a:latin typeface="Arial"/>
+                <a:cs typeface="Arial"/>
               </a:rPr>
               <a:t>Q2. In a cohort, sicker septic patients receive more fluid AND die more often. What is this called?</a:t>
             </a:r>
@@ -14219,25 +14153,19 @@
               <a:spcBef>
                 <a:spcPts val="450"/>
               </a:spcBef>
-              <a:buNone/>
-            </a:pPr>
-            <a:r>
-              <a:rPr lang="en-US" sz="1650" b="1" dirty="0">
-                <a:solidFill>
-                  <a:srgbClr val="6C3483"/>
-                </a:solidFill>
-                <a:latin typeface="Century Gothic"/>
-                <a:cs typeface="Century Gothic"/>
-              </a:rPr>
-              <a:t>3.  </a:t>
-            </a:r>
+              <a:buClr>
+                <a:srgbClr val="6C3483"/>
+              </a:buClr>
+              <a:buFont typeface="Arial"/>
+              <a:buChar char="•"/>
+            </a:pPr>
             <a:r>
               <a:rPr lang="en-US" sz="1650" dirty="0">
                 <a:solidFill>
                   <a:srgbClr val="000000"/>
                 </a:solidFill>
-                <a:latin typeface="Century Gothic"/>
-                <a:cs typeface="Century Gothic"/>
+                <a:latin typeface="Arial"/>
+                <a:cs typeface="Arial"/>
               </a:rPr>
               <a:t>Q3. Mortality is 30% with usual care and 20% with a new strategy. What are the RR and the NNT?</a:t>
             </a:r>
@@ -14250,25 +14178,19 @@
               <a:spcBef>
                 <a:spcPts val="450"/>
               </a:spcBef>
-              <a:buNone/>
-            </a:pPr>
-            <a:r>
-              <a:rPr lang="en-US" sz="1650" b="1" dirty="0">
-                <a:solidFill>
-                  <a:srgbClr val="6C3483"/>
-                </a:solidFill>
-                <a:latin typeface="Century Gothic"/>
-                <a:cs typeface="Century Gothic"/>
-              </a:rPr>
-              <a:t>4.  </a:t>
-            </a:r>
+              <a:buClr>
+                <a:srgbClr val="6C3483"/>
+              </a:buClr>
+              <a:buFont typeface="Arial"/>
+              <a:buChar char="•"/>
+            </a:pPr>
             <a:r>
               <a:rPr lang="en-US" sz="1650" dirty="0">
                 <a:solidFill>
                   <a:srgbClr val="000000"/>
                 </a:solidFill>
-                <a:latin typeface="Century Gothic"/>
-                <a:cs typeface="Century Gothic"/>
+                <a:latin typeface="Arial"/>
+                <a:cs typeface="Arial"/>
               </a:rPr>
               <a:t>Answer alone (2 min), then compare with your neighbour (2 min)</a:t>
             </a:r>
@@ -14312,8 +14234,8 @@
                 <a:solidFill>
                   <a:srgbClr val="6C3483"/>
                 </a:solidFill>
-                <a:latin typeface="Century Gothic"/>
-                <a:cs typeface="Century Gothic"/>
+                <a:latin typeface="Arial"/>
+                <a:cs typeface="Arial"/>
               </a:rPr>
               <a:t>Answers (reveal after)</a:t>
             </a:r>
@@ -14334,8 +14256,8 @@
                 <a:solidFill>
                   <a:srgbClr val="000000"/>
                 </a:solidFill>
-                <a:latin typeface="Century Gothic"/>
-                <a:cs typeface="Century Gothic"/>
+                <a:latin typeface="Arial"/>
+                <a:cs typeface="Arial"/>
               </a:rPr>
               <a:t>Q1: prospective cohort</a:t>
             </a:r>
@@ -14356,8 +14278,8 @@
                 <a:solidFill>
                   <a:srgbClr val="000000"/>
                 </a:solidFill>
-                <a:latin typeface="Century Gothic"/>
-                <a:cs typeface="Century Gothic"/>
+                <a:latin typeface="Arial"/>
+                <a:cs typeface="Arial"/>
               </a:rPr>
               <a:t>Q2: confounding by indication</a:t>
             </a:r>
@@ -14378,8 +14300,8 @@
                 <a:solidFill>
                   <a:srgbClr val="000000"/>
                 </a:solidFill>
-                <a:latin typeface="Century Gothic"/>
-                <a:cs typeface="Century Gothic"/>
+                <a:latin typeface="Arial"/>
+                <a:cs typeface="Arial"/>
               </a:rPr>
               <a:t>Q3: RR = 20/30 = 0.67; RD = 10%; NNT = 1/0.10 = 10</a:t>
             </a:r>
@@ -14425,8 +14347,8 @@
                 <a:solidFill>
                   <a:srgbClr val="6C3483"/>
                 </a:solidFill>
-                <a:latin typeface="Century Gothic"/>
-                <a:cs typeface="Century Gothic"/>
+                <a:latin typeface="Arial"/>
+                <a:cs typeface="Arial"/>
               </a:rPr>
               <a:t>OUTPUT   </a:t>
             </a:r>
@@ -14435,8 +14357,8 @@
                 <a:solidFill>
                   <a:srgbClr val="000000"/>
                 </a:solidFill>
-                <a:latin typeface="Century Gothic"/>
-                <a:cs typeface="Century Gothic"/>
+                <a:latin typeface="Arial"/>
+                <a:cs typeface="Arial"/>
               </a:rPr>
               <a:t>Everyone back on track with designs, confounding and the 2x2 measures</a:t>
             </a:r>
@@ -14473,7 +14395,7 @@
                     <a:lumMod val="50000"/>
                   </a:schemeClr>
                 </a:solidFill>
-                <a:latin typeface="Verdana"/>
+                <a:latin typeface="Arial"/>
               </a:rPr>
               <a:t>Neudata | #ClearDataClearImpact</a:t>
             </a:r>
@@ -14603,8 +14525,8 @@
                 <a:solidFill>
                   <a:srgbClr val="0D7377"/>
                 </a:solidFill>
-                <a:latin typeface="Century Gothic"/>
-                <a:cs typeface="Century Gothic"/>
+                <a:latin typeface="Arial"/>
+                <a:cs typeface="Arial"/>
               </a:rPr>
               <a:t>The cleaning log: the audit trail of the data</a:t>
             </a:r>
@@ -14670,8 +14592,8 @@
                 <a:solidFill>
                   <a:srgbClr val="595959"/>
                 </a:solidFill>
-                <a:latin typeface="Century Gothic"/>
-                <a:cs typeface="Century Gothic"/>
+                <a:latin typeface="Arial"/>
+                <a:cs typeface="Arial"/>
               </a:rPr>
               <a:t>Course/Data/cleaning_log.md: one row for every change made to the raw data.</a:t>
             </a:r>
@@ -14713,8 +14635,8 @@
                 <a:solidFill>
                   <a:srgbClr val="FFFFFF"/>
                 </a:solidFill>
-                <a:latin typeface="Century Gothic"/>
-                <a:cs typeface="Century Gothic"/>
+                <a:latin typeface="Arial"/>
+                <a:cs typeface="Arial"/>
               </a:rPr>
               <a:t>The rule</a:t>
             </a:r>
@@ -14762,8 +14684,8 @@
                 <a:solidFill>
                   <a:srgbClr val="000000"/>
                 </a:solidFill>
-                <a:latin typeface="Century Gothic"/>
-                <a:cs typeface="Century Gothic"/>
+                <a:latin typeface="Arial"/>
+                <a:cs typeface="Arial"/>
               </a:rPr>
               <a:t>Raw file never edited</a:t>
             </a:r>
@@ -14783,8 +14705,8 @@
                 <a:solidFill>
                   <a:srgbClr val="000000"/>
                 </a:solidFill>
-                <a:latin typeface="Century Gothic"/>
-                <a:cs typeface="Century Gothic"/>
+                <a:latin typeface="Arial"/>
+                <a:cs typeface="Arial"/>
               </a:rPr>
               <a:t>Changes made by script</a:t>
             </a:r>
@@ -14804,8 +14726,8 @@
                 <a:solidFill>
                   <a:srgbClr val="000000"/>
                 </a:solidFill>
-                <a:latin typeface="Century Gothic"/>
-                <a:cs typeface="Century Gothic"/>
+                <a:latin typeface="Arial"/>
+                <a:cs typeface="Arial"/>
               </a:rPr>
               <a:t>and written down</a:t>
             </a:r>
@@ -14847,8 +14769,8 @@
                 <a:solidFill>
                   <a:srgbClr val="FFFFFF"/>
                 </a:solidFill>
-                <a:latin typeface="Century Gothic"/>
-                <a:cs typeface="Century Gothic"/>
+                <a:latin typeface="Arial"/>
+                <a:cs typeface="Arial"/>
               </a:rPr>
               <a:t>Each row says</a:t>
             </a:r>
@@ -14896,8 +14818,8 @@
                 <a:solidFill>
                   <a:srgbClr val="000000"/>
                 </a:solidFill>
-                <a:latin typeface="Century Gothic"/>
-                <a:cs typeface="Century Gothic"/>
+                <a:latin typeface="Arial"/>
+                <a:cs typeface="Arial"/>
               </a:rPr>
               <a:t>Problem found</a:t>
             </a:r>
@@ -14917,8 +14839,8 @@
                 <a:solidFill>
                   <a:srgbClr val="000000"/>
                 </a:solidFill>
-                <a:latin typeface="Century Gothic"/>
-                <a:cs typeface="Century Gothic"/>
+                <a:latin typeface="Arial"/>
+                <a:cs typeface="Arial"/>
               </a:rPr>
               <a:t>How many</a:t>
             </a:r>
@@ -14938,8 +14860,8 @@
                 <a:solidFill>
                   <a:srgbClr val="000000"/>
                 </a:solidFill>
-                <a:latin typeface="Century Gothic"/>
-                <a:cs typeface="Century Gothic"/>
+                <a:latin typeface="Arial"/>
+                <a:cs typeface="Arial"/>
               </a:rPr>
               <a:t>What we did and why</a:t>
             </a:r>
@@ -14981,8 +14903,8 @@
                 <a:solidFill>
                   <a:srgbClr val="FFFFFF"/>
                 </a:solidFill>
-                <a:latin typeface="Century Gothic"/>
-                <a:cs typeface="Century Gothic"/>
+                <a:latin typeface="Arial"/>
+                <a:cs typeface="Arial"/>
               </a:rPr>
               <a:t>Queries</a:t>
             </a:r>
@@ -15030,8 +14952,8 @@
                 <a:solidFill>
                   <a:srgbClr val="000000"/>
                 </a:solidFill>
-                <a:latin typeface="Century Gothic"/>
-                <a:cs typeface="Century Gothic"/>
+                <a:latin typeface="Arial"/>
+                <a:cs typeface="Arial"/>
               </a:rPr>
               <a:t>Impossible values →</a:t>
             </a:r>
@@ -15051,8 +14973,8 @@
                 <a:solidFill>
                   <a:srgbClr val="000000"/>
                 </a:solidFill>
-                <a:latin typeface="Century Gothic"/>
-                <a:cs typeface="Century Gothic"/>
+                <a:latin typeface="Arial"/>
+                <a:cs typeface="Arial"/>
               </a:rPr>
               <a:t>missing + query to site</a:t>
             </a:r>
@@ -15072,8 +14994,8 @@
                 <a:solidFill>
                   <a:srgbClr val="000000"/>
                 </a:solidFill>
-                <a:latin typeface="Century Gothic"/>
-                <a:cs typeface="Century Gothic"/>
+                <a:latin typeface="Arial"/>
+                <a:cs typeface="Arial"/>
               </a:rPr>
               <a:t>Patient stays in</a:t>
             </a:r>
@@ -15115,8 +15037,8 @@
                 <a:solidFill>
                   <a:srgbClr val="FFFFFF"/>
                 </a:solidFill>
-                <a:latin typeface="Century Gothic"/>
-                <a:cs typeface="Century Gothic"/>
+                <a:latin typeface="Arial"/>
+                <a:cs typeface="Arial"/>
               </a:rPr>
               <a:t>What is left</a:t>
             </a:r>
@@ -15164,8 +15086,8 @@
                 <a:solidFill>
                   <a:srgbClr val="000000"/>
                 </a:solidFill>
-                <a:latin typeface="Century Gothic"/>
-                <a:cs typeface="Century Gothic"/>
+                <a:latin typeface="Arial"/>
+                <a:cs typeface="Arial"/>
               </a:rPr>
               <a:t>Real missing values</a:t>
             </a:r>
@@ -15185,8 +15107,8 @@
                 <a:solidFill>
                   <a:srgbClr val="000000"/>
                 </a:solidFill>
-                <a:latin typeface="Century Gothic"/>
-                <a:cs typeface="Century Gothic"/>
+                <a:latin typeface="Arial"/>
+                <a:cs typeface="Arial"/>
               </a:rPr>
               <a:t>Lactate: 93/620 (15.0%)</a:t>
             </a:r>
@@ -15206,8 +15128,8 @@
                 <a:solidFill>
                   <a:srgbClr val="000000"/>
                 </a:solidFill>
-                <a:latin typeface="Century Gothic"/>
-                <a:cs typeface="Century Gothic"/>
+                <a:latin typeface="Arial"/>
+                <a:cs typeface="Arial"/>
               </a:rPr>
               <a:t>Others 1% or less</a:t>
             </a:r>
@@ -15251,8 +15173,8 @@
                 <a:solidFill>
                   <a:srgbClr val="FFFFFF"/>
                 </a:solidFill>
-                <a:latin typeface="Century Gothic"/>
-                <a:cs typeface="Century Gothic"/>
+                <a:latin typeface="Arial"/>
+                <a:cs typeface="Arial"/>
               </a:rPr>
               <a:t>KEY MESSAGE   </a:t>
             </a:r>
@@ -15261,8 +15183,8 @@
                 <a:solidFill>
                   <a:srgbClr val="FFFFFF"/>
                 </a:solidFill>
-                <a:latin typeface="Century Gothic"/>
-                <a:cs typeface="Century Gothic"/>
+                <a:latin typeface="Arial"/>
+                <a:cs typeface="Arial"/>
               </a:rPr>
               <a:t>A reviewer must be able to trace every number back to the raw data.</a:t>
             </a:r>
@@ -15299,7 +15221,7 @@
                     <a:lumMod val="50000"/>
                   </a:schemeClr>
                 </a:solidFill>
-                <a:latin typeface="Verdana"/>
+                <a:latin typeface="Arial"/>
               </a:rPr>
               <a:t>Neudata | #ClearDataClearImpact</a:t>
             </a:r>
@@ -15429,8 +15351,8 @@
                 <a:solidFill>
                   <a:srgbClr val="0D7377"/>
                 </a:solidFill>
-                <a:latin typeface="Century Gothic"/>
-                <a:cs typeface="Century Gothic"/>
+                <a:latin typeface="Arial"/>
+                <a:cs typeface="Arial"/>
               </a:rPr>
               <a:t>Five groups, five questions, one dataset</a:t>
             </a:r>
@@ -15496,8 +15418,8 @@
                 <a:solidFill>
                   <a:srgbClr val="595959"/>
                 </a:solidFill>
-                <a:latin typeface="Century Gothic"/>
-                <a:cs typeface="Century Gothic"/>
+                <a:latin typeface="Arial"/>
+                <a:cs typeface="Arial"/>
               </a:rPr>
               <a:t>Each group answers one question and writes it up as a manuscript in Weeks 7-8.</a:t>
             </a:r>
@@ -15539,8 +15461,8 @@
                 <a:solidFill>
                   <a:srgbClr val="FFFFFF"/>
                 </a:solidFill>
-                <a:latin typeface="Century Gothic"/>
-                <a:cs typeface="Century Gothic"/>
+                <a:latin typeface="Arial"/>
+                <a:cs typeface="Arial"/>
               </a:rPr>
               <a:t>Q1 Mortality</a:t>
             </a:r>
@@ -15588,8 +15510,8 @@
                 <a:solidFill>
                   <a:srgbClr val="000000"/>
                 </a:solidFill>
-                <a:latin typeface="Century Gothic"/>
-                <a:cs typeface="Century Gothic"/>
+                <a:latin typeface="Arial"/>
+                <a:cs typeface="Arial"/>
               </a:rPr>
               <a:t>Positive balance and</a:t>
             </a:r>
@@ -15609,8 +15531,8 @@
                 <a:solidFill>
                   <a:srgbClr val="000000"/>
                 </a:solidFill>
-                <a:latin typeface="Century Gothic"/>
-                <a:cs typeface="Century Gothic"/>
+                <a:latin typeface="Arial"/>
+                <a:cs typeface="Arial"/>
               </a:rPr>
               <a:t>28-day death</a:t>
             </a:r>
@@ -15630,8 +15552,8 @@
                 <a:solidFill>
                   <a:srgbClr val="000000"/>
                 </a:solidFill>
-                <a:latin typeface="Century Gothic"/>
-                <a:cs typeface="Century Gothic"/>
+                <a:latin typeface="Arial"/>
+                <a:cs typeface="Arial"/>
               </a:rPr>
               <a:t>Logistic + KM/Cox</a:t>
             </a:r>
@@ -15673,8 +15595,8 @@
                 <a:solidFill>
                   <a:srgbClr val="FFFFFF"/>
                 </a:solidFill>
-                <a:latin typeface="Century Gothic"/>
-                <a:cs typeface="Century Gothic"/>
+                <a:latin typeface="Arial"/>
+                <a:cs typeface="Arial"/>
               </a:rPr>
               <a:t>Q2 AKI</a:t>
             </a:r>
@@ -15722,8 +15644,8 @@
                 <a:solidFill>
                   <a:srgbClr val="000000"/>
                 </a:solidFill>
-                <a:latin typeface="Century Gothic"/>
-                <a:cs typeface="Century Gothic"/>
+                <a:latin typeface="Arial"/>
+                <a:cs typeface="Arial"/>
               </a:rPr>
               <a:t>Fluid balance and</a:t>
             </a:r>
@@ -15743,8 +15665,8 @@
                 <a:solidFill>
                   <a:srgbClr val="000000"/>
                 </a:solidFill>
-                <a:latin typeface="Century Gothic"/>
-                <a:cs typeface="Century Gothic"/>
+                <a:latin typeface="Arial"/>
+                <a:cs typeface="Arial"/>
               </a:rPr>
               <a:t>acute kidney injury</a:t>
             </a:r>
@@ -15764,8 +15686,8 @@
                 <a:solidFill>
                   <a:srgbClr val="000000"/>
                 </a:solidFill>
-                <a:latin typeface="Century Gothic"/>
-                <a:cs typeface="Century Gothic"/>
+                <a:latin typeface="Arial"/>
+                <a:cs typeface="Arial"/>
               </a:rPr>
               <a:t>Logistic</a:t>
             </a:r>
@@ -15807,8 +15729,8 @@
                 <a:solidFill>
                   <a:srgbClr val="FFFFFF"/>
                 </a:solidFill>
-                <a:latin typeface="Century Gothic"/>
-                <a:cs typeface="Century Gothic"/>
+                <a:latin typeface="Arial"/>
+                <a:cs typeface="Arial"/>
               </a:rPr>
               <a:t>Q3 Ventilation</a:t>
             </a:r>
@@ -15856,8 +15778,8 @@
                 <a:solidFill>
                   <a:srgbClr val="000000"/>
                 </a:solidFill>
-                <a:latin typeface="Century Gothic"/>
-                <a:cs typeface="Century Gothic"/>
+                <a:latin typeface="Arial"/>
+                <a:cs typeface="Arial"/>
               </a:rPr>
               <a:t>Fluid balance and</a:t>
             </a:r>
@@ -15877,8 +15799,8 @@
                 <a:solidFill>
                   <a:srgbClr val="000000"/>
                 </a:solidFill>
-                <a:latin typeface="Century Gothic"/>
-                <a:cs typeface="Century Gothic"/>
+                <a:latin typeface="Arial"/>
+                <a:cs typeface="Arial"/>
               </a:rPr>
               <a:t>ventilator-free days</a:t>
             </a:r>
@@ -15898,8 +15820,8 @@
                 <a:solidFill>
                   <a:srgbClr val="000000"/>
                 </a:solidFill>
-                <a:latin typeface="Century Gothic"/>
-                <a:cs typeface="Century Gothic"/>
+                <a:latin typeface="Arial"/>
+                <a:cs typeface="Arial"/>
               </a:rPr>
               <a:t>Non-parametric / linear</a:t>
             </a:r>
@@ -15941,8 +15863,8 @@
                 <a:solidFill>
                   <a:srgbClr val="FFFFFF"/>
                 </a:solidFill>
-                <a:latin typeface="Century Gothic"/>
-                <a:cs typeface="Century Gothic"/>
+                <a:latin typeface="Arial"/>
+                <a:cs typeface="Arial"/>
               </a:rPr>
               <a:t>Q4 Lactate</a:t>
             </a:r>
@@ -15990,8 +15912,8 @@
                 <a:solidFill>
                   <a:srgbClr val="000000"/>
                 </a:solidFill>
-                <a:latin typeface="Century Gothic"/>
-                <a:cs typeface="Century Gothic"/>
+                <a:latin typeface="Arial"/>
+                <a:cs typeface="Arial"/>
               </a:rPr>
               <a:t>Lactate and death;</a:t>
             </a:r>
@@ -16011,8 +15933,8 @@
                 <a:solidFill>
                   <a:srgbClr val="000000"/>
                 </a:solidFill>
-                <a:latin typeface="Century Gothic"/>
-                <a:cs typeface="Century Gothic"/>
+                <a:latin typeface="Arial"/>
+                <a:cs typeface="Arial"/>
               </a:rPr>
               <a:t>missing lactate</a:t>
             </a:r>
@@ -16032,8 +15954,8 @@
                 <a:solidFill>
                   <a:srgbClr val="000000"/>
                 </a:solidFill>
-                <a:latin typeface="Century Gothic"/>
-                <a:cs typeface="Century Gothic"/>
+                <a:latin typeface="Arial"/>
+                <a:cs typeface="Arial"/>
               </a:rPr>
               <a:t>CC vs imputation</a:t>
             </a:r>
@@ -16075,8 +15997,8 @@
                 <a:solidFill>
                   <a:srgbClr val="FFFFFF"/>
                 </a:solidFill>
-                <a:latin typeface="Century Gothic"/>
-                <a:cs typeface="Century Gothic"/>
+                <a:latin typeface="Arial"/>
+                <a:cs typeface="Arial"/>
               </a:rPr>
               <a:t>Q5 ICU stay</a:t>
             </a:r>
@@ -16124,8 +16046,8 @@
                 <a:solidFill>
                   <a:srgbClr val="000000"/>
                 </a:solidFill>
-                <a:latin typeface="Century Gothic"/>
-                <a:cs typeface="Century Gothic"/>
+                <a:latin typeface="Arial"/>
+                <a:cs typeface="Arial"/>
               </a:rPr>
               <a:t>Balance and ICU stay</a:t>
             </a:r>
@@ -16145,8 +16067,8 @@
                 <a:solidFill>
                   <a:srgbClr val="000000"/>
                 </a:solidFill>
-                <a:latin typeface="Century Gothic"/>
-                <a:cs typeface="Century Gothic"/>
+                <a:latin typeface="Arial"/>
+                <a:cs typeface="Arial"/>
               </a:rPr>
               <a:t>in survivors</a:t>
             </a:r>
@@ -16166,8 +16088,8 @@
                 <a:solidFill>
                   <a:srgbClr val="000000"/>
                 </a:solidFill>
-                <a:latin typeface="Century Gothic"/>
-                <a:cs typeface="Century Gothic"/>
+                <a:latin typeface="Arial"/>
+                <a:cs typeface="Arial"/>
               </a:rPr>
               <a:t>Skewed outcome</a:t>
             </a:r>
@@ -16211,8 +16133,8 @@
                 <a:solidFill>
                   <a:srgbClr val="FFFFFF"/>
                 </a:solidFill>
-                <a:latin typeface="Century Gothic"/>
-                <a:cs typeface="Century Gothic"/>
+                <a:latin typeface="Arial"/>
+                <a:cs typeface="Arial"/>
               </a:rPr>
               <a:t>KEY MESSAGE   </a:t>
             </a:r>
@@ -16221,8 +16143,8 @@
                 <a:solidFill>
                   <a:srgbClr val="FFFFFF"/>
                 </a:solidFill>
-                <a:latin typeface="Century Gothic"/>
-                <a:cs typeface="Century Gothic"/>
+                <a:latin typeface="Arial"/>
+                <a:cs typeface="Arial"/>
               </a:rPr>
               <a:t>Your group question is your manuscript: own it from today.</a:t>
             </a:r>
@@ -16259,7 +16181,7 @@
                     <a:lumMod val="50000"/>
                   </a:schemeClr>
                 </a:solidFill>
-                <a:latin typeface="Verdana"/>
+                <a:latin typeface="Arial"/>
               </a:rPr>
               <a:t>Neudata | #ClearDataClearImpact</a:t>
             </a:r>
@@ -16389,8 +16311,8 @@
                 <a:solidFill>
                   <a:srgbClr val="0D7377"/>
                 </a:solidFill>
-                <a:latin typeface="Century Gothic"/>
-                <a:cs typeface="Century Gothic"/>
+                <a:latin typeface="Arial"/>
+                <a:cs typeface="Arial"/>
               </a:rPr>
               <a:t>Your group's question</a:t>
             </a:r>
@@ -16460,8 +16382,8 @@
                 <a:solidFill>
                   <a:srgbClr val="FFFFFF"/>
                 </a:solidFill>
-                <a:latin typeface="Century Gothic"/>
-                <a:cs typeface="Century Gothic"/>
+                <a:latin typeface="Arial"/>
+                <a:cs typeface="Arial"/>
               </a:rPr>
               <a:t>GROUP WORK   |   4 min</a:t>
             </a:r>
@@ -16498,25 +16420,19 @@
               <a:spcBef>
                 <a:spcPts val="450"/>
               </a:spcBef>
-              <a:buNone/>
-            </a:pPr>
-            <a:r>
-              <a:rPr lang="en-US" sz="1650" b="1" dirty="0">
-                <a:solidFill>
-                  <a:srgbClr val="0D7377"/>
-                </a:solidFill>
-                <a:latin typeface="Century Gothic"/>
-                <a:cs typeface="Century Gothic"/>
-              </a:rPr>
-              <a:t>1.  </a:t>
-            </a:r>
+              <a:buClr>
+                <a:srgbClr val="0D7377"/>
+              </a:buClr>
+              <a:buFont typeface="Arial"/>
+              <a:buChar char="•"/>
+            </a:pPr>
             <a:r>
               <a:rPr lang="en-US" sz="1650" dirty="0">
                 <a:solidFill>
                   <a:srgbClr val="000000"/>
                 </a:solidFill>
-                <a:latin typeface="Century Gothic"/>
-                <a:cs typeface="Century Gothic"/>
+                <a:latin typeface="Arial"/>
+                <a:cs typeface="Arial"/>
               </a:rPr>
               <a:t>Read your question in your results pack (page 1)</a:t>
             </a:r>
@@ -16529,25 +16445,19 @@
               <a:spcBef>
                 <a:spcPts val="450"/>
               </a:spcBef>
-              <a:buNone/>
-            </a:pPr>
-            <a:r>
-              <a:rPr lang="en-US" sz="1650" b="1" dirty="0">
-                <a:solidFill>
-                  <a:srgbClr val="0D7377"/>
-                </a:solidFill>
-                <a:latin typeface="Century Gothic"/>
-                <a:cs typeface="Century Gothic"/>
-              </a:rPr>
-              <a:t>2.  </a:t>
-            </a:r>
+              <a:buClr>
+                <a:srgbClr val="0D7377"/>
+              </a:buClr>
+              <a:buFont typeface="Arial"/>
+              <a:buChar char="•"/>
+            </a:pPr>
             <a:r>
               <a:rPr lang="en-US" sz="1650" dirty="0">
                 <a:solidFill>
                   <a:srgbClr val="000000"/>
                 </a:solidFill>
-                <a:latin typeface="Century Gothic"/>
-                <a:cs typeface="Century Gothic"/>
+                <a:latin typeface="Arial"/>
+                <a:cs typeface="Arial"/>
               </a:rPr>
               <a:t>Name the outcome and its type; the exposure and its type</a:t>
             </a:r>
@@ -16560,25 +16470,19 @@
               <a:spcBef>
                 <a:spcPts val="450"/>
               </a:spcBef>
-              <a:buNone/>
-            </a:pPr>
-            <a:r>
-              <a:rPr lang="en-US" sz="1650" b="1" dirty="0">
-                <a:solidFill>
-                  <a:srgbClr val="0D7377"/>
-                </a:solidFill>
-                <a:latin typeface="Century Gothic"/>
-                <a:cs typeface="Century Gothic"/>
-              </a:rPr>
-              <a:t>3.  </a:t>
-            </a:r>
+              <a:buClr>
+                <a:srgbClr val="0D7377"/>
+              </a:buClr>
+              <a:buFont typeface="Arial"/>
+              <a:buChar char="•"/>
+            </a:pPr>
             <a:r>
               <a:rPr lang="en-US" sz="1650" dirty="0">
                 <a:solidFill>
                   <a:srgbClr val="000000"/>
                 </a:solidFill>
-                <a:latin typeface="Century Gothic"/>
-                <a:cs typeface="Century Gothic"/>
+                <a:latin typeface="Arial"/>
+                <a:cs typeface="Arial"/>
               </a:rPr>
               <a:t>Find both in the FLUID-ICU data dictionary</a:t>
             </a:r>
@@ -16591,25 +16495,19 @@
               <a:spcBef>
                 <a:spcPts val="450"/>
               </a:spcBef>
-              <a:buNone/>
-            </a:pPr>
-            <a:r>
-              <a:rPr lang="en-US" sz="1650" b="1" dirty="0">
-                <a:solidFill>
-                  <a:srgbClr val="0D7377"/>
-                </a:solidFill>
-                <a:latin typeface="Century Gothic"/>
-                <a:cs typeface="Century Gothic"/>
-              </a:rPr>
-              <a:t>4.  </a:t>
-            </a:r>
+              <a:buClr>
+                <a:srgbClr val="0D7377"/>
+              </a:buClr>
+              <a:buFont typeface="Arial"/>
+              <a:buChar char="•"/>
+            </a:pPr>
             <a:r>
               <a:rPr lang="en-US" sz="1650" dirty="0">
                 <a:solidFill>
                   <a:srgbClr val="000000"/>
                 </a:solidFill>
-                <a:latin typeface="Century Gothic"/>
-                <a:cs typeface="Century Gothic"/>
+                <a:latin typeface="Arial"/>
+                <a:cs typeface="Arial"/>
               </a:rPr>
               <a:t>Write the question as one sentence (PECO)</a:t>
             </a:r>
@@ -16653,8 +16551,8 @@
                 <a:solidFill>
                   <a:srgbClr val="0D7377"/>
                 </a:solidFill>
-                <a:latin typeface="Century Gothic"/>
-                <a:cs typeface="Century Gothic"/>
+                <a:latin typeface="Arial"/>
+                <a:cs typeface="Arial"/>
               </a:rPr>
               <a:t>Example (Q1)</a:t>
             </a:r>
@@ -16675,8 +16573,8 @@
                 <a:solidFill>
                   <a:srgbClr val="000000"/>
                 </a:solidFill>
-                <a:latin typeface="Century Gothic"/>
-                <a:cs typeface="Century Gothic"/>
+                <a:latin typeface="Arial"/>
+                <a:cs typeface="Arial"/>
               </a:rPr>
               <a:t>P: adults with sepsis in ICU</a:t>
             </a:r>
@@ -16697,8 +16595,8 @@
                 <a:solidFill>
                   <a:srgbClr val="000000"/>
                 </a:solidFill>
-                <a:latin typeface="Century Gothic"/>
-                <a:cs typeface="Century Gothic"/>
+                <a:latin typeface="Arial"/>
+                <a:cs typeface="Arial"/>
               </a:rPr>
               <a:t>E: positive balance by day 3</a:t>
             </a:r>
@@ -16719,8 +16617,8 @@
                 <a:solidFill>
                   <a:srgbClr val="000000"/>
                 </a:solidFill>
-                <a:latin typeface="Century Gothic"/>
-                <a:cs typeface="Century Gothic"/>
+                <a:latin typeface="Arial"/>
+                <a:cs typeface="Arial"/>
               </a:rPr>
               <a:t>C: negative balance</a:t>
             </a:r>
@@ -16741,8 +16639,8 @@
                 <a:solidFill>
                   <a:srgbClr val="000000"/>
                 </a:solidFill>
-                <a:latin typeface="Century Gothic"/>
-                <a:cs typeface="Century Gothic"/>
+                <a:latin typeface="Arial"/>
+                <a:cs typeface="Arial"/>
               </a:rPr>
               <a:t>O: death by day 28 (binary)</a:t>
             </a:r>
@@ -16788,8 +16686,8 @@
                 <a:solidFill>
                   <a:srgbClr val="0D7377"/>
                 </a:solidFill>
-                <a:latin typeface="Century Gothic"/>
-                <a:cs typeface="Century Gothic"/>
+                <a:latin typeface="Arial"/>
+                <a:cs typeface="Arial"/>
               </a:rPr>
               <a:t>OUTPUT   </a:t>
             </a:r>
@@ -16798,8 +16696,8 @@
                 <a:solidFill>
                   <a:srgbClr val="000000"/>
                 </a:solidFill>
-                <a:latin typeface="Century Gothic"/>
-                <a:cs typeface="Century Gothic"/>
+                <a:latin typeface="Arial"/>
+                <a:cs typeface="Arial"/>
               </a:rPr>
               <a:t>One-sentence question with outcome and exposure types (exercise 7)</a:t>
             </a:r>
@@ -16836,7 +16734,7 @@
                     <a:lumMod val="50000"/>
                   </a:schemeClr>
                 </a:solidFill>
-                <a:latin typeface="Verdana"/>
+                <a:latin typeface="Arial"/>
               </a:rPr>
               <a:t>Neudata | #ClearDataClearImpact</a:t>
             </a:r>
@@ -16966,8 +16864,8 @@
                 <a:solidFill>
                   <a:srgbClr val="0D7377"/>
                 </a:solidFill>
-                <a:latin typeface="Century Gothic"/>
-                <a:cs typeface="Century Gothic"/>
+                <a:latin typeface="Arial"/>
+                <a:cs typeface="Arial"/>
               </a:rPr>
               <a:t>Break</a:t>
             </a:r>
@@ -17037,8 +16935,8 @@
                 <a:solidFill>
                   <a:srgbClr val="FFFFFF"/>
                 </a:solidFill>
-                <a:latin typeface="Century Gothic"/>
-                <a:cs typeface="Century Gothic"/>
+                <a:latin typeface="Arial"/>
+                <a:cs typeface="Arial"/>
               </a:rPr>
               <a:t>BREAK   |   15 min</a:t>
             </a:r>
@@ -17075,25 +16973,19 @@
               <a:spcBef>
                 <a:spcPts val="450"/>
               </a:spcBef>
-              <a:buNone/>
-            </a:pPr>
-            <a:r>
-              <a:rPr lang="en-US" sz="1650" b="1" dirty="0">
-                <a:solidFill>
-                  <a:srgbClr val="8A99A3"/>
-                </a:solidFill>
-                <a:latin typeface="Century Gothic"/>
-                <a:cs typeface="Century Gothic"/>
-              </a:rPr>
-              <a:t>1.  </a:t>
-            </a:r>
+              <a:buClr>
+                <a:srgbClr val="8A99A3"/>
+              </a:buClr>
+              <a:buFont typeface="Arial"/>
+              <a:buChar char="•"/>
+            </a:pPr>
             <a:r>
               <a:rPr lang="en-US" sz="1650" dirty="0">
                 <a:solidFill>
                   <a:srgbClr val="000000"/>
                 </a:solidFill>
-                <a:latin typeface="Century Gothic"/>
-                <a:cs typeface="Century Gothic"/>
+                <a:latin typeface="Arial"/>
+                <a:cs typeface="Arial"/>
               </a:rPr>
               <a:t>Stretch, coffee, fresh air</a:t>
             </a:r>
@@ -17106,25 +16998,19 @@
               <a:spcBef>
                 <a:spcPts val="450"/>
               </a:spcBef>
-              <a:buNone/>
-            </a:pPr>
-            <a:r>
-              <a:rPr lang="en-US" sz="1650" b="1" dirty="0">
-                <a:solidFill>
-                  <a:srgbClr val="8A99A3"/>
-                </a:solidFill>
-                <a:latin typeface="Century Gothic"/>
-                <a:cs typeface="Century Gothic"/>
-              </a:rPr>
-              <a:t>2.  </a:t>
-            </a:r>
+              <a:buClr>
+                <a:srgbClr val="8A99A3"/>
+              </a:buClr>
+              <a:buFont typeface="Arial"/>
+              <a:buChar char="•"/>
+            </a:pPr>
             <a:r>
               <a:rPr lang="en-US" sz="1650" dirty="0">
                 <a:solidFill>
                   <a:srgbClr val="000000"/>
                 </a:solidFill>
-                <a:latin typeface="Century Gothic"/>
-                <a:cs typeface="Century Gothic"/>
+                <a:latin typeface="Arial"/>
+                <a:cs typeface="Arial"/>
               </a:rPr>
               <a:t>Groups: glance at your group question and results pack</a:t>
             </a:r>
@@ -17137,25 +17023,19 @@
               <a:spcBef>
                 <a:spcPts val="450"/>
               </a:spcBef>
-              <a:buNone/>
-            </a:pPr>
-            <a:r>
-              <a:rPr lang="en-US" sz="1650" b="1" dirty="0">
-                <a:solidFill>
-                  <a:srgbClr val="8A99A3"/>
-                </a:solidFill>
-                <a:latin typeface="Century Gothic"/>
-                <a:cs typeface="Century Gothic"/>
-              </a:rPr>
-              <a:t>3.  </a:t>
-            </a:r>
+              <a:buClr>
+                <a:srgbClr val="8A99A3"/>
+              </a:buClr>
+              <a:buFont typeface="Arial"/>
+              <a:buChar char="•"/>
+            </a:pPr>
             <a:r>
               <a:rPr lang="en-US" sz="1650" dirty="0">
                 <a:solidFill>
                   <a:srgbClr val="000000"/>
                 </a:solidFill>
-                <a:latin typeface="Century Gothic"/>
-                <a:cs typeface="Century Gothic"/>
+                <a:latin typeface="Arial"/>
+                <a:cs typeface="Arial"/>
               </a:rPr>
               <a:t>We restart with 5.3: describing and showing data</a:t>
             </a:r>
@@ -17199,8 +17079,8 @@
                 <a:solidFill>
                   <a:srgbClr val="8A99A3"/>
                 </a:solidFill>
-                <a:latin typeface="Century Gothic"/>
-                <a:cs typeface="Century Gothic"/>
+                <a:latin typeface="Arial"/>
+                <a:cs typeface="Arial"/>
               </a:rPr>
               <a:t>After the break</a:t>
             </a:r>
@@ -17221,8 +17101,8 @@
                 <a:solidFill>
                   <a:srgbClr val="000000"/>
                 </a:solidFill>
-                <a:latin typeface="Century Gothic"/>
-                <a:cs typeface="Century Gothic"/>
+                <a:latin typeface="Arial"/>
+                <a:cs typeface="Arial"/>
               </a:rPr>
               <a:t>Mean or median?</a:t>
             </a:r>
@@ -17243,8 +17123,8 @@
                 <a:solidFill>
                   <a:srgbClr val="000000"/>
                 </a:solidFill>
-                <a:latin typeface="Century Gothic"/>
-                <a:cs typeface="Century Gothic"/>
+                <a:latin typeface="Arial"/>
+                <a:cs typeface="Arial"/>
               </a:rPr>
               <a:t>SD or IQR?</a:t>
             </a:r>
@@ -17265,8 +17145,8 @@
                 <a:solidFill>
                   <a:srgbClr val="000000"/>
                 </a:solidFill>
-                <a:latin typeface="Century Gothic"/>
-                <a:cs typeface="Century Gothic"/>
+                <a:latin typeface="Arial"/>
+                <a:cs typeface="Arial"/>
               </a:rPr>
               <a:t>Which graph?</a:t>
             </a:r>
@@ -17287,8 +17167,8 @@
                 <a:solidFill>
                   <a:srgbClr val="000000"/>
                 </a:solidFill>
-                <a:latin typeface="Century Gothic"/>
-                <a:cs typeface="Century Gothic"/>
+                <a:latin typeface="Arial"/>
+                <a:cs typeface="Arial"/>
               </a:rPr>
               <a:t>Good and bad figures</a:t>
             </a:r>
@@ -17309,8 +17189,8 @@
                 <a:solidFill>
                   <a:srgbClr val="000000"/>
                 </a:solidFill>
-                <a:latin typeface="Century Gothic"/>
-                <a:cs typeface="Century Gothic"/>
+                <a:latin typeface="Arial"/>
+                <a:cs typeface="Arial"/>
               </a:rPr>
               <a:t>Table 1</a:t>
             </a:r>
@@ -17347,7 +17227,7 @@
                     <a:lumMod val="50000"/>
                   </a:schemeClr>
                 </a:solidFill>
-                <a:latin typeface="Verdana"/>
+                <a:latin typeface="Arial"/>
               </a:rPr>
               <a:t>Neudata | #ClearDataClearImpact</a:t>
             </a:r>
@@ -17477,8 +17357,8 @@
                 <a:solidFill>
                   <a:srgbClr val="0D7377"/>
                 </a:solidFill>
-                <a:latin typeface="Century Gothic"/>
-                <a:cs typeface="Century Gothic"/>
+                <a:latin typeface="Arial"/>
+                <a:cs typeface="Arial"/>
               </a:rPr>
               <a:t>5.3 Describing and showing data</a:t>
             </a:r>
@@ -17547,8 +17427,8 @@
                 <a:solidFill>
                   <a:srgbClr val="0D7377"/>
                 </a:solidFill>
-                <a:latin typeface="Century Gothic"/>
-                <a:cs typeface="Century Gothic"/>
+                <a:latin typeface="Arial"/>
+                <a:cs typeface="Arial"/>
               </a:rPr>
               <a:t>Before comparing groups, describe them.</a:t>
             </a:r>
@@ -17565,8 +17445,8 @@
                 <a:solidFill>
                   <a:srgbClr val="595959"/>
                 </a:solidFill>
-                <a:latin typeface="Century Gothic"/>
-                <a:cs typeface="Century Gothic"/>
+                <a:latin typeface="Arial"/>
+                <a:cs typeface="Arial"/>
               </a:rPr>
               <a:t>5.3 Describing and showing data  |  35 minutes</a:t>
             </a:r>
@@ -17603,7 +17483,7 @@
                     <a:lumMod val="50000"/>
                   </a:schemeClr>
                 </a:solidFill>
-                <a:latin typeface="Verdana"/>
+                <a:latin typeface="Arial"/>
               </a:rPr>
               <a:t>Neudata | #ClearDataClearImpact</a:t>
             </a:r>
@@ -17733,8 +17613,8 @@
                 <a:solidFill>
                   <a:srgbClr val="0D7377"/>
                 </a:solidFill>
-                <a:latin typeface="Century Gothic"/>
-                <a:cs typeface="Century Gothic"/>
+                <a:latin typeface="Arial"/>
+                <a:cs typeface="Arial"/>
               </a:rPr>
               <a:t>Worked example: mean and median by hand</a:t>
             </a:r>
@@ -17800,8 +17680,8 @@
                 <a:solidFill>
                   <a:srgbClr val="595959"/>
                 </a:solidFill>
-                <a:latin typeface="Century Gothic"/>
-                <a:cs typeface="Century Gothic"/>
+                <a:latin typeface="Arial"/>
+                <a:cs typeface="Arial"/>
               </a:rPr>
               <a:t>ICU stay of 7 patients (days): 1, 2, 2, 3, 4, 6, 24</a:t>
             </a:r>
@@ -17845,8 +17725,8 @@
                 <a:solidFill>
                   <a:srgbClr val="FFFFFF"/>
                 </a:solidFill>
-                <a:latin typeface="Century Gothic"/>
-                <a:cs typeface="Century Gothic"/>
+                <a:latin typeface="Arial"/>
+                <a:cs typeface="Arial"/>
               </a:rPr>
               <a:t>Line up</a:t>
             </a:r>
@@ -17894,8 +17774,8 @@
                 <a:solidFill>
                   <a:srgbClr val="000000"/>
                 </a:solidFill>
-                <a:latin typeface="Century Gothic"/>
-                <a:cs typeface="Century Gothic"/>
+                <a:latin typeface="Arial"/>
+                <a:cs typeface="Arial"/>
               </a:rPr>
               <a:t>Sort from short</a:t>
             </a:r>
@@ -17915,8 +17795,8 @@
                 <a:solidFill>
                   <a:srgbClr val="000000"/>
                 </a:solidFill>
-                <a:latin typeface="Century Gothic"/>
-                <a:cs typeface="Century Gothic"/>
+                <a:latin typeface="Arial"/>
+                <a:cs typeface="Arial"/>
               </a:rPr>
               <a:t>to long stays</a:t>
             </a:r>
@@ -17960,8 +17840,8 @@
                 <a:solidFill>
                   <a:srgbClr val="FFFFFF"/>
                 </a:solidFill>
-                <a:latin typeface="Century Gothic"/>
-                <a:cs typeface="Century Gothic"/>
+                <a:latin typeface="Arial"/>
+                <a:cs typeface="Arial"/>
               </a:rPr>
               <a:t>Median</a:t>
             </a:r>
@@ -18009,8 +17889,8 @@
                 <a:solidFill>
                   <a:srgbClr val="000000"/>
                 </a:solidFill>
-                <a:latin typeface="Century Gothic"/>
-                <a:cs typeface="Century Gothic"/>
+                <a:latin typeface="Arial"/>
+                <a:cs typeface="Arial"/>
               </a:rPr>
               <a:t>The 4th of 7 patients:</a:t>
             </a:r>
@@ -18030,8 +17910,8 @@
                 <a:solidFill>
                   <a:srgbClr val="000000"/>
                 </a:solidFill>
-                <a:latin typeface="Century Gothic"/>
-                <a:cs typeface="Century Gothic"/>
+                <a:latin typeface="Arial"/>
+                <a:cs typeface="Arial"/>
               </a:rPr>
               <a:t>3 days</a:t>
             </a:r>
@@ -18075,8 +17955,8 @@
                 <a:solidFill>
                   <a:srgbClr val="FFFFFF"/>
                 </a:solidFill>
-                <a:latin typeface="Century Gothic"/>
-                <a:cs typeface="Century Gothic"/>
+                <a:latin typeface="Arial"/>
+                <a:cs typeface="Arial"/>
               </a:rPr>
               <a:t>Mean</a:t>
             </a:r>
@@ -18124,8 +18004,8 @@
                 <a:solidFill>
                   <a:srgbClr val="000000"/>
                 </a:solidFill>
-                <a:latin typeface="Century Gothic"/>
-                <a:cs typeface="Century Gothic"/>
+                <a:latin typeface="Arial"/>
+                <a:cs typeface="Arial"/>
               </a:rPr>
               <a:t>42 days / 7 patients</a:t>
             </a:r>
@@ -18145,8 +18025,8 @@
                 <a:solidFill>
                   <a:srgbClr val="000000"/>
                 </a:solidFill>
-                <a:latin typeface="Century Gothic"/>
-                <a:cs typeface="Century Gothic"/>
+                <a:latin typeface="Arial"/>
+                <a:cs typeface="Arial"/>
               </a:rPr>
               <a:t>= 6 days</a:t>
             </a:r>
@@ -18190,8 +18070,8 @@
                 <a:solidFill>
                   <a:srgbClr val="FFFFFF"/>
                 </a:solidFill>
-                <a:latin typeface="Century Gothic"/>
-                <a:cs typeface="Century Gothic"/>
+                <a:latin typeface="Arial"/>
+                <a:cs typeface="Arial"/>
               </a:rPr>
               <a:t>Compare</a:t>
             </a:r>
@@ -18239,8 +18119,8 @@
                 <a:solidFill>
                   <a:srgbClr val="000000"/>
                 </a:solidFill>
-                <a:latin typeface="Century Gothic"/>
-                <a:cs typeface="Century Gothic"/>
+                <a:latin typeface="Arial"/>
+                <a:cs typeface="Arial"/>
               </a:rPr>
               <a:t>One 24-day stay</a:t>
             </a:r>
@@ -18260,8 +18140,8 @@
                 <a:solidFill>
                   <a:srgbClr val="000000"/>
                 </a:solidFill>
-                <a:latin typeface="Century Gothic"/>
-                <a:cs typeface="Century Gothic"/>
+                <a:latin typeface="Arial"/>
+                <a:cs typeface="Arial"/>
               </a:rPr>
               <a:t>doubles the mean</a:t>
             </a:r>
@@ -18305,8 +18185,8 @@
                 <a:solidFill>
                   <a:srgbClr val="FFFFFF"/>
                 </a:solidFill>
-                <a:latin typeface="Century Gothic"/>
-                <a:cs typeface="Century Gothic"/>
+                <a:latin typeface="Arial"/>
+                <a:cs typeface="Arial"/>
               </a:rPr>
               <a:t>KEY MESSAGE   </a:t>
             </a:r>
@@ -18315,8 +18195,8 @@
                 <a:solidFill>
                   <a:srgbClr val="FFFFFF"/>
                 </a:solidFill>
-                <a:latin typeface="Century Gothic"/>
-                <a:cs typeface="Century Gothic"/>
+                <a:latin typeface="Arial"/>
+                <a:cs typeface="Arial"/>
               </a:rPr>
               <a:t>One very long stay moves the mean a lot and the median not at all.</a:t>
             </a:r>
@@ -18353,7 +18233,7 @@
                     <a:lumMod val="50000"/>
                   </a:schemeClr>
                 </a:solidFill>
-                <a:latin typeface="Verdana"/>
+                <a:latin typeface="Arial"/>
               </a:rPr>
               <a:t>Neudata | #ClearDataClearImpact</a:t>
             </a:r>
@@ -18483,8 +18363,8 @@
                 <a:solidFill>
                   <a:srgbClr val="0D7377"/>
                 </a:solidFill>
-                <a:latin typeface="Century Gothic"/>
-                <a:cs typeface="Century Gothic"/>
+                <a:latin typeface="Arial"/>
+                <a:cs typeface="Arial"/>
               </a:rPr>
               <a:t>Mean or median? Look at the shape first</a:t>
             </a:r>
@@ -18580,8 +18460,8 @@
                 <a:solidFill>
                   <a:srgbClr val="FFFFFF"/>
                 </a:solidFill>
-                <a:latin typeface="Century Gothic"/>
-                <a:cs typeface="Century Gothic"/>
+                <a:latin typeface="Arial"/>
+                <a:cs typeface="Arial"/>
               </a:rPr>
               <a:t>KEY MESSAGE   </a:t>
             </a:r>
@@ -18590,8 +18470,8 @@
                 <a:solidFill>
                   <a:srgbClr val="FFFFFF"/>
                 </a:solidFill>
-                <a:latin typeface="Century Gothic"/>
-                <a:cs typeface="Century Gothic"/>
+                <a:latin typeface="Arial"/>
+                <a:cs typeface="Arial"/>
               </a:rPr>
               <a:t>For skewed data like length of stay, the median describes the typical patient.</a:t>
             </a:r>
@@ -18628,7 +18508,7 @@
                     <a:lumMod val="50000"/>
                   </a:schemeClr>
                 </a:solidFill>
-                <a:latin typeface="Verdana"/>
+                <a:latin typeface="Arial"/>
               </a:rPr>
               <a:t>Neudata | #ClearDataClearImpact</a:t>
             </a:r>
@@ -18758,8 +18638,8 @@
                 <a:solidFill>
                   <a:srgbClr val="0D7377"/>
                 </a:solidFill>
-                <a:latin typeface="Century Gothic"/>
-                <a:cs typeface="Century Gothic"/>
+                <a:latin typeface="Arial"/>
+                <a:cs typeface="Arial"/>
               </a:rPr>
               <a:t>Spread: SD for symmetric, IQR for skewed</a:t>
             </a:r>
@@ -18855,8 +18735,8 @@
                 <a:solidFill>
                   <a:srgbClr val="FFFFFF"/>
                 </a:solidFill>
-                <a:latin typeface="Century Gothic"/>
-                <a:cs typeface="Century Gothic"/>
+                <a:latin typeface="Arial"/>
+                <a:cs typeface="Arial"/>
               </a:rPr>
               <a:t>KEY MESSAGE   </a:t>
             </a:r>
@@ -18865,8 +18745,8 @@
                 <a:solidFill>
                   <a:srgbClr val="FFFFFF"/>
                 </a:solidFill>
-                <a:latin typeface="Century Gothic"/>
-                <a:cs typeface="Century Gothic"/>
+                <a:latin typeface="Arial"/>
+                <a:cs typeface="Arial"/>
               </a:rPr>
               <a:t>Report mean (SD) or median (IQR): never mix the pairs.</a:t>
             </a:r>
@@ -18903,7 +18783,7 @@
                     <a:lumMod val="50000"/>
                   </a:schemeClr>
                 </a:solidFill>
-                <a:latin typeface="Verdana"/>
+                <a:latin typeface="Arial"/>
               </a:rPr>
               <a:t>Neudata | #ClearDataClearImpact</a:t>
             </a:r>
@@ -19033,8 +18913,8 @@
                 <a:solidFill>
                   <a:srgbClr val="0D7377"/>
                 </a:solidFill>
-                <a:latin typeface="Century Gothic"/>
-                <a:cs typeface="Century Gothic"/>
+                <a:latin typeface="Arial"/>
+                <a:cs typeface="Arial"/>
               </a:rPr>
               <a:t>Why these two shapes? They cover most clinical data</a:t>
             </a:r>
@@ -19130,8 +19010,8 @@
                 <a:solidFill>
                   <a:srgbClr val="FFFFFF"/>
                 </a:solidFill>
-                <a:latin typeface="Century Gothic"/>
-                <a:cs typeface="Century Gothic"/>
+                <a:latin typeface="Arial"/>
+                <a:cs typeface="Arial"/>
               </a:rPr>
               <a:t>KEY MESSAGE   </a:t>
             </a:r>
@@ -19140,8 +19020,8 @@
                 <a:solidFill>
                   <a:srgbClr val="FFFFFF"/>
                 </a:solidFill>
-                <a:latin typeface="Century Gothic"/>
-                <a:cs typeface="Century Gothic"/>
+                <a:latin typeface="Arial"/>
+                <a:cs typeface="Arial"/>
               </a:rPr>
               <a:t>Most clinical data cluster around a typical value or have a long tail. Check which.</a:t>
             </a:r>
@@ -19178,7 +19058,7 @@
                     <a:lumMod val="50000"/>
                   </a:schemeClr>
                 </a:solidFill>
-                <a:latin typeface="Verdana"/>
+                <a:latin typeface="Arial"/>
               </a:rPr>
               <a:t>Neudata | #ClearDataClearImpact</a:t>
             </a:r>
@@ -19308,8 +19188,8 @@
                 <a:solidFill>
                   <a:srgbClr val="0D7377"/>
                 </a:solidFill>
-                <a:latin typeface="Century Gothic"/>
-                <a:cs typeface="Century Gothic"/>
+                <a:latin typeface="Arial"/>
+                <a:cs typeface="Arial"/>
               </a:rPr>
               <a:t>Check your understanding: which summary?</a:t>
             </a:r>
@@ -19379,8 +19259,8 @@
                 <a:solidFill>
                   <a:srgbClr val="FFFFFF"/>
                 </a:solidFill>
-                <a:latin typeface="Century Gothic"/>
-                <a:cs typeface="Century Gothic"/>
+                <a:latin typeface="Arial"/>
+                <a:cs typeface="Arial"/>
               </a:rPr>
               <a:t>QUICK QUIZ   |   3 min</a:t>
             </a:r>
@@ -19417,25 +19297,19 @@
               <a:spcBef>
                 <a:spcPts val="450"/>
               </a:spcBef>
-              <a:buNone/>
-            </a:pPr>
-            <a:r>
-              <a:rPr lang="en-US" sz="1650" b="1" dirty="0">
-                <a:solidFill>
-                  <a:srgbClr val="6C3483"/>
-                </a:solidFill>
-                <a:latin typeface="Century Gothic"/>
-                <a:cs typeface="Century Gothic"/>
-              </a:rPr>
-              <a:t>1.  </a:t>
-            </a:r>
+              <a:buClr>
+                <a:srgbClr val="6C3483"/>
+              </a:buClr>
+              <a:buFont typeface="Arial"/>
+              <a:buChar char="•"/>
+            </a:pPr>
             <a:r>
               <a:rPr lang="en-US" sz="1650" dirty="0">
                 <a:solidFill>
                   <a:srgbClr val="000000"/>
                 </a:solidFill>
-                <a:latin typeface="Century Gothic"/>
-                <a:cs typeface="Century Gothic"/>
+                <a:latin typeface="Arial"/>
+                <a:cs typeface="Arial"/>
               </a:rPr>
               <a:t>ICU length of stay in 200 patients: mean (SD) or median (IQR)?</a:t>
             </a:r>
@@ -19448,25 +19322,19 @@
               <a:spcBef>
                 <a:spcPts val="450"/>
               </a:spcBef>
-              <a:buNone/>
-            </a:pPr>
-            <a:r>
-              <a:rPr lang="en-US" sz="1650" b="1" dirty="0">
-                <a:solidFill>
-                  <a:srgbClr val="6C3483"/>
-                </a:solidFill>
-                <a:latin typeface="Century Gothic"/>
-                <a:cs typeface="Century Gothic"/>
-              </a:rPr>
-              <a:t>2.  </a:t>
-            </a:r>
+              <a:buClr>
+                <a:srgbClr val="6C3483"/>
+              </a:buClr>
+              <a:buFont typeface="Arial"/>
+              <a:buChar char="•"/>
+            </a:pPr>
             <a:r>
               <a:rPr lang="en-US" sz="1650" dirty="0">
                 <a:solidFill>
                   <a:srgbClr val="000000"/>
                 </a:solidFill>
-                <a:latin typeface="Century Gothic"/>
-                <a:cs typeface="Century Gothic"/>
+                <a:latin typeface="Arial"/>
+                <a:cs typeface="Arial"/>
               </a:rPr>
               <a:t>Age of 200 adult ICU patients, bell-shaped: mean (SD) or median (IQR)?</a:t>
             </a:r>
@@ -19479,25 +19347,19 @@
               <a:spcBef>
                 <a:spcPts val="450"/>
               </a:spcBef>
-              <a:buNone/>
-            </a:pPr>
-            <a:r>
-              <a:rPr lang="en-US" sz="1650" b="1" dirty="0">
-                <a:solidFill>
-                  <a:srgbClr val="6C3483"/>
-                </a:solidFill>
-                <a:latin typeface="Century Gothic"/>
-                <a:cs typeface="Century Gothic"/>
-              </a:rPr>
-              <a:t>3.  </a:t>
-            </a:r>
+              <a:buClr>
+                <a:srgbClr val="6C3483"/>
+              </a:buClr>
+              <a:buFont typeface="Arial"/>
+              <a:buChar char="•"/>
+            </a:pPr>
             <a:r>
               <a:rPr lang="en-US" sz="1650" dirty="0">
                 <a:solidFill>
                   <a:srgbClr val="000000"/>
                 </a:solidFill>
-                <a:latin typeface="Century Gothic"/>
-                <a:cs typeface="Century Gothic"/>
+                <a:latin typeface="Arial"/>
+                <a:cs typeface="Arial"/>
               </a:rPr>
               <a:t>Ventilated on admission (yes/no): which summary?</a:t>
             </a:r>
@@ -19510,25 +19372,19 @@
               <a:spcBef>
                 <a:spcPts val="450"/>
               </a:spcBef>
-              <a:buNone/>
-            </a:pPr>
-            <a:r>
-              <a:rPr lang="en-US" sz="1650" b="1" dirty="0">
-                <a:solidFill>
-                  <a:srgbClr val="6C3483"/>
-                </a:solidFill>
-                <a:latin typeface="Century Gothic"/>
-                <a:cs typeface="Century Gothic"/>
-              </a:rPr>
-              <a:t>4.  </a:t>
-            </a:r>
+              <a:buClr>
+                <a:srgbClr val="6C3483"/>
+              </a:buClr>
+              <a:buFont typeface="Arial"/>
+              <a:buChar char="•"/>
+            </a:pPr>
             <a:r>
               <a:rPr lang="en-US" sz="1650" dirty="0">
                 <a:solidFill>
                   <a:srgbClr val="000000"/>
                 </a:solidFill>
-                <a:latin typeface="Century Gothic"/>
-                <a:cs typeface="Century Gothic"/>
+                <a:latin typeface="Arial"/>
+                <a:cs typeface="Arial"/>
               </a:rPr>
               <a:t>Pressure-injury stage 1 to 4: which summary and which graph?</a:t>
             </a:r>
@@ -19572,8 +19428,8 @@
                 <a:solidFill>
                   <a:srgbClr val="6C3483"/>
                 </a:solidFill>
-                <a:latin typeface="Century Gothic"/>
-                <a:cs typeface="Century Gothic"/>
+                <a:latin typeface="Arial"/>
+                <a:cs typeface="Arial"/>
               </a:rPr>
               <a:t>Answers</a:t>
             </a:r>
@@ -19594,8 +19450,8 @@
                 <a:solidFill>
                   <a:srgbClr val="000000"/>
                 </a:solidFill>
-                <a:latin typeface="Century Gothic"/>
-                <a:cs typeface="Century Gothic"/>
+                <a:latin typeface="Arial"/>
+                <a:cs typeface="Arial"/>
               </a:rPr>
               <a:t>LOS: median (IQR)</a:t>
             </a:r>
@@ -19616,8 +19472,8 @@
                 <a:solidFill>
                   <a:srgbClr val="000000"/>
                 </a:solidFill>
-                <a:latin typeface="Century Gothic"/>
-                <a:cs typeface="Century Gothic"/>
+                <a:latin typeface="Arial"/>
+                <a:cs typeface="Arial"/>
               </a:rPr>
               <a:t>Age: mean (SD)</a:t>
             </a:r>
@@ -19638,8 +19494,8 @@
                 <a:solidFill>
                   <a:srgbClr val="000000"/>
                 </a:solidFill>
-                <a:latin typeface="Century Gothic"/>
-                <a:cs typeface="Century Gothic"/>
+                <a:latin typeface="Arial"/>
+                <a:cs typeface="Arial"/>
               </a:rPr>
               <a:t>Ventilated: n (%)</a:t>
             </a:r>
@@ -19660,8 +19516,8 @@
                 <a:solidFill>
                   <a:srgbClr val="000000"/>
                 </a:solidFill>
-                <a:latin typeface="Century Gothic"/>
-                <a:cs typeface="Century Gothic"/>
+                <a:latin typeface="Arial"/>
+                <a:cs typeface="Arial"/>
               </a:rPr>
               <a:t>Stage: n (%) per stage, bar chart</a:t>
             </a:r>
@@ -19707,8 +19563,8 @@
                 <a:solidFill>
                   <a:srgbClr val="6C3483"/>
                 </a:solidFill>
-                <a:latin typeface="Century Gothic"/>
-                <a:cs typeface="Century Gothic"/>
+                <a:latin typeface="Arial"/>
+                <a:cs typeface="Arial"/>
               </a:rPr>
               <a:t>OUTPUT   </a:t>
             </a:r>
@@ -19717,8 +19573,8 @@
                 <a:solidFill>
                   <a:srgbClr val="000000"/>
                 </a:solidFill>
-                <a:latin typeface="Century Gothic"/>
-                <a:cs typeface="Century Gothic"/>
+                <a:latin typeface="Arial"/>
+                <a:cs typeface="Arial"/>
               </a:rPr>
               <a:t>Every participant can pick the right summary for a variable type</a:t>
             </a:r>
@@ -19755,7 +19611,7 @@
                     <a:lumMod val="50000"/>
                   </a:schemeClr>
                 </a:solidFill>
-                <a:latin typeface="Verdana"/>
+                <a:latin typeface="Arial"/>
               </a:rPr>
               <a:t>Neudata | #ClearDataClearImpact</a:t>
             </a:r>
@@ -19885,8 +19741,8 @@
                 <a:solidFill>
                   <a:srgbClr val="0D7377"/>
                 </a:solidFill>
-                <a:latin typeface="Century Gothic"/>
-                <a:cs typeface="Century Gothic"/>
+                <a:latin typeface="Arial"/>
+                <a:cs typeface="Arial"/>
               </a:rPr>
               <a:t>5.1 Good data by design</a:t>
             </a:r>
@@ -19955,8 +19811,8 @@
                 <a:solidFill>
                   <a:srgbClr val="0D7377"/>
                 </a:solidFill>
-                <a:latin typeface="Century Gothic"/>
-                <a:cs typeface="Century Gothic"/>
+                <a:latin typeface="Arial"/>
+                <a:cs typeface="Arial"/>
               </a:rPr>
               <a:t>Bad data cannot be rescued by good statistics.</a:t>
             </a:r>
@@ -19973,8 +19829,8 @@
                 <a:solidFill>
                   <a:srgbClr val="595959"/>
                 </a:solidFill>
-                <a:latin typeface="Century Gothic"/>
-                <a:cs typeface="Century Gothic"/>
+                <a:latin typeface="Arial"/>
+                <a:cs typeface="Arial"/>
               </a:rPr>
               <a:t>5.1 Good data by design  |  35 minutes</a:t>
             </a:r>
@@ -20011,7 +19867,7 @@
                     <a:lumMod val="50000"/>
                   </a:schemeClr>
                 </a:solidFill>
-                <a:latin typeface="Verdana"/>
+                <a:latin typeface="Arial"/>
               </a:rPr>
               <a:t>Neudata | #ClearDataClearImpact</a:t>
             </a:r>
@@ -20141,8 +19997,8 @@
                 <a:solidFill>
                   <a:srgbClr val="0D7377"/>
                 </a:solidFill>
-                <a:latin typeface="Century Gothic"/>
-                <a:cs typeface="Century Gothic"/>
+                <a:latin typeface="Arial"/>
+                <a:cs typeface="Arial"/>
               </a:rPr>
               <a:t>Which graph for which data?</a:t>
             </a:r>
@@ -20238,8 +20094,8 @@
                 <a:solidFill>
                   <a:srgbClr val="FFFFFF"/>
                 </a:solidFill>
-                <a:latin typeface="Century Gothic"/>
-                <a:cs typeface="Century Gothic"/>
+                <a:latin typeface="Arial"/>
+                <a:cs typeface="Arial"/>
               </a:rPr>
               <a:t>KEY MESSAGE   </a:t>
             </a:r>
@@ -20248,8 +20104,8 @@
                 <a:solidFill>
                   <a:srgbClr val="FFFFFF"/>
                 </a:solidFill>
-                <a:latin typeface="Century Gothic"/>
-                <a:cs typeface="Century Gothic"/>
+                <a:latin typeface="Arial"/>
+                <a:cs typeface="Arial"/>
               </a:rPr>
               <a:t>Choose the graph from the variable type, not from the software menu.</a:t>
             </a:r>
@@ -20286,7 +20142,7 @@
                     <a:lumMod val="50000"/>
                   </a:schemeClr>
                 </a:solidFill>
-                <a:latin typeface="Verdana"/>
+                <a:latin typeface="Arial"/>
               </a:rPr>
               <a:t>Neudata | #ClearDataClearImpact</a:t>
             </a:r>
@@ -20416,8 +20272,8 @@
                 <a:solidFill>
                   <a:srgbClr val="0D7377"/>
                 </a:solidFill>
-                <a:latin typeface="Century Gothic"/>
-                <a:cs typeface="Century Gothic"/>
+                <a:latin typeface="Arial"/>
+                <a:cs typeface="Arial"/>
               </a:rPr>
               <a:t>Show the data: dynamite plot vs dots + box</a:t>
             </a:r>
@@ -20483,8 +20339,8 @@
                 <a:solidFill>
                   <a:srgbClr val="595959"/>
                 </a:solidFill>
-                <a:latin typeface="Century Gothic"/>
-                <a:cs typeface="Century Gothic"/>
+                <a:latin typeface="Arial"/>
+                <a:cs typeface="Arial"/>
               </a:rPr>
               <a:t>Same 48 patients, two pictures.</a:t>
             </a:r>
@@ -20546,8 +20402,8 @@
                 <a:solidFill>
                   <a:srgbClr val="595959"/>
                 </a:solidFill>
-                <a:latin typeface="Century Gothic"/>
-                <a:cs typeface="Century Gothic"/>
+                <a:latin typeface="Arial"/>
+                <a:cs typeface="Arial"/>
               </a:rPr>
               <a:t>Dynamite plot: a mean and an error bar hide everything</a:t>
             </a:r>
@@ -20609,8 +20465,8 @@
                 <a:solidFill>
                   <a:srgbClr val="595959"/>
                 </a:solidFill>
-                <a:latin typeface="Century Gothic"/>
-                <a:cs typeface="Century Gothic"/>
+                <a:latin typeface="Arial"/>
+                <a:cs typeface="Arial"/>
               </a:rPr>
               <a:t>Every patient visible: shape, spread and the outlier</a:t>
             </a:r>
@@ -20647,7 +20503,7 @@
                     <a:lumMod val="50000"/>
                   </a:schemeClr>
                 </a:solidFill>
-                <a:latin typeface="Verdana"/>
+                <a:latin typeface="Arial"/>
               </a:rPr>
               <a:t>Neudata | #ClearDataClearImpact</a:t>
             </a:r>
@@ -20777,8 +20633,8 @@
                 <a:solidFill>
                   <a:srgbClr val="0D7377"/>
                 </a:solidFill>
-                <a:latin typeface="Century Gothic"/>
-                <a:cs typeface="Century Gothic"/>
+                <a:latin typeface="Arial"/>
+                <a:cs typeface="Arial"/>
               </a:rPr>
               <a:t>What a 'Table 1' shows</a:t>
             </a:r>
@@ -20874,8 +20730,8 @@
                 <a:solidFill>
                   <a:srgbClr val="FFFFFF"/>
                 </a:solidFill>
-                <a:latin typeface="Century Gothic"/>
-                <a:cs typeface="Century Gothic"/>
+                <a:latin typeface="Arial"/>
+                <a:cs typeface="Arial"/>
               </a:rPr>
               <a:t>KEY MESSAGE   </a:t>
             </a:r>
@@ -20884,8 +20740,8 @@
                 <a:solidFill>
                   <a:srgbClr val="FFFFFF"/>
                 </a:solidFill>
-                <a:latin typeface="Century Gothic"/>
-                <a:cs typeface="Century Gothic"/>
+                <a:latin typeface="Arial"/>
+                <a:cs typeface="Arial"/>
               </a:rPr>
               <a:t>Table 1 answers: who were the patients, and were the groups alike?</a:t>
             </a:r>
@@ -20922,7 +20778,7 @@
                     <a:lumMod val="50000"/>
                   </a:schemeClr>
                 </a:solidFill>
-                <a:latin typeface="Verdana"/>
+                <a:latin typeface="Arial"/>
               </a:rPr>
               <a:t>Neudata | #ClearDataClearImpact</a:t>
             </a:r>
@@ -21052,8 +20908,8 @@
                 <a:solidFill>
                   <a:srgbClr val="0D7377"/>
                 </a:solidFill>
-                <a:latin typeface="Century Gothic"/>
-                <a:cs typeface="Century Gothic"/>
+                <a:latin typeface="Arial"/>
+                <a:cs typeface="Arial"/>
               </a:rPr>
               <a:t>Publication-quality tables: bad vs good</a:t>
             </a:r>
@@ -21119,8 +20975,8 @@
                 <a:solidFill>
                   <a:srgbClr val="595959"/>
                 </a:solidFill>
-                <a:latin typeface="Century Gothic"/>
-                <a:cs typeface="Century Gothic"/>
+                <a:latin typeface="Arial"/>
+                <a:cs typeface="Arial"/>
               </a:rPr>
               <a:t>Rules: units and summary in the row label, n per column, consistent decimals, footnotes.</a:t>
             </a:r>
@@ -21182,8 +21038,8 @@
                 <a:solidFill>
                   <a:srgbClr val="595959"/>
                 </a:solidFill>
-                <a:latin typeface="Century Gothic"/>
-                <a:cs typeface="Century Gothic"/>
+                <a:latin typeface="Arial"/>
+                <a:cs typeface="Arial"/>
               </a:rPr>
               <a:t>Grid lines, no n, no units, 4 decimals</a:t>
             </a:r>
@@ -21245,8 +21101,8 @@
                 <a:solidFill>
                   <a:srgbClr val="595959"/>
                 </a:solidFill>
-                <a:latin typeface="Century Gothic"/>
-                <a:cs typeface="Century Gothic"/>
+                <a:latin typeface="Arial"/>
+                <a:cs typeface="Arial"/>
               </a:rPr>
               <a:t>Clean, self-explanatory, ready for a journal</a:t>
             </a:r>
@@ -21283,7 +21139,7 @@
                     <a:lumMod val="50000"/>
                   </a:schemeClr>
                 </a:solidFill>
-                <a:latin typeface="Verdana"/>
+                <a:latin typeface="Arial"/>
               </a:rPr>
               <a:t>Neudata | #ClearDataClearImpact</a:t>
             </a:r>
@@ -21413,8 +21269,8 @@
                 <a:solidFill>
                   <a:srgbClr val="0D7377"/>
                 </a:solidFill>
-                <a:latin typeface="Century Gothic"/>
-                <a:cs typeface="Century Gothic"/>
+                <a:latin typeface="Arial"/>
+                <a:cs typeface="Arial"/>
               </a:rPr>
               <a:t>5.4 Describe the course dataset</a:t>
             </a:r>
@@ -21483,8 +21339,8 @@
                 <a:solidFill>
                   <a:srgbClr val="0D7377"/>
                 </a:solidFill>
-                <a:latin typeface="Century Gothic"/>
-                <a:cs typeface="Century Gothic"/>
+                <a:latin typeface="Arial"/>
+                <a:cs typeface="Arial"/>
               </a:rPr>
               <a:t>Before comparing groups, describe them: now with real numbers.</a:t>
             </a:r>
@@ -21501,8 +21357,8 @@
                 <a:solidFill>
                   <a:srgbClr val="595959"/>
                 </a:solidFill>
-                <a:latin typeface="Century Gothic"/>
-                <a:cs typeface="Century Gothic"/>
+                <a:latin typeface="Arial"/>
+                <a:cs typeface="Arial"/>
               </a:rPr>
               <a:t>5.4 Describe the course dataset  |  25 minutes</a:t>
             </a:r>
@@ -21539,7 +21395,7 @@
                     <a:lumMod val="50000"/>
                   </a:schemeClr>
                 </a:solidFill>
-                <a:latin typeface="Verdana"/>
+                <a:latin typeface="Arial"/>
               </a:rPr>
               <a:t>Neudata | #ClearDataClearImpact</a:t>
             </a:r>
@@ -21669,8 +21525,8 @@
                 <a:solidFill>
                   <a:srgbClr val="0D7377"/>
                 </a:solidFill>
-                <a:latin typeface="Century Gothic"/>
-                <a:cs typeface="Century Gothic"/>
+                <a:latin typeface="Arial"/>
+                <a:cs typeface="Arial"/>
               </a:rPr>
               <a:t>Live demo: Table 1 and figures in R</a:t>
             </a:r>
@@ -21740,8 +21596,8 @@
                 <a:solidFill>
                   <a:srgbClr val="FFFFFF"/>
                 </a:solidFill>
-                <a:latin typeface="Century Gothic"/>
-                <a:cs typeface="Century Gothic"/>
+                <a:latin typeface="Arial"/>
+                <a:cs typeface="Arial"/>
               </a:rPr>
               <a:t>LIVE DEMO   |   6 min</a:t>
             </a:r>
@@ -21778,25 +21634,19 @@
               <a:spcBef>
                 <a:spcPts val="450"/>
               </a:spcBef>
-              <a:buNone/>
-            </a:pPr>
-            <a:r>
-              <a:rPr lang="en-US" sz="1650" b="1" dirty="0">
-                <a:solidFill>
-                  <a:srgbClr val="B5651D"/>
-                </a:solidFill>
-                <a:latin typeface="Century Gothic"/>
-                <a:cs typeface="Century Gothic"/>
-              </a:rPr>
-              <a:t>1.  </a:t>
-            </a:r>
+              <a:buClr>
+                <a:srgbClr val="B5651D"/>
+              </a:buClr>
+              <a:buFont typeface="Arial"/>
+              <a:buChar char="•"/>
+            </a:pPr>
             <a:r>
               <a:rPr lang="en-US" sz="1650" dirty="0">
                 <a:solidFill>
                   <a:srgbClr val="000000"/>
                 </a:solidFill>
-                <a:latin typeface="Century Gothic"/>
-                <a:cs typeface="Century Gothic"/>
+                <a:latin typeface="Arial"/>
+                <a:cs typeface="Arial"/>
               </a:rPr>
               <a:t>Open 02_describe.R and load the clean data</a:t>
             </a:r>
@@ -21809,25 +21659,19 @@
               <a:spcBef>
                 <a:spcPts val="450"/>
               </a:spcBef>
-              <a:buNone/>
-            </a:pPr>
-            <a:r>
-              <a:rPr lang="en-US" sz="1650" b="1" dirty="0">
-                <a:solidFill>
-                  <a:srgbClr val="B5651D"/>
-                </a:solidFill>
-                <a:latin typeface="Century Gothic"/>
-                <a:cs typeface="Century Gothic"/>
-              </a:rPr>
-              <a:t>2.  </a:t>
-            </a:r>
+              <a:buClr>
+                <a:srgbClr val="B5651D"/>
+              </a:buClr>
+              <a:buFont typeface="Arial"/>
+              <a:buChar char="•"/>
+            </a:pPr>
             <a:r>
               <a:rPr lang="en-US" sz="1650" dirty="0">
                 <a:solidFill>
                   <a:srgbClr val="000000"/>
                 </a:solidFill>
-                <a:latin typeface="Century Gothic"/>
-                <a:cs typeface="Century Gothic"/>
+                <a:latin typeface="Arial"/>
+                <a:cs typeface="Arial"/>
               </a:rPr>
               <a:t>Look at the shape first: histograms of age, lactate, ICU stay</a:t>
             </a:r>
@@ -21840,25 +21684,19 @@
               <a:spcBef>
                 <a:spcPts val="450"/>
               </a:spcBef>
-              <a:buNone/>
-            </a:pPr>
-            <a:r>
-              <a:rPr lang="en-US" sz="1650" b="1" dirty="0">
-                <a:solidFill>
-                  <a:srgbClr val="B5651D"/>
-                </a:solidFill>
-                <a:latin typeface="Century Gothic"/>
-                <a:cs typeface="Century Gothic"/>
-              </a:rPr>
-              <a:t>3.  </a:t>
-            </a:r>
+              <a:buClr>
+                <a:srgbClr val="B5651D"/>
+              </a:buClr>
+              <a:buFont typeface="Arial"/>
+              <a:buChar char="•"/>
+            </a:pPr>
             <a:r>
               <a:rPr lang="en-US" sz="1650" dirty="0">
                 <a:solidFill>
                   <a:srgbClr val="000000"/>
                 </a:solidFill>
-                <a:latin typeface="Century Gothic"/>
-                <a:cs typeface="Century Gothic"/>
+                <a:latin typeface="Arial"/>
+                <a:cs typeface="Arial"/>
               </a:rPr>
               <a:t>Build Table 1 by fluid-balance group (no p-values)</a:t>
             </a:r>
@@ -21871,25 +21709,19 @@
               <a:spcBef>
                 <a:spcPts val="450"/>
               </a:spcBef>
-              <a:buNone/>
-            </a:pPr>
-            <a:r>
-              <a:rPr lang="en-US" sz="1650" b="1" dirty="0">
-                <a:solidFill>
-                  <a:srgbClr val="B5651D"/>
-                </a:solidFill>
-                <a:latin typeface="Century Gothic"/>
-                <a:cs typeface="Century Gothic"/>
-              </a:rPr>
-              <a:t>4.  </a:t>
-            </a:r>
+              <a:buClr>
+                <a:srgbClr val="B5651D"/>
+              </a:buClr>
+              <a:buFont typeface="Arial"/>
+              <a:buChar char="•"/>
+            </a:pPr>
             <a:r>
               <a:rPr lang="en-US" sz="1650" dirty="0">
                 <a:solidFill>
                   <a:srgbClr val="000000"/>
                 </a:solidFill>
-                <a:latin typeface="Century Gothic"/>
-                <a:cs typeface="Century Gothic"/>
+                <a:latin typeface="Arial"/>
+                <a:cs typeface="Arial"/>
               </a:rPr>
               <a:t>Draw the figures: histogram, boxplot, bar chart</a:t>
             </a:r>
@@ -21902,25 +21734,19 @@
               <a:spcBef>
                 <a:spcPts val="450"/>
               </a:spcBef>
-              <a:buNone/>
-            </a:pPr>
-            <a:r>
-              <a:rPr lang="en-US" sz="1650" b="1" dirty="0">
-                <a:solidFill>
-                  <a:srgbClr val="B5651D"/>
-                </a:solidFill>
-                <a:latin typeface="Century Gothic"/>
-                <a:cs typeface="Century Gothic"/>
-              </a:rPr>
-              <a:t>5.  </a:t>
-            </a:r>
+              <a:buClr>
+                <a:srgbClr val="B5651D"/>
+              </a:buClr>
+              <a:buFont typeface="Arial"/>
+              <a:buChar char="•"/>
+            </a:pPr>
             <a:r>
               <a:rPr lang="en-US" sz="1650" dirty="0">
                 <a:solidFill>
                   <a:srgbClr val="000000"/>
                 </a:solidFill>
-                <a:latin typeface="Century Gothic"/>
-                <a:cs typeface="Century Gothic"/>
+                <a:latin typeface="Arial"/>
+                <a:cs typeface="Arial"/>
               </a:rPr>
               <a:t>Save tables and figures for the results packs</a:t>
             </a:r>
@@ -21964,8 +21790,8 @@
                 <a:solidFill>
                   <a:srgbClr val="B5651D"/>
                 </a:solidFill>
-                <a:latin typeface="Century Gothic"/>
-                <a:cs typeface="Century Gothic"/>
+                <a:latin typeface="Arial"/>
+                <a:cs typeface="Arial"/>
               </a:rPr>
               <a:t>Same rules as 5.3</a:t>
             </a:r>
@@ -21986,8 +21812,8 @@
                 <a:solidFill>
                   <a:srgbClr val="000000"/>
                 </a:solidFill>
-                <a:latin typeface="Century Gothic"/>
-                <a:cs typeface="Century Gothic"/>
+                <a:latin typeface="Arial"/>
+                <a:cs typeface="Arial"/>
               </a:rPr>
               <a:t>Shape decides the summary</a:t>
             </a:r>
@@ -22008,8 +21834,8 @@
                 <a:solidFill>
                   <a:srgbClr val="000000"/>
                 </a:solidFill>
-                <a:latin typeface="Century Gothic"/>
-                <a:cs typeface="Century Gothic"/>
+                <a:latin typeface="Arial"/>
+                <a:cs typeface="Arial"/>
               </a:rPr>
               <a:t>n per column</a:t>
             </a:r>
@@ -22030,8 +21856,8 @@
                 <a:solidFill>
                   <a:srgbClr val="000000"/>
                 </a:solidFill>
-                <a:latin typeface="Century Gothic"/>
-                <a:cs typeface="Century Gothic"/>
+                <a:latin typeface="Arial"/>
+                <a:cs typeface="Arial"/>
               </a:rPr>
               <a:t>Units in the row label</a:t>
             </a:r>
@@ -22052,8 +21878,8 @@
                 <a:solidFill>
                   <a:srgbClr val="000000"/>
                 </a:solidFill>
-                <a:latin typeface="Century Gothic"/>
-                <a:cs typeface="Century Gothic"/>
+                <a:latin typeface="Arial"/>
+                <a:cs typeface="Arial"/>
               </a:rPr>
               <a:t>Missing reported</a:t>
             </a:r>
@@ -22099,8 +21925,8 @@
                 <a:solidFill>
                   <a:srgbClr val="B5651D"/>
                 </a:solidFill>
-                <a:latin typeface="Century Gothic"/>
-                <a:cs typeface="Century Gothic"/>
+                <a:latin typeface="Arial"/>
+                <a:cs typeface="Arial"/>
               </a:rPr>
               <a:t>OUTPUT   </a:t>
             </a:r>
@@ -22109,8 +21935,8 @@
                 <a:solidFill>
                   <a:srgbClr val="000000"/>
                 </a:solidFill>
-                <a:latin typeface="Century Gothic"/>
-                <a:cs typeface="Century Gothic"/>
+                <a:latin typeface="Arial"/>
+                <a:cs typeface="Arial"/>
               </a:rPr>
               <a:t>Everyone has seen a Table 1 built from data, reproducibly</a:t>
             </a:r>
@@ -22147,7 +21973,7 @@
                     <a:lumMod val="50000"/>
                   </a:schemeClr>
                 </a:solidFill>
-                <a:latin typeface="Verdana"/>
+                <a:latin typeface="Arial"/>
               </a:rPr>
               <a:t>Neudata | #ClearDataClearImpact</a:t>
             </a:r>
@@ -22277,8 +22103,8 @@
                 <a:solidFill>
                   <a:srgbClr val="0D7377"/>
                 </a:solidFill>
-                <a:latin typeface="Century Gothic"/>
-                <a:cs typeface="Century Gothic"/>
+                <a:latin typeface="Arial"/>
+                <a:cs typeface="Arial"/>
               </a:rPr>
               <a:t>FLUID-ICU Table 1: were the groups alike at the start?</a:t>
             </a:r>
@@ -22374,8 +22200,8 @@
                 <a:solidFill>
                   <a:srgbClr val="FFFFFF"/>
                 </a:solidFill>
-                <a:latin typeface="Century Gothic"/>
-                <a:cs typeface="Century Gothic"/>
+                <a:latin typeface="Arial"/>
+                <a:cs typeface="Arial"/>
               </a:rPr>
               <a:t>KEY MESSAGE   </a:t>
             </a:r>
@@ -22384,8 +22210,8 @@
                 <a:solidFill>
                   <a:srgbClr val="FFFFFF"/>
                 </a:solidFill>
-                <a:latin typeface="Century Gothic"/>
-                <a:cs typeface="Century Gothic"/>
+                <a:latin typeface="Arial"/>
+                <a:cs typeface="Arial"/>
               </a:rPr>
               <a:t>The positive-balance group was sicker at baseline: a warning for Session 6.</a:t>
             </a:r>
@@ -22422,7 +22248,7 @@
                     <a:lumMod val="50000"/>
                   </a:schemeClr>
                 </a:solidFill>
-                <a:latin typeface="Verdana"/>
+                <a:latin typeface="Arial"/>
               </a:rPr>
               <a:t>Neudata | #ClearDataClearImpact</a:t>
             </a:r>
@@ -22552,8 +22378,8 @@
                 <a:solidFill>
                   <a:srgbClr val="0D7377"/>
                 </a:solidFill>
-                <a:latin typeface="Century Gothic"/>
-                <a:cs typeface="Century Gothic"/>
+                <a:latin typeface="Arial"/>
+                <a:cs typeface="Arial"/>
               </a:rPr>
               <a:t>The exposure: cumulative fluid balance at day 3</a:t>
             </a:r>
@@ -22649,8 +22475,8 @@
                 <a:solidFill>
                   <a:srgbClr val="FFFFFF"/>
                 </a:solidFill>
-                <a:latin typeface="Century Gothic"/>
-                <a:cs typeface="Century Gothic"/>
+                <a:latin typeface="Arial"/>
+                <a:cs typeface="Arial"/>
               </a:rPr>
               <a:t>KEY MESSAGE   </a:t>
             </a:r>
@@ -22659,8 +22485,8 @@
                 <a:solidFill>
                   <a:srgbClr val="FFFFFF"/>
                 </a:solidFill>
-                <a:latin typeface="Century Gothic"/>
-                <a:cs typeface="Century Gothic"/>
+                <a:latin typeface="Arial"/>
+                <a:cs typeface="Arial"/>
               </a:rPr>
               <a:t>A continuous exposure, cut at 0 ml/kg into negative and positive balance.</a:t>
             </a:r>
@@ -22697,7 +22523,7 @@
                     <a:lumMod val="50000"/>
                   </a:schemeClr>
                 </a:solidFill>
-                <a:latin typeface="Verdana"/>
+                <a:latin typeface="Arial"/>
               </a:rPr>
               <a:t>Neudata | #ClearDataClearImpact</a:t>
             </a:r>
@@ -22827,8 +22653,8 @@
                 <a:solidFill>
                   <a:srgbClr val="0D7377"/>
                 </a:solidFill>
-                <a:latin typeface="Century Gothic"/>
-                <a:cs typeface="Century Gothic"/>
+                <a:latin typeface="Arial"/>
+                <a:cs typeface="Arial"/>
               </a:rPr>
               <a:t>Severity by group: show every patient</a:t>
             </a:r>
@@ -22894,8 +22720,8 @@
                 <a:solidFill>
                   <a:srgbClr val="0D7377"/>
                 </a:solidFill>
-                <a:latin typeface="Century Gothic"/>
-                <a:cs typeface="Century Gothic"/>
+                <a:latin typeface="Arial"/>
+                <a:cs typeface="Arial"/>
               </a:rPr>
               <a:t>How to read it</a:t>
             </a:r>
@@ -22913,8 +22739,8 @@
                 <a:solidFill>
                   <a:srgbClr val="000000"/>
                 </a:solidFill>
-                <a:latin typeface="Century Gothic"/>
-                <a:cs typeface="Century Gothic"/>
+                <a:latin typeface="Arial"/>
+                <a:cs typeface="Arial"/>
               </a:rPr>
               <a:t>Each dot is one patient</a:t>
             </a:r>
@@ -22932,8 +22758,8 @@
                 <a:solidFill>
                   <a:srgbClr val="000000"/>
                 </a:solidFill>
-                <a:latin typeface="Century Gothic"/>
-                <a:cs typeface="Century Gothic"/>
+                <a:latin typeface="Arial"/>
+                <a:cs typeface="Arial"/>
               </a:rPr>
               <a:t>Box = middle 50%</a:t>
             </a:r>
@@ -22951,8 +22777,8 @@
                 <a:solidFill>
                   <a:srgbClr val="000000"/>
                 </a:solidFill>
-                <a:latin typeface="Century Gothic"/>
-                <a:cs typeface="Century Gothic"/>
+                <a:latin typeface="Arial"/>
+                <a:cs typeface="Arial"/>
               </a:rPr>
               <a:t>Median 6 vs 8</a:t>
             </a:r>
@@ -22970,8 +22796,8 @@
                 <a:solidFill>
                   <a:srgbClr val="000000"/>
                 </a:solidFill>
-                <a:latin typeface="Century Gothic"/>
-                <a:cs typeface="Century Gothic"/>
+                <a:latin typeface="Arial"/>
+                <a:cs typeface="Arial"/>
               </a:rPr>
               <a:t>Sicker patients got more fluid</a:t>
             </a:r>
@@ -23039,8 +22865,8 @@
                 <a:solidFill>
                   <a:srgbClr val="FFFFFF"/>
                 </a:solidFill>
-                <a:latin typeface="Century Gothic"/>
-                <a:cs typeface="Century Gothic"/>
+                <a:latin typeface="Arial"/>
+                <a:cs typeface="Arial"/>
               </a:rPr>
               <a:t>KEY MESSAGE   </a:t>
             </a:r>
@@ -23049,8 +22875,8 @@
                 <a:solidFill>
                   <a:srgbClr val="FFFFFF"/>
                 </a:solidFill>
-                <a:latin typeface="Century Gothic"/>
-                <a:cs typeface="Century Gothic"/>
+                <a:latin typeface="Arial"/>
+                <a:cs typeface="Arial"/>
               </a:rPr>
               <a:t>Dots plus box show the overlap and the shift: confounding you can see.</a:t>
             </a:r>
@@ -23087,7 +22913,7 @@
                     <a:lumMod val="50000"/>
                   </a:schemeClr>
                 </a:solidFill>
-                <a:latin typeface="Verdana"/>
+                <a:latin typeface="Arial"/>
               </a:rPr>
               <a:t>Neudata | #ClearDataClearImpact</a:t>
             </a:r>
@@ -23217,8 +23043,8 @@
                 <a:solidFill>
                   <a:srgbClr val="0D7377"/>
                 </a:solidFill>
-                <a:latin typeface="Century Gothic"/>
-                <a:cs typeface="Century Gothic"/>
+                <a:latin typeface="Arial"/>
+                <a:cs typeface="Arial"/>
               </a:rPr>
               <a:t>The skewed outcome: ICU stay in survivors (Q5)</a:t>
             </a:r>
@@ -23314,8 +23140,8 @@
                 <a:solidFill>
                   <a:srgbClr val="FFFFFF"/>
                 </a:solidFill>
-                <a:latin typeface="Century Gothic"/>
-                <a:cs typeface="Century Gothic"/>
+                <a:latin typeface="Arial"/>
+                <a:cs typeface="Arial"/>
               </a:rPr>
               <a:t>KEY MESSAGE   </a:t>
             </a:r>
@@ -23324,8 +23150,8 @@
                 <a:solidFill>
                   <a:srgbClr val="FFFFFF"/>
                 </a:solidFill>
-                <a:latin typeface="Century Gothic"/>
-                <a:cs typeface="Century Gothic"/>
+                <a:latin typeface="Arial"/>
+                <a:cs typeface="Arial"/>
               </a:rPr>
               <a:t>Mean 7.5 vs median 6.2 days: report the median and IQR.</a:t>
             </a:r>
@@ -23362,7 +23188,7 @@
                     <a:lumMod val="50000"/>
                   </a:schemeClr>
                 </a:solidFill>
-                <a:latin typeface="Verdana"/>
+                <a:latin typeface="Arial"/>
               </a:rPr>
               <a:t>Neudata | #ClearDataClearImpact</a:t>
             </a:r>
@@ -23492,8 +23318,8 @@
                 <a:solidFill>
                   <a:srgbClr val="0D7377"/>
                 </a:solidFill>
-                <a:latin typeface="Century Gothic"/>
-                <a:cs typeface="Century Gothic"/>
+                <a:latin typeface="Arial"/>
+                <a:cs typeface="Arial"/>
               </a:rPr>
               <a:t>What type of variable is it?</a:t>
             </a:r>
@@ -23589,8 +23415,8 @@
                 <a:solidFill>
                   <a:srgbClr val="FFFFFF"/>
                 </a:solidFill>
-                <a:latin typeface="Century Gothic"/>
-                <a:cs typeface="Century Gothic"/>
+                <a:latin typeface="Arial"/>
+                <a:cs typeface="Arial"/>
               </a:rPr>
               <a:t>KEY MESSAGE   </a:t>
             </a:r>
@@ -23599,8 +23425,8 @@
                 <a:solidFill>
                   <a:srgbClr val="FFFFFF"/>
                 </a:solidFill>
-                <a:latin typeface="Century Gothic"/>
-                <a:cs typeface="Century Gothic"/>
+                <a:latin typeface="Arial"/>
+                <a:cs typeface="Arial"/>
               </a:rPr>
               <a:t>The variable type decides the CRF box, the summary and the test.</a:t>
             </a:r>
@@ -23637,7 +23463,7 @@
                     <a:lumMod val="50000"/>
                   </a:schemeClr>
                 </a:solidFill>
-                <a:latin typeface="Verdana"/>
+                <a:latin typeface="Arial"/>
               </a:rPr>
               <a:t>Neudata | #ClearDataClearImpact</a:t>
             </a:r>
@@ -23767,8 +23593,8 @@
                 <a:solidFill>
                   <a:srgbClr val="0D7377"/>
                 </a:solidFill>
-                <a:latin typeface="Century Gothic"/>
-                <a:cs typeface="Century Gothic"/>
+                <a:latin typeface="Arial"/>
+                <a:cs typeface="Arial"/>
               </a:rPr>
               <a:t>Read your group's Table 1 (worksheet)</a:t>
             </a:r>
@@ -23838,8 +23664,8 @@
                 <a:solidFill>
                   <a:srgbClr val="FFFFFF"/>
                 </a:solidFill>
-                <a:latin typeface="Century Gothic"/>
-                <a:cs typeface="Century Gothic"/>
+                <a:latin typeface="Arial"/>
+                <a:cs typeface="Arial"/>
               </a:rPr>
               <a:t>GROUP WORK   |   10 min</a:t>
             </a:r>
@@ -23876,25 +23702,19 @@
               <a:spcBef>
                 <a:spcPts val="450"/>
               </a:spcBef>
-              <a:buNone/>
-            </a:pPr>
-            <a:r>
-              <a:rPr lang="en-US" sz="1650" b="1" dirty="0">
-                <a:solidFill>
-                  <a:srgbClr val="0D7377"/>
-                </a:solidFill>
-                <a:latin typeface="Century Gothic"/>
-                <a:cs typeface="Century Gothic"/>
-              </a:rPr>
-              <a:t>1.  </a:t>
-            </a:r>
+              <a:buClr>
+                <a:srgbClr val="0D7377"/>
+              </a:buClr>
+              <a:buFont typeface="Arial"/>
+              <a:buChar char="•"/>
+            </a:pPr>
             <a:r>
               <a:rPr lang="en-US" sz="1650" dirty="0">
                 <a:solidFill>
                   <a:srgbClr val="000000"/>
                 </a:solidFill>
-                <a:latin typeface="Century Gothic"/>
-                <a:cs typeface="Century Gothic"/>
+                <a:latin typeface="Arial"/>
+                <a:cs typeface="Arial"/>
               </a:rPr>
               <a:t>Open your results pack: Table 1 and the figures</a:t>
             </a:r>
@@ -23907,25 +23727,19 @@
               <a:spcBef>
                 <a:spcPts val="450"/>
               </a:spcBef>
-              <a:buNone/>
-            </a:pPr>
-            <a:r>
-              <a:rPr lang="en-US" sz="1650" b="1" dirty="0">
-                <a:solidFill>
-                  <a:srgbClr val="0D7377"/>
-                </a:solidFill>
-                <a:latin typeface="Century Gothic"/>
-                <a:cs typeface="Century Gothic"/>
-              </a:rPr>
-              <a:t>2.  </a:t>
-            </a:r>
+              <a:buClr>
+                <a:srgbClr val="0D7377"/>
+              </a:buClr>
+              <a:buFont typeface="Arial"/>
+              <a:buChar char="•"/>
+            </a:pPr>
             <a:r>
               <a:rPr lang="en-US" sz="1650" dirty="0">
                 <a:solidFill>
                   <a:srgbClr val="000000"/>
                 </a:solidFill>
-                <a:latin typeface="Century Gothic"/>
-                <a:cs typeface="Century Gothic"/>
+                <a:latin typeface="Arial"/>
+                <a:cs typeface="Arial"/>
               </a:rPr>
               <a:t>For three variables: which summary is used, and why?</a:t>
             </a:r>
@@ -23938,25 +23752,19 @@
               <a:spcBef>
                 <a:spcPts val="450"/>
               </a:spcBef>
-              <a:buNone/>
-            </a:pPr>
-            <a:r>
-              <a:rPr lang="en-US" sz="1650" b="1" dirty="0">
-                <a:solidFill>
-                  <a:srgbClr val="0D7377"/>
-                </a:solidFill>
-                <a:latin typeface="Century Gothic"/>
-                <a:cs typeface="Century Gothic"/>
-              </a:rPr>
-              <a:t>3.  </a:t>
-            </a:r>
+              <a:buClr>
+                <a:srgbClr val="0D7377"/>
+              </a:buClr>
+              <a:buFont typeface="Arial"/>
+              <a:buChar char="•"/>
+            </a:pPr>
             <a:r>
               <a:rPr lang="en-US" sz="1650" dirty="0">
                 <a:solidFill>
                   <a:srgbClr val="000000"/>
                 </a:solidFill>
-                <a:latin typeface="Century Gothic"/>
-                <a:cs typeface="Century Gothic"/>
+                <a:latin typeface="Arial"/>
+                <a:cs typeface="Arial"/>
               </a:rPr>
               <a:t>Were the groups alike at the start? Name the biggest difference</a:t>
             </a:r>
@@ -23969,25 +23777,19 @@
               <a:spcBef>
                 <a:spcPts val="450"/>
               </a:spcBef>
-              <a:buNone/>
-            </a:pPr>
-            <a:r>
-              <a:rPr lang="en-US" sz="1650" b="1" dirty="0">
-                <a:solidFill>
-                  <a:srgbClr val="0D7377"/>
-                </a:solidFill>
-                <a:latin typeface="Century Gothic"/>
-                <a:cs typeface="Century Gothic"/>
-              </a:rPr>
-              <a:t>4.  </a:t>
-            </a:r>
+              <a:buClr>
+                <a:srgbClr val="0D7377"/>
+              </a:buClr>
+              <a:buFont typeface="Arial"/>
+              <a:buChar char="•"/>
+            </a:pPr>
             <a:r>
               <a:rPr lang="en-US" sz="1650" dirty="0">
                 <a:solidFill>
                   <a:srgbClr val="000000"/>
                 </a:solidFill>
-                <a:latin typeface="Century Gothic"/>
-                <a:cs typeface="Century Gothic"/>
+                <a:latin typeface="Arial"/>
+                <a:cs typeface="Arial"/>
               </a:rPr>
               <a:t>Write two sentences describing the patients, as in a Results section</a:t>
             </a:r>
@@ -24000,25 +23802,19 @@
               <a:spcBef>
                 <a:spcPts val="450"/>
               </a:spcBef>
-              <a:buNone/>
-            </a:pPr>
-            <a:r>
-              <a:rPr lang="en-US" sz="1650" b="1" dirty="0">
-                <a:solidFill>
-                  <a:srgbClr val="0D7377"/>
-                </a:solidFill>
-                <a:latin typeface="Century Gothic"/>
-                <a:cs typeface="Century Gothic"/>
-              </a:rPr>
-              <a:t>5.  </a:t>
-            </a:r>
+              <a:buClr>
+                <a:srgbClr val="0D7377"/>
+              </a:buClr>
+              <a:buFont typeface="Arial"/>
+              <a:buChar char="•"/>
+            </a:pPr>
             <a:r>
               <a:rPr lang="en-US" sz="1650" dirty="0">
                 <a:solidFill>
                   <a:srgbClr val="000000"/>
                 </a:solidFill>
-                <a:latin typeface="Century Gothic"/>
-                <a:cs typeface="Century Gothic"/>
+                <a:latin typeface="Arial"/>
+                <a:cs typeface="Arial"/>
               </a:rPr>
               <a:t>One group reads its sentences aloud</a:t>
             </a:r>
@@ -24062,8 +23858,8 @@
                 <a:solidFill>
                   <a:srgbClr val="0D7377"/>
                 </a:solidFill>
-                <a:latin typeface="Century Gothic"/>
-                <a:cs typeface="Century Gothic"/>
+                <a:latin typeface="Arial"/>
+                <a:cs typeface="Arial"/>
               </a:rPr>
               <a:t>Check</a:t>
             </a:r>
@@ -24084,8 +23880,8 @@
                 <a:solidFill>
                   <a:srgbClr val="000000"/>
                 </a:solidFill>
-                <a:latin typeface="Century Gothic"/>
-                <a:cs typeface="Century Gothic"/>
+                <a:latin typeface="Arial"/>
+                <a:cs typeface="Arial"/>
               </a:rPr>
               <a:t>n per column?</a:t>
             </a:r>
@@ -24106,8 +23902,8 @@
                 <a:solidFill>
                   <a:srgbClr val="000000"/>
                 </a:solidFill>
-                <a:latin typeface="Century Gothic"/>
-                <a:cs typeface="Century Gothic"/>
+                <a:latin typeface="Arial"/>
+                <a:cs typeface="Arial"/>
               </a:rPr>
               <a:t>Units in labels?</a:t>
             </a:r>
@@ -24128,8 +23924,8 @@
                 <a:solidFill>
                   <a:srgbClr val="000000"/>
                 </a:solidFill>
-                <a:latin typeface="Century Gothic"/>
-                <a:cs typeface="Century Gothic"/>
+                <a:latin typeface="Arial"/>
+                <a:cs typeface="Arial"/>
               </a:rPr>
               <a:t>Median for skewed?</a:t>
             </a:r>
@@ -24150,8 +23946,8 @@
                 <a:solidFill>
                   <a:srgbClr val="000000"/>
                 </a:solidFill>
-                <a:latin typeface="Century Gothic"/>
-                <a:cs typeface="Century Gothic"/>
+                <a:latin typeface="Arial"/>
+                <a:cs typeface="Arial"/>
               </a:rPr>
               <a:t>Missing reported?</a:t>
             </a:r>
@@ -24197,8 +23993,8 @@
                 <a:solidFill>
                   <a:srgbClr val="0D7377"/>
                 </a:solidFill>
-                <a:latin typeface="Century Gothic"/>
-                <a:cs typeface="Century Gothic"/>
+                <a:latin typeface="Arial"/>
+                <a:cs typeface="Arial"/>
               </a:rPr>
               <a:t>OUTPUT   </a:t>
             </a:r>
@@ -24207,8 +24003,8 @@
                 <a:solidFill>
                   <a:srgbClr val="000000"/>
                 </a:solidFill>
-                <a:latin typeface="Century Gothic"/>
-                <a:cs typeface="Century Gothic"/>
+                <a:latin typeface="Arial"/>
+                <a:cs typeface="Arial"/>
               </a:rPr>
               <a:t>Two Results sentences describing your group's patients (exercise 6)</a:t>
             </a:r>
@@ -24245,7 +24041,7 @@
                     <a:lumMod val="50000"/>
                   </a:schemeClr>
                 </a:solidFill>
-                <a:latin typeface="Verdana"/>
+                <a:latin typeface="Arial"/>
               </a:rPr>
               <a:t>Neudata | #ClearDataClearImpact</a:t>
             </a:r>
@@ -24375,8 +24171,8 @@
                 <a:solidFill>
                   <a:srgbClr val="0D7377"/>
                 </a:solidFill>
-                <a:latin typeface="Century Gothic"/>
-                <a:cs typeface="Century Gothic"/>
+                <a:latin typeface="Arial"/>
+                <a:cs typeface="Arial"/>
               </a:rPr>
               <a:t>Proposal builder 5: what a good one contains</a:t>
             </a:r>
@@ -24442,8 +24238,8 @@
                 <a:solidFill>
                   <a:srgbClr val="595959"/>
                 </a:solidFill>
-                <a:latin typeface="Century Gothic"/>
-                <a:cs typeface="Century Gothic"/>
+                <a:latin typeface="Arial"/>
+                <a:cs typeface="Arial"/>
               </a:rPr>
               <a:t>Example from the running example (restrictive fluids trial).</a:t>
             </a:r>
@@ -24485,8 +24281,8 @@
                 <a:solidFill>
                   <a:srgbClr val="FFFFFF"/>
                 </a:solidFill>
-                <a:latin typeface="Century Gothic"/>
-                <a:cs typeface="Century Gothic"/>
+                <a:latin typeface="Arial"/>
+                <a:cs typeface="Arial"/>
               </a:rPr>
               <a:t>Variables table</a:t>
             </a:r>
@@ -24534,8 +24330,8 @@
                 <a:solidFill>
                   <a:srgbClr val="000000"/>
                 </a:solidFill>
-                <a:latin typeface="Century Gothic"/>
-                <a:cs typeface="Century Gothic"/>
+                <a:latin typeface="Arial"/>
+                <a:cs typeface="Arial"/>
               </a:rPr>
               <a:t>Outcome: 28-day death (binary)</a:t>
             </a:r>
@@ -24555,8 +24351,8 @@
                 <a:solidFill>
                   <a:srgbClr val="000000"/>
                 </a:solidFill>
-                <a:latin typeface="Century Gothic"/>
-                <a:cs typeface="Century Gothic"/>
+                <a:latin typeface="Arial"/>
+                <a:cs typeface="Arial"/>
               </a:rPr>
               <a:t>Exposure: restrictive vs usual</a:t>
             </a:r>
@@ -24576,8 +24372,8 @@
                 <a:solidFill>
                   <a:srgbClr val="000000"/>
                 </a:solidFill>
-                <a:latin typeface="Century Gothic"/>
-                <a:cs typeface="Century Gothic"/>
+                <a:latin typeface="Arial"/>
+                <a:cs typeface="Arial"/>
               </a:rPr>
               <a:t>Confounders: age, SOFA, lactate</a:t>
             </a:r>
@@ -24619,8 +24415,8 @@
                 <a:solidFill>
                   <a:srgbClr val="FFFFFF"/>
                 </a:solidFill>
-                <a:latin typeface="Century Gothic"/>
-                <a:cs typeface="Century Gothic"/>
+                <a:latin typeface="Arial"/>
+                <a:cs typeface="Arial"/>
               </a:rPr>
               <a:t>Mini-CRF</a:t>
             </a:r>
@@ -24668,8 +24464,8 @@
                 <a:solidFill>
                   <a:srgbClr val="000000"/>
                 </a:solidFill>
-                <a:latin typeface="Century Gothic"/>
-                <a:cs typeface="Century Gothic"/>
+                <a:latin typeface="Arial"/>
+                <a:cs typeface="Arial"/>
               </a:rPr>
               <a:t>6-10 items</a:t>
             </a:r>
@@ -24689,8 +24485,8 @@
                 <a:solidFill>
                   <a:srgbClr val="000000"/>
                 </a:solidFill>
-                <a:latin typeface="Century Gothic"/>
-                <a:cs typeface="Century Gothic"/>
+                <a:latin typeface="Arial"/>
+                <a:cs typeface="Arial"/>
               </a:rPr>
               <a:t>units and time points</a:t>
             </a:r>
@@ -24710,8 +24506,8 @@
                 <a:solidFill>
                   <a:srgbClr val="000000"/>
                 </a:solidFill>
-                <a:latin typeface="Century Gothic"/>
-                <a:cs typeface="Century Gothic"/>
+                <a:latin typeface="Arial"/>
+                <a:cs typeface="Arial"/>
               </a:rPr>
               <a:t>'unknown' options</a:t>
             </a:r>
@@ -24753,8 +24549,8 @@
                 <a:solidFill>
                   <a:srgbClr val="FFFFFF"/>
                 </a:solidFill>
-                <a:latin typeface="Century Gothic"/>
-                <a:cs typeface="Century Gothic"/>
+                <a:latin typeface="Arial"/>
+                <a:cs typeface="Arial"/>
               </a:rPr>
               <a:t>Data dictionary</a:t>
             </a:r>
@@ -24802,8 +24598,8 @@
                 <a:solidFill>
                   <a:srgbClr val="000000"/>
                 </a:solidFill>
-                <a:latin typeface="Century Gothic"/>
-                <a:cs typeface="Century Gothic"/>
+                <a:latin typeface="Arial"/>
+                <a:cs typeface="Arial"/>
               </a:rPr>
               <a:t>3-5 rows: name, label,</a:t>
             </a:r>
@@ -24823,8 +24619,8 @@
                 <a:solidFill>
                   <a:srgbClr val="000000"/>
                 </a:solidFill>
-                <a:latin typeface="Century Gothic"/>
-                <a:cs typeface="Century Gothic"/>
+                <a:latin typeface="Arial"/>
+                <a:cs typeface="Arial"/>
               </a:rPr>
               <a:t>type, unit/codes,</a:t>
             </a:r>
@@ -24844,8 +24640,8 @@
                 <a:solidFill>
                   <a:srgbClr val="000000"/>
                 </a:solidFill>
-                <a:latin typeface="Century Gothic"/>
-                <a:cs typeface="Century Gothic"/>
+                <a:latin typeface="Arial"/>
+                <a:cs typeface="Arial"/>
               </a:rPr>
               <a:t>allowed values</a:t>
             </a:r>
@@ -24887,8 +24683,8 @@
                 <a:solidFill>
                   <a:srgbClr val="FFFFFF"/>
                 </a:solidFill>
-                <a:latin typeface="Century Gothic"/>
-                <a:cs typeface="Century Gothic"/>
+                <a:latin typeface="Arial"/>
+                <a:cs typeface="Arial"/>
               </a:rPr>
               <a:t>Data management</a:t>
             </a:r>
@@ -24936,8 +24732,8 @@
                 <a:solidFill>
                   <a:srgbClr val="000000"/>
                 </a:solidFill>
-                <a:latin typeface="Century Gothic"/>
-                <a:cs typeface="Century Gothic"/>
+                <a:latin typeface="Arial"/>
+                <a:cs typeface="Arial"/>
               </a:rPr>
               <a:t>EDC or double entry</a:t>
             </a:r>
@@ -24957,8 +24753,8 @@
                 <a:solidFill>
                   <a:srgbClr val="000000"/>
                 </a:solidFill>
-                <a:latin typeface="Century Gothic"/>
-                <a:cs typeface="Century Gothic"/>
+                <a:latin typeface="Arial"/>
+                <a:cs typeface="Arial"/>
               </a:rPr>
               <a:t>coded IDs, audit trail</a:t>
             </a:r>
@@ -24978,8 +24774,8 @@
                 <a:solidFill>
                   <a:srgbClr val="000000"/>
                 </a:solidFill>
-                <a:latin typeface="Century Gothic"/>
-                <a:cs typeface="Century Gothic"/>
+                <a:latin typeface="Arial"/>
+                <a:cs typeface="Arial"/>
               </a:rPr>
               <a:t>backups, sharing statement</a:t>
             </a:r>
@@ -25023,8 +24819,8 @@
                 <a:solidFill>
                   <a:srgbClr val="FFFFFF"/>
                 </a:solidFill>
-                <a:latin typeface="Century Gothic"/>
-                <a:cs typeface="Century Gothic"/>
+                <a:latin typeface="Arial"/>
+                <a:cs typeface="Arial"/>
               </a:rPr>
               <a:t>KEY MESSAGE   </a:t>
             </a:r>
@@ -25033,8 +24829,8 @@
                 <a:solidFill>
                   <a:srgbClr val="FFFFFF"/>
                 </a:solidFill>
-                <a:latin typeface="Century Gothic"/>
-                <a:cs typeface="Century Gothic"/>
+                <a:latin typeface="Arial"/>
+                <a:cs typeface="Arial"/>
               </a:rPr>
               <a:t>Today: what you will collect and how you will keep it safe.</a:t>
             </a:r>
@@ -25071,7 +24867,7 @@
                     <a:lumMod val="50000"/>
                   </a:schemeClr>
                 </a:solidFill>
-                <a:latin typeface="Verdana"/>
+                <a:latin typeface="Arial"/>
               </a:rPr>
               <a:t>Neudata | #ClearDataClearImpact</a:t>
             </a:r>
@@ -25201,8 +24997,8 @@
                 <a:solidFill>
                   <a:srgbClr val="0D7377"/>
                 </a:solidFill>
-                <a:latin typeface="Century Gothic"/>
-                <a:cs typeface="Century Gothic"/>
+                <a:latin typeface="Arial"/>
+                <a:cs typeface="Arial"/>
               </a:rPr>
               <a:t>Proposal builder 5: variables, CRF and data management</a:t>
             </a:r>
@@ -25272,8 +25068,8 @@
                 <a:solidFill>
                   <a:srgbClr val="FFFFFF"/>
                 </a:solidFill>
-                <a:latin typeface="Century Gothic"/>
-                <a:cs typeface="Century Gothic"/>
+                <a:latin typeface="Arial"/>
+                <a:cs typeface="Arial"/>
               </a:rPr>
               <a:t>PROPOSAL BUILDER   |   30 min</a:t>
             </a:r>
@@ -25310,25 +25106,19 @@
               <a:spcBef>
                 <a:spcPts val="450"/>
               </a:spcBef>
-              <a:buNone/>
-            </a:pPr>
-            <a:r>
-              <a:rPr lang="en-US" sz="1650" b="1" dirty="0">
-                <a:solidFill>
-                  <a:srgbClr val="055F56"/>
-                </a:solidFill>
-                <a:latin typeface="Century Gothic"/>
-                <a:cs typeface="Century Gothic"/>
-              </a:rPr>
-              <a:t>1.  </a:t>
-            </a:r>
+              <a:buClr>
+                <a:srgbClr val="055F56"/>
+              </a:buClr>
+              <a:buFont typeface="Arial"/>
+              <a:buChar char="•"/>
+            </a:pPr>
             <a:r>
               <a:rPr lang="en-US" sz="1650" dirty="0">
                 <a:solidFill>
                   <a:srgbClr val="000000"/>
                 </a:solidFill>
-                <a:latin typeface="Century Gothic"/>
-                <a:cs typeface="Century Gothic"/>
+                <a:latin typeface="Arial"/>
+                <a:cs typeface="Arial"/>
               </a:rPr>
               <a:t>Variables table: outcome, exposure, 3-5 confounders, each with its type (8 min)</a:t>
             </a:r>
@@ -25341,25 +25131,19 @@
               <a:spcBef>
                 <a:spcPts val="450"/>
               </a:spcBef>
-              <a:buNone/>
-            </a:pPr>
-            <a:r>
-              <a:rPr lang="en-US" sz="1650" b="1" dirty="0">
-                <a:solidFill>
-                  <a:srgbClr val="055F56"/>
-                </a:solidFill>
-                <a:latin typeface="Century Gothic"/>
-                <a:cs typeface="Century Gothic"/>
-              </a:rPr>
-              <a:t>2.  </a:t>
-            </a:r>
+              <a:buClr>
+                <a:srgbClr val="055F56"/>
+              </a:buClr>
+              <a:buFont typeface="Arial"/>
+              <a:buChar char="•"/>
+            </a:pPr>
             <a:r>
               <a:rPr lang="en-US" sz="1650" dirty="0">
                 <a:solidFill>
                   <a:srgbClr val="000000"/>
                 </a:solidFill>
-                <a:latin typeface="Century Gothic"/>
-                <a:cs typeface="Century Gothic"/>
+                <a:latin typeface="Arial"/>
+                <a:cs typeface="Arial"/>
               </a:rPr>
               <a:t>Mini-CRF: 6-10 items with units, time points and 'unknown' options (10 min)</a:t>
             </a:r>
@@ -25372,25 +25156,19 @@
               <a:spcBef>
                 <a:spcPts val="450"/>
               </a:spcBef>
-              <a:buNone/>
-            </a:pPr>
-            <a:r>
-              <a:rPr lang="en-US" sz="1650" b="1" dirty="0">
-                <a:solidFill>
-                  <a:srgbClr val="055F56"/>
-                </a:solidFill>
-                <a:latin typeface="Century Gothic"/>
-                <a:cs typeface="Century Gothic"/>
-              </a:rPr>
-              <a:t>3.  </a:t>
-            </a:r>
+              <a:buClr>
+                <a:srgbClr val="055F56"/>
+              </a:buClr>
+              <a:buFont typeface="Arial"/>
+              <a:buChar char="•"/>
+            </a:pPr>
             <a:r>
               <a:rPr lang="en-US" sz="1650" dirty="0">
                 <a:solidFill>
                   <a:srgbClr val="000000"/>
                 </a:solidFill>
-                <a:latin typeface="Century Gothic"/>
-                <a:cs typeface="Century Gothic"/>
+                <a:latin typeface="Arial"/>
+                <a:cs typeface="Arial"/>
               </a:rPr>
               <a:t>Data dictionary: 3-5 rows + one validation rule (6 min)</a:t>
             </a:r>
@@ -25403,25 +25181,19 @@
               <a:spcBef>
                 <a:spcPts val="450"/>
               </a:spcBef>
-              <a:buNone/>
-            </a:pPr>
-            <a:r>
-              <a:rPr lang="en-US" sz="1650" b="1" dirty="0">
-                <a:solidFill>
-                  <a:srgbClr val="055F56"/>
-                </a:solidFill>
-                <a:latin typeface="Century Gothic"/>
-                <a:cs typeface="Century Gothic"/>
-              </a:rPr>
-              <a:t>4.  </a:t>
-            </a:r>
+              <a:buClr>
+                <a:srgbClr val="055F56"/>
+              </a:buClr>
+              <a:buFont typeface="Arial"/>
+              <a:buChar char="•"/>
+            </a:pPr>
             <a:r>
               <a:rPr lang="en-US" sz="1650" dirty="0">
                 <a:solidFill>
                   <a:srgbClr val="000000"/>
                 </a:solidFill>
-                <a:latin typeface="Century Gothic"/>
-                <a:cs typeface="Century Gothic"/>
+                <a:latin typeface="Arial"/>
+                <a:cs typeface="Arial"/>
               </a:rPr>
               <a:t>Data-management plan: EDC or double entry, IDs, backups, sharing (6 min)</a:t>
             </a:r>
@@ -25465,8 +25237,8 @@
                 <a:solidFill>
                   <a:srgbClr val="055F56"/>
                 </a:solidFill>
-                <a:latin typeface="Century Gothic"/>
-                <a:cs typeface="Century Gothic"/>
+                <a:latin typeface="Arial"/>
+                <a:cs typeface="Arial"/>
               </a:rPr>
               <a:t>Use these tools</a:t>
             </a:r>
@@ -25487,8 +25259,8 @@
                 <a:solidFill>
                   <a:srgbClr val="000000"/>
                 </a:solidFill>
-                <a:latin typeface="Century Gothic"/>
-                <a:cs typeface="Century Gothic"/>
+                <a:latin typeface="Arial"/>
+                <a:cs typeface="Arial"/>
               </a:rPr>
               <a:t>Variable-type tree</a:t>
             </a:r>
@@ -25509,8 +25281,8 @@
                 <a:solidFill>
                   <a:srgbClr val="000000"/>
                 </a:solidFill>
-                <a:latin typeface="Century Gothic"/>
-                <a:cs typeface="Century Gothic"/>
+                <a:latin typeface="Arial"/>
+                <a:cs typeface="Arial"/>
               </a:rPr>
               <a:t>Good vs bad CRF items</a:t>
             </a:r>
@@ -25531,8 +25303,8 @@
                 <a:solidFill>
                   <a:srgbClr val="000000"/>
                 </a:solidFill>
-                <a:latin typeface="Century Gothic"/>
-                <a:cs typeface="Century Gothic"/>
+                <a:latin typeface="Arial"/>
+                <a:cs typeface="Arial"/>
               </a:rPr>
               <a:t>FLUID-ICU data dictionary</a:t>
             </a:r>
@@ -25553,8 +25325,8 @@
                 <a:solidFill>
                   <a:srgbClr val="000000"/>
                 </a:solidFill>
-                <a:latin typeface="Century Gothic"/>
-                <a:cs typeface="Century Gothic"/>
+                <a:latin typeface="Arial"/>
+                <a:cs typeface="Arial"/>
               </a:rPr>
               <a:t>Worksheet: exercise 8</a:t>
             </a:r>
@@ -25600,8 +25372,8 @@
                 <a:solidFill>
                   <a:srgbClr val="055F56"/>
                 </a:solidFill>
-                <a:latin typeface="Century Gothic"/>
-                <a:cs typeface="Century Gothic"/>
+                <a:latin typeface="Arial"/>
+                <a:cs typeface="Arial"/>
               </a:rPr>
               <a:t>OUTPUT   </a:t>
             </a:r>
@@ -25610,8 +25382,8 @@
                 <a:solidFill>
                   <a:srgbClr val="000000"/>
                 </a:solidFill>
-                <a:latin typeface="Century Gothic"/>
-                <a:cs typeface="Century Gothic"/>
+                <a:latin typeface="Arial"/>
+                <a:cs typeface="Arial"/>
               </a:rPr>
               <a:t>Proposal Part 3 (first half) written into the group template</a:t>
             </a:r>
@@ -25648,7 +25420,7 @@
                     <a:lumMod val="50000"/>
                   </a:schemeClr>
                 </a:solidFill>
-                <a:latin typeface="Verdana"/>
+                <a:latin typeface="Arial"/>
               </a:rPr>
               <a:t>Neudata | #ClearDataClearImpact</a:t>
             </a:r>
@@ -25778,8 +25550,8 @@
                 <a:solidFill>
                   <a:srgbClr val="0D7377"/>
                 </a:solidFill>
-                <a:latin typeface="Century Gothic"/>
-                <a:cs typeface="Century Gothic"/>
+                <a:latin typeface="Arial"/>
+                <a:cs typeface="Arial"/>
               </a:rPr>
               <a:t>Key words of the day</a:t>
             </a:r>
@@ -25845,8 +25617,8 @@
                 <a:solidFill>
                   <a:srgbClr val="595959"/>
                 </a:solidFill>
-                <a:latin typeface="Century Gothic"/>
-                <a:cs typeface="Century Gothic"/>
+                <a:latin typeface="Arial"/>
+                <a:cs typeface="Arial"/>
               </a:rPr>
               <a:t>Twelve words you should now be able to explain to a colleague.</a:t>
             </a:r>
@@ -25888,8 +25660,8 @@
                 <a:solidFill>
                   <a:srgbClr val="FFFFFF"/>
                 </a:solidFill>
-                <a:latin typeface="Century Gothic"/>
-                <a:cs typeface="Century Gothic"/>
+                <a:latin typeface="Arial"/>
+                <a:cs typeface="Arial"/>
               </a:rPr>
               <a:t>Collect</a:t>
             </a:r>
@@ -25937,8 +25709,8 @@
                 <a:solidFill>
                   <a:srgbClr val="000000"/>
                 </a:solidFill>
-                <a:latin typeface="Century Gothic"/>
-                <a:cs typeface="Century Gothic"/>
+                <a:latin typeface="Arial"/>
+                <a:cs typeface="Arial"/>
               </a:rPr>
               <a:t>Variable type</a:t>
             </a:r>
@@ -25958,8 +25730,8 @@
                 <a:solidFill>
                   <a:srgbClr val="000000"/>
                 </a:solidFill>
-                <a:latin typeface="Century Gothic"/>
-                <a:cs typeface="Century Gothic"/>
+                <a:latin typeface="Arial"/>
+                <a:cs typeface="Arial"/>
               </a:rPr>
               <a:t>CRF</a:t>
             </a:r>
@@ -25979,8 +25751,8 @@
                 <a:solidFill>
                   <a:srgbClr val="000000"/>
                 </a:solidFill>
-                <a:latin typeface="Century Gothic"/>
-                <a:cs typeface="Century Gothic"/>
+                <a:latin typeface="Arial"/>
+                <a:cs typeface="Arial"/>
               </a:rPr>
               <a:t>Data dictionary</a:t>
             </a:r>
@@ -26022,8 +25794,8 @@
                 <a:solidFill>
                   <a:srgbClr val="FFFFFF"/>
                 </a:solidFill>
-                <a:latin typeface="Century Gothic"/>
-                <a:cs typeface="Century Gothic"/>
+                <a:latin typeface="Arial"/>
+                <a:cs typeface="Arial"/>
               </a:rPr>
               <a:t>Protect</a:t>
             </a:r>
@@ -26071,8 +25843,8 @@
                 <a:solidFill>
                   <a:srgbClr val="000000"/>
                 </a:solidFill>
-                <a:latin typeface="Century Gothic"/>
-                <a:cs typeface="Century Gothic"/>
+                <a:latin typeface="Arial"/>
+                <a:cs typeface="Arial"/>
               </a:rPr>
               <a:t>Validation check</a:t>
             </a:r>
@@ -26092,8 +25864,8 @@
                 <a:solidFill>
                   <a:srgbClr val="000000"/>
                 </a:solidFill>
-                <a:latin typeface="Century Gothic"/>
-                <a:cs typeface="Century Gothic"/>
+                <a:latin typeface="Arial"/>
+                <a:cs typeface="Arial"/>
               </a:rPr>
               <a:t>Audit trail</a:t>
             </a:r>
@@ -26113,8 +25885,8 @@
                 <a:solidFill>
                   <a:srgbClr val="000000"/>
                 </a:solidFill>
-                <a:latin typeface="Century Gothic"/>
-                <a:cs typeface="Century Gothic"/>
+                <a:latin typeface="Arial"/>
+                <a:cs typeface="Arial"/>
               </a:rPr>
               <a:t>Cleaning log</a:t>
             </a:r>
@@ -26156,8 +25928,8 @@
                 <a:solidFill>
                   <a:srgbClr val="FFFFFF"/>
                 </a:solidFill>
-                <a:latin typeface="Century Gothic"/>
-                <a:cs typeface="Century Gothic"/>
+                <a:latin typeface="Arial"/>
+                <a:cs typeface="Arial"/>
               </a:rPr>
               <a:t>Describe</a:t>
             </a:r>
@@ -26205,8 +25977,8 @@
                 <a:solidFill>
                   <a:srgbClr val="000000"/>
                 </a:solidFill>
-                <a:latin typeface="Century Gothic"/>
-                <a:cs typeface="Century Gothic"/>
+                <a:latin typeface="Arial"/>
+                <a:cs typeface="Arial"/>
               </a:rPr>
               <a:t>Median (IQR)</a:t>
             </a:r>
@@ -26226,8 +25998,8 @@
                 <a:solidFill>
                   <a:srgbClr val="000000"/>
                 </a:solidFill>
-                <a:latin typeface="Century Gothic"/>
-                <a:cs typeface="Century Gothic"/>
+                <a:latin typeface="Arial"/>
+                <a:cs typeface="Arial"/>
               </a:rPr>
               <a:t>Mean (SD)</a:t>
             </a:r>
@@ -26247,8 +26019,8 @@
                 <a:solidFill>
                   <a:srgbClr val="000000"/>
                 </a:solidFill>
-                <a:latin typeface="Century Gothic"/>
-                <a:cs typeface="Century Gothic"/>
+                <a:latin typeface="Arial"/>
+                <a:cs typeface="Arial"/>
               </a:rPr>
               <a:t>Skewed</a:t>
             </a:r>
@@ -26290,8 +26062,8 @@
                 <a:solidFill>
                   <a:srgbClr val="FFFFFF"/>
                 </a:solidFill>
-                <a:latin typeface="Century Gothic"/>
-                <a:cs typeface="Century Gothic"/>
+                <a:latin typeface="Arial"/>
+                <a:cs typeface="Arial"/>
               </a:rPr>
               <a:t>Show</a:t>
             </a:r>
@@ -26339,8 +26111,8 @@
                 <a:solidFill>
                   <a:srgbClr val="000000"/>
                 </a:solidFill>
-                <a:latin typeface="Century Gothic"/>
-                <a:cs typeface="Century Gothic"/>
+                <a:latin typeface="Arial"/>
+                <a:cs typeface="Arial"/>
               </a:rPr>
               <a:t>Table 1</a:t>
             </a:r>
@@ -26360,8 +26132,8 @@
                 <a:solidFill>
                   <a:srgbClr val="000000"/>
                 </a:solidFill>
-                <a:latin typeface="Century Gothic"/>
-                <a:cs typeface="Century Gothic"/>
+                <a:latin typeface="Arial"/>
+                <a:cs typeface="Arial"/>
               </a:rPr>
               <a:t>Dots + box</a:t>
             </a:r>
@@ -26381,8 +26153,8 @@
                 <a:solidFill>
                   <a:srgbClr val="000000"/>
                 </a:solidFill>
-                <a:latin typeface="Century Gothic"/>
-                <a:cs typeface="Century Gothic"/>
+                <a:latin typeface="Arial"/>
+                <a:cs typeface="Arial"/>
               </a:rPr>
               <a:t>n (%)</a:t>
             </a:r>
@@ -26426,8 +26198,8 @@
                 <a:solidFill>
                   <a:srgbClr val="FFFFFF"/>
                 </a:solidFill>
-                <a:latin typeface="Century Gothic"/>
-                <a:cs typeface="Century Gothic"/>
+                <a:latin typeface="Arial"/>
+                <a:cs typeface="Arial"/>
               </a:rPr>
               <a:t>KEY MESSAGE   </a:t>
             </a:r>
@@ -26436,8 +26208,8 @@
                 <a:solidFill>
                   <a:srgbClr val="FFFFFF"/>
                 </a:solidFill>
-                <a:latin typeface="Century Gothic"/>
-                <a:cs typeface="Century Gothic"/>
+                <a:latin typeface="Arial"/>
+                <a:cs typeface="Arial"/>
               </a:rPr>
               <a:t>If one word is unclear, ask now or look it up in the glossary.</a:t>
             </a:r>
@@ -26474,7 +26246,7 @@
                     <a:lumMod val="50000"/>
                   </a:schemeClr>
                 </a:solidFill>
-                <a:latin typeface="Verdana"/>
+                <a:latin typeface="Arial"/>
               </a:rPr>
               <a:t>Neudata | #ClearDataClearImpact</a:t>
             </a:r>
@@ -26604,8 +26376,8 @@
                 <a:solidFill>
                   <a:srgbClr val="0D7377"/>
                 </a:solidFill>
-                <a:latin typeface="Century Gothic"/>
-                <a:cs typeface="Century Gothic"/>
+                <a:latin typeface="Arial"/>
+                <a:cs typeface="Arial"/>
               </a:rPr>
               <a:t>Session 5 recap</a:t>
             </a:r>
@@ -26671,8 +26443,8 @@
                 <a:solidFill>
                   <a:srgbClr val="595959"/>
                 </a:solidFill>
-                <a:latin typeface="Century Gothic"/>
-                <a:cs typeface="Century Gothic"/>
+                <a:latin typeface="Arial"/>
+                <a:cs typeface="Arial"/>
               </a:rPr>
               <a:t>Three messages to take home.</a:t>
             </a:r>
@@ -26714,10 +26486,10 @@
                 <a:solidFill>
                   <a:srgbClr val="FFFFFF"/>
                 </a:solidFill>
-                <a:latin typeface="Century Gothic"/>
-                <a:cs typeface="Century Gothic"/>
-              </a:rPr>
-              <a:t>1. Design the data</a:t>
+                <a:latin typeface="Arial"/>
+                <a:cs typeface="Arial"/>
+              </a:rPr>
+              <a:t>Design the data</a:t>
             </a:r>
           </a:p>
         </p:txBody>
@@ -26763,8 +26535,8 @@
                 <a:solidFill>
                   <a:srgbClr val="000000"/>
                 </a:solidFill>
-                <a:latin typeface="Century Gothic"/>
-                <a:cs typeface="Century Gothic"/>
+                <a:latin typeface="Arial"/>
+                <a:cs typeface="Arial"/>
               </a:rPr>
               <a:t>Clear CRF items</a:t>
             </a:r>
@@ -26784,8 +26556,8 @@
                 <a:solidFill>
                   <a:srgbClr val="000000"/>
                 </a:solidFill>
-                <a:latin typeface="Century Gothic"/>
-                <a:cs typeface="Century Gothic"/>
+                <a:latin typeface="Arial"/>
+                <a:cs typeface="Arial"/>
               </a:rPr>
               <a:t>Data dictionary first</a:t>
             </a:r>
@@ -26805,8 +26577,8 @@
                 <a:solidFill>
                   <a:srgbClr val="000000"/>
                 </a:solidFill>
-                <a:latin typeface="Century Gothic"/>
-                <a:cs typeface="Century Gothic"/>
+                <a:latin typeface="Arial"/>
+                <a:cs typeface="Arial"/>
               </a:rPr>
               <a:t>Checks at entry</a:t>
             </a:r>
@@ -26848,10 +26620,10 @@
                 <a:solidFill>
                   <a:srgbClr val="FFFFFF"/>
                 </a:solidFill>
-                <a:latin typeface="Century Gothic"/>
-                <a:cs typeface="Century Gothic"/>
-              </a:rPr>
-              <a:t>2. Keep it clean</a:t>
+                <a:latin typeface="Arial"/>
+                <a:cs typeface="Arial"/>
+              </a:rPr>
+              <a:t>Keep it clean</a:t>
             </a:r>
           </a:p>
         </p:txBody>
@@ -26897,8 +26669,8 @@
                 <a:solidFill>
                   <a:srgbClr val="000000"/>
                 </a:solidFill>
-                <a:latin typeface="Century Gothic"/>
-                <a:cs typeface="Century Gothic"/>
+                <a:latin typeface="Arial"/>
+                <a:cs typeface="Arial"/>
               </a:rPr>
               <a:t>Never edit raw data</a:t>
             </a:r>
@@ -26918,8 +26690,8 @@
                 <a:solidFill>
                   <a:srgbClr val="000000"/>
                 </a:solidFill>
-                <a:latin typeface="Century Gothic"/>
-                <a:cs typeface="Century Gothic"/>
+                <a:latin typeface="Arial"/>
+                <a:cs typeface="Arial"/>
               </a:rPr>
               <a:t>Log every correction</a:t>
             </a:r>
@@ -26939,8 +26711,8 @@
                 <a:solidFill>
                   <a:srgbClr val="000000"/>
                 </a:solidFill>
-                <a:latin typeface="Century Gothic"/>
-                <a:cs typeface="Century Gothic"/>
+                <a:latin typeface="Arial"/>
+                <a:cs typeface="Arial"/>
               </a:rPr>
               <a:t>Backups, coded IDs</a:t>
             </a:r>
@@ -26982,10 +26754,10 @@
                 <a:solidFill>
                   <a:srgbClr val="FFFFFF"/>
                 </a:solidFill>
-                <a:latin typeface="Century Gothic"/>
-                <a:cs typeface="Century Gothic"/>
-              </a:rPr>
-              <a:t>3. Describe honestly</a:t>
+                <a:latin typeface="Arial"/>
+                <a:cs typeface="Arial"/>
+              </a:rPr>
+              <a:t>Describe honestly</a:t>
             </a:r>
           </a:p>
         </p:txBody>
@@ -27031,8 +26803,8 @@
                 <a:solidFill>
                   <a:srgbClr val="000000"/>
                 </a:solidFill>
-                <a:latin typeface="Century Gothic"/>
-                <a:cs typeface="Century Gothic"/>
+                <a:latin typeface="Arial"/>
+                <a:cs typeface="Arial"/>
               </a:rPr>
               <a:t>Shape decides the summary</a:t>
             </a:r>
@@ -27052,8 +26824,8 @@
                 <a:solidFill>
                   <a:srgbClr val="000000"/>
                 </a:solidFill>
-                <a:latin typeface="Century Gothic"/>
-                <a:cs typeface="Century Gothic"/>
+                <a:latin typeface="Arial"/>
+                <a:cs typeface="Arial"/>
               </a:rPr>
               <a:t>Show every patient</a:t>
             </a:r>
@@ -27073,8 +26845,8 @@
                 <a:solidFill>
                   <a:srgbClr val="000000"/>
                 </a:solidFill>
-                <a:latin typeface="Century Gothic"/>
-                <a:cs typeface="Century Gothic"/>
+                <a:latin typeface="Arial"/>
+                <a:cs typeface="Arial"/>
               </a:rPr>
               <a:t>Table 1 that stands alone</a:t>
             </a:r>
@@ -27118,8 +26890,8 @@
                 <a:solidFill>
                   <a:srgbClr val="FFFFFF"/>
                 </a:solidFill>
-                <a:latin typeface="Century Gothic"/>
-                <a:cs typeface="Century Gothic"/>
+                <a:latin typeface="Arial"/>
+                <a:cs typeface="Arial"/>
               </a:rPr>
               <a:t>KEY MESSAGE   </a:t>
             </a:r>
@@ -27128,8 +26900,8 @@
                 <a:solidFill>
                   <a:srgbClr val="FFFFFF"/>
                 </a:solidFill>
-                <a:latin typeface="Century Gothic"/>
-                <a:cs typeface="Century Gothic"/>
+                <a:latin typeface="Arial"/>
+                <a:cs typeface="Arial"/>
               </a:rPr>
               <a:t>Good analysis starts with good data, described honestly.</a:t>
             </a:r>
@@ -27166,7 +26938,7 @@
                     <a:lumMod val="50000"/>
                   </a:schemeClr>
                 </a:solidFill>
-                <a:latin typeface="Verdana"/>
+                <a:latin typeface="Arial"/>
               </a:rPr>
               <a:t>Neudata | #ClearDataClearImpact</a:t>
             </a:r>
@@ -27296,8 +27068,8 @@
                 <a:solidFill>
                   <a:srgbClr val="0D7377"/>
                 </a:solidFill>
-                <a:latin typeface="Century Gothic"/>
-                <a:cs typeface="Century Gothic"/>
+                <a:latin typeface="Arial"/>
+                <a:cs typeface="Arial"/>
               </a:rPr>
               <a:t>Wrap-up and homework</a:t>
             </a:r>
@@ -27367,8 +27139,8 @@
                 <a:solidFill>
                   <a:srgbClr val="FFFFFF"/>
                 </a:solidFill>
-                <a:latin typeface="Century Gothic"/>
-                <a:cs typeface="Century Gothic"/>
+                <a:latin typeface="Arial"/>
+                <a:cs typeface="Arial"/>
               </a:rPr>
               <a:t>DISCUSSION   |   5 min</a:t>
             </a:r>
@@ -27405,25 +27177,19 @@
               <a:spcBef>
                 <a:spcPts val="450"/>
               </a:spcBef>
-              <a:buNone/>
-            </a:pPr>
-            <a:r>
-              <a:rPr lang="en-US" sz="1650" b="1" dirty="0">
-                <a:solidFill>
-                  <a:srgbClr val="1F5C7A"/>
-                </a:solidFill>
-                <a:latin typeface="Century Gothic"/>
-                <a:cs typeface="Century Gothic"/>
-              </a:rPr>
-              <a:t>1.  </a:t>
-            </a:r>
+              <a:buClr>
+                <a:srgbClr val="1F5C7A"/>
+              </a:buClr>
+              <a:buFont typeface="Arial"/>
+              <a:buChar char="•"/>
+            </a:pPr>
             <a:r>
               <a:rPr lang="en-US" sz="1650" dirty="0">
                 <a:solidFill>
                   <a:srgbClr val="000000"/>
                 </a:solidFill>
-                <a:latin typeface="Century Gothic"/>
-                <a:cs typeface="Century Gothic"/>
+                <a:latin typeface="Arial"/>
+                <a:cs typeface="Arial"/>
               </a:rPr>
               <a:t>Key words and recap (previous two slides)</a:t>
             </a:r>
@@ -27436,25 +27202,19 @@
               <a:spcBef>
                 <a:spcPts val="450"/>
               </a:spcBef>
-              <a:buNone/>
-            </a:pPr>
-            <a:r>
-              <a:rPr lang="en-US" sz="1650" b="1" dirty="0">
-                <a:solidFill>
-                  <a:srgbClr val="1F5C7A"/>
-                </a:solidFill>
-                <a:latin typeface="Century Gothic"/>
-                <a:cs typeface="Century Gothic"/>
-              </a:rPr>
-              <a:t>2.  </a:t>
-            </a:r>
+              <a:buClr>
+                <a:srgbClr val="1F5C7A"/>
+              </a:buClr>
+              <a:buFont typeface="Arial"/>
+              <a:buChar char="•"/>
+            </a:pPr>
             <a:r>
               <a:rPr lang="en-US" sz="1650" dirty="0">
                 <a:solidFill>
                   <a:srgbClr val="000000"/>
                 </a:solidFill>
-                <a:latin typeface="Century Gothic"/>
-                <a:cs typeface="Century Gothic"/>
+                <a:latin typeface="Arial"/>
+                <a:cs typeface="Arial"/>
               </a:rPr>
               <a:t>Exit question: one data-quality problem found in FLUID-ICU, and how it was fixed</a:t>
             </a:r>
@@ -27467,25 +27227,19 @@
               <a:spcBef>
                 <a:spcPts val="450"/>
               </a:spcBef>
-              <a:buNone/>
-            </a:pPr>
-            <a:r>
-              <a:rPr lang="en-US" sz="1650" b="1" dirty="0">
-                <a:solidFill>
-                  <a:srgbClr val="1F5C7A"/>
-                </a:solidFill>
-                <a:latin typeface="Century Gothic"/>
-                <a:cs typeface="Century Gothic"/>
-              </a:rPr>
-              <a:t>3.  </a:t>
-            </a:r>
+              <a:buClr>
+                <a:srgbClr val="1F5C7A"/>
+              </a:buClr>
+              <a:buFont typeface="Arial"/>
+              <a:buChar char="•"/>
+            </a:pPr>
             <a:r>
               <a:rPr lang="en-US" sz="1650" dirty="0">
                 <a:solidFill>
                   <a:srgbClr val="000000"/>
                 </a:solidFill>
-                <a:latin typeface="Century Gothic"/>
-                <a:cs typeface="Century Gothic"/>
+                <a:latin typeface="Arial"/>
+                <a:cs typeface="Arial"/>
               </a:rPr>
               <a:t>Homework: finish the CRF and data dictionary rows of your proposal</a:t>
             </a:r>
@@ -27498,25 +27252,19 @@
               <a:spcBef>
                 <a:spcPts val="450"/>
               </a:spcBef>
-              <a:buNone/>
-            </a:pPr>
-            <a:r>
-              <a:rPr lang="en-US" sz="1650" b="1" dirty="0">
-                <a:solidFill>
-                  <a:srgbClr val="1F5C7A"/>
-                </a:solidFill>
-                <a:latin typeface="Century Gothic"/>
-                <a:cs typeface="Century Gothic"/>
-              </a:rPr>
-              <a:t>4.  </a:t>
-            </a:r>
+              <a:buClr>
+                <a:srgbClr val="1F5C7A"/>
+              </a:buClr>
+              <a:buFont typeface="Arial"/>
+              <a:buChar char="•"/>
+            </a:pPr>
             <a:r>
               <a:rPr lang="en-US" sz="1650" dirty="0">
                 <a:solidFill>
                   <a:srgbClr val="000000"/>
                 </a:solidFill>
-                <a:latin typeface="Century Gothic"/>
-                <a:cs typeface="Century Gothic"/>
+                <a:latin typeface="Arial"/>
+                <a:cs typeface="Arial"/>
               </a:rPr>
               <a:t>Read your group's results pack (Table 1 and figures) before Session 6</a:t>
             </a:r>
@@ -27560,8 +27308,8 @@
                 <a:solidFill>
                   <a:srgbClr val="1F5C7A"/>
                 </a:solidFill>
-                <a:latin typeface="Century Gothic"/>
-                <a:cs typeface="Century Gothic"/>
+                <a:latin typeface="Arial"/>
+                <a:cs typeface="Arial"/>
               </a:rPr>
               <a:t>Next Saturday: Session 6</a:t>
             </a:r>
@@ -27582,8 +27330,8 @@
                 <a:solidFill>
                   <a:srgbClr val="000000"/>
                 </a:solidFill>
-                <a:latin typeface="Century Gothic"/>
-                <a:cs typeface="Century Gothic"/>
+                <a:latin typeface="Arial"/>
+                <a:cs typeface="Arial"/>
               </a:rPr>
               <a:t>Confidence intervals, p-values</a:t>
             </a:r>
@@ -27604,8 +27352,8 @@
                 <a:solidFill>
                   <a:srgbClr val="000000"/>
                 </a:solidFill>
-                <a:latin typeface="Century Gothic"/>
-                <a:cs typeface="Century Gothic"/>
+                <a:latin typeface="Arial"/>
+                <a:cs typeface="Arial"/>
               </a:rPr>
               <a:t>Choosing a test</a:t>
             </a:r>
@@ -27626,8 +27374,8 @@
                 <a:solidFill>
                   <a:srgbClr val="000000"/>
                 </a:solidFill>
-                <a:latin typeface="Century Gothic"/>
-                <a:cs typeface="Century Gothic"/>
+                <a:latin typeface="Arial"/>
+                <a:cs typeface="Arial"/>
               </a:rPr>
               <a:t>Regression and survival</a:t>
             </a:r>
@@ -27648,8 +27396,8 @@
                 <a:solidFill>
                   <a:srgbClr val="000000"/>
                 </a:solidFill>
-                <a:latin typeface="Century Gothic"/>
-                <a:cs typeface="Century Gothic"/>
+                <a:latin typeface="Arial"/>
+                <a:cs typeface="Arial"/>
               </a:rPr>
               <a:t>Missing data</a:t>
             </a:r>
@@ -27670,8 +27418,8 @@
                 <a:solidFill>
                   <a:srgbClr val="000000"/>
                 </a:solidFill>
-                <a:latin typeface="Century Gothic"/>
-                <a:cs typeface="Century Gothic"/>
+                <a:latin typeface="Arial"/>
+                <a:cs typeface="Arial"/>
               </a:rPr>
               <a:t>Your dataset results</a:t>
             </a:r>
@@ -27717,8 +27465,8 @@
                 <a:solidFill>
                   <a:srgbClr val="1F5C7A"/>
                 </a:solidFill>
-                <a:latin typeface="Century Gothic"/>
-                <a:cs typeface="Century Gothic"/>
+                <a:latin typeface="Arial"/>
+                <a:cs typeface="Arial"/>
               </a:rPr>
               <a:t>OUTPUT   </a:t>
             </a:r>
@@ -27727,8 +27475,8 @@
                 <a:solidFill>
                   <a:srgbClr val="000000"/>
                 </a:solidFill>
-                <a:latin typeface="Century Gothic"/>
-                <a:cs typeface="Century Gothic"/>
+                <a:latin typeface="Arial"/>
+                <a:cs typeface="Arial"/>
               </a:rPr>
               <a:t>Exit sentence on a sticky note</a:t>
             </a:r>
@@ -27765,7 +27513,7 @@
                     <a:lumMod val="50000"/>
                   </a:schemeClr>
                 </a:solidFill>
-                <a:latin typeface="Verdana"/>
+                <a:latin typeface="Arial"/>
               </a:rPr>
               <a:t>Neudata | #ClearDataClearImpact</a:t>
             </a:r>
@@ -27895,8 +27643,8 @@
                 <a:solidFill>
                   <a:srgbClr val="0D7377"/>
                 </a:solidFill>
-                <a:latin typeface="Century Gothic"/>
-                <a:cs typeface="Century Gothic"/>
+                <a:latin typeface="Arial"/>
+                <a:cs typeface="Arial"/>
               </a:rPr>
               <a:t>Extra slides: Session 5</a:t>
             </a:r>
@@ -27965,8 +27713,8 @@
                 <a:solidFill>
                   <a:srgbClr val="0D7377"/>
                 </a:solidFill>
-                <a:latin typeface="Century Gothic"/>
-                <a:cs typeface="Century Gothic"/>
+                <a:latin typeface="Arial"/>
+                <a:cs typeface="Arial"/>
               </a:rPr>
               <a:t>Extra slides: use if time allows, or for self-study.</a:t>
             </a:r>
@@ -27983,8 +27731,8 @@
                 <a:solidFill>
                   <a:srgbClr val="595959"/>
                 </a:solidFill>
-                <a:latin typeface="Century Gothic"/>
-                <a:cs typeface="Century Gothic"/>
+                <a:latin typeface="Arial"/>
+                <a:cs typeface="Arial"/>
               </a:rPr>
               <a:t>Not needed to follow Session 6</a:t>
             </a:r>
@@ -28021,7 +27769,7 @@
                     <a:lumMod val="50000"/>
                   </a:schemeClr>
                 </a:solidFill>
-                <a:latin typeface="Verdana"/>
+                <a:latin typeface="Arial"/>
               </a:rPr>
               <a:t>Neudata | #ClearDataClearImpact</a:t>
             </a:r>
@@ -28151,8 +27899,8 @@
                 <a:solidFill>
                   <a:srgbClr val="0D7377"/>
                 </a:solidFill>
-                <a:latin typeface="Century Gothic"/>
-                <a:cs typeface="Century Gothic"/>
+                <a:latin typeface="Arial"/>
+                <a:cs typeface="Arial"/>
               </a:rPr>
               <a:t>Extra: Coding, versions, backups and data sharing</a:t>
             </a:r>
@@ -28218,8 +27966,8 @@
                 <a:solidFill>
                   <a:srgbClr val="595959"/>
                 </a:solidFill>
-                <a:latin typeface="Century Gothic"/>
-                <a:cs typeface="Century Gothic"/>
+                <a:latin typeface="Arial"/>
+                <a:cs typeface="Arial"/>
               </a:rPr>
               <a:t>Four habits that protect your data and your future paper.</a:t>
             </a:r>
@@ -28261,8 +28009,8 @@
                 <a:solidFill>
                   <a:srgbClr val="FFFFFF"/>
                 </a:solidFill>
-                <a:latin typeface="Century Gothic"/>
-                <a:cs typeface="Century Gothic"/>
+                <a:latin typeface="Arial"/>
+                <a:cs typeface="Arial"/>
               </a:rPr>
               <a:t>Coding</a:t>
             </a:r>
@@ -28310,8 +28058,8 @@
                 <a:solidFill>
                   <a:srgbClr val="000000"/>
                 </a:solidFill>
-                <a:latin typeface="Century Gothic"/>
-                <a:cs typeface="Century Gothic"/>
+                <a:latin typeface="Arial"/>
+                <a:cs typeface="Arial"/>
               </a:rPr>
               <a:t>Codes, not free text</a:t>
             </a:r>
@@ -28331,8 +28079,8 @@
                 <a:solidFill>
                   <a:srgbClr val="000000"/>
                 </a:solidFill>
-                <a:latin typeface="Century Gothic"/>
-                <a:cs typeface="Century Gothic"/>
+                <a:latin typeface="Arial"/>
+                <a:cs typeface="Arial"/>
               </a:rPr>
               <a:t>Study ID, not names</a:t>
             </a:r>
@@ -28352,8 +28100,8 @@
                 <a:solidFill>
                   <a:srgbClr val="000000"/>
                 </a:solidFill>
-                <a:latin typeface="Century Gothic"/>
-                <a:cs typeface="Century Gothic"/>
+                <a:latin typeface="Arial"/>
+                <a:cs typeface="Arial"/>
               </a:rPr>
               <a:t>Codes in the dictionary</a:t>
             </a:r>
@@ -28395,8 +28143,8 @@
                 <a:solidFill>
                   <a:srgbClr val="FFFFFF"/>
                 </a:solidFill>
-                <a:latin typeface="Century Gothic"/>
-                <a:cs typeface="Century Gothic"/>
+                <a:latin typeface="Arial"/>
+                <a:cs typeface="Arial"/>
               </a:rPr>
               <a:t>Versions</a:t>
             </a:r>
@@ -28444,8 +28192,8 @@
                 <a:solidFill>
                   <a:srgbClr val="000000"/>
                 </a:solidFill>
-                <a:latin typeface="Century Gothic"/>
-                <a:cs typeface="Century Gothic"/>
+                <a:latin typeface="Arial"/>
+                <a:cs typeface="Arial"/>
               </a:rPr>
               <a:t>Raw file: read-only</a:t>
             </a:r>
@@ -28465,8 +28213,8 @@
                 <a:solidFill>
                   <a:srgbClr val="000000"/>
                 </a:solidFill>
-                <a:latin typeface="Century Gothic"/>
-                <a:cs typeface="Century Gothic"/>
+                <a:latin typeface="Arial"/>
+                <a:cs typeface="Arial"/>
               </a:rPr>
               <a:t>Dated copies:</a:t>
             </a:r>
@@ -28486,8 +28234,8 @@
                 <a:solidFill>
                   <a:srgbClr val="000000"/>
                 </a:solidFill>
-                <a:latin typeface="Century Gothic"/>
-                <a:cs typeface="Century Gothic"/>
+                <a:latin typeface="Arial"/>
+                <a:cs typeface="Arial"/>
               </a:rPr>
               <a:t>data_2026-03-12_v2</a:t>
             </a:r>
@@ -28529,8 +28277,8 @@
                 <a:solidFill>
                   <a:srgbClr val="FFFFFF"/>
                 </a:solidFill>
-                <a:latin typeface="Century Gothic"/>
-                <a:cs typeface="Century Gothic"/>
+                <a:latin typeface="Arial"/>
+                <a:cs typeface="Arial"/>
               </a:rPr>
               <a:t>Backups</a:t>
             </a:r>
@@ -28578,8 +28326,8 @@
                 <a:solidFill>
                   <a:srgbClr val="000000"/>
                 </a:solidFill>
-                <a:latin typeface="Century Gothic"/>
-                <a:cs typeface="Century Gothic"/>
+                <a:latin typeface="Arial"/>
+                <a:cs typeface="Arial"/>
               </a:rPr>
               <a:t>3 copies, 2 media,</a:t>
             </a:r>
@@ -28599,8 +28347,8 @@
                 <a:solidFill>
                   <a:srgbClr val="000000"/>
                 </a:solidFill>
-                <a:latin typeface="Century Gothic"/>
-                <a:cs typeface="Century Gothic"/>
+                <a:latin typeface="Arial"/>
+                <a:cs typeface="Arial"/>
               </a:rPr>
               <a:t>1 off-site (encrypted)</a:t>
             </a:r>
@@ -28620,8 +28368,8 @@
                 <a:solidFill>
                   <a:srgbClr val="000000"/>
                 </a:solidFill>
-                <a:latin typeface="Century Gothic"/>
-                <a:cs typeface="Century Gothic"/>
+                <a:latin typeface="Arial"/>
+                <a:cs typeface="Arial"/>
               </a:rPr>
               <a:t>Test a restore</a:t>
             </a:r>
@@ -28663,8 +28411,8 @@
                 <a:solidFill>
                   <a:srgbClr val="FFFFFF"/>
                 </a:solidFill>
-                <a:latin typeface="Century Gothic"/>
-                <a:cs typeface="Century Gothic"/>
+                <a:latin typeface="Arial"/>
+                <a:cs typeface="Arial"/>
               </a:rPr>
               <a:t>Data sharing</a:t>
             </a:r>
@@ -28712,8 +28460,8 @@
                 <a:solidFill>
                   <a:srgbClr val="000000"/>
                 </a:solidFill>
-                <a:latin typeface="Century Gothic"/>
-                <a:cs typeface="Century Gothic"/>
+                <a:latin typeface="Arial"/>
+                <a:cs typeface="Arial"/>
               </a:rPr>
               <a:t>Journals ask for a</a:t>
             </a:r>
@@ -28733,8 +28481,8 @@
                 <a:solidFill>
                   <a:srgbClr val="000000"/>
                 </a:solidFill>
-                <a:latin typeface="Century Gothic"/>
-                <a:cs typeface="Century Gothic"/>
+                <a:latin typeface="Arial"/>
+                <a:cs typeface="Arial"/>
               </a:rPr>
               <a:t>data-sharing statement</a:t>
             </a:r>
@@ -28754,8 +28502,8 @@
                 <a:solidFill>
                   <a:srgbClr val="000000"/>
                 </a:solidFill>
-                <a:latin typeface="Century Gothic"/>
-                <a:cs typeface="Century Gothic"/>
+                <a:latin typeface="Arial"/>
+                <a:cs typeface="Arial"/>
               </a:rPr>
               <a:t>Plan it at the start</a:t>
             </a:r>
@@ -28799,8 +28547,8 @@
                 <a:solidFill>
                   <a:srgbClr val="FFFFFF"/>
                 </a:solidFill>
-                <a:latin typeface="Century Gothic"/>
-                <a:cs typeface="Century Gothic"/>
+                <a:latin typeface="Arial"/>
+                <a:cs typeface="Arial"/>
               </a:rPr>
               <a:t>KEY MESSAGE   </a:t>
             </a:r>
@@ -28809,8 +28557,8 @@
                 <a:solidFill>
                   <a:srgbClr val="FFFFFF"/>
                 </a:solidFill>
-                <a:latin typeface="Century Gothic"/>
-                <a:cs typeface="Century Gothic"/>
+                <a:latin typeface="Arial"/>
+                <a:cs typeface="Arial"/>
               </a:rPr>
               <a:t>Never edit the raw file: keep it, copy it, date it, back it up.</a:t>
             </a:r>
@@ -28847,7 +28595,7 @@
                     <a:lumMod val="50000"/>
                   </a:schemeClr>
                 </a:solidFill>
-                <a:latin typeface="Verdana"/>
+                <a:latin typeface="Arial"/>
               </a:rPr>
               <a:t>Neudata | #ClearDataClearImpact</a:t>
             </a:r>
@@ -28977,8 +28725,8 @@
                 <a:solidFill>
                   <a:srgbClr val="0D7377"/>
                 </a:solidFill>
-                <a:latin typeface="Century Gothic"/>
-                <a:cs typeface="Century Gothic"/>
+                <a:latin typeface="Arial"/>
+                <a:cs typeface="Arial"/>
               </a:rPr>
               <a:t>Extra: Three more chart crimes, and how to fix them</a:t>
             </a:r>
@@ -29074,8 +28822,8 @@
                 <a:solidFill>
                   <a:srgbClr val="FFFFFF"/>
                 </a:solidFill>
-                <a:latin typeface="Century Gothic"/>
-                <a:cs typeface="Century Gothic"/>
+                <a:latin typeface="Arial"/>
+                <a:cs typeface="Arial"/>
               </a:rPr>
               <a:t>KEY MESSAGE   </a:t>
             </a:r>
@@ -29084,8 +28832,8 @@
                 <a:solidFill>
                   <a:srgbClr val="FFFFFF"/>
                 </a:solidFill>
-                <a:latin typeface="Century Gothic"/>
-                <a:cs typeface="Century Gothic"/>
+                <a:latin typeface="Arial"/>
+                <a:cs typeface="Arial"/>
               </a:rPr>
               <a:t>Bars start at zero, one axis per graph, and no 3-D effects.</a:t>
             </a:r>
@@ -29122,7 +28870,7 @@
                     <a:lumMod val="50000"/>
                   </a:schemeClr>
                 </a:solidFill>
-                <a:latin typeface="Verdana"/>
+                <a:latin typeface="Arial"/>
               </a:rPr>
               <a:t>Neudata | #ClearDataClearImpact</a:t>
             </a:r>
@@ -29276,8 +29024,8 @@
                 <a:solidFill>
                   <a:srgbClr val="4472C4"/>
                 </a:solidFill>
-                <a:latin typeface="Century Gothic"/>
-                <a:cs typeface="Century Gothic"/>
+                <a:latin typeface="Arial"/>
+                <a:cs typeface="Arial"/>
               </a:rPr>
               <a:t>Copyright © Neudata, 2026</a:t>
             </a:r>
@@ -29422,7 +29170,7 @@
                     <a:lumMod val="50000"/>
                   </a:schemeClr>
                 </a:solidFill>
-                <a:latin typeface="Verdana"/>
+                <a:latin typeface="Arial"/>
               </a:rPr>
               <a:t>Neudata | #ClearDataClearImpact</a:t>
             </a:r>
@@ -29528,8 +29276,8 @@
                 <a:solidFill>
                   <a:srgbClr val="0D7377"/>
                 </a:solidFill>
-                <a:latin typeface="Century Gothic"/>
-                <a:cs typeface="Century Gothic"/>
+                <a:latin typeface="Arial"/>
+                <a:cs typeface="Arial"/>
               </a:rPr>
               <a:t>Check your understanding: what type of variable?</a:t>
             </a:r>
@@ -29599,8 +29347,8 @@
                 <a:solidFill>
                   <a:srgbClr val="FFFFFF"/>
                 </a:solidFill>
-                <a:latin typeface="Century Gothic"/>
-                <a:cs typeface="Century Gothic"/>
+                <a:latin typeface="Arial"/>
+                <a:cs typeface="Arial"/>
               </a:rPr>
               <a:t>QUICK QUIZ   |   3 min</a:t>
             </a:r>
@@ -29637,25 +29385,19 @@
               <a:spcBef>
                 <a:spcPts val="450"/>
               </a:spcBef>
-              <a:buNone/>
-            </a:pPr>
-            <a:r>
-              <a:rPr lang="en-US" sz="1650" b="1" dirty="0">
-                <a:solidFill>
-                  <a:srgbClr val="6C3483"/>
-                </a:solidFill>
-                <a:latin typeface="Century Gothic"/>
-                <a:cs typeface="Century Gothic"/>
-              </a:rPr>
-              <a:t>1.  </a:t>
-            </a:r>
+              <a:buClr>
+                <a:srgbClr val="6C3483"/>
+              </a:buClr>
+              <a:buFont typeface="Arial"/>
+              <a:buChar char="•"/>
+            </a:pPr>
             <a:r>
               <a:rPr lang="en-US" sz="1650" dirty="0">
                 <a:solidFill>
                   <a:srgbClr val="000000"/>
                 </a:solidFill>
-                <a:latin typeface="Century Gothic"/>
-                <a:cs typeface="Century Gothic"/>
+                <a:latin typeface="Arial"/>
+                <a:cs typeface="Arial"/>
               </a:rPr>
               <a:t>Heart rate (beats per minute)</a:t>
             </a:r>
@@ -29668,25 +29410,19 @@
               <a:spcBef>
                 <a:spcPts val="450"/>
               </a:spcBef>
-              <a:buNone/>
-            </a:pPr>
-            <a:r>
-              <a:rPr lang="en-US" sz="1650" b="1" dirty="0">
-                <a:solidFill>
-                  <a:srgbClr val="6C3483"/>
-                </a:solidFill>
-                <a:latin typeface="Century Gothic"/>
-                <a:cs typeface="Century Gothic"/>
-              </a:rPr>
-              <a:t>2.  </a:t>
-            </a:r>
+              <a:buClr>
+                <a:srgbClr val="6C3483"/>
+              </a:buClr>
+              <a:buFont typeface="Arial"/>
+              <a:buChar char="•"/>
+            </a:pPr>
             <a:r>
               <a:rPr lang="en-US" sz="1650" dirty="0">
                 <a:solidFill>
                   <a:srgbClr val="000000"/>
                 </a:solidFill>
-                <a:latin typeface="Century Gothic"/>
-                <a:cs typeface="Century Gothic"/>
+                <a:latin typeface="Arial"/>
+                <a:cs typeface="Arial"/>
               </a:rPr>
               <a:t>Glasgow Coma Scale (3-15)</a:t>
             </a:r>
@@ -29699,25 +29435,19 @@
               <a:spcBef>
                 <a:spcPts val="450"/>
               </a:spcBef>
-              <a:buNone/>
-            </a:pPr>
-            <a:r>
-              <a:rPr lang="en-US" sz="1650" b="1" dirty="0">
-                <a:solidFill>
-                  <a:srgbClr val="6C3483"/>
-                </a:solidFill>
-                <a:latin typeface="Century Gothic"/>
-                <a:cs typeface="Century Gothic"/>
-              </a:rPr>
-              <a:t>3.  </a:t>
-            </a:r>
+              <a:buClr>
+                <a:srgbClr val="6C3483"/>
+              </a:buClr>
+              <a:buFont typeface="Arial"/>
+              <a:buChar char="•"/>
+            </a:pPr>
             <a:r>
               <a:rPr lang="en-US" sz="1650" dirty="0">
                 <a:solidFill>
                   <a:srgbClr val="000000"/>
                 </a:solidFill>
-                <a:latin typeface="Century Gothic"/>
-                <a:cs typeface="Century Gothic"/>
+                <a:latin typeface="Arial"/>
+                <a:cs typeface="Arial"/>
               </a:rPr>
               <a:t>Blood group (A, B, AB, O)</a:t>
             </a:r>
@@ -29730,25 +29460,19 @@
               <a:spcBef>
                 <a:spcPts val="450"/>
               </a:spcBef>
-              <a:buNone/>
-            </a:pPr>
-            <a:r>
-              <a:rPr lang="en-US" sz="1650" b="1" dirty="0">
-                <a:solidFill>
-                  <a:srgbClr val="6C3483"/>
-                </a:solidFill>
-                <a:latin typeface="Century Gothic"/>
-                <a:cs typeface="Century Gothic"/>
-              </a:rPr>
-              <a:t>4.  </a:t>
-            </a:r>
+              <a:buClr>
+                <a:srgbClr val="6C3483"/>
+              </a:buClr>
+              <a:buFont typeface="Arial"/>
+              <a:buChar char="•"/>
+            </a:pPr>
             <a:r>
               <a:rPr lang="en-US" sz="1650" dirty="0">
                 <a:solidFill>
                   <a:srgbClr val="000000"/>
                 </a:solidFill>
-                <a:latin typeface="Century Gothic"/>
-                <a:cs typeface="Century Gothic"/>
+                <a:latin typeface="Arial"/>
+                <a:cs typeface="Arial"/>
               </a:rPr>
               <a:t>Ventilated on day 1 (yes / no)</a:t>
             </a:r>
@@ -29761,25 +29485,19 @@
               <a:spcBef>
                 <a:spcPts val="450"/>
               </a:spcBef>
-              <a:buNone/>
-            </a:pPr>
-            <a:r>
-              <a:rPr lang="en-US" sz="1650" b="1" dirty="0">
-                <a:solidFill>
-                  <a:srgbClr val="6C3483"/>
-                </a:solidFill>
-                <a:latin typeface="Century Gothic"/>
-                <a:cs typeface="Century Gothic"/>
-              </a:rPr>
-              <a:t>5.  </a:t>
-            </a:r>
+              <a:buClr>
+                <a:srgbClr val="6C3483"/>
+              </a:buClr>
+              <a:buFont typeface="Arial"/>
+              <a:buChar char="•"/>
+            </a:pPr>
             <a:r>
               <a:rPr lang="en-US" sz="1650" dirty="0">
                 <a:solidFill>
                   <a:srgbClr val="000000"/>
                 </a:solidFill>
-                <a:latin typeface="Century Gothic"/>
-                <a:cs typeface="Century Gothic"/>
+                <a:latin typeface="Arial"/>
+                <a:cs typeface="Arial"/>
               </a:rPr>
               <a:t>Time from ICU admission to extubation</a:t>
             </a:r>
@@ -29823,8 +29541,8 @@
                 <a:solidFill>
                   <a:srgbClr val="6C3483"/>
                 </a:solidFill>
-                <a:latin typeface="Century Gothic"/>
-                <a:cs typeface="Century Gothic"/>
+                <a:latin typeface="Arial"/>
+                <a:cs typeface="Arial"/>
               </a:rPr>
               <a:t>Answers</a:t>
             </a:r>
@@ -29845,8 +29563,8 @@
                 <a:solidFill>
                   <a:srgbClr val="000000"/>
                 </a:solidFill>
-                <a:latin typeface="Century Gothic"/>
-                <a:cs typeface="Century Gothic"/>
+                <a:latin typeface="Arial"/>
+                <a:cs typeface="Arial"/>
               </a:rPr>
               <a:t>Continuous</a:t>
             </a:r>
@@ -29867,8 +29585,8 @@
                 <a:solidFill>
                   <a:srgbClr val="000000"/>
                 </a:solidFill>
-                <a:latin typeface="Century Gothic"/>
-                <a:cs typeface="Century Gothic"/>
+                <a:latin typeface="Arial"/>
+                <a:cs typeface="Arial"/>
               </a:rPr>
               <a:t>Ordinal (often analysed as a number)</a:t>
             </a:r>
@@ -29889,8 +29607,8 @@
                 <a:solidFill>
                   <a:srgbClr val="000000"/>
                 </a:solidFill>
-                <a:latin typeface="Century Gothic"/>
-                <a:cs typeface="Century Gothic"/>
+                <a:latin typeface="Arial"/>
+                <a:cs typeface="Arial"/>
               </a:rPr>
               <a:t>Nominal</a:t>
             </a:r>
@@ -29911,8 +29629,8 @@
                 <a:solidFill>
                   <a:srgbClr val="000000"/>
                 </a:solidFill>
-                <a:latin typeface="Century Gothic"/>
-                <a:cs typeface="Century Gothic"/>
+                <a:latin typeface="Arial"/>
+                <a:cs typeface="Arial"/>
               </a:rPr>
               <a:t>Binary</a:t>
             </a:r>
@@ -29933,8 +29651,8 @@
                 <a:solidFill>
                   <a:srgbClr val="000000"/>
                 </a:solidFill>
-                <a:latin typeface="Century Gothic"/>
-                <a:cs typeface="Century Gothic"/>
+                <a:latin typeface="Arial"/>
+                <a:cs typeface="Arial"/>
               </a:rPr>
               <a:t>Time-to-event (some never extubated)</a:t>
             </a:r>
@@ -29980,8 +29698,8 @@
                 <a:solidFill>
                   <a:srgbClr val="6C3483"/>
                 </a:solidFill>
-                <a:latin typeface="Century Gothic"/>
-                <a:cs typeface="Century Gothic"/>
+                <a:latin typeface="Arial"/>
+                <a:cs typeface="Arial"/>
               </a:rPr>
               <a:t>OUTPUT   </a:t>
             </a:r>
@@ -29990,8 +29708,8 @@
                 <a:solidFill>
                   <a:srgbClr val="000000"/>
                 </a:solidFill>
-                <a:latin typeface="Century Gothic"/>
-                <a:cs typeface="Century Gothic"/>
+                <a:latin typeface="Arial"/>
+                <a:cs typeface="Arial"/>
               </a:rPr>
               <a:t>Everyone can name the five variable types</a:t>
             </a:r>
@@ -30028,7 +29746,7 @@
                     <a:lumMod val="50000"/>
                   </a:schemeClr>
                 </a:solidFill>
-                <a:latin typeface="Verdana"/>
+                <a:latin typeface="Arial"/>
               </a:rPr>
               <a:t>Neudata | #ClearDataClearImpact</a:t>
             </a:r>
@@ -30158,8 +29876,8 @@
                 <a:solidFill>
                   <a:srgbClr val="0D7377"/>
                 </a:solidFill>
-                <a:latin typeface="Century Gothic"/>
-                <a:cs typeface="Century Gothic"/>
+                <a:latin typeface="Arial"/>
+                <a:cs typeface="Arial"/>
               </a:rPr>
               <a:t>Good vs bad CRF items</a:t>
             </a:r>
@@ -30225,8 +29943,8 @@
                 <a:solidFill>
                   <a:srgbClr val="595959"/>
                 </a:solidFill>
-                <a:latin typeface="Century Gothic"/>
-                <a:cs typeface="Century Gothic"/>
+                <a:latin typeface="Arial"/>
+                <a:cs typeface="Arial"/>
               </a:rPr>
               <a:t>A case report form (CRF) question must have only one possible reading.</a:t>
             </a:r>
@@ -30288,8 +30006,8 @@
                 <a:solidFill>
                   <a:srgbClr val="595959"/>
                 </a:solidFill>
-                <a:latin typeface="Century Gothic"/>
-                <a:cs typeface="Century Gothic"/>
+                <a:latin typeface="Arial"/>
+                <a:cs typeface="Arial"/>
               </a:rPr>
               <a:t>Ambiguous: two nurses will write two different things</a:t>
             </a:r>
@@ -30351,8 +30069,8 @@
                 <a:solidFill>
                   <a:srgbClr val="595959"/>
                 </a:solidFill>
-                <a:latin typeface="Century Gothic"/>
-                <a:cs typeface="Century Gothic"/>
+                <a:latin typeface="Arial"/>
+                <a:cs typeface="Arial"/>
               </a:rPr>
               <a:t>Clear: unit, time window, one answer, 'unknown'</a:t>
             </a:r>
@@ -30389,7 +30107,7 @@
                     <a:lumMod val="50000"/>
                   </a:schemeClr>
                 </a:solidFill>
-                <a:latin typeface="Verdana"/>
+                <a:latin typeface="Arial"/>
               </a:rPr>
               <a:t>Neudata | #ClearDataClearImpact</a:t>
             </a:r>
@@ -30519,8 +30237,8 @@
                 <a:solidFill>
                   <a:srgbClr val="0D7377"/>
                 </a:solidFill>
-                <a:latin typeface="Century Gothic"/>
-                <a:cs typeface="Century Gothic"/>
+                <a:latin typeface="Arial"/>
+                <a:cs typeface="Arial"/>
               </a:rPr>
               <a:t>Worked example: from a question to one CRF item</a:t>
             </a:r>
@@ -30586,8 +30304,8 @@
                 <a:solidFill>
                   <a:srgbClr val="595959"/>
                 </a:solidFill>
-                <a:latin typeface="Century Gothic"/>
-                <a:cs typeface="Century Gothic"/>
+                <a:latin typeface="Arial"/>
+                <a:cs typeface="Arial"/>
               </a:rPr>
               <a:t>The outcome 'cumulative fluid balance' in five decisions.</a:t>
             </a:r>
@@ -30631,8 +30349,8 @@
                 <a:solidFill>
                   <a:srgbClr val="FFFFFF"/>
                 </a:solidFill>
-                <a:latin typeface="Century Gothic"/>
-                <a:cs typeface="Century Gothic"/>
+                <a:latin typeface="Arial"/>
+                <a:cs typeface="Arial"/>
               </a:rPr>
               <a:t>What?</a:t>
             </a:r>
@@ -30680,8 +30398,8 @@
                 <a:solidFill>
                   <a:srgbClr val="000000"/>
                 </a:solidFill>
-                <a:latin typeface="Century Gothic"/>
-                <a:cs typeface="Century Gothic"/>
+                <a:latin typeface="Arial"/>
+                <a:cs typeface="Arial"/>
               </a:rPr>
               <a:t>Fluid IN minus fluid OUT</a:t>
             </a:r>
@@ -30701,8 +30419,8 @@
                 <a:solidFill>
                   <a:srgbClr val="000000"/>
                 </a:solidFill>
-                <a:latin typeface="Century Gothic"/>
-                <a:cs typeface="Century Gothic"/>
+                <a:latin typeface="Arial"/>
+                <a:cs typeface="Arial"/>
               </a:rPr>
               <a:t>all routes, incl. drugs</a:t>
             </a:r>
@@ -30746,8 +30464,8 @@
                 <a:solidFill>
                   <a:srgbClr val="FFFFFF"/>
                 </a:solidFill>
-                <a:latin typeface="Century Gothic"/>
-                <a:cs typeface="Century Gothic"/>
+                <a:latin typeface="Arial"/>
+                <a:cs typeface="Arial"/>
               </a:rPr>
               <a:t>When?</a:t>
             </a:r>
@@ -30795,8 +30513,8 @@
                 <a:solidFill>
                   <a:srgbClr val="000000"/>
                 </a:solidFill>
-                <a:latin typeface="Century Gothic"/>
-                <a:cs typeface="Century Gothic"/>
+                <a:latin typeface="Arial"/>
+                <a:cs typeface="Arial"/>
               </a:rPr>
               <a:t>From ICU admission</a:t>
             </a:r>
@@ -30816,8 +30534,8 @@
                 <a:solidFill>
                   <a:srgbClr val="000000"/>
                 </a:solidFill>
-                <a:latin typeface="Century Gothic"/>
-                <a:cs typeface="Century Gothic"/>
+                <a:latin typeface="Arial"/>
+                <a:cs typeface="Arial"/>
               </a:rPr>
               <a:t>to the end of day 3</a:t>
             </a:r>
@@ -30861,8 +30579,8 @@
                 <a:solidFill>
                   <a:srgbClr val="FFFFFF"/>
                 </a:solidFill>
-                <a:latin typeface="Century Gothic"/>
-                <a:cs typeface="Century Gothic"/>
+                <a:latin typeface="Arial"/>
+                <a:cs typeface="Arial"/>
               </a:rPr>
               <a:t>Unit?</a:t>
             </a:r>
@@ -30910,8 +30628,8 @@
                 <a:solidFill>
                   <a:srgbClr val="000000"/>
                 </a:solidFill>
-                <a:latin typeface="Century Gothic"/>
-                <a:cs typeface="Century Gothic"/>
+                <a:latin typeface="Arial"/>
+                <a:cs typeface="Arial"/>
               </a:rPr>
               <a:t>ml per kg of</a:t>
             </a:r>
@@ -30931,8 +30649,8 @@
                 <a:solidFill>
                   <a:srgbClr val="000000"/>
                 </a:solidFill>
-                <a:latin typeface="Century Gothic"/>
-                <a:cs typeface="Century Gothic"/>
+                <a:latin typeface="Arial"/>
+                <a:cs typeface="Arial"/>
               </a:rPr>
               <a:t>admission weight</a:t>
             </a:r>
@@ -30976,8 +30694,8 @@
                 <a:solidFill>
                   <a:srgbClr val="FFFFFF"/>
                 </a:solidFill>
-                <a:latin typeface="Century Gothic"/>
-                <a:cs typeface="Century Gothic"/>
+                <a:latin typeface="Arial"/>
+                <a:cs typeface="Arial"/>
               </a:rPr>
               <a:t>Format?</a:t>
             </a:r>
@@ -31025,8 +30743,8 @@
                 <a:solidFill>
                   <a:srgbClr val="000000"/>
                 </a:solidFill>
-                <a:latin typeface="Century Gothic"/>
-                <a:cs typeface="Century Gothic"/>
+                <a:latin typeface="Arial"/>
+                <a:cs typeface="Arial"/>
               </a:rPr>
               <a:t>Number with +/- sign</a:t>
             </a:r>
@@ -31046,8 +30764,8 @@
                 <a:solidFill>
                   <a:srgbClr val="000000"/>
                 </a:solidFill>
-                <a:latin typeface="Century Gothic"/>
-                <a:cs typeface="Century Gothic"/>
+                <a:latin typeface="Arial"/>
+                <a:cs typeface="Arial"/>
               </a:rPr>
               <a:t>boxes for digits</a:t>
             </a:r>
@@ -31091,8 +30809,8 @@
                 <a:solidFill>
                   <a:srgbClr val="FFFFFF"/>
                 </a:solidFill>
-                <a:latin typeface="Century Gothic"/>
-                <a:cs typeface="Century Gothic"/>
+                <a:latin typeface="Arial"/>
+                <a:cs typeface="Arial"/>
               </a:rPr>
               <a:t>Missing?</a:t>
             </a:r>
@@ -31140,8 +30858,8 @@
                 <a:solidFill>
                   <a:srgbClr val="000000"/>
                 </a:solidFill>
-                <a:latin typeface="Century Gothic"/>
-                <a:cs typeface="Century Gothic"/>
+                <a:latin typeface="Arial"/>
+                <a:cs typeface="Arial"/>
               </a:rPr>
               <a:t>'Not recorded' box</a:t>
             </a:r>
@@ -31161,8 +30879,8 @@
                 <a:solidFill>
                   <a:srgbClr val="000000"/>
                 </a:solidFill>
-                <a:latin typeface="Century Gothic"/>
-                <a:cs typeface="Century Gothic"/>
+                <a:latin typeface="Arial"/>
+                <a:cs typeface="Arial"/>
               </a:rPr>
               <a:t>+ reason</a:t>
             </a:r>
@@ -31206,8 +30924,8 @@
                 <a:solidFill>
                   <a:srgbClr val="FFFFFF"/>
                 </a:solidFill>
-                <a:latin typeface="Century Gothic"/>
-                <a:cs typeface="Century Gothic"/>
+                <a:latin typeface="Arial"/>
+                <a:cs typeface="Arial"/>
               </a:rPr>
               <a:t>KEY MESSAGE   </a:t>
             </a:r>
@@ -31216,8 +30934,8 @@
                 <a:solidFill>
                   <a:srgbClr val="FFFFFF"/>
                 </a:solidFill>
-                <a:latin typeface="Century Gothic"/>
-                <a:cs typeface="Century Gothic"/>
+                <a:latin typeface="Arial"/>
+                <a:cs typeface="Arial"/>
               </a:rPr>
               <a:t>Answer what, when, unit, format and missing before the first patient.</a:t>
             </a:r>
@@ -31254,7 +30972,7 @@
                     <a:lumMod val="50000"/>
                   </a:schemeClr>
                 </a:solidFill>
-                <a:latin typeface="Verdana"/>
+                <a:latin typeface="Arial"/>
               </a:rPr>
               <a:t>Neudata | #ClearDataClearImpact</a:t>
             </a:r>
@@ -31384,8 +31102,8 @@
                 <a:solidFill>
                   <a:srgbClr val="0D7377"/>
                 </a:solidFill>
-                <a:latin typeface="Century Gothic"/>
-                <a:cs typeface="Century Gothic"/>
+                <a:latin typeface="Arial"/>
+                <a:cs typeface="Arial"/>
               </a:rPr>
               <a:t>Five rules for a good CRF</a:t>
             </a:r>
@@ -31451,8 +31169,8 @@
                 <a:solidFill>
                   <a:srgbClr val="595959"/>
                 </a:solidFill>
-                <a:latin typeface="Century Gothic"/>
-                <a:cs typeface="Century Gothic"/>
+                <a:latin typeface="Arial"/>
+                <a:cs typeface="Arial"/>
               </a:rPr>
               <a:t>Write the form before the first patient, then test it on five patients.</a:t>
             </a:r>
@@ -31494,8 +31212,8 @@
                 <a:solidFill>
                   <a:srgbClr val="FFFFFF"/>
                 </a:solidFill>
-                <a:latin typeface="Century Gothic"/>
-                <a:cs typeface="Century Gothic"/>
+                <a:latin typeface="Arial"/>
+                <a:cs typeface="Arial"/>
               </a:rPr>
               <a:t>Only what you need</a:t>
             </a:r>
@@ -31543,8 +31261,8 @@
                 <a:solidFill>
                   <a:srgbClr val="000000"/>
                 </a:solidFill>
-                <a:latin typeface="Century Gothic"/>
-                <a:cs typeface="Century Gothic"/>
+                <a:latin typeface="Arial"/>
+                <a:cs typeface="Arial"/>
               </a:rPr>
               <a:t>Every item links to an objective</a:t>
             </a:r>
@@ -31564,8 +31282,8 @@
                 <a:solidFill>
                   <a:srgbClr val="000000"/>
                 </a:solidFill>
-                <a:latin typeface="Century Gothic"/>
-                <a:cs typeface="Century Gothic"/>
+                <a:latin typeface="Arial"/>
+                <a:cs typeface="Arial"/>
               </a:rPr>
               <a:t>Short forms get completed</a:t>
             </a:r>
@@ -31607,8 +31325,8 @@
                 <a:solidFill>
                   <a:srgbClr val="FFFFFF"/>
                 </a:solidFill>
-                <a:latin typeface="Century Gothic"/>
-                <a:cs typeface="Century Gothic"/>
+                <a:latin typeface="Arial"/>
+                <a:cs typeface="Arial"/>
               </a:rPr>
               <a:t>One question, one answer</a:t>
             </a:r>
@@ -31656,8 +31374,8 @@
                 <a:solidFill>
                   <a:srgbClr val="000000"/>
                 </a:solidFill>
-                <a:latin typeface="Century Gothic"/>
-                <a:cs typeface="Century Gothic"/>
+                <a:latin typeface="Arial"/>
+                <a:cs typeface="Arial"/>
               </a:rPr>
               <a:t>No double questions</a:t>
             </a:r>
@@ -31677,8 +31395,8 @@
                 <a:solidFill>
                   <a:srgbClr val="000000"/>
                 </a:solidFill>
-                <a:latin typeface="Century Gothic"/>
-                <a:cs typeface="Century Gothic"/>
+                <a:latin typeface="Arial"/>
+                <a:cs typeface="Arial"/>
               </a:rPr>
               <a:t>Objective, not opinion</a:t>
             </a:r>
@@ -31720,8 +31438,8 @@
                 <a:solidFill>
                   <a:srgbClr val="FFFFFF"/>
                 </a:solidFill>
-                <a:latin typeface="Century Gothic"/>
-                <a:cs typeface="Century Gothic"/>
+                <a:latin typeface="Arial"/>
+                <a:cs typeface="Arial"/>
               </a:rPr>
               <a:t>Units and timing</a:t>
             </a:r>
@@ -31769,8 +31487,8 @@
                 <a:solidFill>
                   <a:srgbClr val="000000"/>
                 </a:solidFill>
-                <a:latin typeface="Century Gothic"/>
-                <a:cs typeface="Century Gothic"/>
+                <a:latin typeface="Arial"/>
+                <a:cs typeface="Arial"/>
               </a:rPr>
               <a:t>ml/kg, mmol/L</a:t>
             </a:r>
@@ -31790,8 +31508,8 @@
                 <a:solidFill>
                   <a:srgbClr val="000000"/>
                 </a:solidFill>
-                <a:latin typeface="Century Gothic"/>
-                <a:cs typeface="Century Gothic"/>
+                <a:latin typeface="Arial"/>
+                <a:cs typeface="Arial"/>
               </a:rPr>
               <a:t>'at ICU admission', 'day 5'</a:t>
             </a:r>
@@ -31833,8 +31551,8 @@
                 <a:solidFill>
                   <a:srgbClr val="FFFFFF"/>
                 </a:solidFill>
-                <a:latin typeface="Century Gothic"/>
-                <a:cs typeface="Century Gothic"/>
+                <a:latin typeface="Arial"/>
+                <a:cs typeface="Arial"/>
               </a:rPr>
               <a:t>Closed answers</a:t>
             </a:r>
@@ -31882,8 +31600,8 @@
                 <a:solidFill>
                   <a:srgbClr val="000000"/>
                 </a:solidFill>
-                <a:latin typeface="Century Gothic"/>
-                <a:cs typeface="Century Gothic"/>
+                <a:latin typeface="Arial"/>
+                <a:cs typeface="Arial"/>
               </a:rPr>
               <a:t>Tick boxes</a:t>
             </a:r>
@@ -31903,8 +31621,8 @@
                 <a:solidFill>
                   <a:srgbClr val="000000"/>
                 </a:solidFill>
-                <a:latin typeface="Century Gothic"/>
-                <a:cs typeface="Century Gothic"/>
+                <a:latin typeface="Arial"/>
+                <a:cs typeface="Arial"/>
               </a:rPr>
               <a:t>Include 'other' and 'unknown'</a:t>
             </a:r>
@@ -31946,8 +31664,8 @@
                 <a:solidFill>
                   <a:srgbClr val="FFFFFF"/>
                 </a:solidFill>
-                <a:latin typeface="Century Gothic"/>
-                <a:cs typeface="Century Gothic"/>
+                <a:latin typeface="Arial"/>
+                <a:cs typeface="Arial"/>
               </a:rPr>
               <a:t>Pilot it</a:t>
             </a:r>
@@ -31995,8 +31713,8 @@
                 <a:solidFill>
                   <a:srgbClr val="000000"/>
                 </a:solidFill>
-                <a:latin typeface="Century Gothic"/>
-                <a:cs typeface="Century Gothic"/>
+                <a:latin typeface="Arial"/>
+                <a:cs typeface="Arial"/>
               </a:rPr>
               <a:t>Two people, same patient</a:t>
             </a:r>
@@ -32016,8 +31734,8 @@
                 <a:solidFill>
                   <a:srgbClr val="000000"/>
                 </a:solidFill>
-                <a:latin typeface="Century Gothic"/>
-                <a:cs typeface="Century Gothic"/>
+                <a:latin typeface="Arial"/>
+                <a:cs typeface="Arial"/>
               </a:rPr>
               <a:t>Do they agree?</a:t>
             </a:r>
@@ -32061,8 +31779,8 @@
                 <a:solidFill>
                   <a:srgbClr val="FFFFFF"/>
                 </a:solidFill>
-                <a:latin typeface="Century Gothic"/>
-                <a:cs typeface="Century Gothic"/>
+                <a:latin typeface="Arial"/>
+                <a:cs typeface="Arial"/>
               </a:rPr>
               <a:t>KEY MESSAGE   </a:t>
             </a:r>
@@ -32071,8 +31789,8 @@
                 <a:solidFill>
                   <a:srgbClr val="FFFFFF"/>
                 </a:solidFill>
-                <a:latin typeface="Century Gothic"/>
-                <a:cs typeface="Century Gothic"/>
+                <a:latin typeface="Arial"/>
+                <a:cs typeface="Arial"/>
               </a:rPr>
               <a:t>If two colleagues can fill an item differently, rewrite it.</a:t>
             </a:r>
@@ -32109,7 +31827,7 @@
                     <a:lumMod val="50000"/>
                   </a:schemeClr>
                 </a:solidFill>
-                <a:latin typeface="Verdana"/>
+                <a:latin typeface="Arial"/>
               </a:rPr>
               <a:t>Neudata | #ClearDataClearImpact</a:t>
             </a:r>
@@ -32239,8 +31957,8 @@
                 <a:solidFill>
                   <a:srgbClr val="0D7377"/>
                 </a:solidFill>
-                <a:latin typeface="Century Gothic"/>
-                <a:cs typeface="Century Gothic"/>
+                <a:latin typeface="Arial"/>
+                <a:cs typeface="Arial"/>
               </a:rPr>
               <a:t>The data dictionary: one row per variable</a:t>
             </a:r>
@@ -32330,8 +32048,8 @@
                 <a:solidFill>
                   <a:srgbClr val="595959"/>
                 </a:solidFill>
-                <a:latin typeface="Century Gothic"/>
-                <a:cs typeface="Century Gothic"/>
+                <a:latin typeface="Arial"/>
+                <a:cs typeface="Arial"/>
               </a:rPr>
               <a:t>Example rows for the fluids-in-septic-shock study</a:t>
             </a:r>
@@ -32375,8 +32093,8 @@
                 <a:solidFill>
                   <a:srgbClr val="FFFFFF"/>
                 </a:solidFill>
-                <a:latin typeface="Century Gothic"/>
-                <a:cs typeface="Century Gothic"/>
+                <a:latin typeface="Arial"/>
+                <a:cs typeface="Arial"/>
               </a:rPr>
               <a:t>KEY MESSAGE   </a:t>
             </a:r>
@@ -32385,8 +32103,8 @@
                 <a:solidFill>
                   <a:srgbClr val="FFFFFF"/>
                 </a:solidFill>
-                <a:latin typeface="Century Gothic"/>
-                <a:cs typeface="Century Gothic"/>
+                <a:latin typeface="Arial"/>
+                <a:cs typeface="Arial"/>
               </a:rPr>
               <a:t>The data dictionary is the instruction manual for your dataset.</a:t>
             </a:r>
@@ -32423,7 +32141,7 @@
                     <a:lumMod val="50000"/>
                   </a:schemeClr>
                 </a:solidFill>
-                <a:latin typeface="Verdana"/>
+                <a:latin typeface="Arial"/>
               </a:rPr>
               <a:t>Neudata | #ClearDataClearImpact</a:t>
             </a:r>
@@ -32540,7 +32258,7 @@
     </a:clrScheme>
     <a:fontScheme name="Office">
       <a:majorFont>
-        <a:latin typeface="Calibri"/>
+        <a:latin typeface="Arial"/>
         <a:ea typeface=""/>
         <a:cs typeface=""/>
         <a:font script="Jpan" typeface="ＭＳ Ｐゴシック"/>
@@ -32575,7 +32293,7 @@
         <a:font script="Geor" typeface="Sylfaen"/>
       </a:majorFont>
       <a:minorFont>
-        <a:latin typeface="Calibri"/>
+        <a:latin typeface="Arial"/>
         <a:ea typeface=""/>
         <a:cs typeface=""/>
         <a:font script="Jpan" typeface="ＭＳ Ｐゴシック"/>
@@ -32860,7 +32578,7 @@
     </a:clrScheme>
     <a:fontScheme name="Office">
       <a:majorFont>
-        <a:latin typeface="Calibri Light" panose="020F0302020204030204"/>
+        <a:latin typeface="Arial" panose="020F0302020204030204"/>
         <a:ea typeface=""/>
         <a:cs typeface=""/>
         <a:font script="Jpan" typeface="游ゴシック Light"/>
@@ -32895,7 +32613,7 @@
         <a:font script="Geor" typeface="Sylfaen"/>
       </a:majorFont>
       <a:minorFont>
-        <a:latin typeface="Calibri" panose="020F0502020204030204"/>
+        <a:latin typeface="Arial" panose="020F0502020204030204"/>
         <a:ea typeface=""/>
         <a:cs typeface=""/>
         <a:font script="Jpan" typeface="游ゴシック"/>
@@ -33121,7 +32839,7 @@
     </a:clrScheme>
     <a:fontScheme name="Office">
       <a:majorFont>
-        <a:latin typeface="Calibri Light" panose="020F0302020204030204"/>
+        <a:latin typeface="Arial" panose="020F0302020204030204"/>
         <a:ea typeface=""/>
         <a:cs typeface=""/>
         <a:font script="Jpan" typeface="游ゴシック Light"/>
@@ -33156,7 +32874,7 @@
         <a:font script="Geor" typeface="Sylfaen"/>
       </a:majorFont>
       <a:minorFont>
-        <a:latin typeface="Calibri" panose="020F0502020204030204"/>
+        <a:latin typeface="Arial" panose="020F0502020204030204"/>
         <a:ea typeface=""/>
         <a:cs typeface=""/>
         <a:font script="Jpan" typeface="游ゴシック"/>

--- a/en/files/slides/Session_5_EN.pptx
+++ b/en/files/slides/Session_5_EN.pptx
@@ -2018,7 +2018,7 @@
           <a:p>
             <a:r>
               <a:rPr lang="en-US" sz="1400" b="0" dirty="0"/>
-              <a:t>Run it: launch one poll per question (Zoom/Teams poll or a form), give 1 minute each, show the results, then reveal. Hide the side panel until the reveal (or read the answers from these notes).</a:t>
+              <a:t>Run it: launch one poll per question (Zoom/Teams poll), give 1 minute each, show the results, then reveal. Hide the side panel until the reveal (or read the answers from these notes).</a:t>
             </a:r>
           </a:p>
           <a:p>
@@ -5150,7 +5150,7 @@
           <a:p>
             <a:r>
               <a:rPr lang="en-US" sz="1400" b="0" dirty="0"/>
-              <a:t>Exit question in the chat (or a one-question form): name one data-quality problem found in the raw FLUID-ICU data and how the cleaning fixed it. Purpose: it checks understanding of today's core idea (clean with a script and a log, never by hand). Read the answers before Session 6 and open Session 6 with two or three of them.</a:t>
+              <a:t>Exit question in the chat: name one data-quality problem found in the raw FLUID-ICU data and how the cleaning fixed it. Purpose: it checks understanding of today's core idea (clean with a script and a log, never by hand). Read the answers before Session 6 and open Session 6 with two or three of them.</a:t>
             </a:r>
           </a:p>
           <a:p>
@@ -9747,12 +9747,12 @@
           </a:ln>
         </p:spPr>
         <p:txBody>
-          <a:bodyPr wrap="square" lIns="137160" tIns="91440" rIns="137160" bIns="91440" rtlCol="0" anchor="t">
+          <a:bodyPr wrap="square" lIns="137160" tIns="91440" rIns="137160" bIns="91440" rtlCol="0" anchor="ctr">
             <a:normAutofit/>
           </a:bodyPr>
           <a:lstStyle/>
           <a:p>
-            <a:pPr marL="0" indent="0" algn="l">
+            <a:pPr marL="0" indent="0" algn="ctr">
               <a:lnSpc>
                 <a:spcPct val="104000"/>
               </a:lnSpc>
@@ -9773,7 +9773,7 @@
             </a:r>
           </a:p>
           <a:p>
-            <a:pPr marL="0" indent="0" algn="l">
+            <a:pPr marL="0" indent="0" algn="ctr">
               <a:lnSpc>
                 <a:spcPct val="104000"/>
               </a:lnSpc>
@@ -9860,12 +9860,12 @@
           </a:ln>
         </p:spPr>
         <p:txBody>
-          <a:bodyPr wrap="square" lIns="137160" tIns="91440" rIns="137160" bIns="91440" rtlCol="0" anchor="t">
+          <a:bodyPr wrap="square" lIns="137160" tIns="91440" rIns="137160" bIns="91440" rtlCol="0" anchor="ctr">
             <a:normAutofit/>
           </a:bodyPr>
           <a:lstStyle/>
           <a:p>
-            <a:pPr marL="0" indent="0" algn="l">
+            <a:pPr marL="0" indent="0" algn="ctr">
               <a:lnSpc>
                 <a:spcPct val="104000"/>
               </a:lnSpc>
@@ -9886,7 +9886,7 @@
             </a:r>
           </a:p>
           <a:p>
-            <a:pPr marL="0" indent="0" algn="l">
+            <a:pPr marL="0" indent="0" algn="ctr">
               <a:lnSpc>
                 <a:spcPct val="104000"/>
               </a:lnSpc>
@@ -9973,12 +9973,12 @@
           </a:ln>
         </p:spPr>
         <p:txBody>
-          <a:bodyPr wrap="square" lIns="137160" tIns="91440" rIns="137160" bIns="91440" rtlCol="0" anchor="t">
+          <a:bodyPr wrap="square" lIns="137160" tIns="91440" rIns="137160" bIns="91440" rtlCol="0" anchor="ctr">
             <a:normAutofit/>
           </a:bodyPr>
           <a:lstStyle/>
           <a:p>
-            <a:pPr marL="0" indent="0" algn="l">
+            <a:pPr marL="0" indent="0" algn="ctr">
               <a:lnSpc>
                 <a:spcPct val="104000"/>
               </a:lnSpc>
@@ -9999,7 +9999,7 @@
             </a:r>
           </a:p>
           <a:p>
-            <a:pPr marL="0" indent="0" algn="l">
+            <a:pPr marL="0" indent="0" algn="ctr">
               <a:lnSpc>
                 <a:spcPct val="104000"/>
               </a:lnSpc>
@@ -10086,12 +10086,12 @@
           </a:ln>
         </p:spPr>
         <p:txBody>
-          <a:bodyPr wrap="square" lIns="137160" tIns="91440" rIns="137160" bIns="91440" rtlCol="0" anchor="t">
+          <a:bodyPr wrap="square" lIns="137160" tIns="91440" rIns="137160" bIns="91440" rtlCol="0" anchor="ctr">
             <a:normAutofit/>
           </a:bodyPr>
           <a:lstStyle/>
           <a:p>
-            <a:pPr marL="0" indent="0" algn="l">
+            <a:pPr marL="0" indent="0" algn="ctr">
               <a:lnSpc>
                 <a:spcPct val="104000"/>
               </a:lnSpc>
@@ -10112,7 +10112,7 @@
             </a:r>
           </a:p>
           <a:p>
-            <a:pPr marL="0" indent="0" algn="l">
+            <a:pPr marL="0" indent="0" algn="ctr">
               <a:lnSpc>
                 <a:spcPct val="104000"/>
               </a:lnSpc>
@@ -10489,12 +10489,12 @@
           </a:ln>
         </p:spPr>
         <p:txBody>
-          <a:bodyPr wrap="square" lIns="137160" tIns="91440" rIns="137160" bIns="91440" rtlCol="0" anchor="t">
+          <a:bodyPr wrap="square" lIns="137160" tIns="91440" rIns="137160" bIns="91440" rtlCol="0" anchor="ctr">
             <a:normAutofit/>
           </a:bodyPr>
           <a:lstStyle/>
           <a:p>
-            <a:pPr marL="0" indent="0" algn="l">
+            <a:pPr marL="0" indent="0" algn="ctr">
               <a:lnSpc>
                 <a:spcPct val="104000"/>
               </a:lnSpc>
@@ -10515,7 +10515,7 @@
             </a:r>
           </a:p>
           <a:p>
-            <a:pPr marL="0" indent="0" algn="l">
+            <a:pPr marL="0" indent="0" algn="ctr">
               <a:lnSpc>
                 <a:spcPct val="104000"/>
               </a:lnSpc>
@@ -10536,7 +10536,7 @@
             </a:r>
           </a:p>
           <a:p>
-            <a:pPr marL="0" indent="0" algn="l">
+            <a:pPr marL="0" indent="0" algn="ctr">
               <a:lnSpc>
                 <a:spcPct val="104000"/>
               </a:lnSpc>
@@ -10623,12 +10623,12 @@
           </a:ln>
         </p:spPr>
         <p:txBody>
-          <a:bodyPr wrap="square" lIns="137160" tIns="91440" rIns="137160" bIns="91440" rtlCol="0" anchor="t">
+          <a:bodyPr wrap="square" lIns="137160" tIns="91440" rIns="137160" bIns="91440" rtlCol="0" anchor="ctr">
             <a:normAutofit/>
           </a:bodyPr>
           <a:lstStyle/>
           <a:p>
-            <a:pPr marL="0" indent="0" algn="l">
+            <a:pPr marL="0" indent="0" algn="ctr">
               <a:lnSpc>
                 <a:spcPct val="104000"/>
               </a:lnSpc>
@@ -10649,7 +10649,7 @@
             </a:r>
           </a:p>
           <a:p>
-            <a:pPr marL="0" indent="0" algn="l">
+            <a:pPr marL="0" indent="0" algn="ctr">
               <a:lnSpc>
                 <a:spcPct val="104000"/>
               </a:lnSpc>
@@ -10670,7 +10670,7 @@
             </a:r>
           </a:p>
           <a:p>
-            <a:pPr marL="0" indent="0" algn="l">
+            <a:pPr marL="0" indent="0" algn="ctr">
               <a:lnSpc>
                 <a:spcPct val="104000"/>
               </a:lnSpc>
@@ -10757,12 +10757,12 @@
           </a:ln>
         </p:spPr>
         <p:txBody>
-          <a:bodyPr wrap="square" lIns="137160" tIns="91440" rIns="137160" bIns="91440" rtlCol="0" anchor="t">
+          <a:bodyPr wrap="square" lIns="137160" tIns="91440" rIns="137160" bIns="91440" rtlCol="0" anchor="ctr">
             <a:normAutofit/>
           </a:bodyPr>
           <a:lstStyle/>
           <a:p>
-            <a:pPr marL="0" indent="0" algn="l">
+            <a:pPr marL="0" indent="0" algn="ctr">
               <a:lnSpc>
                 <a:spcPct val="104000"/>
               </a:lnSpc>
@@ -10783,7 +10783,7 @@
             </a:r>
           </a:p>
           <a:p>
-            <a:pPr marL="0" indent="0" algn="l">
+            <a:pPr marL="0" indent="0" algn="ctr">
               <a:lnSpc>
                 <a:spcPct val="104000"/>
               </a:lnSpc>
@@ -10804,7 +10804,7 @@
             </a:r>
           </a:p>
           <a:p>
-            <a:pPr marL="0" indent="0" algn="l">
+            <a:pPr marL="0" indent="0" algn="ctr">
               <a:lnSpc>
                 <a:spcPct val="104000"/>
               </a:lnSpc>
@@ -11458,12 +11458,12 @@
           </a:ln>
         </p:spPr>
         <p:txBody>
-          <a:bodyPr wrap="square" lIns="110000" tIns="91440" rIns="110000" bIns="91440" rtlCol="0" anchor="t">
+          <a:bodyPr wrap="square" lIns="110000" tIns="91440" rIns="110000" bIns="91440" rtlCol="0" anchor="ctr">
             <a:normAutofit/>
           </a:bodyPr>
           <a:lstStyle/>
           <a:p>
-            <a:pPr marL="0" indent="0" algn="l">
+            <a:pPr marL="0" indent="0" algn="ctr">
               <a:lnSpc>
                 <a:spcPct val="104000"/>
               </a:lnSpc>
@@ -11484,7 +11484,7 @@
             </a:r>
           </a:p>
           <a:p>
-            <a:pPr marL="0" indent="0" algn="l">
+            <a:pPr marL="0" indent="0" algn="ctr">
               <a:lnSpc>
                 <a:spcPct val="104000"/>
               </a:lnSpc>
@@ -11573,12 +11573,12 @@
           </a:ln>
         </p:spPr>
         <p:txBody>
-          <a:bodyPr wrap="square" lIns="110000" tIns="91440" rIns="110000" bIns="91440" rtlCol="0" anchor="t">
+          <a:bodyPr wrap="square" lIns="110000" tIns="91440" rIns="110000" bIns="91440" rtlCol="0" anchor="ctr">
             <a:normAutofit/>
           </a:bodyPr>
           <a:lstStyle/>
           <a:p>
-            <a:pPr marL="0" indent="0" algn="l">
+            <a:pPr marL="0" indent="0" algn="ctr">
               <a:lnSpc>
                 <a:spcPct val="104000"/>
               </a:lnSpc>
@@ -11599,7 +11599,7 @@
             </a:r>
           </a:p>
           <a:p>
-            <a:pPr marL="0" indent="0" algn="l">
+            <a:pPr marL="0" indent="0" algn="ctr">
               <a:lnSpc>
                 <a:spcPct val="104000"/>
               </a:lnSpc>
@@ -11688,12 +11688,12 @@
           </a:ln>
         </p:spPr>
         <p:txBody>
-          <a:bodyPr wrap="square" lIns="110000" tIns="91440" rIns="110000" bIns="91440" rtlCol="0" anchor="t">
+          <a:bodyPr wrap="square" lIns="110000" tIns="91440" rIns="110000" bIns="91440" rtlCol="0" anchor="ctr">
             <a:normAutofit/>
           </a:bodyPr>
           <a:lstStyle/>
           <a:p>
-            <a:pPr marL="0" indent="0" algn="l">
+            <a:pPr marL="0" indent="0" algn="ctr">
               <a:lnSpc>
                 <a:spcPct val="104000"/>
               </a:lnSpc>
@@ -11714,7 +11714,7 @@
             </a:r>
           </a:p>
           <a:p>
-            <a:pPr marL="0" indent="0" algn="l">
+            <a:pPr marL="0" indent="0" algn="ctr">
               <a:lnSpc>
                 <a:spcPct val="104000"/>
               </a:lnSpc>
@@ -11803,12 +11803,12 @@
           </a:ln>
         </p:spPr>
         <p:txBody>
-          <a:bodyPr wrap="square" lIns="110000" tIns="91440" rIns="110000" bIns="91440" rtlCol="0" anchor="t">
+          <a:bodyPr wrap="square" lIns="110000" tIns="91440" rIns="110000" bIns="91440" rtlCol="0" anchor="ctr">
             <a:normAutofit/>
           </a:bodyPr>
           <a:lstStyle/>
           <a:p>
-            <a:pPr marL="0" indent="0" algn="l">
+            <a:pPr marL="0" indent="0" algn="ctr">
               <a:lnSpc>
                 <a:spcPct val="104000"/>
               </a:lnSpc>
@@ -11829,7 +11829,7 @@
             </a:r>
           </a:p>
           <a:p>
-            <a:pPr marL="0" indent="0" algn="l">
+            <a:pPr marL="0" indent="0" algn="ctr">
               <a:lnSpc>
                 <a:spcPct val="104000"/>
               </a:lnSpc>
@@ -11918,12 +11918,12 @@
           </a:ln>
         </p:spPr>
         <p:txBody>
-          <a:bodyPr wrap="square" lIns="110000" tIns="91440" rIns="110000" bIns="91440" rtlCol="0" anchor="t">
+          <a:bodyPr wrap="square" lIns="110000" tIns="91440" rIns="110000" bIns="91440" rtlCol="0" anchor="ctr">
             <a:normAutofit/>
           </a:bodyPr>
           <a:lstStyle/>
           <a:p>
-            <a:pPr marL="0" indent="0" algn="l">
+            <a:pPr marL="0" indent="0" algn="ctr">
               <a:lnSpc>
                 <a:spcPct val="104000"/>
               </a:lnSpc>
@@ -11944,7 +11944,7 @@
             </a:r>
           </a:p>
           <a:p>
-            <a:pPr marL="0" indent="0" algn="l">
+            <a:pPr marL="0" indent="0" algn="ctr">
               <a:lnSpc>
                 <a:spcPct val="104000"/>
               </a:lnSpc>
@@ -12433,12 +12433,12 @@
           </a:ln>
         </p:spPr>
         <p:txBody>
-          <a:bodyPr wrap="square" lIns="137160" tIns="91440" rIns="137160" bIns="91440" rtlCol="0" anchor="t">
+          <a:bodyPr wrap="square" lIns="137160" tIns="91440" rIns="137160" bIns="91440" rtlCol="0" anchor="ctr">
             <a:normAutofit/>
           </a:bodyPr>
           <a:lstStyle/>
           <a:p>
-            <a:pPr marL="0" indent="0" algn="l">
+            <a:pPr marL="0" indent="0" algn="ctr">
               <a:buNone/>
             </a:pPr>
             <a:r>
@@ -12453,15 +12453,14 @@
             </a:r>
           </a:p>
           <a:p>
-            <a:pPr marL="274320" indent="-274320" algn="l">
+            <a:pPr marL="0" indent="0" algn="ctr">
               <a:lnSpc>
                 <a:spcPct val="104000"/>
               </a:lnSpc>
               <a:spcBef>
                 <a:spcPts val="300"/>
               </a:spcBef>
-              <a:buFont typeface="Arial"/>
-              <a:buChar char="•"/>
+              <a:buNone/>
             </a:pPr>
             <a:r>
               <a:rPr lang="en-US" sz="1500" dirty="0">
@@ -12475,15 +12474,14 @@
             </a:r>
           </a:p>
           <a:p>
-            <a:pPr marL="274320" indent="-274320" algn="l">
+            <a:pPr marL="0" indent="0" algn="ctr">
               <a:lnSpc>
                 <a:spcPct val="104000"/>
               </a:lnSpc>
               <a:spcBef>
                 <a:spcPts val="300"/>
               </a:spcBef>
-              <a:buFont typeface="Arial"/>
-              <a:buChar char="•"/>
+              <a:buNone/>
             </a:pPr>
             <a:r>
               <a:rPr lang="en-US" sz="1500" dirty="0">
@@ -12497,15 +12495,14 @@
             </a:r>
           </a:p>
           <a:p>
-            <a:pPr marL="274320" indent="-274320" algn="l">
+            <a:pPr marL="0" indent="0" algn="ctr">
               <a:lnSpc>
                 <a:spcPct val="104000"/>
               </a:lnSpc>
               <a:spcBef>
                 <a:spcPts val="300"/>
               </a:spcBef>
-              <a:buFont typeface="Arial"/>
-              <a:buChar char="•"/>
+              <a:buNone/>
             </a:pPr>
             <a:r>
               <a:rPr lang="en-US" sz="1500" dirty="0">
@@ -12519,15 +12516,14 @@
             </a:r>
           </a:p>
           <a:p>
-            <a:pPr marL="274320" indent="-274320" algn="l">
+            <a:pPr marL="0" indent="0" algn="ctr">
               <a:lnSpc>
                 <a:spcPct val="104000"/>
               </a:lnSpc>
               <a:spcBef>
                 <a:spcPts val="300"/>
               </a:spcBef>
-              <a:buFont typeface="Arial"/>
-              <a:buChar char="•"/>
+              <a:buNone/>
             </a:pPr>
             <a:r>
               <a:rPr lang="en-US" sz="1500" dirty="0">
@@ -13155,12 +13151,12 @@
           </a:ln>
         </p:spPr>
         <p:txBody>
-          <a:bodyPr wrap="square" lIns="137160" tIns="91440" rIns="137160" bIns="91440" rtlCol="0" anchor="t">
+          <a:bodyPr wrap="square" lIns="137160" tIns="91440" rIns="137160" bIns="91440" rtlCol="0" anchor="ctr">
             <a:normAutofit/>
           </a:bodyPr>
           <a:lstStyle/>
           <a:p>
-            <a:pPr marL="0" indent="0" algn="l">
+            <a:pPr marL="0" indent="0" algn="ctr">
               <a:lnSpc>
                 <a:spcPct val="104000"/>
               </a:lnSpc>
@@ -13181,7 +13177,7 @@
             </a:r>
           </a:p>
           <a:p>
-            <a:pPr marL="0" indent="0" algn="l">
+            <a:pPr marL="0" indent="0" algn="ctr">
               <a:lnSpc>
                 <a:spcPct val="104000"/>
               </a:lnSpc>
@@ -13268,12 +13264,12 @@
           </a:ln>
         </p:spPr>
         <p:txBody>
-          <a:bodyPr wrap="square" lIns="137160" tIns="91440" rIns="137160" bIns="91440" rtlCol="0" anchor="t">
+          <a:bodyPr wrap="square" lIns="137160" tIns="91440" rIns="137160" bIns="91440" rtlCol="0" anchor="ctr">
             <a:normAutofit/>
           </a:bodyPr>
           <a:lstStyle/>
           <a:p>
-            <a:pPr marL="0" indent="0" algn="l">
+            <a:pPr marL="0" indent="0" algn="ctr">
               <a:lnSpc>
                 <a:spcPct val="104000"/>
               </a:lnSpc>
@@ -13294,7 +13290,7 @@
             </a:r>
           </a:p>
           <a:p>
-            <a:pPr marL="0" indent="0" algn="l">
+            <a:pPr marL="0" indent="0" algn="ctr">
               <a:lnSpc>
                 <a:spcPct val="104000"/>
               </a:lnSpc>
@@ -13381,12 +13377,12 @@
           </a:ln>
         </p:spPr>
         <p:txBody>
-          <a:bodyPr wrap="square" lIns="137160" tIns="91440" rIns="137160" bIns="91440" rtlCol="0" anchor="t">
+          <a:bodyPr wrap="square" lIns="137160" tIns="91440" rIns="137160" bIns="91440" rtlCol="0" anchor="ctr">
             <a:normAutofit/>
           </a:bodyPr>
           <a:lstStyle/>
           <a:p>
-            <a:pPr marL="0" indent="0" algn="l">
+            <a:pPr marL="0" indent="0" algn="ctr">
               <a:lnSpc>
                 <a:spcPct val="104000"/>
               </a:lnSpc>
@@ -13407,7 +13403,7 @@
             </a:r>
           </a:p>
           <a:p>
-            <a:pPr marL="0" indent="0" algn="l">
+            <a:pPr marL="0" indent="0" algn="ctr">
               <a:lnSpc>
                 <a:spcPct val="104000"/>
               </a:lnSpc>
@@ -13494,12 +13490,12 @@
           </a:ln>
         </p:spPr>
         <p:txBody>
-          <a:bodyPr wrap="square" lIns="137160" tIns="91440" rIns="137160" bIns="91440" rtlCol="0" anchor="t">
+          <a:bodyPr wrap="square" lIns="137160" tIns="91440" rIns="137160" bIns="91440" rtlCol="0" anchor="ctr">
             <a:normAutofit/>
           </a:bodyPr>
           <a:lstStyle/>
           <a:p>
-            <a:pPr marL="0" indent="0" algn="l">
+            <a:pPr marL="0" indent="0" algn="ctr">
               <a:lnSpc>
                 <a:spcPct val="104000"/>
               </a:lnSpc>
@@ -13520,7 +13516,7 @@
             </a:r>
           </a:p>
           <a:p>
-            <a:pPr marL="0" indent="0" algn="l">
+            <a:pPr marL="0" indent="0" algn="ctr">
               <a:lnSpc>
                 <a:spcPct val="104000"/>
               </a:lnSpc>
@@ -13541,7 +13537,7 @@
             </a:r>
           </a:p>
           <a:p>
-            <a:pPr marL="0" indent="0" algn="l">
+            <a:pPr marL="0" indent="0" algn="ctr">
               <a:lnSpc>
                 <a:spcPct val="104000"/>
               </a:lnSpc>
@@ -13562,7 +13558,7 @@
             </a:r>
           </a:p>
           <a:p>
-            <a:pPr marL="0" indent="0" algn="l">
+            <a:pPr marL="0" indent="0" algn="ctr">
               <a:lnSpc>
                 <a:spcPct val="104000"/>
               </a:lnSpc>
@@ -13941,12 +13937,12 @@
           </a:ln>
         </p:spPr>
         <p:txBody>
-          <a:bodyPr wrap="square" lIns="110000" tIns="91440" rIns="110000" bIns="91440" rtlCol="0" anchor="t">
+          <a:bodyPr wrap="square" lIns="110000" tIns="91440" rIns="110000" bIns="91440" rtlCol="0" anchor="ctr">
             <a:normAutofit/>
           </a:bodyPr>
           <a:lstStyle/>
           <a:p>
-            <a:pPr marL="0" indent="0" algn="l">
+            <a:pPr marL="0" indent="0" algn="ctr">
               <a:lnSpc>
                 <a:spcPct val="104000"/>
               </a:lnSpc>
@@ -13967,7 +13963,7 @@
             </a:r>
           </a:p>
           <a:p>
-            <a:pPr marL="0" indent="0" algn="l">
+            <a:pPr marL="0" indent="0" algn="ctr">
               <a:lnSpc>
                 <a:spcPct val="104000"/>
               </a:lnSpc>
@@ -14056,12 +14052,12 @@
           </a:ln>
         </p:spPr>
         <p:txBody>
-          <a:bodyPr wrap="square" lIns="110000" tIns="91440" rIns="110000" bIns="91440" rtlCol="0" anchor="t">
+          <a:bodyPr wrap="square" lIns="110000" tIns="91440" rIns="110000" bIns="91440" rtlCol="0" anchor="ctr">
             <a:normAutofit/>
           </a:bodyPr>
           <a:lstStyle/>
           <a:p>
-            <a:pPr marL="0" indent="0" algn="l">
+            <a:pPr marL="0" indent="0" algn="ctr">
               <a:lnSpc>
                 <a:spcPct val="104000"/>
               </a:lnSpc>
@@ -14082,7 +14078,7 @@
             </a:r>
           </a:p>
           <a:p>
-            <a:pPr marL="0" indent="0" algn="l">
+            <a:pPr marL="0" indent="0" algn="ctr">
               <a:lnSpc>
                 <a:spcPct val="104000"/>
               </a:lnSpc>
@@ -14171,12 +14167,12 @@
           </a:ln>
         </p:spPr>
         <p:txBody>
-          <a:bodyPr wrap="square" lIns="110000" tIns="91440" rIns="110000" bIns="91440" rtlCol="0" anchor="t">
+          <a:bodyPr wrap="square" lIns="110000" tIns="91440" rIns="110000" bIns="91440" rtlCol="0" anchor="ctr">
             <a:normAutofit/>
           </a:bodyPr>
           <a:lstStyle/>
           <a:p>
-            <a:pPr marL="0" indent="0" algn="l">
+            <a:pPr marL="0" indent="0" algn="ctr">
               <a:lnSpc>
                 <a:spcPct val="104000"/>
               </a:lnSpc>
@@ -14197,7 +14193,7 @@
             </a:r>
           </a:p>
           <a:p>
-            <a:pPr marL="0" indent="0" algn="l">
+            <a:pPr marL="0" indent="0" algn="ctr">
               <a:lnSpc>
                 <a:spcPct val="104000"/>
               </a:lnSpc>
@@ -14286,12 +14282,12 @@
           </a:ln>
         </p:spPr>
         <p:txBody>
-          <a:bodyPr wrap="square" lIns="110000" tIns="91440" rIns="110000" bIns="91440" rtlCol="0" anchor="t">
+          <a:bodyPr wrap="square" lIns="110000" tIns="91440" rIns="110000" bIns="91440" rtlCol="0" anchor="ctr">
             <a:normAutofit/>
           </a:bodyPr>
           <a:lstStyle/>
           <a:p>
-            <a:pPr marL="0" indent="0" algn="l">
+            <a:pPr marL="0" indent="0" algn="ctr">
               <a:lnSpc>
                 <a:spcPct val="104000"/>
               </a:lnSpc>
@@ -14312,7 +14308,7 @@
             </a:r>
           </a:p>
           <a:p>
-            <a:pPr marL="0" indent="0" algn="l">
+            <a:pPr marL="0" indent="0" algn="ctr">
               <a:lnSpc>
                 <a:spcPct val="104000"/>
               </a:lnSpc>
@@ -15669,12 +15665,12 @@
           </a:ln>
         </p:spPr>
         <p:txBody>
-          <a:bodyPr wrap="square" lIns="137160" tIns="91440" rIns="137160" bIns="91440" rtlCol="0" anchor="t">
+          <a:bodyPr wrap="square" lIns="137160" tIns="91440" rIns="137160" bIns="91440" rtlCol="0" anchor="ctr">
             <a:normAutofit/>
           </a:bodyPr>
           <a:lstStyle/>
           <a:p>
-            <a:pPr marL="0" indent="0" algn="l">
+            <a:pPr marL="0" indent="0" algn="ctr">
               <a:buNone/>
             </a:pPr>
             <a:r>
@@ -15689,15 +15685,14 @@
             </a:r>
           </a:p>
           <a:p>
-            <a:pPr marL="274320" indent="-274320" algn="l">
+            <a:pPr marL="0" indent="0" algn="ctr">
               <a:lnSpc>
                 <a:spcPct val="104000"/>
               </a:lnSpc>
               <a:spcBef>
                 <a:spcPts val="300"/>
               </a:spcBef>
-              <a:buFont typeface="Arial"/>
-              <a:buChar char="•"/>
+              <a:buNone/>
             </a:pPr>
             <a:r>
               <a:rPr lang="en-US" sz="1500" dirty="0">
@@ -15711,15 +15706,14 @@
             </a:r>
           </a:p>
           <a:p>
-            <a:pPr marL="274320" indent="-274320" algn="l">
+            <a:pPr marL="0" indent="0" algn="ctr">
               <a:lnSpc>
                 <a:spcPct val="104000"/>
               </a:lnSpc>
               <a:spcBef>
                 <a:spcPts val="300"/>
               </a:spcBef>
-              <a:buFont typeface="Arial"/>
-              <a:buChar char="•"/>
+              <a:buNone/>
             </a:pPr>
             <a:r>
               <a:rPr lang="en-US" sz="1500" dirty="0">
@@ -15733,15 +15727,14 @@
             </a:r>
           </a:p>
           <a:p>
-            <a:pPr marL="274320" indent="-274320" algn="l">
+            <a:pPr marL="0" indent="0" algn="ctr">
               <a:lnSpc>
                 <a:spcPct val="104000"/>
               </a:lnSpc>
               <a:spcBef>
                 <a:spcPts val="300"/>
               </a:spcBef>
-              <a:buFont typeface="Arial"/>
-              <a:buChar char="•"/>
+              <a:buNone/>
             </a:pPr>
             <a:r>
               <a:rPr lang="en-US" sz="1500" dirty="0">
@@ -15755,15 +15748,14 @@
             </a:r>
           </a:p>
           <a:p>
-            <a:pPr marL="274320" indent="-274320" algn="l">
+            <a:pPr marL="0" indent="0" algn="ctr">
               <a:lnSpc>
                 <a:spcPct val="104000"/>
               </a:lnSpc>
               <a:spcBef>
                 <a:spcPts val="300"/>
               </a:spcBef>
-              <a:buFont typeface="Arial"/>
-              <a:buChar char="•"/>
+              <a:buNone/>
             </a:pPr>
             <a:r>
               <a:rPr lang="en-US" sz="1500" dirty="0">
@@ -16222,12 +16214,12 @@
           </a:ln>
         </p:spPr>
         <p:txBody>
-          <a:bodyPr wrap="square" lIns="137160" tIns="91440" rIns="137160" bIns="91440" rtlCol="0" anchor="t">
+          <a:bodyPr wrap="square" lIns="137160" tIns="91440" rIns="137160" bIns="91440" rtlCol="0" anchor="ctr">
             <a:normAutofit/>
           </a:bodyPr>
           <a:lstStyle/>
           <a:p>
-            <a:pPr marL="0" indent="0" algn="l">
+            <a:pPr marL="0" indent="0" algn="ctr">
               <a:buNone/>
             </a:pPr>
             <a:r>
@@ -16242,15 +16234,14 @@
             </a:r>
           </a:p>
           <a:p>
-            <a:pPr marL="274320" indent="-274320" algn="l">
+            <a:pPr marL="0" indent="0" algn="ctr">
               <a:lnSpc>
                 <a:spcPct val="104000"/>
               </a:lnSpc>
               <a:spcBef>
                 <a:spcPts val="300"/>
               </a:spcBef>
-              <a:buFont typeface="Arial"/>
-              <a:buChar char="•"/>
+              <a:buNone/>
             </a:pPr>
             <a:r>
               <a:rPr lang="en-US" sz="1500" dirty="0">
@@ -16264,15 +16255,14 @@
             </a:r>
           </a:p>
           <a:p>
-            <a:pPr marL="274320" indent="-274320" algn="l">
+            <a:pPr marL="0" indent="0" algn="ctr">
               <a:lnSpc>
                 <a:spcPct val="104000"/>
               </a:lnSpc>
               <a:spcBef>
                 <a:spcPts val="300"/>
               </a:spcBef>
-              <a:buFont typeface="Arial"/>
-              <a:buChar char="•"/>
+              <a:buNone/>
             </a:pPr>
             <a:r>
               <a:rPr lang="en-US" sz="1500" dirty="0">
@@ -16286,15 +16276,14 @@
             </a:r>
           </a:p>
           <a:p>
-            <a:pPr marL="274320" indent="-274320" algn="l">
+            <a:pPr marL="0" indent="0" algn="ctr">
               <a:lnSpc>
                 <a:spcPct val="104000"/>
               </a:lnSpc>
               <a:spcBef>
                 <a:spcPts val="300"/>
               </a:spcBef>
-              <a:buFont typeface="Arial"/>
-              <a:buChar char="•"/>
+              <a:buNone/>
             </a:pPr>
             <a:r>
               <a:rPr lang="en-US" sz="1500" dirty="0">
@@ -16666,12 +16655,12 @@
           </a:ln>
         </p:spPr>
         <p:txBody>
-          <a:bodyPr wrap="square" lIns="137160" tIns="91440" rIns="137160" bIns="91440" rtlCol="0" anchor="t">
+          <a:bodyPr wrap="square" lIns="137160" tIns="91440" rIns="137160" bIns="91440" rtlCol="0" anchor="ctr">
             <a:normAutofit/>
           </a:bodyPr>
           <a:lstStyle/>
           <a:p>
-            <a:pPr marL="0" indent="0" algn="l">
+            <a:pPr marL="0" indent="0" algn="ctr">
               <a:lnSpc>
                 <a:spcPct val="104000"/>
               </a:lnSpc>
@@ -16692,7 +16681,7 @@
             </a:r>
           </a:p>
           <a:p>
-            <a:pPr marL="0" indent="0" algn="l">
+            <a:pPr marL="0" indent="0" algn="ctr">
               <a:lnSpc>
                 <a:spcPct val="104000"/>
               </a:lnSpc>
@@ -16779,12 +16768,12 @@
           </a:ln>
         </p:spPr>
         <p:txBody>
-          <a:bodyPr wrap="square" lIns="137160" tIns="91440" rIns="137160" bIns="91440" rtlCol="0" anchor="t">
+          <a:bodyPr wrap="square" lIns="137160" tIns="91440" rIns="137160" bIns="91440" rtlCol="0" anchor="ctr">
             <a:normAutofit/>
           </a:bodyPr>
           <a:lstStyle/>
           <a:p>
-            <a:pPr marL="0" indent="0" algn="l">
+            <a:pPr marL="0" indent="0" algn="ctr">
               <a:lnSpc>
                 <a:spcPct val="104000"/>
               </a:lnSpc>
@@ -16805,7 +16794,7 @@
             </a:r>
           </a:p>
           <a:p>
-            <a:pPr marL="0" indent="0" algn="l">
+            <a:pPr marL="0" indent="0" algn="ctr">
               <a:lnSpc>
                 <a:spcPct val="104000"/>
               </a:lnSpc>
@@ -16826,7 +16815,7 @@
             </a:r>
           </a:p>
           <a:p>
-            <a:pPr marL="0" indent="0" algn="l">
+            <a:pPr marL="0" indent="0" algn="ctr">
               <a:lnSpc>
                 <a:spcPct val="104000"/>
               </a:lnSpc>
@@ -16913,12 +16902,12 @@
           </a:ln>
         </p:spPr>
         <p:txBody>
-          <a:bodyPr wrap="square" lIns="137160" tIns="91440" rIns="137160" bIns="91440" rtlCol="0" anchor="t">
+          <a:bodyPr wrap="square" lIns="137160" tIns="91440" rIns="137160" bIns="91440" rtlCol="0" anchor="ctr">
             <a:normAutofit/>
           </a:bodyPr>
           <a:lstStyle/>
           <a:p>
-            <a:pPr marL="0" indent="0" algn="l">
+            <a:pPr marL="0" indent="0" algn="ctr">
               <a:lnSpc>
                 <a:spcPct val="104000"/>
               </a:lnSpc>
@@ -16939,7 +16928,7 @@
             </a:r>
           </a:p>
           <a:p>
-            <a:pPr marL="0" indent="0" algn="l">
+            <a:pPr marL="0" indent="0" algn="ctr">
               <a:lnSpc>
                 <a:spcPct val="104000"/>
               </a:lnSpc>
@@ -16960,7 +16949,7 @@
             </a:r>
           </a:p>
           <a:p>
-            <a:pPr marL="0" indent="0" algn="l">
+            <a:pPr marL="0" indent="0" algn="ctr">
               <a:lnSpc>
                 <a:spcPct val="104000"/>
               </a:lnSpc>
@@ -17047,12 +17036,12 @@
           </a:ln>
         </p:spPr>
         <p:txBody>
-          <a:bodyPr wrap="square" lIns="137160" tIns="91440" rIns="137160" bIns="91440" rtlCol="0" anchor="t">
+          <a:bodyPr wrap="square" lIns="137160" tIns="91440" rIns="137160" bIns="91440" rtlCol="0" anchor="ctr">
             <a:normAutofit/>
           </a:bodyPr>
           <a:lstStyle/>
           <a:p>
-            <a:pPr marL="0" indent="0" algn="l">
+            <a:pPr marL="0" indent="0" algn="ctr">
               <a:lnSpc>
                 <a:spcPct val="104000"/>
               </a:lnSpc>
@@ -17073,7 +17062,7 @@
             </a:r>
           </a:p>
           <a:p>
-            <a:pPr marL="0" indent="0" algn="l">
+            <a:pPr marL="0" indent="0" algn="ctr">
               <a:lnSpc>
                 <a:spcPct val="104000"/>
               </a:lnSpc>
@@ -17094,7 +17083,7 @@
             </a:r>
           </a:p>
           <a:p>
-            <a:pPr marL="0" indent="0" algn="l">
+            <a:pPr marL="0" indent="0" algn="ctr">
               <a:lnSpc>
                 <a:spcPct val="104000"/>
               </a:lnSpc>
@@ -17471,12 +17460,12 @@
           </a:ln>
         </p:spPr>
         <p:txBody>
-          <a:bodyPr wrap="square" lIns="137160" tIns="91440" rIns="137160" bIns="91440" rtlCol="0" anchor="t">
+          <a:bodyPr wrap="square" lIns="137160" tIns="91440" rIns="137160" bIns="91440" rtlCol="0" anchor="ctr">
             <a:normAutofit/>
           </a:bodyPr>
           <a:lstStyle/>
           <a:p>
-            <a:pPr marL="0" indent="0" algn="l">
+            <a:pPr marL="0" indent="0" algn="ctr">
               <a:lnSpc>
                 <a:spcPct val="104000"/>
               </a:lnSpc>
@@ -17497,7 +17486,7 @@
             </a:r>
           </a:p>
           <a:p>
-            <a:pPr marL="0" indent="0" algn="l">
+            <a:pPr marL="0" indent="0" algn="ctr">
               <a:lnSpc>
                 <a:spcPct val="104000"/>
               </a:lnSpc>
@@ -17518,7 +17507,7 @@
             </a:r>
           </a:p>
           <a:p>
-            <a:pPr marL="0" indent="0" algn="l">
+            <a:pPr marL="0" indent="0" algn="ctr">
               <a:lnSpc>
                 <a:spcPct val="104000"/>
               </a:lnSpc>
@@ -17605,12 +17594,12 @@
           </a:ln>
         </p:spPr>
         <p:txBody>
-          <a:bodyPr wrap="square" lIns="137160" tIns="91440" rIns="137160" bIns="91440" rtlCol="0" anchor="t">
+          <a:bodyPr wrap="square" lIns="137160" tIns="91440" rIns="137160" bIns="91440" rtlCol="0" anchor="ctr">
             <a:normAutofit/>
           </a:bodyPr>
           <a:lstStyle/>
           <a:p>
-            <a:pPr marL="0" indent="0" algn="l">
+            <a:pPr marL="0" indent="0" algn="ctr">
               <a:lnSpc>
                 <a:spcPct val="104000"/>
               </a:lnSpc>
@@ -17631,7 +17620,7 @@
             </a:r>
           </a:p>
           <a:p>
-            <a:pPr marL="0" indent="0" algn="l">
+            <a:pPr marL="0" indent="0" algn="ctr">
               <a:lnSpc>
                 <a:spcPct val="104000"/>
               </a:lnSpc>
@@ -17718,12 +17707,12 @@
           </a:ln>
         </p:spPr>
         <p:txBody>
-          <a:bodyPr wrap="square" lIns="137160" tIns="91440" rIns="137160" bIns="91440" rtlCol="0" anchor="t">
+          <a:bodyPr wrap="square" lIns="137160" tIns="91440" rIns="137160" bIns="91440" rtlCol="0" anchor="ctr">
             <a:normAutofit/>
           </a:bodyPr>
           <a:lstStyle/>
           <a:p>
-            <a:pPr marL="0" indent="0" algn="l">
+            <a:pPr marL="0" indent="0" algn="ctr">
               <a:lnSpc>
                 <a:spcPct val="104000"/>
               </a:lnSpc>
@@ -17744,7 +17733,7 @@
             </a:r>
           </a:p>
           <a:p>
-            <a:pPr marL="0" indent="0" algn="l">
+            <a:pPr marL="0" indent="0" algn="ctr">
               <a:lnSpc>
                 <a:spcPct val="104000"/>
               </a:lnSpc>
@@ -17831,12 +17820,12 @@
           </a:ln>
         </p:spPr>
         <p:txBody>
-          <a:bodyPr wrap="square" lIns="137160" tIns="91440" rIns="137160" bIns="91440" rtlCol="0" anchor="t">
+          <a:bodyPr wrap="square" lIns="137160" tIns="91440" rIns="137160" bIns="91440" rtlCol="0" anchor="ctr">
             <a:normAutofit/>
           </a:bodyPr>
           <a:lstStyle/>
           <a:p>
-            <a:pPr marL="0" indent="0" algn="l">
+            <a:pPr marL="0" indent="0" algn="ctr">
               <a:lnSpc>
                 <a:spcPct val="104000"/>
               </a:lnSpc>
@@ -17857,7 +17846,7 @@
             </a:r>
           </a:p>
           <a:p>
-            <a:pPr marL="0" indent="0" algn="l">
+            <a:pPr marL="0" indent="0" algn="ctr">
               <a:lnSpc>
                 <a:spcPct val="104000"/>
               </a:lnSpc>
@@ -17944,12 +17933,12 @@
           </a:ln>
         </p:spPr>
         <p:txBody>
-          <a:bodyPr wrap="square" lIns="137160" tIns="91440" rIns="137160" bIns="91440" rtlCol="0" anchor="t">
+          <a:bodyPr wrap="square" lIns="137160" tIns="91440" rIns="137160" bIns="91440" rtlCol="0" anchor="ctr">
             <a:normAutofit/>
           </a:bodyPr>
           <a:lstStyle/>
           <a:p>
-            <a:pPr marL="0" indent="0" algn="l">
+            <a:pPr marL="0" indent="0" algn="ctr">
               <a:lnSpc>
                 <a:spcPct val="104000"/>
               </a:lnSpc>
@@ -17970,7 +17959,7 @@
             </a:r>
           </a:p>
           <a:p>
-            <a:pPr marL="0" indent="0" algn="l">
+            <a:pPr marL="0" indent="0" algn="ctr">
               <a:lnSpc>
                 <a:spcPct val="104000"/>
               </a:lnSpc>
@@ -18459,12 +18448,12 @@
           </a:ln>
         </p:spPr>
         <p:txBody>
-          <a:bodyPr wrap="square" lIns="137160" tIns="91440" rIns="137160" bIns="91440" rtlCol="0" anchor="t">
+          <a:bodyPr wrap="square" lIns="137160" tIns="91440" rIns="137160" bIns="91440" rtlCol="0" anchor="ctr">
             <a:normAutofit/>
           </a:bodyPr>
           <a:lstStyle/>
           <a:p>
-            <a:pPr marL="0" indent="0" algn="l">
+            <a:pPr marL="0" indent="0" algn="ctr">
               <a:buNone/>
             </a:pPr>
             <a:r>
@@ -18479,15 +18468,14 @@
             </a:r>
           </a:p>
           <a:p>
-            <a:pPr marL="274320" indent="-274320" algn="l">
+            <a:pPr marL="0" indent="0" algn="ctr">
               <a:lnSpc>
                 <a:spcPct val="104000"/>
               </a:lnSpc>
               <a:spcBef>
                 <a:spcPts val="300"/>
               </a:spcBef>
-              <a:buFont typeface="Arial"/>
-              <a:buChar char="•"/>
+              <a:buNone/>
             </a:pPr>
             <a:r>
               <a:rPr lang="en-US" sz="1500" dirty="0">
@@ -18501,15 +18489,14 @@
             </a:r>
           </a:p>
           <a:p>
-            <a:pPr marL="274320" indent="-274320" algn="l">
+            <a:pPr marL="0" indent="0" algn="ctr">
               <a:lnSpc>
                 <a:spcPct val="104000"/>
               </a:lnSpc>
               <a:spcBef>
                 <a:spcPts val="300"/>
               </a:spcBef>
-              <a:buFont typeface="Arial"/>
-              <a:buChar char="•"/>
+              <a:buNone/>
             </a:pPr>
             <a:r>
               <a:rPr lang="en-US" sz="1500" dirty="0">
@@ -18523,15 +18510,14 @@
             </a:r>
           </a:p>
           <a:p>
-            <a:pPr marL="274320" indent="-274320" algn="l">
+            <a:pPr marL="0" indent="0" algn="ctr">
               <a:lnSpc>
                 <a:spcPct val="104000"/>
               </a:lnSpc>
               <a:spcBef>
                 <a:spcPts val="300"/>
               </a:spcBef>
-              <a:buFont typeface="Arial"/>
-              <a:buChar char="•"/>
+              <a:buNone/>
             </a:pPr>
             <a:r>
               <a:rPr lang="en-US" sz="1500" dirty="0">
@@ -18545,15 +18531,14 @@
             </a:r>
           </a:p>
           <a:p>
-            <a:pPr marL="274320" indent="-274320" algn="l">
+            <a:pPr marL="0" indent="0" algn="ctr">
               <a:lnSpc>
                 <a:spcPct val="104000"/>
               </a:lnSpc>
               <a:spcBef>
                 <a:spcPts val="300"/>
               </a:spcBef>
-              <a:buFont typeface="Arial"/>
-              <a:buChar char="•"/>
+              <a:buNone/>
             </a:pPr>
             <a:r>
               <a:rPr lang="en-US" sz="1500" dirty="0">
@@ -19653,12 +19638,12 @@
           </a:ln>
         </p:spPr>
         <p:txBody>
-          <a:bodyPr wrap="square" lIns="110000" tIns="91440" rIns="110000" bIns="91440" rtlCol="0" anchor="t">
+          <a:bodyPr wrap="square" lIns="110000" tIns="91440" rIns="110000" bIns="91440" rtlCol="0" anchor="ctr">
             <a:normAutofit/>
           </a:bodyPr>
           <a:lstStyle/>
           <a:p>
-            <a:pPr marL="0" indent="0" algn="l">
+            <a:pPr marL="0" indent="0" algn="ctr">
               <a:lnSpc>
                 <a:spcPct val="104000"/>
               </a:lnSpc>
@@ -19747,12 +19732,12 @@
           </a:ln>
         </p:spPr>
         <p:txBody>
-          <a:bodyPr wrap="square" lIns="110000" tIns="91440" rIns="110000" bIns="91440" rtlCol="0" anchor="t">
+          <a:bodyPr wrap="square" lIns="110000" tIns="91440" rIns="110000" bIns="91440" rtlCol="0" anchor="ctr">
             <a:normAutofit/>
           </a:bodyPr>
           <a:lstStyle/>
           <a:p>
-            <a:pPr marL="0" indent="0" algn="l">
+            <a:pPr marL="0" indent="0" algn="ctr">
               <a:lnSpc>
                 <a:spcPct val="104000"/>
               </a:lnSpc>
@@ -19841,12 +19826,12 @@
           </a:ln>
         </p:spPr>
         <p:txBody>
-          <a:bodyPr wrap="square" lIns="110000" tIns="91440" rIns="110000" bIns="91440" rtlCol="0" anchor="t">
+          <a:bodyPr wrap="square" lIns="110000" tIns="91440" rIns="110000" bIns="91440" rtlCol="0" anchor="ctr">
             <a:normAutofit/>
           </a:bodyPr>
           <a:lstStyle/>
           <a:p>
-            <a:pPr marL="0" indent="0" algn="l">
+            <a:pPr marL="0" indent="0" algn="ctr">
               <a:lnSpc>
                 <a:spcPct val="104000"/>
               </a:lnSpc>
@@ -19935,12 +19920,12 @@
           </a:ln>
         </p:spPr>
         <p:txBody>
-          <a:bodyPr wrap="square" lIns="110000" tIns="91440" rIns="110000" bIns="91440" rtlCol="0" anchor="t">
+          <a:bodyPr wrap="square" lIns="110000" tIns="91440" rIns="110000" bIns="91440" rtlCol="0" anchor="ctr">
             <a:normAutofit/>
           </a:bodyPr>
           <a:lstStyle/>
           <a:p>
-            <a:pPr marL="0" indent="0" algn="l">
+            <a:pPr marL="0" indent="0" algn="ctr">
               <a:lnSpc>
                 <a:spcPct val="104000"/>
               </a:lnSpc>
@@ -21229,12 +21214,12 @@
           </a:ln>
         </p:spPr>
         <p:txBody>
-          <a:bodyPr wrap="square" lIns="137160" tIns="91440" rIns="137160" bIns="91440" rtlCol="0" anchor="t">
+          <a:bodyPr wrap="square" lIns="137160" tIns="91440" rIns="137160" bIns="91440" rtlCol="0" anchor="ctr">
             <a:normAutofit/>
           </a:bodyPr>
           <a:lstStyle/>
           <a:p>
-            <a:pPr marL="0" indent="0" algn="l">
+            <a:pPr marL="0" indent="0" algn="ctr">
               <a:buNone/>
             </a:pPr>
             <a:r>
@@ -21249,15 +21234,14 @@
             </a:r>
           </a:p>
           <a:p>
-            <a:pPr marL="274320" indent="-274320" algn="l">
+            <a:pPr marL="0" indent="0" algn="ctr">
               <a:lnSpc>
                 <a:spcPct val="104000"/>
               </a:lnSpc>
               <a:spcBef>
                 <a:spcPts val="300"/>
               </a:spcBef>
-              <a:buFont typeface="Arial"/>
-              <a:buChar char="•"/>
+              <a:buNone/>
             </a:pPr>
             <a:r>
               <a:rPr lang="en-US" sz="1500" dirty="0">
@@ -21271,15 +21255,14 @@
             </a:r>
           </a:p>
           <a:p>
-            <a:pPr marL="274320" indent="-274320" algn="l">
+            <a:pPr marL="0" indent="0" algn="ctr">
               <a:lnSpc>
                 <a:spcPct val="104000"/>
               </a:lnSpc>
               <a:spcBef>
                 <a:spcPts val="300"/>
               </a:spcBef>
-              <a:buFont typeface="Arial"/>
-              <a:buChar char="•"/>
+              <a:buNone/>
             </a:pPr>
             <a:r>
               <a:rPr lang="en-US" sz="1500" dirty="0">
@@ -21293,15 +21276,14 @@
             </a:r>
           </a:p>
           <a:p>
-            <a:pPr marL="274320" indent="-274320" algn="l">
+            <a:pPr marL="0" indent="0" algn="ctr">
               <a:lnSpc>
                 <a:spcPct val="104000"/>
               </a:lnSpc>
               <a:spcBef>
                 <a:spcPts val="300"/>
               </a:spcBef>
-              <a:buFont typeface="Arial"/>
-              <a:buChar char="•"/>
+              <a:buNone/>
             </a:pPr>
             <a:r>
               <a:rPr lang="en-US" sz="1500" dirty="0">
@@ -21315,15 +21297,14 @@
             </a:r>
           </a:p>
           <a:p>
-            <a:pPr marL="274320" indent="-274320" algn="l">
+            <a:pPr marL="0" indent="0" algn="ctr">
               <a:lnSpc>
                 <a:spcPct val="104000"/>
               </a:lnSpc>
               <a:spcBef>
                 <a:spcPts val="300"/>
               </a:spcBef>
-              <a:buFont typeface="Arial"/>
-              <a:buChar char="•"/>
+              <a:buNone/>
             </a:pPr>
             <a:r>
               <a:rPr lang="en-US" sz="1500" dirty="0">
@@ -24020,12 +24001,12 @@
           </a:ln>
         </p:spPr>
         <p:txBody>
-          <a:bodyPr wrap="square" lIns="137160" tIns="91440" rIns="137160" bIns="91440" rtlCol="0" anchor="t">
+          <a:bodyPr wrap="square" lIns="137160" tIns="91440" rIns="137160" bIns="91440" rtlCol="0" anchor="ctr">
             <a:normAutofit/>
           </a:bodyPr>
           <a:lstStyle/>
           <a:p>
-            <a:pPr marL="0" indent="0" algn="l">
+            <a:pPr marL="0" indent="0" algn="ctr">
               <a:buNone/>
             </a:pPr>
             <a:r>
@@ -24040,15 +24021,14 @@
             </a:r>
           </a:p>
           <a:p>
-            <a:pPr marL="274320" indent="-274320" algn="l">
+            <a:pPr marL="0" indent="0" algn="ctr">
               <a:lnSpc>
                 <a:spcPct val="104000"/>
               </a:lnSpc>
               <a:spcBef>
                 <a:spcPts val="300"/>
               </a:spcBef>
-              <a:buFont typeface="Arial"/>
-              <a:buChar char="•"/>
+              <a:buNone/>
             </a:pPr>
             <a:r>
               <a:rPr lang="en-US" sz="1500" dirty="0">
@@ -24062,15 +24042,14 @@
             </a:r>
           </a:p>
           <a:p>
-            <a:pPr marL="274320" indent="-274320" algn="l">
+            <a:pPr marL="0" indent="0" algn="ctr">
               <a:lnSpc>
                 <a:spcPct val="104000"/>
               </a:lnSpc>
               <a:spcBef>
                 <a:spcPts val="300"/>
               </a:spcBef>
-              <a:buFont typeface="Arial"/>
-              <a:buChar char="•"/>
+              <a:buNone/>
             </a:pPr>
             <a:r>
               <a:rPr lang="en-US" sz="1500" dirty="0">
@@ -24084,15 +24063,14 @@
             </a:r>
           </a:p>
           <a:p>
-            <a:pPr marL="274320" indent="-274320" algn="l">
+            <a:pPr marL="0" indent="0" algn="ctr">
               <a:lnSpc>
                 <a:spcPct val="104000"/>
               </a:lnSpc>
               <a:spcBef>
                 <a:spcPts val="300"/>
               </a:spcBef>
-              <a:buFont typeface="Arial"/>
-              <a:buChar char="•"/>
+              <a:buNone/>
             </a:pPr>
             <a:r>
               <a:rPr lang="en-US" sz="1500" dirty="0">
@@ -24106,15 +24084,14 @@
             </a:r>
           </a:p>
           <a:p>
-            <a:pPr marL="274320" indent="-274320" algn="l">
+            <a:pPr marL="0" indent="0" algn="ctr">
               <a:lnSpc>
                 <a:spcPct val="104000"/>
               </a:lnSpc>
               <a:spcBef>
                 <a:spcPts val="300"/>
               </a:spcBef>
-              <a:buFont typeface="Arial"/>
-              <a:buChar char="•"/>
+              <a:buNone/>
             </a:pPr>
             <a:r>
               <a:rPr lang="en-US" sz="1500" dirty="0">
@@ -26526,12 +26503,12 @@
           </a:ln>
         </p:spPr>
         <p:txBody>
-          <a:bodyPr wrap="square" lIns="137160" tIns="91440" rIns="137160" bIns="91440" rtlCol="0" anchor="t">
+          <a:bodyPr wrap="square" lIns="137160" tIns="91440" rIns="137160" bIns="91440" rtlCol="0" anchor="ctr">
             <a:normAutofit/>
           </a:bodyPr>
           <a:lstStyle/>
           <a:p>
-            <a:pPr marL="0" indent="0" algn="l">
+            <a:pPr marL="0" indent="0" algn="ctr">
               <a:lnSpc>
                 <a:spcPct val="104000"/>
               </a:lnSpc>
@@ -26552,7 +26529,7 @@
             </a:r>
           </a:p>
           <a:p>
-            <a:pPr marL="0" indent="0" algn="l">
+            <a:pPr marL="0" indent="0" algn="ctr">
               <a:lnSpc>
                 <a:spcPct val="104000"/>
               </a:lnSpc>
@@ -26639,12 +26616,12 @@
           </a:ln>
         </p:spPr>
         <p:txBody>
-          <a:bodyPr wrap="square" lIns="137160" tIns="91440" rIns="137160" bIns="91440" rtlCol="0" anchor="t">
+          <a:bodyPr wrap="square" lIns="137160" tIns="91440" rIns="137160" bIns="91440" rtlCol="0" anchor="ctr">
             <a:normAutofit/>
           </a:bodyPr>
           <a:lstStyle/>
           <a:p>
-            <a:pPr marL="0" indent="0" algn="l">
+            <a:pPr marL="0" indent="0" algn="ctr">
               <a:lnSpc>
                 <a:spcPct val="104000"/>
               </a:lnSpc>
@@ -26665,7 +26642,7 @@
             </a:r>
           </a:p>
           <a:p>
-            <a:pPr marL="0" indent="0" algn="l">
+            <a:pPr marL="0" indent="0" algn="ctr">
               <a:lnSpc>
                 <a:spcPct val="104000"/>
               </a:lnSpc>
@@ -26752,12 +26729,12 @@
           </a:ln>
         </p:spPr>
         <p:txBody>
-          <a:bodyPr wrap="square" lIns="137160" tIns="91440" rIns="137160" bIns="91440" rtlCol="0" anchor="t">
+          <a:bodyPr wrap="square" lIns="137160" tIns="91440" rIns="137160" bIns="91440" rtlCol="0" anchor="ctr">
             <a:normAutofit/>
           </a:bodyPr>
           <a:lstStyle/>
           <a:p>
-            <a:pPr marL="0" indent="0" algn="l">
+            <a:pPr marL="0" indent="0" algn="ctr">
               <a:lnSpc>
                 <a:spcPct val="104000"/>
               </a:lnSpc>
@@ -26778,7 +26755,7 @@
             </a:r>
           </a:p>
           <a:p>
-            <a:pPr marL="0" indent="0" algn="l">
+            <a:pPr marL="0" indent="0" algn="ctr">
               <a:lnSpc>
                 <a:spcPct val="104000"/>
               </a:lnSpc>
@@ -26865,12 +26842,12 @@
           </a:ln>
         </p:spPr>
         <p:txBody>
-          <a:bodyPr wrap="square" lIns="137160" tIns="91440" rIns="137160" bIns="91440" rtlCol="0" anchor="t">
+          <a:bodyPr wrap="square" lIns="137160" tIns="91440" rIns="137160" bIns="91440" rtlCol="0" anchor="ctr">
             <a:normAutofit/>
           </a:bodyPr>
           <a:lstStyle/>
           <a:p>
-            <a:pPr marL="0" indent="0" algn="l">
+            <a:pPr marL="0" indent="0" algn="ctr">
               <a:lnSpc>
                 <a:spcPct val="104000"/>
               </a:lnSpc>
@@ -26891,7 +26868,7 @@
             </a:r>
           </a:p>
           <a:p>
-            <a:pPr marL="0" indent="0" algn="l">
+            <a:pPr marL="0" indent="0" algn="ctr">
               <a:lnSpc>
                 <a:spcPct val="104000"/>
               </a:lnSpc>
@@ -26978,12 +26955,12 @@
           </a:ln>
         </p:spPr>
         <p:txBody>
-          <a:bodyPr wrap="square" lIns="137160" tIns="91440" rIns="137160" bIns="91440" rtlCol="0" anchor="t">
+          <a:bodyPr wrap="square" lIns="137160" tIns="91440" rIns="137160" bIns="91440" rtlCol="0" anchor="ctr">
             <a:normAutofit/>
           </a:bodyPr>
           <a:lstStyle/>
           <a:p>
-            <a:pPr marL="0" indent="0" algn="l">
+            <a:pPr marL="0" indent="0" algn="ctr">
               <a:lnSpc>
                 <a:spcPct val="104000"/>
               </a:lnSpc>
@@ -27004,7 +26981,7 @@
             </a:r>
           </a:p>
           <a:p>
-            <a:pPr marL="0" indent="0" algn="l">
+            <a:pPr marL="0" indent="0" algn="ctr">
               <a:lnSpc>
                 <a:spcPct val="104000"/>
               </a:lnSpc>
@@ -27493,12 +27470,12 @@
           </a:ln>
         </p:spPr>
         <p:txBody>
-          <a:bodyPr wrap="square" lIns="137160" tIns="91440" rIns="137160" bIns="91440" rtlCol="0" anchor="t">
+          <a:bodyPr wrap="square" lIns="137160" tIns="91440" rIns="137160" bIns="91440" rtlCol="0" anchor="ctr">
             <a:normAutofit/>
           </a:bodyPr>
           <a:lstStyle/>
           <a:p>
-            <a:pPr marL="0" indent="0" algn="l">
+            <a:pPr marL="0" indent="0" algn="ctr">
               <a:buNone/>
             </a:pPr>
             <a:r>
@@ -27513,15 +27490,14 @@
             </a:r>
           </a:p>
           <a:p>
-            <a:pPr marL="274320" indent="-274320" algn="l">
+            <a:pPr marL="0" indent="0" algn="ctr">
               <a:lnSpc>
                 <a:spcPct val="104000"/>
               </a:lnSpc>
               <a:spcBef>
                 <a:spcPts val="300"/>
               </a:spcBef>
-              <a:buFont typeface="Arial"/>
-              <a:buChar char="•"/>
+              <a:buNone/>
             </a:pPr>
             <a:r>
               <a:rPr lang="en-US" sz="1500" dirty="0">
@@ -27535,15 +27511,14 @@
             </a:r>
           </a:p>
           <a:p>
-            <a:pPr marL="274320" indent="-274320" algn="l">
+            <a:pPr marL="0" indent="0" algn="ctr">
               <a:lnSpc>
                 <a:spcPct val="104000"/>
               </a:lnSpc>
               <a:spcBef>
                 <a:spcPts val="300"/>
               </a:spcBef>
-              <a:buFont typeface="Arial"/>
-              <a:buChar char="•"/>
+              <a:buNone/>
             </a:pPr>
             <a:r>
               <a:rPr lang="en-US" sz="1500" dirty="0">
@@ -27557,15 +27532,14 @@
             </a:r>
           </a:p>
           <a:p>
-            <a:pPr marL="274320" indent="-274320" algn="l">
+            <a:pPr marL="0" indent="0" algn="ctr">
               <a:lnSpc>
                 <a:spcPct val="104000"/>
               </a:lnSpc>
               <a:spcBef>
                 <a:spcPts val="300"/>
               </a:spcBef>
-              <a:buFont typeface="Arial"/>
-              <a:buChar char="•"/>
+              <a:buNone/>
             </a:pPr>
             <a:r>
               <a:rPr lang="en-US" sz="1500" dirty="0">
@@ -27579,15 +27553,14 @@
             </a:r>
           </a:p>
           <a:p>
-            <a:pPr marL="274320" indent="-274320" algn="l">
+            <a:pPr marL="0" indent="0" algn="ctr">
               <a:lnSpc>
                 <a:spcPct val="104000"/>
               </a:lnSpc>
               <a:spcBef>
                 <a:spcPts val="300"/>
               </a:spcBef>
-              <a:buFont typeface="Arial"/>
-              <a:buChar char="•"/>
+              <a:buNone/>
             </a:pPr>
             <a:r>
               <a:rPr lang="en-US" sz="1500" dirty="0">
@@ -27959,12 +27932,12 @@
           </a:ln>
         </p:spPr>
         <p:txBody>
-          <a:bodyPr wrap="square" lIns="137160" tIns="91440" rIns="137160" bIns="91440" rtlCol="0" anchor="t">
+          <a:bodyPr wrap="square" lIns="137160" tIns="91440" rIns="137160" bIns="91440" rtlCol="0" anchor="ctr">
             <a:normAutofit/>
           </a:bodyPr>
           <a:lstStyle/>
           <a:p>
-            <a:pPr marL="0" indent="0" algn="l">
+            <a:pPr marL="0" indent="0" algn="ctr">
               <a:lnSpc>
                 <a:spcPct val="104000"/>
               </a:lnSpc>
@@ -27985,7 +27958,7 @@
             </a:r>
           </a:p>
           <a:p>
-            <a:pPr marL="0" indent="0" algn="l">
+            <a:pPr marL="0" indent="0" algn="ctr">
               <a:lnSpc>
                 <a:spcPct val="104000"/>
               </a:lnSpc>
@@ -28006,7 +27979,7 @@
             </a:r>
           </a:p>
           <a:p>
-            <a:pPr marL="0" indent="0" algn="l">
+            <a:pPr marL="0" indent="0" algn="ctr">
               <a:lnSpc>
                 <a:spcPct val="104000"/>
               </a:lnSpc>
@@ -28093,12 +28066,12 @@
           </a:ln>
         </p:spPr>
         <p:txBody>
-          <a:bodyPr wrap="square" lIns="137160" tIns="91440" rIns="137160" bIns="91440" rtlCol="0" anchor="t">
+          <a:bodyPr wrap="square" lIns="137160" tIns="91440" rIns="137160" bIns="91440" rtlCol="0" anchor="ctr">
             <a:normAutofit/>
           </a:bodyPr>
           <a:lstStyle/>
           <a:p>
-            <a:pPr marL="0" indent="0" algn="l">
+            <a:pPr marL="0" indent="0" algn="ctr">
               <a:lnSpc>
                 <a:spcPct val="104000"/>
               </a:lnSpc>
@@ -28119,7 +28092,7 @@
             </a:r>
           </a:p>
           <a:p>
-            <a:pPr marL="0" indent="0" algn="l">
+            <a:pPr marL="0" indent="0" algn="ctr">
               <a:lnSpc>
                 <a:spcPct val="104000"/>
               </a:lnSpc>
@@ -28140,7 +28113,7 @@
             </a:r>
           </a:p>
           <a:p>
-            <a:pPr marL="0" indent="0" algn="l">
+            <a:pPr marL="0" indent="0" algn="ctr">
               <a:lnSpc>
                 <a:spcPct val="104000"/>
               </a:lnSpc>
@@ -28227,12 +28200,12 @@
           </a:ln>
         </p:spPr>
         <p:txBody>
-          <a:bodyPr wrap="square" lIns="137160" tIns="91440" rIns="137160" bIns="91440" rtlCol="0" anchor="t">
+          <a:bodyPr wrap="square" lIns="137160" tIns="91440" rIns="137160" bIns="91440" rtlCol="0" anchor="ctr">
             <a:normAutofit/>
           </a:bodyPr>
           <a:lstStyle/>
           <a:p>
-            <a:pPr marL="0" indent="0" algn="l">
+            <a:pPr marL="0" indent="0" algn="ctr">
               <a:lnSpc>
                 <a:spcPct val="104000"/>
               </a:lnSpc>
@@ -28253,7 +28226,7 @@
             </a:r>
           </a:p>
           <a:p>
-            <a:pPr marL="0" indent="0" algn="l">
+            <a:pPr marL="0" indent="0" algn="ctr">
               <a:lnSpc>
                 <a:spcPct val="104000"/>
               </a:lnSpc>
@@ -28274,7 +28247,7 @@
             </a:r>
           </a:p>
           <a:p>
-            <a:pPr marL="0" indent="0" algn="l">
+            <a:pPr marL="0" indent="0" algn="ctr">
               <a:lnSpc>
                 <a:spcPct val="104000"/>
               </a:lnSpc>
@@ -28361,12 +28334,12 @@
           </a:ln>
         </p:spPr>
         <p:txBody>
-          <a:bodyPr wrap="square" lIns="137160" tIns="91440" rIns="137160" bIns="91440" rtlCol="0" anchor="t">
+          <a:bodyPr wrap="square" lIns="137160" tIns="91440" rIns="137160" bIns="91440" rtlCol="0" anchor="ctr">
             <a:normAutofit/>
           </a:bodyPr>
           <a:lstStyle/>
           <a:p>
-            <a:pPr marL="0" indent="0" algn="l">
+            <a:pPr marL="0" indent="0" algn="ctr">
               <a:lnSpc>
                 <a:spcPct val="104000"/>
               </a:lnSpc>
@@ -28387,7 +28360,7 @@
             </a:r>
           </a:p>
           <a:p>
-            <a:pPr marL="0" indent="0" algn="l">
+            <a:pPr marL="0" indent="0" algn="ctr">
               <a:lnSpc>
                 <a:spcPct val="104000"/>
               </a:lnSpc>
@@ -28408,7 +28381,7 @@
             </a:r>
           </a:p>
           <a:p>
-            <a:pPr marL="0" indent="0" algn="l">
+            <a:pPr marL="0" indent="0" algn="ctr">
               <a:lnSpc>
                 <a:spcPct val="104000"/>
               </a:lnSpc>
@@ -28872,12 +28845,12 @@
           </a:ln>
         </p:spPr>
         <p:txBody>
-          <a:bodyPr wrap="square" lIns="137160" tIns="91440" rIns="137160" bIns="91440" rtlCol="0" anchor="t">
+          <a:bodyPr wrap="square" lIns="137160" tIns="91440" rIns="137160" bIns="91440" rtlCol="0" anchor="ctr">
             <a:normAutofit/>
           </a:bodyPr>
           <a:lstStyle/>
           <a:p>
-            <a:pPr marL="0" indent="0" algn="l">
+            <a:pPr marL="0" indent="0" algn="ctr">
               <a:buNone/>
             </a:pPr>
             <a:r>
@@ -28892,15 +28865,14 @@
             </a:r>
           </a:p>
           <a:p>
-            <a:pPr marL="274320" indent="-274320" algn="l">
+            <a:pPr marL="0" indent="0" algn="ctr">
               <a:lnSpc>
                 <a:spcPct val="104000"/>
               </a:lnSpc>
               <a:spcBef>
                 <a:spcPts val="300"/>
               </a:spcBef>
-              <a:buFont typeface="Arial"/>
-              <a:buChar char="•"/>
+              <a:buNone/>
             </a:pPr>
             <a:r>
               <a:rPr lang="en-US" sz="1500" dirty="0">
@@ -28914,15 +28886,14 @@
             </a:r>
           </a:p>
           <a:p>
-            <a:pPr marL="274320" indent="-274320" algn="l">
+            <a:pPr marL="0" indent="0" algn="ctr">
               <a:lnSpc>
                 <a:spcPct val="104000"/>
               </a:lnSpc>
               <a:spcBef>
                 <a:spcPts val="300"/>
               </a:spcBef>
-              <a:buFont typeface="Arial"/>
-              <a:buChar char="•"/>
+              <a:buNone/>
             </a:pPr>
             <a:r>
               <a:rPr lang="en-US" sz="1500" dirty="0">
@@ -28936,15 +28907,14 @@
             </a:r>
           </a:p>
           <a:p>
-            <a:pPr marL="274320" indent="-274320" algn="l">
+            <a:pPr marL="0" indent="0" algn="ctr">
               <a:lnSpc>
                 <a:spcPct val="104000"/>
               </a:lnSpc>
               <a:spcBef>
                 <a:spcPts val="300"/>
               </a:spcBef>
-              <a:buFont typeface="Arial"/>
-              <a:buChar char="•"/>
+              <a:buNone/>
             </a:pPr>
             <a:r>
               <a:rPr lang="en-US" sz="1500" dirty="0">
@@ -28958,15 +28928,14 @@
             </a:r>
           </a:p>
           <a:p>
-            <a:pPr marL="274320" indent="-274320" algn="l">
+            <a:pPr marL="0" indent="0" algn="ctr">
               <a:lnSpc>
                 <a:spcPct val="104000"/>
               </a:lnSpc>
               <a:spcBef>
                 <a:spcPts val="300"/>
               </a:spcBef>
-              <a:buFont typeface="Arial"/>
-              <a:buChar char="•"/>
+              <a:buNone/>
             </a:pPr>
             <a:r>
               <a:rPr lang="en-US" sz="1500" dirty="0">
@@ -29338,12 +29307,12 @@
           </a:ln>
         </p:spPr>
         <p:txBody>
-          <a:bodyPr wrap="square" lIns="137160" tIns="91440" rIns="137160" bIns="91440" rtlCol="0" anchor="t">
+          <a:bodyPr wrap="square" lIns="137160" tIns="91440" rIns="137160" bIns="91440" rtlCol="0" anchor="ctr">
             <a:normAutofit/>
           </a:bodyPr>
           <a:lstStyle/>
           <a:p>
-            <a:pPr marL="0" indent="0" algn="l">
+            <a:pPr marL="0" indent="0" algn="ctr">
               <a:lnSpc>
                 <a:spcPct val="104000"/>
               </a:lnSpc>
@@ -29364,7 +29333,7 @@
             </a:r>
           </a:p>
           <a:p>
-            <a:pPr marL="0" indent="0" algn="l">
+            <a:pPr marL="0" indent="0" algn="ctr">
               <a:lnSpc>
                 <a:spcPct val="104000"/>
               </a:lnSpc>
@@ -29385,7 +29354,7 @@
             </a:r>
           </a:p>
           <a:p>
-            <a:pPr marL="0" indent="0" algn="l">
+            <a:pPr marL="0" indent="0" algn="ctr">
               <a:lnSpc>
                 <a:spcPct val="104000"/>
               </a:lnSpc>
@@ -29472,12 +29441,12 @@
           </a:ln>
         </p:spPr>
         <p:txBody>
-          <a:bodyPr wrap="square" lIns="137160" tIns="91440" rIns="137160" bIns="91440" rtlCol="0" anchor="t">
+          <a:bodyPr wrap="square" lIns="137160" tIns="91440" rIns="137160" bIns="91440" rtlCol="0" anchor="ctr">
             <a:normAutofit/>
           </a:bodyPr>
           <a:lstStyle/>
           <a:p>
-            <a:pPr marL="0" indent="0" algn="l">
+            <a:pPr marL="0" indent="0" algn="ctr">
               <a:lnSpc>
                 <a:spcPct val="104000"/>
               </a:lnSpc>
@@ -29498,7 +29467,7 @@
             </a:r>
           </a:p>
           <a:p>
-            <a:pPr marL="0" indent="0" algn="l">
+            <a:pPr marL="0" indent="0" algn="ctr">
               <a:lnSpc>
                 <a:spcPct val="104000"/>
               </a:lnSpc>
@@ -29519,7 +29488,7 @@
             </a:r>
           </a:p>
           <a:p>
-            <a:pPr marL="0" indent="0" algn="l">
+            <a:pPr marL="0" indent="0" algn="ctr">
               <a:lnSpc>
                 <a:spcPct val="104000"/>
               </a:lnSpc>
@@ -29606,12 +29575,12 @@
           </a:ln>
         </p:spPr>
         <p:txBody>
-          <a:bodyPr wrap="square" lIns="137160" tIns="91440" rIns="137160" bIns="91440" rtlCol="0" anchor="t">
+          <a:bodyPr wrap="square" lIns="137160" tIns="91440" rIns="137160" bIns="91440" rtlCol="0" anchor="ctr">
             <a:normAutofit/>
           </a:bodyPr>
           <a:lstStyle/>
           <a:p>
-            <a:pPr marL="0" indent="0" algn="l">
+            <a:pPr marL="0" indent="0" algn="ctr">
               <a:lnSpc>
                 <a:spcPct val="104000"/>
               </a:lnSpc>
@@ -29632,7 +29601,7 @@
             </a:r>
           </a:p>
           <a:p>
-            <a:pPr marL="0" indent="0" algn="l">
+            <a:pPr marL="0" indent="0" algn="ctr">
               <a:lnSpc>
                 <a:spcPct val="104000"/>
               </a:lnSpc>
@@ -29653,7 +29622,7 @@
             </a:r>
           </a:p>
           <a:p>
-            <a:pPr marL="0" indent="0" algn="l">
+            <a:pPr marL="0" indent="0" algn="ctr">
               <a:lnSpc>
                 <a:spcPct val="104000"/>
               </a:lnSpc>
@@ -29740,12 +29709,12 @@
           </a:ln>
         </p:spPr>
         <p:txBody>
-          <a:bodyPr wrap="square" lIns="137160" tIns="91440" rIns="137160" bIns="91440" rtlCol="0" anchor="t">
+          <a:bodyPr wrap="square" lIns="137160" tIns="91440" rIns="137160" bIns="91440" rtlCol="0" anchor="ctr">
             <a:normAutofit/>
           </a:bodyPr>
           <a:lstStyle/>
           <a:p>
-            <a:pPr marL="0" indent="0" algn="l">
+            <a:pPr marL="0" indent="0" algn="ctr">
               <a:lnSpc>
                 <a:spcPct val="104000"/>
               </a:lnSpc>
@@ -29766,7 +29735,7 @@
             </a:r>
           </a:p>
           <a:p>
-            <a:pPr marL="0" indent="0" algn="l">
+            <a:pPr marL="0" indent="0" algn="ctr">
               <a:lnSpc>
                 <a:spcPct val="104000"/>
               </a:lnSpc>
@@ -29787,7 +29756,7 @@
             </a:r>
           </a:p>
           <a:p>
-            <a:pPr marL="0" indent="0" algn="l">
+            <a:pPr marL="0" indent="0" algn="ctr">
               <a:lnSpc>
                 <a:spcPct val="104000"/>
               </a:lnSpc>
@@ -30164,12 +30133,12 @@
           </a:ln>
         </p:spPr>
         <p:txBody>
-          <a:bodyPr wrap="square" lIns="137160" tIns="91440" rIns="137160" bIns="91440" rtlCol="0" anchor="t">
+          <a:bodyPr wrap="square" lIns="137160" tIns="91440" rIns="137160" bIns="91440" rtlCol="0" anchor="ctr">
             <a:normAutofit/>
           </a:bodyPr>
           <a:lstStyle/>
           <a:p>
-            <a:pPr marL="0" indent="0" algn="l">
+            <a:pPr marL="0" indent="0" algn="ctr">
               <a:lnSpc>
                 <a:spcPct val="104000"/>
               </a:lnSpc>
@@ -30190,7 +30159,7 @@
             </a:r>
           </a:p>
           <a:p>
-            <a:pPr marL="0" indent="0" algn="l">
+            <a:pPr marL="0" indent="0" algn="ctr">
               <a:lnSpc>
                 <a:spcPct val="104000"/>
               </a:lnSpc>
@@ -30211,7 +30180,7 @@
             </a:r>
           </a:p>
           <a:p>
-            <a:pPr marL="0" indent="0" algn="l">
+            <a:pPr marL="0" indent="0" algn="ctr">
               <a:lnSpc>
                 <a:spcPct val="104000"/>
               </a:lnSpc>
@@ -30298,12 +30267,12 @@
           </a:ln>
         </p:spPr>
         <p:txBody>
-          <a:bodyPr wrap="square" lIns="137160" tIns="91440" rIns="137160" bIns="91440" rtlCol="0" anchor="t">
+          <a:bodyPr wrap="square" lIns="137160" tIns="91440" rIns="137160" bIns="91440" rtlCol="0" anchor="ctr">
             <a:normAutofit/>
           </a:bodyPr>
           <a:lstStyle/>
           <a:p>
-            <a:pPr marL="0" indent="0" algn="l">
+            <a:pPr marL="0" indent="0" algn="ctr">
               <a:lnSpc>
                 <a:spcPct val="104000"/>
               </a:lnSpc>
@@ -30324,7 +30293,7 @@
             </a:r>
           </a:p>
           <a:p>
-            <a:pPr marL="0" indent="0" algn="l">
+            <a:pPr marL="0" indent="0" algn="ctr">
               <a:lnSpc>
                 <a:spcPct val="104000"/>
               </a:lnSpc>
@@ -30345,7 +30314,7 @@
             </a:r>
           </a:p>
           <a:p>
-            <a:pPr marL="0" indent="0" algn="l">
+            <a:pPr marL="0" indent="0" algn="ctr">
               <a:lnSpc>
                 <a:spcPct val="104000"/>
               </a:lnSpc>
@@ -30432,12 +30401,12 @@
           </a:ln>
         </p:spPr>
         <p:txBody>
-          <a:bodyPr wrap="square" lIns="137160" tIns="91440" rIns="137160" bIns="91440" rtlCol="0" anchor="t">
+          <a:bodyPr wrap="square" lIns="137160" tIns="91440" rIns="137160" bIns="91440" rtlCol="0" anchor="ctr">
             <a:normAutofit/>
           </a:bodyPr>
           <a:lstStyle/>
           <a:p>
-            <a:pPr marL="0" indent="0" algn="l">
+            <a:pPr marL="0" indent="0" algn="ctr">
               <a:lnSpc>
                 <a:spcPct val="104000"/>
               </a:lnSpc>
@@ -30458,7 +30427,7 @@
             </a:r>
           </a:p>
           <a:p>
-            <a:pPr marL="0" indent="0" algn="l">
+            <a:pPr marL="0" indent="0" algn="ctr">
               <a:lnSpc>
                 <a:spcPct val="104000"/>
               </a:lnSpc>
@@ -30479,7 +30448,7 @@
             </a:r>
           </a:p>
           <a:p>
-            <a:pPr marL="0" indent="0" algn="l">
+            <a:pPr marL="0" indent="0" algn="ctr">
               <a:lnSpc>
                 <a:spcPct val="104000"/>
               </a:lnSpc>
@@ -30943,12 +30912,12 @@
           </a:ln>
         </p:spPr>
         <p:txBody>
-          <a:bodyPr wrap="square" lIns="137160" tIns="91440" rIns="137160" bIns="91440" rtlCol="0" anchor="t">
+          <a:bodyPr wrap="square" lIns="137160" tIns="91440" rIns="137160" bIns="91440" rtlCol="0" anchor="ctr">
             <a:normAutofit/>
           </a:bodyPr>
           <a:lstStyle/>
           <a:p>
-            <a:pPr marL="0" indent="0" algn="l">
+            <a:pPr marL="0" indent="0" algn="ctr">
               <a:buNone/>
             </a:pPr>
             <a:r>
@@ -30963,15 +30932,14 @@
             </a:r>
           </a:p>
           <a:p>
-            <a:pPr marL="274320" indent="-274320" algn="l">
+            <a:pPr marL="0" indent="0" algn="ctr">
               <a:lnSpc>
                 <a:spcPct val="104000"/>
               </a:lnSpc>
               <a:spcBef>
                 <a:spcPts val="300"/>
               </a:spcBef>
-              <a:buFont typeface="Arial"/>
-              <a:buChar char="•"/>
+              <a:buNone/>
             </a:pPr>
             <a:r>
               <a:rPr lang="en-US" sz="1500" dirty="0">
@@ -30985,15 +30953,14 @@
             </a:r>
           </a:p>
           <a:p>
-            <a:pPr marL="274320" indent="-274320" algn="l">
+            <a:pPr marL="0" indent="0" algn="ctr">
               <a:lnSpc>
                 <a:spcPct val="104000"/>
               </a:lnSpc>
               <a:spcBef>
                 <a:spcPts val="300"/>
               </a:spcBef>
-              <a:buFont typeface="Arial"/>
-              <a:buChar char="•"/>
+              <a:buNone/>
             </a:pPr>
             <a:r>
               <a:rPr lang="en-US" sz="1500" dirty="0">
@@ -31007,15 +30974,14 @@
             </a:r>
           </a:p>
           <a:p>
-            <a:pPr marL="274320" indent="-274320" algn="l">
+            <a:pPr marL="0" indent="0" algn="ctr">
               <a:lnSpc>
                 <a:spcPct val="104000"/>
               </a:lnSpc>
               <a:spcBef>
                 <a:spcPts val="300"/>
               </a:spcBef>
-              <a:buFont typeface="Arial"/>
-              <a:buChar char="•"/>
+              <a:buNone/>
             </a:pPr>
             <a:r>
               <a:rPr lang="en-US" sz="1500" dirty="0">
@@ -31029,15 +30995,14 @@
             </a:r>
           </a:p>
           <a:p>
-            <a:pPr marL="274320" indent="-274320" algn="l">
+            <a:pPr marL="0" indent="0" algn="ctr">
               <a:lnSpc>
                 <a:spcPct val="104000"/>
               </a:lnSpc>
               <a:spcBef>
                 <a:spcPts val="300"/>
               </a:spcBef>
-              <a:buFont typeface="Arial"/>
-              <a:buChar char="•"/>
+              <a:buNone/>
             </a:pPr>
             <a:r>
               <a:rPr lang="en-US" sz="1500" dirty="0">
@@ -31051,15 +31016,14 @@
             </a:r>
           </a:p>
           <a:p>
-            <a:pPr marL="274320" indent="-274320" algn="l">
+            <a:pPr marL="0" indent="0" algn="ctr">
               <a:lnSpc>
                 <a:spcPct val="104000"/>
               </a:lnSpc>
               <a:spcBef>
                 <a:spcPts val="300"/>
               </a:spcBef>
-              <a:buFont typeface="Arial"/>
-              <a:buChar char="•"/>
+              <a:buNone/>
             </a:pPr>
             <a:r>
               <a:rPr lang="en-US" sz="1500" dirty="0">
@@ -31126,7 +31090,7 @@
                 <a:latin typeface="Arial"/>
                 <a:cs typeface="Arial"/>
               </a:rPr>
-              <a:t>Exit answer in the chat (or a one-question form)</a:t>
+              <a:t>Exit answer in the chat</a:t>
             </a:r>
           </a:p>
         </p:txBody>
@@ -31687,12 +31651,12 @@
           </a:ln>
         </p:spPr>
         <p:txBody>
-          <a:bodyPr wrap="square" lIns="137160" tIns="91440" rIns="137160" bIns="91440" rtlCol="0" anchor="t">
+          <a:bodyPr wrap="square" lIns="137160" tIns="91440" rIns="137160" bIns="91440" rtlCol="0" anchor="ctr">
             <a:normAutofit/>
           </a:bodyPr>
           <a:lstStyle/>
           <a:p>
-            <a:pPr marL="0" indent="0" algn="l">
+            <a:pPr marL="0" indent="0" algn="ctr">
               <a:lnSpc>
                 <a:spcPct val="104000"/>
               </a:lnSpc>
@@ -31713,7 +31677,7 @@
             </a:r>
           </a:p>
           <a:p>
-            <a:pPr marL="0" indent="0" algn="l">
+            <a:pPr marL="0" indent="0" algn="ctr">
               <a:lnSpc>
                 <a:spcPct val="104000"/>
               </a:lnSpc>
@@ -31734,7 +31698,7 @@
             </a:r>
           </a:p>
           <a:p>
-            <a:pPr marL="0" indent="0" algn="l">
+            <a:pPr marL="0" indent="0" algn="ctr">
               <a:lnSpc>
                 <a:spcPct val="104000"/>
               </a:lnSpc>
@@ -31821,12 +31785,12 @@
           </a:ln>
         </p:spPr>
         <p:txBody>
-          <a:bodyPr wrap="square" lIns="137160" tIns="91440" rIns="137160" bIns="91440" rtlCol="0" anchor="t">
+          <a:bodyPr wrap="square" lIns="137160" tIns="91440" rIns="137160" bIns="91440" rtlCol="0" anchor="ctr">
             <a:normAutofit/>
           </a:bodyPr>
           <a:lstStyle/>
           <a:p>
-            <a:pPr marL="0" indent="0" algn="l">
+            <a:pPr marL="0" indent="0" algn="ctr">
               <a:lnSpc>
                 <a:spcPct val="104000"/>
               </a:lnSpc>
@@ -31847,7 +31811,7 @@
             </a:r>
           </a:p>
           <a:p>
-            <a:pPr marL="0" indent="0" algn="l">
+            <a:pPr marL="0" indent="0" algn="ctr">
               <a:lnSpc>
                 <a:spcPct val="104000"/>
               </a:lnSpc>
@@ -31934,12 +31898,12 @@
           </a:ln>
         </p:spPr>
         <p:txBody>
-          <a:bodyPr wrap="square" lIns="137160" tIns="91440" rIns="137160" bIns="91440" rtlCol="0" anchor="t">
+          <a:bodyPr wrap="square" lIns="137160" tIns="91440" rIns="137160" bIns="91440" rtlCol="0" anchor="ctr">
             <a:normAutofit/>
           </a:bodyPr>
           <a:lstStyle/>
           <a:p>
-            <a:pPr marL="0" indent="0" algn="l">
+            <a:pPr marL="0" indent="0" algn="ctr">
               <a:lnSpc>
                 <a:spcPct val="104000"/>
               </a:lnSpc>
@@ -31960,7 +31924,7 @@
             </a:r>
           </a:p>
           <a:p>
-            <a:pPr marL="0" indent="0" algn="l">
+            <a:pPr marL="0" indent="0" algn="ctr">
               <a:lnSpc>
                 <a:spcPct val="104000"/>
               </a:lnSpc>
@@ -31981,7 +31945,7 @@
             </a:r>
           </a:p>
           <a:p>
-            <a:pPr marL="0" indent="0" algn="l">
+            <a:pPr marL="0" indent="0" algn="ctr">
               <a:lnSpc>
                 <a:spcPct val="104000"/>
               </a:lnSpc>
@@ -32068,12 +32032,12 @@
           </a:ln>
         </p:spPr>
         <p:txBody>
-          <a:bodyPr wrap="square" lIns="137160" tIns="91440" rIns="137160" bIns="91440" rtlCol="0" anchor="t">
+          <a:bodyPr wrap="square" lIns="137160" tIns="91440" rIns="137160" bIns="91440" rtlCol="0" anchor="ctr">
             <a:normAutofit/>
           </a:bodyPr>
           <a:lstStyle/>
           <a:p>
-            <a:pPr marL="0" indent="0" algn="l">
+            <a:pPr marL="0" indent="0" algn="ctr">
               <a:lnSpc>
                 <a:spcPct val="104000"/>
               </a:lnSpc>
@@ -32094,7 +32058,7 @@
             </a:r>
           </a:p>
           <a:p>
-            <a:pPr marL="0" indent="0" algn="l">
+            <a:pPr marL="0" indent="0" algn="ctr">
               <a:lnSpc>
                 <a:spcPct val="104000"/>
               </a:lnSpc>
@@ -33134,12 +33098,12 @@
           </a:ln>
         </p:spPr>
         <p:txBody>
-          <a:bodyPr wrap="square" lIns="137160" tIns="91440" rIns="137160" bIns="91440" rtlCol="0" anchor="t">
+          <a:bodyPr wrap="square" lIns="137160" tIns="91440" rIns="137160" bIns="91440" rtlCol="0" anchor="ctr">
             <a:normAutofit/>
           </a:bodyPr>
           <a:lstStyle/>
           <a:p>
-            <a:pPr marL="0" indent="0" algn="l">
+            <a:pPr marL="0" indent="0" algn="ctr">
               <a:buNone/>
             </a:pPr>
             <a:r>
@@ -33154,15 +33118,14 @@
             </a:r>
           </a:p>
           <a:p>
-            <a:pPr marL="274320" indent="-274320" algn="l">
+            <a:pPr marL="0" indent="0" algn="ctr">
               <a:lnSpc>
                 <a:spcPct val="104000"/>
               </a:lnSpc>
               <a:spcBef>
                 <a:spcPts val="300"/>
               </a:spcBef>
-              <a:buFont typeface="Arial"/>
-              <a:buChar char="•"/>
+              <a:buNone/>
             </a:pPr>
             <a:r>
               <a:rPr lang="en-US" sz="1500" dirty="0">
@@ -33176,15 +33139,14 @@
             </a:r>
           </a:p>
           <a:p>
-            <a:pPr marL="274320" indent="-274320" algn="l">
+            <a:pPr marL="0" indent="0" algn="ctr">
               <a:lnSpc>
                 <a:spcPct val="104000"/>
               </a:lnSpc>
               <a:spcBef>
                 <a:spcPts val="300"/>
               </a:spcBef>
-              <a:buFont typeface="Arial"/>
-              <a:buChar char="•"/>
+              <a:buNone/>
             </a:pPr>
             <a:r>
               <a:rPr lang="en-US" sz="1500" dirty="0">
@@ -33198,15 +33160,14 @@
             </a:r>
           </a:p>
           <a:p>
-            <a:pPr marL="274320" indent="-274320" algn="l">
+            <a:pPr marL="0" indent="0" algn="ctr">
               <a:lnSpc>
                 <a:spcPct val="104000"/>
               </a:lnSpc>
               <a:spcBef>
                 <a:spcPts val="300"/>
               </a:spcBef>
-              <a:buFont typeface="Arial"/>
-              <a:buChar char="•"/>
+              <a:buNone/>
             </a:pPr>
             <a:r>
               <a:rPr lang="en-US" sz="1500" dirty="0">
@@ -33220,15 +33181,14 @@
             </a:r>
           </a:p>
           <a:p>
-            <a:pPr marL="274320" indent="-274320" algn="l">
+            <a:pPr marL="0" indent="0" algn="ctr">
               <a:lnSpc>
                 <a:spcPct val="104000"/>
               </a:lnSpc>
               <a:spcBef>
                 <a:spcPts val="300"/>
               </a:spcBef>
-              <a:buFont typeface="Arial"/>
-              <a:buChar char="•"/>
+              <a:buNone/>
             </a:pPr>
             <a:r>
               <a:rPr lang="en-US" sz="1500" dirty="0">
@@ -33242,15 +33202,14 @@
             </a:r>
           </a:p>
           <a:p>
-            <a:pPr marL="274320" indent="-274320" algn="l">
+            <a:pPr marL="0" indent="0" algn="ctr">
               <a:lnSpc>
                 <a:spcPct val="104000"/>
               </a:lnSpc>
               <a:spcBef>
                 <a:spcPts val="300"/>
               </a:spcBef>
-              <a:buFont typeface="Arial"/>
-              <a:buChar char="•"/>
+              <a:buNone/>
             </a:pPr>
             <a:r>
               <a:rPr lang="en-US" sz="1500" dirty="0">
@@ -33985,12 +33944,12 @@
           </a:ln>
         </p:spPr>
         <p:txBody>
-          <a:bodyPr wrap="square" lIns="110000" tIns="91440" rIns="110000" bIns="91440" rtlCol="0" anchor="t">
+          <a:bodyPr wrap="square" lIns="110000" tIns="91440" rIns="110000" bIns="91440" rtlCol="0" anchor="ctr">
             <a:normAutofit/>
           </a:bodyPr>
           <a:lstStyle/>
           <a:p>
-            <a:pPr marL="0" indent="0" algn="l">
+            <a:pPr marL="0" indent="0" algn="ctr">
               <a:lnSpc>
                 <a:spcPct val="104000"/>
               </a:lnSpc>
@@ -34011,7 +33970,7 @@
             </a:r>
           </a:p>
           <a:p>
-            <a:pPr marL="0" indent="0" algn="l">
+            <a:pPr marL="0" indent="0" algn="ctr">
               <a:lnSpc>
                 <a:spcPct val="104000"/>
               </a:lnSpc>
@@ -34100,12 +34059,12 @@
           </a:ln>
         </p:spPr>
         <p:txBody>
-          <a:bodyPr wrap="square" lIns="110000" tIns="91440" rIns="110000" bIns="91440" rtlCol="0" anchor="t">
+          <a:bodyPr wrap="square" lIns="110000" tIns="91440" rIns="110000" bIns="91440" rtlCol="0" anchor="ctr">
             <a:normAutofit/>
           </a:bodyPr>
           <a:lstStyle/>
           <a:p>
-            <a:pPr marL="0" indent="0" algn="l">
+            <a:pPr marL="0" indent="0" algn="ctr">
               <a:lnSpc>
                 <a:spcPct val="104000"/>
               </a:lnSpc>
@@ -34194,12 +34153,12 @@
           </a:ln>
         </p:spPr>
         <p:txBody>
-          <a:bodyPr wrap="square" lIns="110000" tIns="91440" rIns="110000" bIns="91440" rtlCol="0" anchor="t">
+          <a:bodyPr wrap="square" lIns="110000" tIns="91440" rIns="110000" bIns="91440" rtlCol="0" anchor="ctr">
             <a:normAutofit/>
           </a:bodyPr>
           <a:lstStyle/>
           <a:p>
-            <a:pPr marL="0" indent="0" algn="l">
+            <a:pPr marL="0" indent="0" algn="ctr">
               <a:lnSpc>
                 <a:spcPct val="104000"/>
               </a:lnSpc>
@@ -34288,12 +34247,12 @@
           </a:ln>
         </p:spPr>
         <p:txBody>
-          <a:bodyPr wrap="square" lIns="110000" tIns="91440" rIns="110000" bIns="91440" rtlCol="0" anchor="t">
+          <a:bodyPr wrap="square" lIns="110000" tIns="91440" rIns="110000" bIns="91440" rtlCol="0" anchor="ctr">
             <a:normAutofit/>
           </a:bodyPr>
           <a:lstStyle/>
           <a:p>
-            <a:pPr marL="0" indent="0" algn="l">
+            <a:pPr marL="0" indent="0" algn="ctr">
               <a:lnSpc>
                 <a:spcPct val="104000"/>
               </a:lnSpc>
@@ -34314,7 +34273,7 @@
             </a:r>
           </a:p>
           <a:p>
-            <a:pPr marL="0" indent="0" algn="l">
+            <a:pPr marL="0" indent="0" algn="ctr">
               <a:lnSpc>
                 <a:spcPct val="104000"/>
               </a:lnSpc>
@@ -34403,12 +34362,12 @@
           </a:ln>
         </p:spPr>
         <p:txBody>
-          <a:bodyPr wrap="square" lIns="110000" tIns="91440" rIns="110000" bIns="91440" rtlCol="0" anchor="t">
+          <a:bodyPr wrap="square" lIns="110000" tIns="91440" rIns="110000" bIns="91440" rtlCol="0" anchor="ctr">
             <a:normAutofit/>
           </a:bodyPr>
           <a:lstStyle/>
           <a:p>
-            <a:pPr marL="0" indent="0" algn="l">
+            <a:pPr marL="0" indent="0" algn="ctr">
               <a:lnSpc>
                 <a:spcPct val="104000"/>
               </a:lnSpc>
@@ -34429,7 +34388,7 @@
             </a:r>
           </a:p>
           <a:p>
-            <a:pPr marL="0" indent="0" algn="l">
+            <a:pPr marL="0" indent="0" algn="ctr">
               <a:lnSpc>
                 <a:spcPct val="104000"/>
               </a:lnSpc>
@@ -34806,12 +34765,12 @@
           </a:ln>
         </p:spPr>
         <p:txBody>
-          <a:bodyPr wrap="square" lIns="137160" tIns="91440" rIns="137160" bIns="91440" rtlCol="0" anchor="t">
+          <a:bodyPr wrap="square" lIns="137160" tIns="91440" rIns="137160" bIns="91440" rtlCol="0" anchor="ctr">
             <a:normAutofit/>
           </a:bodyPr>
           <a:lstStyle/>
           <a:p>
-            <a:pPr marL="0" indent="0" algn="l">
+            <a:pPr marL="0" indent="0" algn="ctr">
               <a:lnSpc>
                 <a:spcPct val="104000"/>
               </a:lnSpc>
@@ -34832,7 +34791,7 @@
             </a:r>
           </a:p>
           <a:p>
-            <a:pPr marL="0" indent="0" algn="l">
+            <a:pPr marL="0" indent="0" algn="ctr">
               <a:lnSpc>
                 <a:spcPct val="104000"/>
               </a:lnSpc>
@@ -34919,12 +34878,12 @@
           </a:ln>
         </p:spPr>
         <p:txBody>
-          <a:bodyPr wrap="square" lIns="137160" tIns="91440" rIns="137160" bIns="91440" rtlCol="0" anchor="t">
+          <a:bodyPr wrap="square" lIns="137160" tIns="91440" rIns="137160" bIns="91440" rtlCol="0" anchor="ctr">
             <a:normAutofit/>
           </a:bodyPr>
           <a:lstStyle/>
           <a:p>
-            <a:pPr marL="0" indent="0" algn="l">
+            <a:pPr marL="0" indent="0" algn="ctr">
               <a:lnSpc>
                 <a:spcPct val="104000"/>
               </a:lnSpc>
@@ -34945,7 +34904,7 @@
             </a:r>
           </a:p>
           <a:p>
-            <a:pPr marL="0" indent="0" algn="l">
+            <a:pPr marL="0" indent="0" algn="ctr">
               <a:lnSpc>
                 <a:spcPct val="104000"/>
               </a:lnSpc>
@@ -35032,12 +34991,12 @@
           </a:ln>
         </p:spPr>
         <p:txBody>
-          <a:bodyPr wrap="square" lIns="137160" tIns="91440" rIns="137160" bIns="91440" rtlCol="0" anchor="t">
+          <a:bodyPr wrap="square" lIns="137160" tIns="91440" rIns="137160" bIns="91440" rtlCol="0" anchor="ctr">
             <a:normAutofit/>
           </a:bodyPr>
           <a:lstStyle/>
           <a:p>
-            <a:pPr marL="0" indent="0" algn="l">
+            <a:pPr marL="0" indent="0" algn="ctr">
               <a:lnSpc>
                 <a:spcPct val="104000"/>
               </a:lnSpc>
@@ -35058,7 +35017,7 @@
             </a:r>
           </a:p>
           <a:p>
-            <a:pPr marL="0" indent="0" algn="l">
+            <a:pPr marL="0" indent="0" algn="ctr">
               <a:lnSpc>
                 <a:spcPct val="104000"/>
               </a:lnSpc>
@@ -35145,12 +35104,12 @@
           </a:ln>
         </p:spPr>
         <p:txBody>
-          <a:bodyPr wrap="square" lIns="137160" tIns="91440" rIns="137160" bIns="91440" rtlCol="0" anchor="t">
+          <a:bodyPr wrap="square" lIns="137160" tIns="91440" rIns="137160" bIns="91440" rtlCol="0" anchor="ctr">
             <a:normAutofit/>
           </a:bodyPr>
           <a:lstStyle/>
           <a:p>
-            <a:pPr marL="0" indent="0" algn="l">
+            <a:pPr marL="0" indent="0" algn="ctr">
               <a:lnSpc>
                 <a:spcPct val="104000"/>
               </a:lnSpc>
@@ -35171,7 +35130,7 @@
             </a:r>
           </a:p>
           <a:p>
-            <a:pPr marL="0" indent="0" algn="l">
+            <a:pPr marL="0" indent="0" algn="ctr">
               <a:lnSpc>
                 <a:spcPct val="104000"/>
               </a:lnSpc>
@@ -35258,12 +35217,12 @@
           </a:ln>
         </p:spPr>
         <p:txBody>
-          <a:bodyPr wrap="square" lIns="137160" tIns="91440" rIns="137160" bIns="91440" rtlCol="0" anchor="t">
+          <a:bodyPr wrap="square" lIns="137160" tIns="91440" rIns="137160" bIns="91440" rtlCol="0" anchor="ctr">
             <a:normAutofit/>
           </a:bodyPr>
           <a:lstStyle/>
           <a:p>
-            <a:pPr marL="0" indent="0" algn="l">
+            <a:pPr marL="0" indent="0" algn="ctr">
               <a:lnSpc>
                 <a:spcPct val="104000"/>
               </a:lnSpc>
@@ -35284,7 +35243,7 @@
             </a:r>
           </a:p>
           <a:p>
-            <a:pPr marL="0" indent="0" algn="l">
+            <a:pPr marL="0" indent="0" algn="ctr">
               <a:lnSpc>
                 <a:spcPct val="104000"/>
               </a:lnSpc>

--- a/en/files/slides/Session_5_EN.pptx
+++ b/en/files/slides/Session_5_EN.pptx
@@ -737,43 +737,19 @@
           <a:p>
             <a:r>
               <a:rPr lang="en-US" sz="1400" b="0" dirty="0"/>
-              <a:t>Welcome to Week 5. We meet online, 19:30 to 22:30 with a 15-minute break. Sessions 1-4 asked a question, found the evidence and chose a design. Over these two Saturdays we measure and analyse: today (Session 5) the data, next Saturday (Session 6) the analysis.</a:t>
+              <a:t>Session 5 (19:30-22:30, break 20:40-20:55). Today the data, next Saturday the analysis.</a:t>
             </a:r>
           </a:p>
           <a:p>
             <a:r>
               <a:rPr lang="en-US" sz="1400" b="0" dirty="0"/>
-              <a:t>Key promise: no formulas. Every idea comes as a picture, then a worked example, then a one-minute check: a poll, or two or three people called on with the microphone on. Your job is to interpret, not to calculate.</a:t>
+              <a:t>New: the simulated course dataset FLUID-ICU (620 adults with sepsis) and five questions, Q1 to Q5. At the end of Session 6 each participant chooses one and writes its Results section.</a:t>
             </a:r>
           </a:p>
           <a:p>
             <a:r>
               <a:rPr lang="en-US" sz="1400" b="0" dirty="0"/>
-              <a:t>New in Weeks 5-6: the course dataset FLUID-ICU, a realistic (simulated) cohort of 620 adults with sepsis. You will see it cleaned and described live in R on the shared screen. It comes with five research questions (Q1 to Q5), each with a results pack. In class we work through the questions together. Later, each of you chooses one question and writes your own manuscript from its results pack in Weeks 7-8: we give you the results, you write the paper.</a:t>
-            </a:r>
-          </a:p>
-          <a:p>
-            <a:r>
-              <a:rPr lang="en-US" sz="1400" b="0" dirty="0"/>
-              <a:t>Running example: fluids in septic shock. The variable 'cumulative fluid balance (ml/kg)' follows us all evening: on the form, in the data dictionary, in the cleaned dataset, in Table 1.</a:t>
-            </a:r>
-          </a:p>
-          <a:p>
-            <a:r>
-              <a:rPr lang="en-US" sz="1400" b="0" dirty="0"/>
-              <a:t>Ask the class (call on two or three people, microphone on): who has ever filled in a data collection form and thought 'what does this box actually want?' Expected: many replies. That is section 5.1.</a:t>
-            </a:r>
-          </a:p>
-          <a:p>
-            <a:r>
-              <a:rPr lang="en-US" sz="1400" b="0" dirty="0"/>
-              <a:t>Timing: recap 19:30, 5.1 at 19:40, 5.2 at 20:15, break at 20:40, 5.3 at 20:55, 5.4 at 21:30, proposal builder at 21:55, wrap-up at 22:25.</a:t>
-            </a:r>
-          </a:p>
-          <a:p>
-            <a:r>
-              <a:rPr lang="en-US" sz="1400" b="0" dirty="0"/>
-              <a:t>Pace: slow. Attention is lower online in the evening. If the class needs time, skip the extra slides at the end. Never skip the checks.</a:t>
+              <a:t>No formulas: picture, worked example, check. Never skip the checks.</a:t>
             </a:r>
           </a:p>
         </p:txBody>
@@ -854,55 +830,25 @@
           <a:p>
             <a:r>
               <a:rPr lang="en-US" sz="1400" b="0" dirty="0"/>
-              <a:t>Teaching point: four simple types of check catch most data-entry errors.</a:t>
+              <a:t>Four checks catch most entry errors: range, consistency, logic, completeness. The range comes from the data dictionary.</a:t>
             </a:r>
           </a:p>
           <a:p>
             <a:r>
               <a:rPr lang="en-US" sz="1400" b="0" dirty="0"/>
-              <a:t>Range check: a value outside the allowed range (age 230 was probably 23 or 30). The range comes straight from the data dictionary.</a:t>
+              <a:t>Find errors while the chart is still on the ward.</a:t>
             </a:r>
           </a:p>
           <a:p>
             <a:r>
               <a:rPr lang="en-US" sz="1400" b="0" dirty="0"/>
-              <a:t>Consistency check: two values that cannot both be true (discharge before admission).</a:t>
+              <a:t>Ask: what impossible values have you seen? Expected: 700 kg, future dates.</a:t>
             </a:r>
           </a:p>
           <a:p>
             <a:r>
               <a:rPr lang="en-US" sz="1400" b="0" dirty="0"/>
-              <a:t>Logic check: an impossible combination of answers (male and pregnant).</a:t>
-            </a:r>
-          </a:p>
-          <a:p>
-            <a:r>
-              <a:rPr lang="en-US" sz="1400" b="0" dirty="0"/>
-              <a:t>Completeness check: a required field is empty. Chase it now while the chart is still available.</a:t>
-            </a:r>
-          </a:p>
-          <a:p>
-            <a:r>
-              <a:rPr lang="en-US" sz="1400" b="0" dirty="0"/>
-              <a:t>How to do it in practice: electronic forms can block impossible values at entry (next slide). On paper, a weekly check by the study coordinator does the same job.</a:t>
-            </a:r>
-          </a:p>
-          <a:p>
-            <a:r>
-              <a:rPr lang="en-US" sz="1400" b="0" dirty="0"/>
-              <a:t>Clinical point: the earlier you find the error, the easier it is to fix. Next week the patient's chart is still on the ward. Next year it is archived.</a:t>
-            </a:r>
-          </a:p>
-          <a:p>
-            <a:r>
-              <a:rPr lang="en-US" sz="1400" b="0" dirty="0"/>
-              <a:t>Ask (call on two or three people, microphone on): what impossible values have you seen in hospital data? Expected: weights of 700 kg, dates in the future, a heart rate of 0 in a living patient.</a:t>
-            </a:r>
-          </a:p>
-          <a:p>
-            <a:r>
-              <a:rPr lang="en-US" sz="1400" b="0" dirty="0"/>
-              <a:t>Timing: 2 minutes. Then data management in practice, then the two missing-data slides.</a:t>
+              <a:t>Timing: 2 minutes.</a:t>
             </a:r>
           </a:p>
         </p:txBody>
@@ -983,37 +929,19 @@
           <a:p>
             <a:r>
               <a:rPr lang="en-US" sz="1400" b="0" dirty="0"/>
-              <a:t>Teaching point: good data need a safe route from the patient to the analysis file. Two routes are shown.</a:t>
+              <a:t>Two safe routes: paper with double data entry, or electronic data capture (REDCap, KoBoToolbox) with checks at entry.</a:t>
             </a:r>
           </a:p>
           <a:p>
             <a:r>
               <a:rPr lang="en-US" sz="1400" b="0" dirty="0"/>
-              <a:t>Paper route: the CRF is typed into the computer twice by two different people (double data entry). A simple comparison shows every mismatch, and each one is corrected by looking at the paper form. This catches most typing errors (lactate 21 instead of 2.1).</a:t>
+              <a:t>The database holds study codes, never names, and keeps an audit trail.</a:t>
             </a:r>
           </a:p>
           <a:p>
             <a:r>
               <a:rPr lang="en-US" sz="1400" b="0" dirty="0"/>
-              <a:t>Electronic data capture (EDC): the form is filled directly on a tablet or computer. Free, widely used examples are REDCap and KoBoToolbox. The range, logic and required-field checks from the data dictionary run at entry, so impossible values are blocked before they are saved.</a:t>
-            </a:r>
-          </a:p>
-          <a:p>
-            <a:r>
-              <a:rPr lang="en-US" sz="1400" b="0" dirty="0"/>
-              <a:t>Audit trail (third card): a good system records who changed what, when and why. Never overwrite silently. Ethics committees, monitors and journals may ask for this.</a:t>
-            </a:r>
-          </a:p>
-          <a:p>
-            <a:r>
-              <a:rPr lang="en-US" sz="1400" b="0" dirty="0"/>
-              <a:t>The database holds coded study IDs, not names. The key linking IDs to names is kept separately and locked.</a:t>
-            </a:r>
-          </a:p>
-          <a:p>
-            <a:r>
-              <a:rPr lang="en-US" sz="1400" b="0" dirty="0"/>
-              <a:t>Ask (call on two or three people, microphone on): who has seen an Excel sheet with names, phone numbers and results in the same file, emailed around? Expected: many. That is exactly what we want to avoid.</a:t>
+              <a:t>Ask: who has seen an Excel file with names and results emailed around?</a:t>
             </a:r>
           </a:p>
           <a:p>
@@ -1100,43 +1028,19 @@
           <a:p>
             <a:r>
               <a:rPr lang="en-US" sz="1400" b="0" dirty="0"/>
-              <a:t>Missing data, part 1: why it matters (prevention is next, the mechanisms and statistical handling come in Session 6, section 6.4).</a:t>
+              <a:t>Missing data, part 1. Walk the picture: 30% truly died, but 15 deaths have an empty box, so we see 18%.</a:t>
             </a:r>
           </a:p>
           <a:p>
             <a:r>
               <a:rPr lang="en-US" sz="1400" b="0" dirty="0"/>
-              <a:t>Teaching point: missing data reduce the number of patients, and they can also give the wrong answer.</a:t>
+              <a:t>Missing is linked to the outcome: the sickest go missing first. Who is missing matters more than how many.</a:t>
             </a:r>
           </a:p>
           <a:p>
             <a:r>
               <a:rPr lang="en-US" sz="1400" b="0" dirty="0"/>
-              <a:t>Walk through the picture: 100 patients, 30 truly died. But 15 of the deaths have an empty outcome box (transferred out, died at night, form never completed). Among the 85 recorded patients we see 15 deaths: 18%. The truth was 30%.</a:t>
-            </a:r>
-          </a:p>
-          <a:p>
-            <a:r>
-              <a:rPr lang="en-US" sz="1400" b="0" dirty="0"/>
-              <a:t>Why? Because missing is linked to the outcome itself. The sickest, most chaotic patients are the ones whose forms stay empty.</a:t>
-            </a:r>
-          </a:p>
-          <a:p>
-            <a:r>
-              <a:rPr lang="en-US" sz="1400" b="0" dirty="0"/>
-              <a:t>Common misconception: 'we lost only 15%, that is fine'. The amount matters less than who is missing.</a:t>
-            </a:r>
-          </a:p>
-          <a:p>
-            <a:r>
-              <a:rPr lang="en-US" sz="1400" b="0" dirty="0"/>
-              <a:t>Next Saturday (Session 6, 6.4) we name the mechanisms (MCAR, MAR, MNAR) and see the idea of multiple imputation. But statistical fixes are always second best to prevention.</a:t>
-            </a:r>
-          </a:p>
-          <a:p>
-            <a:r>
-              <a:rPr lang="en-US" sz="1400" b="0" dirty="0"/>
-              <a:t>Ask (call on two or three people, microphone on): in your unit, which patients are most likely to have incomplete records? Expected: transfers, deaths, night admissions, very short stays.</a:t>
+              <a:t>Mechanisms and imputation come in 6.4.</a:t>
             </a:r>
           </a:p>
         </p:txBody>
@@ -1217,55 +1121,19 @@
           <a:p>
             <a:r>
               <a:rPr lang="en-US" sz="1400" b="0" dirty="0"/>
-              <a:t>Missing data, part 2: prevention.</a:t>
+              <a:t>Missing data, part 2: five habits prevent most of it.</a:t>
             </a:r>
           </a:p>
           <a:p>
             <a:r>
               <a:rPr lang="en-US" sz="1400" b="0" dirty="0"/>
-              <a:t>Teaching point: five habits prevent most missing data.</a:t>
+              <a:t>The day-28 outcome is the most often missing variable in ICU studies: plan who checks it for transfers.</a:t>
             </a:r>
           </a:p>
           <a:p>
             <a:r>
               <a:rPr lang="en-US" sz="1400" b="0" dirty="0"/>
-              <a:t>Fewer items: every extra item increases the chance that something is left blank.</a:t>
-            </a:r>
-          </a:p>
-          <a:p>
-            <a:r>
-              <a:rPr lang="en-US" sz="1400" b="0" dirty="0"/>
-              <a:t>Clear form: mark required fields. Give 'not done' and 'unknown' options so a blank always means 'forgotten'.</a:t>
-            </a:r>
-          </a:p>
-          <a:p>
-            <a:r>
-              <a:rPr lang="en-US" sz="1400" b="0" dirty="0"/>
-              <a:t>Train: a 30-minute session for every nurse or resident who will collect data, with the data dictionary in hand.</a:t>
-            </a:r>
-          </a:p>
-          <a:p>
-            <a:r>
-              <a:rPr lang="en-US" sz="1400" b="0" dirty="0"/>
-              <a:t>Check weekly: a simple count of empty boxes per variable and per patient. If one item is always empty, the item is the problem.</a:t>
-            </a:r>
-          </a:p>
-          <a:p>
-            <a:r>
-              <a:rPr lang="en-US" sz="1400" b="0" dirty="0"/>
-              <a:t>Chase early: the day-28 outcome is the most often missing variable in ICU studies. Plan who will check it (phone call, records) for patients transferred out.</a:t>
-            </a:r>
-          </a:p>
-          <a:p>
-            <a:r>
-              <a:rPr lang="en-US" sz="1400" b="0" dirty="0"/>
-              <a:t>Mention: write these steps into your proposal as the 'data quality plan' (Part 3).</a:t>
-            </a:r>
-          </a:p>
-          <a:p>
-            <a:r>
-              <a:rPr lang="en-US" sz="1400" b="0" dirty="0"/>
-              <a:t>Transition: now we fix some bad CRF items together.</a:t>
+              <a:t>These steps go into the data-quality plan of Proposal Part 3.</a:t>
             </a:r>
           </a:p>
         </p:txBody>
@@ -1346,37 +1214,19 @@
           <a:p>
             <a:r>
               <a:rPr lang="en-US" sz="1400" b="0" dirty="0"/>
-              <a:t>Whole-class task closing 5.1 (7 minutes, 20:08 to 20:15). Exercises 1 and 2 are in the Session 5 exercise sheet (Course/Practicals/s5_exercises.md, sent as a PDF before the session). Answers in Course/Solutions/s5_solutions.md.</a:t>
+              <a:t>Whole class, 7 minutes (20:08-20:15). Exercise 2 of the Session 5 sheet. Answers: s5_solutions.md.</a:t>
             </a:r>
           </a:p>
           <a:p>
             <a:r>
               <a:rPr lang="en-US" sz="1400" b="0" dirty="0"/>
-              <a:t>Run it: share the sheet on screen. For each item (start with 'Fluid given: ____', then 'Lactate high? Y / N'), give 1 minute, call on two or three people to read their version, and type the class version into the shared document while the class applies the four checks on the side panel. Aim for two items done well rather than four done in a hurry.</a:t>
+              <a:t>One item at a time, 1 minute each. Call on two or three people and type the class version. Two items done well beat four in a hurry.</a:t>
             </a:r>
           </a:p>
           <a:p>
             <a:r>
               <a:rPr lang="en-US" sz="1400" b="0" dirty="0"/>
-              <a:t>Model rewrite for (a): 'Total IV fluid received from ICU admission to 24 h (ml), including crystalloids, colloids and drug diluents: [ ][ ][ ][ ][ ] ml, or tick: not recorded.'</a:t>
-            </a:r>
-          </a:p>
-          <a:p>
-            <a:r>
-              <a:rPr lang="en-US" sz="1400" b="0" dirty="0"/>
-              <a:t>Model rewrite for (d): 'Serum lactate at ICU admission (mmol/L): [ ][ ].[ ], or tick: not done.' Collecting the number is better than a yes/no.</a:t>
-            </a:r>
-          </a:p>
-          <a:p>
-            <a:r>
-              <a:rPr lang="en-US" sz="1400" b="0" dirty="0"/>
-              <a:t>Exercise 1 (classify 10 variables) was covered by the quick quiz. It stays as homework and self-check.</a:t>
-            </a:r>
-          </a:p>
-          <a:p>
-            <a:r>
-              <a:rPr lang="en-US" sz="1400" b="0" dirty="0"/>
-              <a:t>If the class is fast: ask them to suggest one data dictionary row for the rewritten fluid item.</a:t>
+              <a:t>Exercise 1 is homework.</a:t>
             </a:r>
           </a:p>
         </p:txBody>
@@ -1457,25 +1307,25 @@
           <a:p>
             <a:r>
               <a:rPr lang="en-US" sz="1400" b="0" dirty="0"/>
-              <a:t>Section 5.2 opener (25 minutes, 20:15 to 20:40: the study, the flow of patients, raw vs clean data, an 8-minute live R cleaning demo, the cleaning log, the five questions, then Question 1 written together as a PECO sentence).</a:t>
+              <a:t>Section 5.2 (20:15-20:40).</a:t>
             </a:r>
           </a:p>
           <a:p>
             <a:r>
               <a:rPr lang="en-US" sz="1400" b="0" dirty="0"/>
-              <a:t>Key message: from now on you will analyse and write up a realistic study, as well as reading other people's. FLUID-ICU is simulated: invented by computer, no real patient, hospital or country. But it behaves like real ICU data, including its problems.</a:t>
+              <a:t>FLUID-ICU is simulated: no real patient, hospital or country, but it behaves like real ICU data.</a:t>
             </a:r>
           </a:p>
           <a:p>
             <a:r>
               <a:rPr lang="en-US" sz="1400" b="0" dirty="0"/>
-              <a:t>Nobody needs to run R. The instructor runs it live on the shared screen. You read and interpret. Participants who took the Neudata course 'Clinical Data Analysis in R' can reproduce everything with the scripts in Course/Data/R.</a:t>
+              <a:t>Nobody runs R. The instructor does it on screen.</a:t>
             </a:r>
           </a:p>
           <a:p>
             <a:r>
               <a:rPr lang="en-US" sz="1400" b="0" dirty="0"/>
-              <a:t>Link to the running example: Sessions 1-4 asked an interventional question (restrictive fluids: an RCT, Paper 1, Boulet 2024, a pilot trial of restrictive vs usual fluids in septic shock, in Course/Papers). FLUID-ICU asks the observational form: is a positive fluid balance associated with death? That is a cohort question, like Paper 2 (Hyun 2023). Ask (call on two or three people, microphone on): what can a cohort claim that an RCT cannot, and vice versa? Expected: association, not causation. But real-world patients and more of them.</a:t>
+              <a:t>Ask: what can a cohort claim that a trial cannot? Expected: association, not causation.</a:t>
             </a:r>
           </a:p>
         </p:txBody>
@@ -1556,43 +1406,19 @@
           <a:p>
             <a:r>
               <a:rPr lang="en-US" sz="1400" b="0" dirty="0"/>
-              <a:t>Teaching point: before any analysis, know the study: who, exposure, outcome, what else was measured.</a:t>
+              <a:t>Know the study before any analysis.</a:t>
             </a:r>
           </a:p>
           <a:p>
             <a:r>
               <a:rPr lang="en-US" sz="1400" b="0" dirty="0"/>
-              <a:t>Who: 620 adults with sepsis in 4 ICUs (ICU A 191, ICU B 164, ICU C 147, ICU D 118), enrolled January 2023 to December 2024. Simulated data.</a:t>
+              <a:t>620 adults with sepsis, 4 ICUs, 2023-2024. Exposure: cumulative fluid balance by day 3, positive in 373 of 618 (60.4%). Primary outcome: death by day 28, 179 of 620 (28.9%).</a:t>
             </a:r>
           </a:p>
           <a:p>
             <a:r>
               <a:rPr lang="en-US" sz="1400" b="0" dirty="0"/>
-              <a:t>Exposure: cumulative fluid balance by day 3, (all fluid in minus all fluid out over days 1-3) divided by admission weight, in ml/kg. Positive balance in 373 of 618 patients with a computable balance (60.4%), median 8.8 ml/kg (IQR -10.3 to 26.2).</a:t>
-            </a:r>
-          </a:p>
-          <a:p>
-            <a:r>
-              <a:rPr lang="en-US" sz="1400" b="0" dirty="0"/>
-              <a:t>Primary outcome: death by day 28: 179 of 620 (28.9%). Time to death is also recorded (survivors censored at day 28).</a:t>
-            </a:r>
-          </a:p>
-          <a:p>
-            <a:r>
-              <a:rPr lang="en-US" sz="1400" b="0" dirty="0"/>
-              <a:t>Other variables: demographics, comorbidities, infection source, severity scores (SOFA = Sequential Organ Failure Assessment, APACHE II = Acute Physiology and Chronic Health Evaluation II), lactate, vasopressors, ventilation, AKI, renal replacement, ventilator-free days, ICU stay.</a:t>
-            </a:r>
-          </a:p>
-          <a:p>
-            <a:r>
-              <a:rPr lang="en-US" sz="1400" b="0" dirty="0"/>
-              <a:t>The full data dictionary is Course/Data/data_dictionary.md (also sent as a PDF): the same structure as the one you saw in 5.1.</a:t>
-            </a:r>
-          </a:p>
-          <a:p>
-            <a:r>
-              <a:rPr lang="en-US" sz="1400" b="0" dirty="0"/>
-              <a:t>Ask (call on two or three people, microphone on): from what you know of Session 4 and Paper 2, which patients do you expect to have a positive balance? Expected: the sickest ones. Keep that in mind for Table 1 and Session 6.</a:t>
+              <a:t>Ask: who do you expect to have a positive balance? Expected: the sickest. Keep it for Table 1.</a:t>
             </a:r>
           </a:p>
         </p:txBody>
@@ -1673,43 +1499,13 @@
           <a:p>
             <a:r>
               <a:rPr lang="en-US" sz="1400" b="0" dirty="0"/>
-              <a:t>Teaching point: the flow of patients (the STROBE flow diagram in the manuscript, STROBE is the reporting guideline for observational studies, Session 7).</a:t>
+              <a:t>The flow of patients: 623 rows, 3 duplicates removed, 620 enrolled. 2 without a day-3 balance: 618 analysed. 91 without lactate or age: 527 in the adjusted model.</a:t>
             </a:r>
           </a:p>
           <a:p>
             <a:r>
               <a:rPr lang="en-US" sz="1400" b="0" dirty="0"/>
-              <a:t>Raw file: 623 rows. Three patients were entered twice: after removing duplicates, 620 enrolled patients.</a:t>
-            </a:r>
-          </a:p>
-          <a:p>
-            <a:r>
-              <a:rPr lang="en-US" sz="1400" b="0" dirty="0"/>
-              <a:t>Two patients have no day-3 fluid balance (their weight or one fluid output was impossible and set to missing during cleaning): 618 in the exposure population, used for Table 1 and the comparisons.</a:t>
-            </a:r>
-          </a:p>
-          <a:p>
-            <a:r>
-              <a:rPr lang="en-US" sz="1400" b="0" dirty="0"/>
-              <a:t>91 more have no lactate (or age): 527 complete cases for the adjusted model in Session 6.</a:t>
-            </a:r>
-          </a:p>
-          <a:p>
-            <a:r>
-              <a:rPr lang="en-US" sz="1400" b="0" dirty="0"/>
-              <a:t>Why it matters: 527 of 620 is 85%. Are the 91 patients without lactate different? Session 6 (6.4) answers this: they were less sick.</a:t>
-            </a:r>
-          </a:p>
-          <a:p>
-            <a:r>
-              <a:rPr lang="en-US" sz="1400" b="0" dirty="0"/>
-              <a:t>Ask (call on two or three people, microphone on): in which section of your manuscript will this flow go? Expected: the first paragraph of the Results (participants), as Figure 1.</a:t>
-            </a:r>
-          </a:p>
-          <a:p>
-            <a:r>
-              <a:rPr lang="en-US" sz="1400" b="0" dirty="0"/>
-              <a:t>This slide is now built from editable shapes (it was a picture before). The numbers are unchanged.</a:t>
+              <a:t>Ask: where does this flow go in a paper? Expected: the first paragraph of the Results. Every Results section starts here.</a:t>
             </a:r>
           </a:p>
         </p:txBody>
@@ -1790,37 +1586,19 @@
           <a:p>
             <a:r>
               <a:rPr lang="en-US" sz="1400" b="0" dirty="0"/>
-              <a:t>Teaching point: these are the data-quality problems found in the raw file, and how each was fixed. Call on people to guess the problem for each row before revealing the clean column.</a:t>
+              <a:t>Call on people to guess each problem before revealing the clean column.</a:t>
             </a:r>
           </a:p>
           <a:p>
             <a:r>
               <a:rPr lang="en-US" sz="1400" b="0" dirty="0"/>
-              <a:t>Sex and yes/no variables spelled in many ways. Three date formats (is 03/04 March or April?). ICU C sent lactate in mg/dL instead of mmol/L (found by comparing medians by ICU), 999 and -99 used as missing codes. Impossible values (an age of 210, a weight of 7 kg, a negative fluid output). Duplicate records (623 rows for 620 patients).</a:t>
+              <a:t>Each problem breaks the analysis silently: 999 inflates a mean, 'Y' and 'Yes' become two groups, mg/dL makes ICU C look like a disaster.</a:t>
             </a:r>
           </a:p>
           <a:p>
             <a:r>
               <a:rPr lang="en-US" sz="1400" b="0" dirty="0"/>
-              <a:t>Each problem breaks the analysis silently: a lactate of 999 inflates the mean. 'Y' and 'Yes' become two categories. Mg/dL values make ICU C look like a lactate catastrophe.</a:t>
-            </a:r>
-          </a:p>
-          <a:p>
-            <a:r>
-              <a:rPr lang="en-US" sz="1400" b="0" dirty="0"/>
-              <a:t>Impossible values are set to missing and a query is sent to the site. The patient stays in the study. We never guess.</a:t>
-            </a:r>
-          </a:p>
-          <a:p>
-            <a:r>
-              <a:rPr lang="en-US" sz="1400" b="0" dirty="0"/>
-              <a:t>Link to 5.1: every one of these would have been prevented by an electronic CRF with validation rules and a data dictionary.</a:t>
-            </a:r>
-          </a:p>
-          <a:p>
-            <a:r>
-              <a:rPr lang="en-US" sz="1400" b="0" dirty="0"/>
-              <a:t>Ask (call on two or three people, microphone on): which problem would you never have spotted without a graph or a summary by ICU? Expected: the lactate unit.</a:t>
+              <a:t>Impossible values are set to missing with a query to the site. We never guess.</a:t>
             </a:r>
           </a:p>
         </p:txBody>
@@ -1901,37 +1679,25 @@
           <a:p>
             <a:r>
               <a:rPr lang="en-US" sz="1400" b="0" dirty="0"/>
-              <a:t>Live demo on the shared screen, 8 minutes. Full script with expected outputs and fallback screenshots: Course/Demos/s5_demo.md (Part A).</a:t>
+              <a:t>Live demo, 8 minutes. Script and fallback screenshots: s5_demo.md, Part A.</a:t>
             </a:r>
           </a:p>
           <a:p>
             <a:r>
               <a:rPr lang="en-US" sz="1400" b="0" dirty="0"/>
-              <a:t>You run R, participants watch. Run blocks one at a time with Ctrl+Enter and say aloud what each block fixes. Before a block, ask the class to predict (poll, or call on two or three people).</a:t>
+              <a:t>Run one block at a time and say what it fixes. Ask the class to predict first.</a:t>
             </a:r>
           </a:p>
           <a:p>
             <a:r>
               <a:rPr lang="en-US" sz="1400" b="0" dirty="0"/>
-              <a:t>Show: the raw data read as text, 623 rows reduced to 620 by removing the 3 duplicates. The table of sex spellings before and after. The three date formats. The lactate medians by ICU (ICU C about 9 times higher) and the conversion. Impossible values set to missing. The final check that the cleaned file is identical to the reference clean file.</a:t>
+              <a:t>Three points: the raw file is never edited, one problem one block, a script gives the same result every time.</a:t>
             </a:r>
           </a:p>
           <a:p>
             <a:r>
               <a:rPr lang="en-US" sz="1400" b="0" dirty="0"/>
-              <a:t>Teaching points: (1) the raw file is never edited. (2) one problem, one block, one log entry. (3) because it is a script, anyone can re-run it and get exactly the same clean data: reproducibility.</a:t>
-            </a:r>
-          </a:p>
-          <a:p>
-            <a:r>
-              <a:rPr lang="en-US" sz="1400" b="0" dirty="0"/>
-              <a:t>If R fails: show the raw-vs-clean slide again and the screenshots in the demo script. The teaching points are the same.</a:t>
-            </a:r>
-          </a:p>
-          <a:p>
-            <a:r>
-              <a:rPr lang="en-US" sz="1400" b="0" dirty="0"/>
-              <a:t>Do not let the demo run over: stop after 8 minutes, even if you skip a block.</a:t>
+              <a:t>Stop at 8 minutes.</a:t>
             </a:r>
           </a:p>
         </p:txBody>
@@ -2012,43 +1778,19 @@
           <a:p>
             <a:r>
               <a:rPr lang="en-US" sz="1400" b="0" dirty="0"/>
-              <a:t>Purpose: wake up Session 4 memory and catch anyone who missed it. Keep it light: no marks.</a:t>
+              <a:t>Recap (19:30-19:40). One poll per question, 1 minute each, then reveal.</a:t>
             </a:r>
           </a:p>
           <a:p>
             <a:r>
               <a:rPr lang="en-US" sz="1400" b="0" dirty="0"/>
-              <a:t>Run it: launch one poll per question (Zoom/Teams poll), give 1 minute each, show the results, then reveal. Hide the side panel until the reveal (or read the answers from these notes).</a:t>
+              <a:t>Q1: prospective cohort (case-control starts from the outcome). Q2: confounding by indication, the reason Paper 2 used propensity matching. Q3: RR 0.67, RD 10%, NNT 10.</a:t>
             </a:r>
           </a:p>
           <a:p>
             <a:r>
               <a:rPr lang="en-US" sz="1400" b="0" dirty="0"/>
-              <a:t>Q1 answer: prospective cohort. Exposure (smoking) is measured first, then we wait for the outcome. Common wrong answer: case-control. Point out that case-control starts from the outcome and looks back.</a:t>
-            </a:r>
-          </a:p>
-          <a:p>
-            <a:r>
-              <a:rPr lang="en-US" sz="1400" b="0" dirty="0"/>
-              <a:t>Q2 answer: confounding by indication. Severity causes both more fluid and more death. This is exactly why Paper 2 (Hyun 2023, a cohort of fluid balance and mortality in septic shock, in the course folder, Course/Papers) used propensity-score matching, and why Session 6 (6.3 and 6.4) is about 'adjusted' results.</a:t>
-            </a:r>
-          </a:p>
-          <a:p>
-            <a:r>
-              <a:rPr lang="en-US" sz="1400" b="0" dirty="0"/>
-              <a:t>Q3 answer: RR = 0.20 / 0.30 = 0.67 (a one-third relative reduction). Risk difference = 10 percentage points. NNT = 1 / 0.10 = 10 patients treated to prevent one death.</a:t>
-            </a:r>
-          </a:p>
-          <a:p>
-            <a:r>
-              <a:rPr lang="en-US" sz="1400" b="0" dirty="0"/>
-              <a:t>If more than a third of the class gets Q3 wrong, spend 2 extra minutes drawing the 2x2 table on the shared screen (whiteboard) before moving on.</a:t>
-            </a:r>
-          </a:p>
-          <a:p>
-            <a:r>
-              <a:rPr lang="en-US" sz="1400" b="0" dirty="0"/>
-              <a:t>Timing: 10 minutes including the reveal (19:30 to 19:40).</a:t>
+              <a:t>If a third get Q3 wrong, draw the 2x2 table on screen.</a:t>
             </a:r>
           </a:p>
         </p:txBody>
@@ -2129,43 +1871,25 @@
           <a:p>
             <a:r>
               <a:rPr lang="en-US" sz="1400" b="0" dirty="0"/>
-              <a:t>Teaching point: the cleaning log is the audit trail of the dataset. Show the real file on the shared screen (Course/Data/cleaning_log.md).</a:t>
+              <a:t>The cleaning log (cleaning_log.md): one row per change, with the reason.</a:t>
             </a:r>
           </a:p>
           <a:p>
             <a:r>
               <a:rPr lang="en-US" sz="1400" b="0" dirty="0"/>
-              <a:t>The rule: the raw file is never edited. Every change is made by the script and written down.</a:t>
+              <a:t>Impossible values are set to missing and queried. The patient stays in.</a:t>
             </a:r>
           </a:p>
           <a:p>
             <a:r>
               <a:rPr lang="en-US" sz="1400" b="0" dirty="0"/>
-              <a:t>Each row: the problem found, how many records, what was done and why (for example: lactate at ICU C in mg/dL, divided by 9.01 to obtain mmol/L, confirmed with the site laboratory).</a:t>
+              <a:t>What is left is real missing data: lactate 93 of 620 (15.0%).</a:t>
             </a:r>
           </a:p>
           <a:p>
             <a:r>
               <a:rPr lang="en-US" sz="1400" b="0" dirty="0"/>
-              <a:t>Queries: impossible values are set to missing and a query is sent to the site. The patient is not deleted (deleting would bias the sample).</a:t>
-            </a:r>
-          </a:p>
-          <a:p>
-            <a:r>
-              <a:rPr lang="en-US" sz="1400" b="0" dirty="0"/>
-              <a:t>What is left after cleaning is real missing data: lactate 93 of 620 (15.0%), every other variable 1% or less. These gaps are the subject of 6.4 next Saturday.</a:t>
-            </a:r>
-          </a:p>
-          <a:p>
-            <a:r>
-              <a:rPr lang="en-US" sz="1400" b="0" dirty="0"/>
-              <a:t>Ask (call on two or three people, microphone on): why not just delete the patient with an age of 210? Expected: the rest of the record is valid. Deleting patients for typing errors can bias the sample.</a:t>
-            </a:r>
-          </a:p>
-          <a:p>
-            <a:r>
-              <a:rPr lang="en-US" sz="1400" b="0" dirty="0"/>
-              <a:t>Your manuscript's Methods will say: 'Data were cleaned with a script. All changes are documented in a cleaning log.'</a:t>
+              <a:t>Ask: why not delete the patient aged 210? Expected: the rest of the record is valid.</a:t>
             </a:r>
           </a:p>
         </p:txBody>
@@ -2246,49 +1970,25 @@
           <a:p>
             <a:r>
               <a:rPr lang="en-US" sz="1400" b="0" dirty="0"/>
-              <a:t>Teaching point: one dataset, five different research questions, matching the secondary objectives of the FLUID-ICU statistical analysis plan (SAP, Course/Data/SAP_FLUID-ICU.md).</a:t>
+              <a:t>One dataset, five questions, all from the FLUID-ICU SAP.</a:t>
             </a:r>
           </a:p>
           <a:p>
             <a:r>
               <a:rPr lang="en-US" sz="1400" b="0" dirty="0"/>
-              <a:t>Question 1 (Q1): positive fluid balance by day 3 and 28-day mortality: logistic regression plus Kaplan-Meier and Cox. The primary question. We work through Q1 in full in Sessions 5 and 6.</a:t>
+              <a:t>Q1 (the primary question) is done in full in Sessions 5 and 6. Q2 to Q5 more briefly.</a:t>
             </a:r>
           </a:p>
           <a:p>
             <a:r>
               <a:rPr lang="en-US" sz="1400" b="0" dirty="0"/>
-              <a:t>Question 2 (Q2): cumulative fluid balance and acute kidney injury: logistic regression.</a:t>
+              <a:t>Each question has a results pack (Results_Pack_Q1 to Q5, PDF, sent by email).</a:t>
             </a:r>
           </a:p>
           <a:p>
             <a:r>
               <a:rPr lang="en-US" sz="1400" b="0" dirty="0"/>
-              <a:t>Question 3 (Q3): cumulative fluid balance and ventilator-free days: a count from 0 to 28, piled up at both ends: Mann-Whitney and linear regression.</a:t>
-            </a:r>
-          </a:p>
-          <a:p>
-            <a:r>
-              <a:rPr lang="en-US" sz="1400" b="0" dirty="0"/>
-              <a:t>Question 4 (Q4): initial lactate and 28-day mortality, and what missing lactate does: complete-case analysis vs multiple imputation.</a:t>
-            </a:r>
-          </a:p>
-          <a:p>
-            <a:r>
-              <a:rPr lang="en-US" sz="1400" b="0" dirty="0"/>
-              <a:t>Question 5 (Q5): fluid balance and ICU length of stay among survivors: a skewed outcome (median, IQR, log scale).</a:t>
-            </a:r>
-          </a:p>
-          <a:p>
-            <a:r>
-              <a:rPr lang="en-US" sz="1400" b="0" dirty="0"/>
-              <a:t>Each question has a results pack: Course/Data/results_packs/Results_Pack_Q1 to Q5 (Table 1, figures, regression tables, plain-language notes), sent to everyone as PDFs before this session. In class we use all five as worked examples (Q1 in full, Q2 to Q5 more briefly).</a:t>
-            </a:r>
-          </a:p>
-          <a:p>
-            <a:r>
-              <a:rPr lang="en-US" sz="1400" b="0" dirty="0"/>
-              <a:t>For the manuscript (Weeks 7-8), each participant chooses one question and writes the paper from its results pack: we give you the results, you write the paper. Ask participants to tell you their choice (chat, email or the course form) before Session 6.</a:t>
+              <a:t>At the end of Session 6 each participant chooses one question and writes its Results section from the pack.</a:t>
             </a:r>
           </a:p>
         </p:txBody>
@@ -2369,31 +2069,19 @@
           <a:p>
             <a:r>
               <a:rPr lang="en-US" sz="1400" b="0" dirty="0"/>
-              <a:t>Whole-class task, 4 minutes (20:36 to 20:40). Exercise 7 of the Session 5 exercise sheet has the same table. Participants complete it later for the question they choose.</a:t>
+              <a:t>Whole class, 4 minutes (20:36-20:40). Exercise 7 of the sheet.</a:t>
             </a:r>
           </a:p>
           <a:p>
             <a:r>
               <a:rPr lang="en-US" sz="1400" b="0" dirty="0"/>
-              <a:t>PECO: P = population, E = exposure, C = comparison, O = outcome (the observational form of PICO from Session 1). Use the variable types from 5.1.</a:t>
+              <a:t>Q1: call on people for the outcome type (binary, also time-to-event) and the exposure type (binary). Type: 'In adults with sepsis in the ICU, is a positive fluid balance by day 3, compared with a negative balance, associated with higher 28-day mortality?'</a:t>
             </a:r>
           </a:p>
           <a:p>
             <a:r>
               <a:rPr lang="en-US" sz="1400" b="0" dirty="0"/>
-              <a:t>Q1 in full: call on two or three people for the outcome type (binary, and also time-to-event) and the exposure type (binary: positive vs negative balance). Then type the sentence: 'In adults with sepsis admitted to the ICU, is a positive cumulative fluid balance by day 3, compared with a negative balance, associated with higher 28-day mortality?'</a:t>
-            </a:r>
-          </a:p>
-          <a:p>
-            <a:r>
-              <a:rPr lang="en-US" sz="1400" b="0" dirty="0"/>
-              <a:t>Q2 to Q5, one line each: Q2 binary outcome (AKI), continuous exposure. Q3 count outcome (0-28, skewed), continuous exposure. Q4 binary outcome, continuous exposure (lactate) with missing values. Q5 continuous skewed outcome (survivors only), binary exposure.</a:t>
-            </a:r>
-          </a:p>
-          <a:p>
-            <a:r>
-              <a:rPr lang="en-US" sz="1400" b="0" dirty="0"/>
-              <a:t>Then break.</a:t>
+              <a:t>Q2 to Q5: one line each. Then break.</a:t>
             </a:r>
           </a:p>
         </p:txBody>
@@ -2474,25 +2162,13 @@
           <a:p>
             <a:r>
               <a:rPr lang="en-US" sz="1400" b="0" dirty="0"/>
-              <a:t>The slide is only a picture on purpose. Before the break, say: we restart at 20:55 with 5.3 (mean or median, SD or IQR, which graph, good and bad figures, Table 1). Optional: look at Table 1 in the Q1 results pack.</a:t>
+              <a:t>Break (20:40-20:55). Say: we restart at 20:55 with 5.3.</a:t>
             </a:r>
           </a:p>
           <a:p>
             <a:r>
               <a:rPr lang="en-US" sz="1400" b="0" dirty="0"/>
-              <a:t>Break: 15 minutes (20:40 to 20:55). Start again on time.</a:t>
-            </a:r>
-          </a:p>
-          <a:p>
-            <a:r>
-              <a:rPr lang="en-US" sz="1400" b="0" dirty="0"/>
-              <a:t>During the break: check that the R project for 02_describe.R opens and runs, and that the fallback figures for 5.4 are ready to share.</a:t>
-            </a:r>
-          </a:p>
-          <a:p>
-            <a:r>
-              <a:rPr lang="en-US" sz="1400" b="0" dirty="0"/>
-              <a:t>Read the chat, or ask two or three people what was hardest so far (often the course-dataset cleaning). Adjust the pace of 5.3.</a:t>
+              <a:t>Check that 02_describe.R runs and the fallback figures for 5.4 are ready.</a:t>
             </a:r>
           </a:p>
         </p:txBody>
@@ -2573,25 +2249,13 @@
           <a:p>
             <a:r>
               <a:rPr lang="en-US" sz="1400" b="0" dirty="0"/>
-              <a:t>Section 5.3 opener (35 minutes, 20:55 to 21:30: a worked example by hand, mean vs median, spread, shapes, a check, which graph, honest figures, Table 1 and publication-quality tables).</a:t>
+              <a:t>Section 5.3 (20:55-21:30).</a:t>
             </a:r>
           </a:p>
           <a:p>
             <a:r>
               <a:rPr lang="en-US" sz="1400" b="0" dirty="0"/>
-              <a:t>Key message: every paper begins its results by describing the patients: who they were, how sick, how old. You need two numbers for any numerical variable: a centre (where is the typical patient?) and a spread (how different are patients from each other?).</a:t>
-            </a:r>
-          </a:p>
-          <a:p>
-            <a:r>
-              <a:rPr lang="en-US" sz="1400" b="0" dirty="0"/>
-              <a:t>The choice between the two families (mean and SD, or median and IQR) depends on one thing: the shape of the data.</a:t>
-            </a:r>
-          </a:p>
-          <a:p>
-            <a:r>
-              <a:rPr lang="en-US" sz="1400" b="0" dirty="0"/>
-              <a:t>Transition: let us look at the most famous skewed variable in hospital medicine: length of stay.</a:t>
+              <a:t>Message: every numerical variable needs a centre and a spread. The shape of the data decides which pair: mean (SD) or median (IQR).</a:t>
             </a:r>
           </a:p>
         </p:txBody>
@@ -2672,43 +2336,25 @@
           <a:p>
             <a:r>
               <a:rPr lang="en-US" sz="1400" b="0" dirty="0"/>
-              <a:t>Worked example (3 minutes). Type the seven numbers on the shared screen (whiteboard or a blank slide).</a:t>
+              <a:t>Worked example (3 minutes). Type the seven stays on screen.</a:t>
             </a:r>
           </a:p>
           <a:p>
             <a:r>
               <a:rPr lang="en-US" sz="1400" b="0" dirty="0"/>
-              <a:t>Line up: they are already sorted: 1, 2, 2, 3, 4, 6, 24.</a:t>
+              <a:t>Median: the 4th patient, 3 days. Mean: 42 / 7 = 6 days. One long stay doubles the mean.</a:t>
             </a:r>
           </a:p>
           <a:p>
             <a:r>
               <a:rPr lang="en-US" sz="1400" b="0" dirty="0"/>
-              <a:t>Median: the middle patient of seven is the 4th: 3 days. Half stayed less, half more.</a:t>
+              <a:t>Ask: if that patient stayed 60 days? Expected: median still 3, mean about 11.</a:t>
             </a:r>
           </a:p>
           <a:p>
             <a:r>
               <a:rPr lang="en-US" sz="1400" b="0" dirty="0"/>
-              <a:t>Mean: add them up: 1 + 2 + 2 + 3 + 4 + 6 + 24 = 42. Divide by 7 = 6 days.</a:t>
-            </a:r>
-          </a:p>
-          <a:p>
-            <a:r>
-              <a:rPr lang="en-US" sz="1400" b="0" dirty="0"/>
-              <a:t>Compare: six of the seven patients stayed 6 days or less. The mean of 6 is pulled up by the single 24-day stay. The median describes the typical patient.</a:t>
-            </a:r>
-          </a:p>
-          <a:p>
-            <a:r>
-              <a:rPr lang="en-US" sz="1400" b="0" dirty="0"/>
-              <a:t>Now ask (call on two or three people, microphone on): if the long-stay patient had stayed 60 days instead of 24, what happens? Expected: the median stays 3, the mean jumps to about 11 (78 / 7 = 11.1).</a:t>
-            </a:r>
-          </a:p>
-          <a:p>
-            <a:r>
-              <a:rPr lang="en-US" sz="1400" b="0" dirty="0"/>
-              <a:t>This is the only hand calculation today. Afterwards the computer does it and you interpret.</a:t>
+              <a:t>The only hand calculation today.</a:t>
             </a:r>
           </a:p>
         </p:txBody>
@@ -2789,43 +2435,19 @@
           <a:p>
             <a:r>
               <a:rPr lang="en-US" sz="1400" b="0" dirty="0"/>
-              <a:t>Teaching point: the median is the middle patient when you line everyone up. The mean is the arithmetic average.</a:t>
+              <a:t>Most patients stay 1 to 5 days, a few for weeks: the mean (3.9) is pulled right of the median (2.8).</a:t>
             </a:r>
           </a:p>
           <a:p>
             <a:r>
               <a:rPr lang="en-US" sz="1400" b="0" dirty="0"/>
-              <a:t>In this simulated ICU, most patients stay 1 to 5 days, but a few stay 3 to 6 weeks. Those few long stays pull the mean to the right (3.9 days) while the median stays with the typical patient (2.8 days).</a:t>
+              <a:t>Rule of thumb: mean and median far apart means skewed: report the median.</a:t>
             </a:r>
           </a:p>
           <a:p>
             <a:r>
               <a:rPr lang="en-US" sz="1400" b="0" dirty="0"/>
-              <a:t>Clinical translation: if a manager says 'the average ICU stay is 3.9 days', most of your patients actually leave earlier than that.</a:t>
-            </a:r>
-          </a:p>
-          <a:p>
-            <a:r>
-              <a:rPr lang="en-US" sz="1400" b="0" dirty="0"/>
-              <a:t>Common misconception: 'the mean is always the correct average'. For skewed data it describes no real patient.</a:t>
-            </a:r>
-          </a:p>
-          <a:p>
-            <a:r>
-              <a:rPr lang="en-US" sz="1400" b="0" dirty="0"/>
-              <a:t>Rule of thumb: if the mean and median are far apart, the data are skewed: report the median.</a:t>
-            </a:r>
-          </a:p>
-          <a:p>
-            <a:r>
-              <a:rPr lang="en-US" sz="1400" b="0" dirty="0"/>
-              <a:t>Ask (call on two or three people, microphone on): name other skewed variables in your work. Expected: hospital costs, CRP, troponin, time to antibiotics, days on ventilator.</a:t>
-            </a:r>
-          </a:p>
-          <a:p>
-            <a:r>
-              <a:rPr lang="en-US" sz="1400" b="0" dirty="0"/>
-              <a:t>Running example: Paper 1 (Boulet 2024) reported cumulative fluid balance as medians (6.9 vs 35.0 ml/kg) for exactly this reason.</a:t>
+              <a:t>Ask: other skewed variables in your work? Expected: costs, CRP, days on ventilator.</a:t>
             </a:r>
           </a:p>
         </p:txBody>
@@ -2906,37 +2528,19 @@
           <a:p>
             <a:r>
               <a:rPr lang="en-US" sz="1400" b="0" dirty="0"/>
-              <a:t>Teaching point: the spread tells you how different patients are from each other.</a:t>
+              <a:t>Symmetric data: mean (SD). Skewed data: median (IQR), the middle half of patients.</a:t>
             </a:r>
           </a:p>
           <a:p>
             <a:r>
               <a:rPr lang="en-US" sz="1400" b="0" dirty="0"/>
-              <a:t>Left: age is roughly symmetric. The standard deviation (SD) is the typical distance of a patient from the mean. In bell-shaped data, about two thirds of patients lie within one SD of the mean.</a:t>
+              <a:t>Read 'median 2.8 (IQR 1.5-4.7)' aloud in plain words.</a:t>
             </a:r>
           </a:p>
           <a:p>
             <a:r>
               <a:rPr lang="en-US" sz="1400" b="0" dirty="0"/>
-              <a:t>Right: length of stay is skewed. The boxplot shows the median (thick line), the box from the 25th to the 75th percentile (the interquartile range, IQR: the middle 50% of patients), whiskers, and outliers as dots.</a:t>
-            </a:r>
-          </a:p>
-          <a:p>
-            <a:r>
-              <a:rPr lang="en-US" sz="1400" b="0" dirty="0"/>
-              <a:t>How to read 'median 2.8 (IQR 1.5-4.7)': half the patients stayed less than 2.8 days. The middle half stayed between 1.5 and 4.7 days.</a:t>
-            </a:r>
-          </a:p>
-          <a:p>
-            <a:r>
-              <a:rPr lang="en-US" sz="1400" b="0" dirty="0"/>
-              <a:t>Common mistakes: reporting mean with IQR, or median with SD. And confusing SD (spread of patients) with the standard error or CI (precision of the estimate), which comes in 6.1.</a:t>
-            </a:r>
-          </a:p>
-          <a:p>
-            <a:r>
-              <a:rPr lang="en-US" sz="1400" b="0" dirty="0"/>
-              <a:t>Paper 1 example: control-group fluid balance 'median 35.0 (IQR -7.9, 40.2)'. Point out the negative lower quartile: a quarter of patients had a negative balance.</a:t>
+              <a:t>Common mistakes: mean with IQR, median with SD, and confusing SD (spread of patients) with a CI (precision, 6.1).</a:t>
             </a:r>
           </a:p>
         </p:txBody>
@@ -3017,49 +2621,19 @@
           <a:p>
             <a:r>
               <a:rPr lang="en-US" sz="1400" b="0" dirty="0"/>
-              <a:t>Teaching point: two shapes cover most clinical data.</a:t>
+              <a:t>Two shapes cover most clinical data: symmetric (physiology, body size) and right-skewed (times, counts, costs, lab values that cannot go below zero).</a:t>
             </a:r>
           </a:p>
           <a:p>
             <a:r>
               <a:rPr lang="en-US" sz="1400" b="0" dirty="0"/>
-              <a:t>Why these two (reviewer question): most clinical measurements either cluster around a typical value (body size, physiology tightly regulated by the body: symmetric) or cannot go below zero but can go very high (times, counts, costs, inflammatory markers: right-skewed). Together they cover the large majority of variables in a clinical dataset, and they lead to the two ways of summarising data.</a:t>
+              <a:t>The shape also decides the test in 6.1.</a:t>
             </a:r>
           </a:p>
           <a:p>
             <a:r>
               <a:rPr lang="en-US" sz="1400" b="0" dirty="0"/>
-              <a:t>Other shapes exist but are rarer: left-skewed (a ceiling, e.g. gestational age at birth, oxygen saturation), bimodal (two groups mixed, e.g. age on a ward that admits both children and adults). For any shape that is not clearly symmetric, show the histogram and report median (IQR).</a:t>
-            </a:r>
-          </a:p>
-          <a:p>
-            <a:r>
-              <a:rPr lang="en-US" sz="1400" b="0" dirty="0"/>
-              <a:t>Symmetric, bell-shaped (often called 'normal'): mean and median are in the same place. Examples: age in adults, height, haemoglobin, systolic blood pressure. Report mean (SD).</a:t>
-            </a:r>
-          </a:p>
-          <a:p>
-            <a:r>
-              <a:rPr lang="en-US" sz="1400" b="0" dirty="0"/>
-              <a:t>Right-skewed: a long tail of high values pulls the mean to the right of the median. Examples: length of stay, cost, CRP, many lab values that cannot go below zero. Report median (IQR).</a:t>
-            </a:r>
-          </a:p>
-          <a:p>
-            <a:r>
-              <a:rPr lang="en-US" sz="1400" b="0" dirty="0"/>
-              <a:t>Quick check without software: if the SD is larger than half the mean for a variable that cannot be negative, it is probably skewed.</a:t>
-            </a:r>
-          </a:p>
-          <a:p>
-            <a:r>
-              <a:rPr lang="en-US" sz="1400" b="0" dirty="0"/>
-              <a:t>Why this matters later: the shape also decides the test (t-test for symmetric, Mann-Whitney for skewed). That is the decision table in 6.1.</a:t>
-            </a:r>
-          </a:p>
-          <a:p>
-            <a:r>
-              <a:rPr lang="en-US" sz="1400" b="0" dirty="0"/>
-              <a:t>Ask (call on two or three people, microphone on): is 'number of days on vasopressors' symmetric or skewed? Expected: skewed (most patients 1-3 days, a few for weeks).</a:t>
+              <a:t>Ask: days on vasopressors, symmetric or skewed? Expected: skewed.</a:t>
             </a:r>
           </a:p>
         </p:txBody>
@@ -3140,43 +2714,19 @@
           <a:p>
             <a:r>
               <a:rPr lang="en-US" sz="1400" b="0" dirty="0"/>
-              <a:t>Check your understanding (3 minutes), half-way through 5.3. Run it as a poll (one question per item).</a:t>
+              <a:t>Check (3 minutes), one poll per item.</a:t>
             </a:r>
           </a:p>
           <a:p>
             <a:r>
               <a:rPr lang="en-US" sz="1400" b="0" dirty="0"/>
-              <a:t>Q1: median (IQR): length of stay is right-skewed.</a:t>
+              <a:t>Length of stay: median (IQR). Age: mean (SD). Ventilated: n (%). AKI stage: n (%) per stage with a bar chart, never a 'mean stage'.</a:t>
             </a:r>
           </a:p>
           <a:p>
             <a:r>
               <a:rPr lang="en-US" sz="1400" b="0" dirty="0"/>
-              <a:t>Q2: mean (SD): bell-shaped data.</a:t>
-            </a:r>
-          </a:p>
-          <a:p>
-            <a:r>
-              <a:rPr lang="en-US" sz="1400" b="0" dirty="0"/>
-              <a:t>Q3: n (%): a binary variable has no mean or SD. Report the number and percentage.</a:t>
-            </a:r>
-          </a:p>
-          <a:p>
-            <a:r>
-              <a:rPr lang="en-US" sz="1400" b="0" dirty="0"/>
-              <a:t>Q4: n (%) for each stage, shown with a bar chart. The median stage is also acceptable for an ordinal variable. Do not report a 'mean stage of 1.8'.</a:t>
-            </a:r>
-          </a:p>
-          <a:p>
-            <a:r>
-              <a:rPr lang="en-US" sz="1400" b="0" dirty="0"/>
-              <a:t>If many get Q1 wrong, return to the histogram slide for one minute.</a:t>
-            </a:r>
-          </a:p>
-          <a:p>
-            <a:r>
-              <a:rPr lang="en-US" sz="1400" b="0" dirty="0"/>
-              <a:t>Transition: now, how to show these summaries: graphs, figures and tables.</a:t>
+              <a:t>If many miss item 1, return to the histogram.</a:t>
             </a:r>
           </a:p>
         </p:txBody>
@@ -3257,31 +2807,19 @@
           <a:p>
             <a:r>
               <a:rPr lang="en-US" sz="1400" b="0" dirty="0"/>
-              <a:t>Section 5.1 opener (35 minutes, 19:40 to 20:15: variable types with a check, CRF design with a worked example, data dictionary, validation, data management, missing data, then a 7-minute whole-class task on fixing CRF items).</a:t>
+              <a:t>Section 5.1 (19:40-20:15).</a:t>
             </a:r>
           </a:p>
           <a:p>
             <a:r>
               <a:rPr lang="en-US" sz="1400" b="0" dirty="0"/>
-              <a:t>Key message: most problems in clinical research lie in the data rather than in the analysis. A statistician cannot fix a blank box, a missing unit or an impossible value six months later.</a:t>
+              <a:t>Message: most problems lie in the data, not the analysis. A statistician cannot fix a blank box later.</a:t>
             </a:r>
           </a:p>
           <a:p>
             <a:r>
               <a:rPr lang="en-US" sz="1400" b="0" dirty="0"/>
-              <a:t>Garbage in, garbage out: the quality of your answer is capped by the quality of your form.</a:t>
-            </a:r>
-          </a:p>
-          <a:p>
-            <a:r>
-              <a:rPr lang="en-US" sz="1400" b="0" dirty="0"/>
-              <a:t>Ask the class (call on two or three people, microphone on): has anyone been asked to 'help with the data' after a study finished, and found half the forms incomplete? Invite one or two people to unmute and tell their story in one sentence.</a:t>
-            </a:r>
-          </a:p>
-          <a:p>
-            <a:r>
-              <a:rPr lang="en-US" sz="1400" b="0" dirty="0"/>
-              <a:t>Transition: we start with the most basic decision of all: what type of variable are you collecting? It decides how you write the CRF item, how you summarise it and which test you use.</a:t>
+              <a:t>Ask: who has been asked to 'help with the data' and found half the forms incomplete?</a:t>
             </a:r>
           </a:p>
         </p:txBody>
@@ -3362,43 +2900,13 @@
           <a:p>
             <a:r>
               <a:rPr lang="en-US" sz="1400" b="0" dirty="0"/>
-              <a:t>Teaching point: four graphs cover most of what you need to describe data. Survival curves (Kaplan-Meier) come in Session 6, when we analyse time-to-event outcomes.</a:t>
+              <a:t>Four graphs cover most needs: bar chart (one category), histogram (one number), boxplots (a number by group), scatter plot (two numbers).</a:t>
             </a:r>
           </a:p>
           <a:p>
             <a:r>
               <a:rPr lang="en-US" sz="1400" b="0" dirty="0"/>
-              <a:t>One categorical variable: bar chart with counts or percentages (source of sepsis). Avoid 3-D pie charts.</a:t>
-            </a:r>
-          </a:p>
-          <a:p>
-            <a:r>
-              <a:rPr lang="en-US" sz="1400" b="0" dirty="0"/>
-              <a:t>One numerical variable: histogram to see the shape (length of stay).</a:t>
-            </a:r>
-          </a:p>
-          <a:p>
-            <a:r>
-              <a:rPr lang="en-US" sz="1400" b="0" dirty="0"/>
-              <a:t>A number compared between groups: side-by-side boxplots (fluid balance in restrictive vs usual care).</a:t>
-            </a:r>
-          </a:p>
-          <a:p>
-            <a:r>
-              <a:rPr lang="en-US" sz="1400" b="0" dirty="0"/>
-              <a:t>Two numerical variables: scatter plot (fluid balance against lactate).</a:t>
-            </a:r>
-          </a:p>
-          <a:p>
-            <a:r>
-              <a:rPr lang="en-US" sz="1400" b="0" dirty="0"/>
-              <a:t>Common mistake: a bar chart of means with a small error bar for skewed data. It hides the shape and the outliers. A boxplot shows much more.</a:t>
-            </a:r>
-          </a:p>
-          <a:p>
-            <a:r>
-              <a:rPr lang="en-US" sz="1400" b="0" dirty="0"/>
-              <a:t>Ask (call on two or three people, microphone on): which graph would you use to compare ICU length of stay between the two fluid groups? Expected: side-by-side boxplots (skewed numbers by group).</a:t>
+              <a:t>Ask: which graph compares ICU stay between two fluid groups? Expected: side-by-side boxplots.</a:t>
             </a:r>
           </a:p>
         </p:txBody>
@@ -3479,37 +2987,19 @@
           <a:p>
             <a:r>
               <a:rPr lang="en-US" sz="1400" b="0" dirty="0"/>
-              <a:t>Teaching point: the 'dynamite plot' (bar of the mean plus an error bar) is the most common bad figure in clinical journals. It shows two numbers per group and hides the rest.</a:t>
+              <a:t>The dynamite plot hides the shape and the outlier. The dots show one patient at 160 ml/kg dragging the mean and a large overlap.</a:t>
             </a:r>
           </a:p>
           <a:p>
             <a:r>
               <a:rPr lang="en-US" sz="1400" b="0" dirty="0"/>
-              <a:t>Left: the bars suggest the usual-care group has much higher fluid balance. Right: the same simulated data as dots plus a boxplot. Now you see that one extreme patient (160 ml/kg) drags the usual-care mean up, that the data are skewed, and that the groups overlap a lot.</a:t>
+              <a:t>Always say whether error bars are SD, SE or 95% CI.</a:t>
             </a:r>
           </a:p>
           <a:p>
             <a:r>
               <a:rPr lang="en-US" sz="1400" b="0" dirty="0"/>
-              <a:t>Also note: the left plot shows the standard error (SE), not the SD, which makes the spread look small. Always say whether bars are SD, SE or 95% CI.</a:t>
-            </a:r>
-          </a:p>
-          <a:p>
-            <a:r>
-              <a:rPr lang="en-US" sz="1400" b="0" dirty="0"/>
-              <a:t>Rule: with fewer than about 100 patients per group, show the individual points.</a:t>
-            </a:r>
-          </a:p>
-          <a:p>
-            <a:r>
-              <a:rPr lang="en-US" sz="1400" b="0" dirty="0"/>
-              <a:t>Many journals now explicitly discourage bar charts for continuous data.</a:t>
-            </a:r>
-          </a:p>
-          <a:p>
-            <a:r>
-              <a:rPr lang="en-US" sz="1400" b="0" dirty="0"/>
-              <a:t>Ask (call on two or three people, microphone on): what would you have concluded from the left picture alone? Expected: 'the usual-care group is clearly higher'. That is the danger.</a:t>
+              <a:t>Ask: what would you conclude from the left picture alone?</a:t>
             </a:r>
           </a:p>
           <a:p>
@@ -3596,49 +3086,25 @@
           <a:p>
             <a:r>
               <a:rPr lang="en-US" sz="1400" b="0" dirty="0"/>
-              <a:t>Teaching point: Table 1 in almost every clinical paper describes the patients at baseline, by group.</a:t>
+              <a:t>Table 1 describes the patients at baseline, by group. The summary is in the row label.</a:t>
             </a:r>
           </a:p>
           <a:p>
             <a:r>
               <a:rPr lang="en-US" sz="1400" b="0" dirty="0"/>
-              <a:t>Read it row by row: the summary is written in the row label. Symmetric variables as mean (SD), skewed ones as median (IQR), categories as n (%).</a:t>
+              <a:t>Two questions: do these patients look like mine, and were the groups alike at the start?</a:t>
             </a:r>
           </a:p>
           <a:p>
             <a:r>
               <a:rPr lang="en-US" sz="1400" b="0" dirty="0"/>
-              <a:t>Two questions to ask of every Table 1: (1) Do these patients look like mine? (generalisability) (2) Are the groups similar at the start? (fair comparison).</a:t>
+              <a:t>In a trial, differences are chance (no p-values). In a cohort, large differences warn of confounding.</a:t>
             </a:r>
           </a:p>
           <a:p>
             <a:r>
               <a:rPr lang="en-US" sz="1400" b="0" dirty="0"/>
-              <a:t>In an RCT, groups should be similar by chance thanks to randomisation. Small differences are expected. Many guidelines (CONSORT, the reporting guideline for trials) advise against p-values in an RCT's Table 1, because any difference is due to chance by definition.</a:t>
-            </a:r>
-          </a:p>
-          <a:p>
-            <a:r>
-              <a:rPr lang="en-US" sz="1400" b="0" dirty="0"/>
-              <a:t>In a cohort (Paper 2), large baseline differences are a warning sign of confounding. That is why Paper 2 matched patients on a propensity score before comparing them.</a:t>
-            </a:r>
-          </a:p>
-          <a:p>
-            <a:r>
-              <a:rPr lang="en-US" sz="1400" b="0" dirty="0"/>
-              <a:t>Numbers on the slide are illustrative, not from Paper 1. Paper 1's real Table 1 has 24 patients per group. Participants can open it in Course/Papers.</a:t>
-            </a:r>
-          </a:p>
-          <a:p>
-            <a:r>
-              <a:rPr lang="en-US" sz="1400" b="0" dirty="0"/>
-              <a:t>Ask (call on two or three people, microphone on): what would worry you if the restrictive group had a median SOFA of 6 and usual care 11? Expected: the groups are not comparable. Sicker patients in one arm.</a:t>
-            </a:r>
-          </a:p>
-          <a:p>
-            <a:r>
-              <a:rPr lang="en-US" sz="1400" b="0" dirty="0"/>
-              <a:t>This slide is now an editable table (it was a picture before). Timing: 2 minutes. Next: a table written badly and well.</a:t>
+              <a:t>Numbers are illustrative.</a:t>
             </a:r>
           </a:p>
         </p:txBody>
@@ -3719,55 +3185,13 @@
           <a:p>
             <a:r>
               <a:rPr lang="en-US" sz="1400" b="0" dirty="0"/>
-              <a:t>Teaching point: a table in a paper must stand alone. Compare the two versions row by row. (These two stay as pictures on purpose: the bad one shows formatting faults, such as grid lines, that a native slide table would hide.)</a:t>
+              <a:t>A table must stand alone. Compare row by row: group names and n in the header, unit and summary in each row label, sensible decimals, footnotes for abbreviations.</a:t>
             </a:r>
           </a:p>
           <a:p>
             <a:r>
               <a:rPr lang="en-US" sz="1400" b="0" dirty="0"/>
-              <a:t>Column headers: 'Group A / Group B' tells the reader nothing. Write the group names and the number of patients in each column (n = 24).</a:t>
-            </a:r>
-          </a:p>
-          <a:p>
-            <a:r>
-              <a:rPr lang="en-US" sz="1400" b="0" dirty="0"/>
-              <a:t>Row labels: say the unit and the summary used: 'Age, years, mean (SD)', 'Lactate, mmol/L, median (IQR)'.</a:t>
-            </a:r>
-          </a:p>
-          <a:p>
-            <a:r>
-              <a:rPr lang="en-US" sz="1400" b="0" dirty="0"/>
-              <a:t>Numbers: sensible, consistent decimals: age as whole years, percentages without decimals for small samples, lactate with one decimal. 63.4567 suggests a precision that does not exist.</a:t>
-            </a:r>
-          </a:p>
-          <a:p>
-            <a:r>
-              <a:rPr lang="en-US" sz="1400" b="0" dirty="0"/>
-              <a:t>Categories as n (%), never as a proportion like 0.375.</a:t>
-            </a:r>
-          </a:p>
-          <a:p>
-            <a:r>
-              <a:rPr lang="en-US" sz="1400" b="0" dirty="0"/>
-              <a:t>Footnotes explain every abbreviation (SOFA, IQR) and, if p-values are shown, which test was used. In an RCT Table 1, leave p-values out (CONSORT).</a:t>
-            </a:r>
-          </a:p>
-          <a:p>
-            <a:r>
-              <a:rPr lang="en-US" sz="1400" b="0" dirty="0"/>
-              <a:t>No vertical lines, few horizontal ones. Journals will re-typeset anyway, but reviewers notice messy tables.</a:t>
-            </a:r>
-          </a:p>
-          <a:p>
-            <a:r>
-              <a:rPr lang="en-US" sz="1400" b="0" dirty="0"/>
-              <a:t>The proposal template and Sessions 7-8 (writing the paper) use these same rules.</a:t>
-            </a:r>
-          </a:p>
-          <a:p>
-            <a:r>
-              <a:rPr lang="en-US" sz="1400" b="0" dirty="0"/>
-              <a:t>Ask (call on two or three people, microphone on): find four problems in the left table in 30 seconds. Expected: no n, no units, no %, too many decimals, unexplained SOFA, p-values in an RCT.</a:t>
+              <a:t>Ask: find four problems in the left table in 30 seconds.</a:t>
             </a:r>
           </a:p>
           <a:p>
@@ -3854,13 +3278,7 @@
           <a:p>
             <a:r>
               <a:rPr lang="en-US" sz="1400" b="0" dirty="0"/>
-              <a:t>Section 5.4 opener (25 minutes, 21:30 to 21:55: a 6-minute live demo of Table 1 and figures, four slides of FLUID-ICU results, then a 10-minute whole-class reading of Table 1).</a:t>
-            </a:r>
-          </a:p>
-          <a:p>
-            <a:r>
-              <a:rPr lang="en-US" sz="1400" b="0" dirty="0"/>
-              <a:t>Key message: everything from 5.3 (shape, mean or median, which graph, Table 1) now applied to FLUID-ICU. Same rules, real (simulated) numbers.</a:t>
+              <a:t>Section 5.4 (21:30-21:55): the 5.3 rules applied to FLUID-ICU. Demo, four slides of results, then 10 minutes reading Table 1 together.</a:t>
             </a:r>
           </a:p>
         </p:txBody>
@@ -3941,25 +3359,25 @@
           <a:p>
             <a:r>
               <a:rPr lang="en-US" sz="1400" b="0" dirty="0"/>
-              <a:t>Live demo on the shared screen, 6 minutes. Full script: Course/Demos/s5_demo.md (Part B), using Course/Data/R/02_describe.R.</a:t>
+              <a:t>Live demo, 6 minutes. Script: s5_demo.md, Part B (02_describe.R).</a:t>
             </a:r>
           </a:p>
           <a:p>
             <a:r>
               <a:rPr lang="en-US" sz="1400" b="0" dirty="0"/>
-              <a:t>Show: the shape of age (roughly symmetric, so mean and SD) vs lactate and ICU stay (right-skewed, so median and IQR). The Table 1 by fluid-balance group with overall, negative (n = 245) and positive (n = 373) columns and the number missing per variable. The histogram of fluid balance, the SOFA boxplot by group, the sorted bar chart of infection source.</a:t>
+              <a:t>Show the shapes first, then Table 1 by fluid-balance group with missing values, then the figures.</a:t>
             </a:r>
           </a:p>
           <a:p>
             <a:r>
               <a:rPr lang="en-US" sz="1400" b="0" dirty="0"/>
-              <a:t>Point out: no p-values in Table 1 (it describes, it does not test), as written in the FLUID-ICU SAP.</a:t>
+              <a:t>No p-values in Table 1, as the SAP says.</a:t>
             </a:r>
           </a:p>
           <a:p>
             <a:r>
               <a:rPr lang="en-US" sz="1400" b="0" dirty="0"/>
-              <a:t>If R fails: go straight to the next slides. They show the same outputs.</a:t>
+              <a:t>If R fails, the next slides show the same outputs.</a:t>
             </a:r>
           </a:p>
         </p:txBody>
@@ -4040,37 +3458,25 @@
           <a:p>
             <a:r>
               <a:rPr lang="en-US" sz="1400" b="0" dirty="0"/>
-              <a:t>Teaching point: read Table 1 with the two questions from 5.3: do these patients look like mine, and were the groups alike at the start?</a:t>
+              <a:t>Read with the two questions from 5.3.</a:t>
             </a:r>
           </a:p>
           <a:p>
             <a:r>
               <a:rPr lang="en-US" sz="1400" b="0" dirty="0"/>
-              <a:t>Age: mean 64.6 vs 61.4 years (negative vs positive): similar.</a:t>
+              <a:t>Age similar. Severity not: SOFA 6 vs 8, vasopressor 24.9% vs 55.0%, ventilation 39.6% vs 57.9%. Heart failure goes the other way (22.0% vs 11.5%).</a:t>
             </a:r>
           </a:p>
           <a:p>
             <a:r>
               <a:rPr lang="en-US" sz="1400" b="0" dirty="0"/>
-              <a:t>Severity is not similar: SOFA median 6 (4 to 8) vs 8 (6 to 10). Vasopressor 61/245 (24.9%) vs 205/373 (55.0%). Mechanical ventilation 97/245 (39.6%) vs 216/373 (57.9%), lactate median 2.2 vs 2.9 mmol/L.</a:t>
+              <a:t>Sicker patients got more fluid: confounding by indication.</a:t>
             </a:r>
           </a:p>
           <a:p>
             <a:r>
               <a:rPr lang="en-US" sz="1400" b="0" dirty="0"/>
-              <a:t>Heart failure: 54/245 (22.0%) vs 43/373 (11.5%): clinicians give less fluid to patients with heart failure.</a:t>
-            </a:r>
-          </a:p>
-          <a:p>
-            <a:r>
-              <a:rPr lang="en-US" sz="1400" b="0" dirty="0"/>
-              <a:t>Interpretation: patients with a positive balance were sicker before the fluid was given. Sicker patients receive more fluid and die more often: confounding by indication (Session 4). Any crude comparison of mortality will be biased. Session 6 adjusts for it.</a:t>
-            </a:r>
-          </a:p>
-          <a:p>
-            <a:r>
-              <a:rPr lang="en-US" sz="1400" b="0" dirty="0"/>
-              <a:t>Ask (poll, or call on two or three people): from this table alone, would you expect the crude odds ratio for death to be larger or smaller than the adjusted one? Expected: larger (the sickness inflates it).</a:t>
+              <a:t>Ask: crude OR larger or smaller than adjusted? Expected: larger.</a:t>
             </a:r>
           </a:p>
         </p:txBody>
@@ -4151,25 +3557,13 @@
           <a:p>
             <a:r>
               <a:rPr lang="en-US" sz="1400" b="0" dirty="0"/>
-              <a:t>Teaching point: always look at the exposure before using it.</a:t>
+              <a:t>Look at the exposure before using it: median 8.8 ml/kg (IQR -10.3 to 26.2), positive in 373 of 618.</a:t>
             </a:r>
           </a:p>
           <a:p>
             <a:r>
               <a:rPr lang="en-US" sz="1400" b="0" dirty="0"/>
-              <a:t>The cumulative fluid balance at day 3 ranges widely. Median 8.8 ml/kg (IQR -10.3 to 26.2). 373 of 618 patients (60.4%) had a positive balance.</a:t>
-            </a:r>
-          </a:p>
-          <a:p>
-            <a:r>
-              <a:rPr lang="en-US" sz="1400" b="0" dirty="0"/>
-              <a:t>The primary analysis (Q1) cuts the continuous variable at 0 ml/kg into two groups. Q2 and Q3 keep it continuous (per 10 ml/kg). Cutting loses information but is easier to explain. The SAP fixed this choice in advance.</a:t>
-            </a:r>
-          </a:p>
-          <a:p>
-            <a:r>
-              <a:rPr lang="en-US" sz="1400" b="0" dirty="0"/>
-              <a:t>Ask (call on two or three people, microphone on): which summary would you report for this variable in Table 1? Expected: median (IQR), as here, because of the tails. Roughly symmetric in the middle, so mean (SD) would also be acceptable if stated.</a:t>
+              <a:t>Q1 cuts it at 0 ml/kg. Q2 and Q3 keep it continuous (per 10 ml/kg). The SAP fixed this in advance.</a:t>
             </a:r>
           </a:p>
         </p:txBody>
@@ -4250,25 +3644,19 @@
           <a:p>
             <a:r>
               <a:rPr lang="en-US" sz="1400" b="0" dirty="0"/>
-              <a:t>Teaching point: the 'dots plus box' figure from 5.3, applied to FLUID-ICU.</a:t>
+              <a:t>Dots plus box for FLUID-ICU: median SOFA 6 vs 8, every patient visible.</a:t>
             </a:r>
           </a:p>
           <a:p>
             <a:r>
               <a:rPr lang="en-US" sz="1400" b="0" dirty="0"/>
-              <a:t>SOFA score on admission: median 6 (IQR 4 to 8) in the negative-balance group vs 8 (6 to 10) in the positive-balance group. Every dot is a patient, so the reader sees the overlap and the shift.</a:t>
+              <a:t>This picture is the visual proof of confounding by indication.</a:t>
             </a:r>
           </a:p>
           <a:p>
             <a:r>
               <a:rPr lang="en-US" sz="1400" b="0" dirty="0"/>
-              <a:t>This single picture is the visual proof of confounding by indication in this dataset.</a:t>
-            </a:r>
-          </a:p>
-          <a:p>
-            <a:r>
-              <a:rPr lang="en-US" sz="1400" b="0" dirty="0"/>
-              <a:t>Ask (call on two or three people, microphone on): why a boxplot and not a bar of the mean SOFA? Expected: SOFA is a score with a skewed distribution. The bar would hide the spread and the overlap.</a:t>
+              <a:t>Ask: why not a bar of the mean SOFA? Expected: it would hide the spread and the overlap.</a:t>
             </a:r>
           </a:p>
         </p:txBody>
@@ -4349,25 +3737,19 @@
           <a:p>
             <a:r>
               <a:rPr lang="en-US" sz="1400" b="0" dirty="0"/>
-              <a:t>Teaching point: the length-of-stay picture from 5.3 is true in FLUID-ICU too.</a:t>
+              <a:t>ICU stay in the 439 survivors is right-skewed: mean 7.5, median 6.2 days.</a:t>
             </a:r>
           </a:p>
           <a:p>
             <a:r>
               <a:rPr lang="en-US" sz="1400" b="0" dirty="0"/>
-              <a:t>ICU stay among the 439 survivors is right-skewed: a few very long stays pull the mean (7.5 days) above the median (6.2 days). Across all patients: mean 7.3, median 6.0.</a:t>
+              <a:t>Q5 reports medians (IQR), uses Mann-Whitney and a log scale in the model.</a:t>
             </a:r>
           </a:p>
           <a:p>
             <a:r>
               <a:rPr lang="en-US" sz="1400" b="0" dirty="0"/>
-              <a:t>Question 5 (Q5) is about this outcome: it reports medians (IQR), compares groups with the Mann-Whitney test, and uses a log scale in the model (Session 6).</a:t>
-            </a:r>
-          </a:p>
-          <a:p>
-            <a:r>
-              <a:rPr lang="en-US" sz="1400" b="0" dirty="0"/>
-              <a:t>Ask (call on two or three people, microphone on): who most needs this slide? Expected: anyone who chooses Q5 for the manuscript, but every manuscript reports at least one skewed variable in Table 1.</a:t>
+              <a:t>Every Table 1 has at least one skewed variable.</a:t>
             </a:r>
           </a:p>
         </p:txBody>
@@ -4448,49 +3830,25 @@
           <a:p>
             <a:r>
               <a:rPr lang="en-US" sz="1400" b="0" dirty="0"/>
-              <a:t>Teaching point: every variable is either a number you measure or a category you assign. Then split once more.</a:t>
+              <a:t>Every variable is a number (continuous, count) or a category (binary, nominal, ordinal). Time-to-event: just mention it, it returns in Session 6.</a:t>
             </a:r>
           </a:p>
           <a:p>
             <a:r>
               <a:rPr lang="en-US" sz="1400" b="0" dirty="0"/>
-              <a:t>Numbers: continuous (any value on a scale: fluid balance in ml/kg, lactate, age) or counts (whole numbers: number of organ failures).</a:t>
+              <a:t>Misconception: sex coded 1/2 is still a category.</a:t>
             </a:r>
           </a:p>
           <a:p>
             <a:r>
               <a:rPr lang="en-US" sz="1400" b="0" dirty="0"/>
-              <a:t>Categories: binary (two options: died yes/no), nominal (several groups with no order: source of sepsis) and ordinal (ordered groups: acute kidney injury (AKI) stage 1 to 3, pain mild/moderate/severe).</a:t>
+              <a:t>Tip: collect numbers as numbers. You can group age later, never ungroup it.</a:t>
             </a:r>
           </a:p>
           <a:p>
             <a:r>
               <a:rPr lang="en-US" sz="1400" b="0" dirty="0"/>
-              <a:t>Time-to-event (in the intro line) is special: it combines how long (time to death) and whether it happened (died, or censored at day 28 if still alive). Just mention it. We meet it again with Kaplan-Meier curves and Cox models in Session 6 (6.3).</a:t>
-            </a:r>
-          </a:p>
-          <a:p>
-            <a:r>
-              <a:rPr lang="en-US" sz="1400" b="0" dirty="0"/>
-              <a:t>Common misconception: 'coded as numbers means numerical'. Sex coded 1/2 is still a category. The average of 1.4 means nothing.</a:t>
-            </a:r>
-          </a:p>
-          <a:p>
-            <a:r>
-              <a:rPr lang="en-US" sz="1400" b="0" dirty="0"/>
-              <a:t>Quick sorting game: name a variable and call on someone to say its type: Glasgow Coma Scale (ordinal, though often treated as a number), heart rate (continuous), ventilated yes/no (binary), blood group (nominal), days on ventilator (count), time to extubation (time-to-event).</a:t>
-            </a:r>
-          </a:p>
-          <a:p>
-            <a:r>
-              <a:rPr lang="en-US" sz="1400" b="0" dirty="0"/>
-              <a:t>Tip: collect continuous variables as numbers whenever possible. You can always group age into bands later, but you can never get the exact age back from '60-69'.</a:t>
-            </a:r>
-          </a:p>
-          <a:p>
-            <a:r>
-              <a:rPr lang="en-US" sz="1400" b="0" dirty="0"/>
-              <a:t>This slide replaces the earlier tree picture with editable cards. The content is the same.</a:t>
+              <a:t>Timing: 3 minutes.</a:t>
             </a:r>
           </a:p>
         </p:txBody>
@@ -4571,49 +3929,25 @@
           <a:p>
             <a:r>
               <a:rPr lang="en-US" sz="1400" b="0" dirty="0"/>
-              <a:t>Whole-class task, 10 minutes (21:45 to 21:55). Exercise 6 of the Session 5 exercise sheet. Model answers in Course/Solutions/s5_solutions.md.</a:t>
+              <a:t>Whole class, 10 minutes (21:45-21:55). Exercise 6. Answers: s5_solutions.md.</a:t>
             </a:r>
           </a:p>
           <a:p>
             <a:r>
               <a:rPr lang="en-US" sz="1400" b="0" dirty="0"/>
-              <a:t>Share Table 1 from the Q1 results pack on screen. All five packs contain the same Table 1 by fluid-balance group (the Q5 pack also has a table for survivors).</a:t>
+              <a:t>Poll the summaries (age mean, SOFA median, vasopressor n %). Ask for the biggest difference: severity.</a:t>
             </a:r>
           </a:p>
           <a:p>
             <a:r>
               <a:rPr lang="en-US" sz="1400" b="0" dirty="0"/>
-              <a:t>Poll (2 minutes): age = mean (SD), symmetric. SOFA = median (IQR), skewed score. Vasopressor = n (%), binary.</a:t>
+              <a:t>Write two sentences together, e.g. 'Of 620 patients, 618 had a day-3 balance and 373 (60.4%) were positive. They were sicker (median SOFA 8 vs 6, vasopressor 55.0% vs 24.9%).'</a:t>
             </a:r>
           </a:p>
           <a:p>
             <a:r>
               <a:rPr lang="en-US" sz="1400" b="0" dirty="0"/>
-              <a:t>Call on two or three people (3 minutes): biggest difference = severity (SOFA, vasopressor, ventilation). Someone may spot heart failure going the other way: clinicians give less fluid in heart failure.</a:t>
-            </a:r>
-          </a:p>
-          <a:p>
-            <a:r>
-              <a:rPr lang="en-US" sz="1400" b="0" dirty="0"/>
-              <a:t>Write together (4 minutes), typing in the shared document: 'Of 620 enrolled patients, 618 had a computable day-3 fluid balance, 373 (60.4%) had a positive balance. Patients with a positive balance were more severely ill at admission (median SOFA 8 vs 6, vasopressor 55.0% vs 24.9%, mechanical ventilation 57.9% vs 39.6%).'</a:t>
-            </a:r>
-          </a:p>
-          <a:p>
-            <a:r>
-              <a:rPr lang="en-US" sz="1400" b="0" dirty="0"/>
-              <a:t>Q2 to Q5 (1 minute): the same patients, so the same Table 1. Q5 adds survivors only (n = 439).</a:t>
-            </a:r>
-          </a:p>
-          <a:p>
-            <a:r>
-              <a:rPr lang="en-US" sz="1400" b="0" dirty="0"/>
-              <a:t>Listen for: correct summaries (mean vs median), no interpretation of 'significance' in Table 1, and the realisation that severity differs between groups.</a:t>
-            </a:r>
-          </a:p>
-          <a:p>
-            <a:r>
-              <a:rPr lang="en-US" sz="1400" b="0" dirty="0"/>
-              <a:t>These sentences go straight into the Results of each participant's manuscript (Session 7).</a:t>
+              <a:t>These sentences are the start of a Results section.</a:t>
             </a:r>
           </a:p>
         </p:txBody>
@@ -4694,43 +4028,19 @@
           <a:p>
             <a:r>
               <a:rPr lang="en-US" sz="1400" b="0" dirty="0"/>
-              <a:t>Show for 1 minute before the instructor starts modelling, so participants see the expected level.</a:t>
+              <a:t>Show for 1 minute before modelling, so participants see the expected level.</a:t>
             </a:r>
           </a:p>
           <a:p>
             <a:r>
               <a:rPr lang="en-US" sz="1400" b="0" dirty="0"/>
-              <a:t>Variables table: primary outcome, exposure (or intervention), 3-5 confounders, each with its type. This table drives everything else.</a:t>
+              <a:t>Variables table first: it drives the CRF, the dictionary and the analysis.</a:t>
             </a:r>
           </a:p>
           <a:p>
             <a:r>
               <a:rPr lang="en-US" sz="1400" b="0" dirty="0"/>
-              <a:t>Mini-CRF: 6 to 10 items that collect exactly those variables, with units, time points and 'unknown' options (the worked example).</a:t>
-            </a:r>
-          </a:p>
-          <a:p>
-            <a:r>
-              <a:rPr lang="en-US" sz="1400" b="0" dirty="0"/>
-              <a:t>Data dictionary: 3 to 5 rows with short variable names, labels, types, units or codes, and allowed values.</a:t>
-            </a:r>
-          </a:p>
-          <a:p>
-            <a:r>
-              <a:rPr lang="en-US" sz="1400" b="0" dirty="0"/>
-              <a:t>Data-management plan: one or two sentences: EDC (electronic data capture) or paper with double entry, coded IDs with a separately locked linking log, audit trail, backups, and a data-sharing statement in the consent form.</a:t>
-            </a:r>
-          </a:p>
-          <a:p>
-            <a:r>
-              <a:rPr lang="en-US" sz="1400" b="0" dirty="0"/>
-              <a:t>Each participant writes this for their own research question (their own proposal), not for FLUID-ICU.</a:t>
-            </a:r>
-          </a:p>
-          <a:p>
-            <a:r>
-              <a:rPr lang="en-US" sz="1400" b="0" dirty="0"/>
-              <a:t>Next Saturday (Session 6) the proposal gets the sample size, the analysis plan and the missing-data plan.</a:t>
+              <a:t>Each participant writes this for their own proposal, not for FLUID-ICU.</a:t>
             </a:r>
           </a:p>
         </p:txBody>
@@ -4811,43 +4121,19 @@
           <a:p>
             <a:r>
               <a:rPr lang="en-US" sz="1400" b="0" dirty="0"/>
-              <a:t>Proposal builder 5: 30 minutes (21:55 to 22:25). Template: Course/Templates/Research_Proposal_Template.docx (sent before Session 1). Worksheet: Exercise 8 of the Session 5 exercise sheet, with the same headings.</a:t>
+              <a:t>Proposal builder 5, 30 minutes (21:55-22:25). Template: Research_Proposal_Template.docx. Worksheet: Exercise 8.</a:t>
             </a:r>
           </a:p>
           <a:p>
             <a:r>
               <a:rPr lang="en-US" sz="1400" b="0" dirty="0"/>
-              <a:t>Model live (18 minutes) on the running example, typing into a copy of the template on the shared screen: variables table (5 min), mini-CRF (5 min), data dictionary rows with one validation rule (4 min), data-management plan (4 min). Call on people to suggest items as you go.</a:t>
+              <a:t>Model live (18 min): variables table, mini-CRF, dictionary rows, data-management plan. Then 10 minutes on their own variables table, 2 minutes for questions.</a:t>
             </a:r>
           </a:p>
           <a:p>
             <a:r>
               <a:rPr lang="en-US" sz="1400" b="0" dirty="0"/>
-              <a:t>Individual slot (10 minutes): everyone drafts their own variables table quietly (cameras can stay off). Then 2 minutes for questions in the chat.</a:t>
-            </a:r>
-          </a:p>
-          <a:p>
-            <a:r>
-              <a:rPr lang="en-US" sz="1400" b="0" dirty="0"/>
-              <a:t>Use the FLUID-ICU data dictionary as a model: participants have just seen what a real one looks like.</a:t>
-            </a:r>
-          </a:p>
-          <a:p>
-            <a:r>
-              <a:rPr lang="en-US" sz="1400" b="0" dirty="0"/>
-              <a:t>Common problems to mention while modelling: too many CRF items (keep to 10). Confounders that are actually outcomes. Names and IDs in the same file. No plan for backups.</a:t>
-            </a:r>
-          </a:p>
-          <a:p>
-            <a:r>
-              <a:rPr lang="en-US" sz="1400" b="0" dirty="0"/>
-              <a:t>Homework: finish the mini-CRF, data dictionary rows and data-management plan in your own template before Session 6.</a:t>
-            </a:r>
-          </a:p>
-          <a:p>
-            <a:r>
-              <a:rPr lang="en-US" sz="1400" b="0" dirty="0"/>
-              <a:t>At 22:25, stop for the wrap-up.</a:t>
+              <a:t>Watch for: too many CRF items, outcomes listed as confounders, names in the data file.</a:t>
             </a:r>
           </a:p>
         </p:txBody>
@@ -4928,37 +4214,13 @@
           <a:p>
             <a:r>
               <a:rPr lang="en-US" sz="1400" b="0" dirty="0"/>
-              <a:t>Key words of the day (2 minutes). Point to each word and call on someone for a one-line definition, microphone on. Correct gently.</a:t>
+              <a:t>Key words (2 minutes). Point to a word, call on someone for a one-line definition, correct gently.</a:t>
             </a:r>
           </a:p>
           <a:p>
             <a:r>
               <a:rPr lang="en-US" sz="1400" b="0" dirty="0"/>
-              <a:t>Variable type: number vs category, and the subtypes. CRF (case report form): the form that collects the data. Data dictionary: one row per variable, with type, unit/codes and allowed values.</a:t>
-            </a:r>
-          </a:p>
-          <a:p>
-            <a:r>
-              <a:rPr lang="en-US" sz="1400" b="0" dirty="0"/>
-              <a:t>Validation check: a rule that flags impossible values (range, consistency, logic, completeness). Audit trail: the record of who changed what, when and why. Cleaning log: the list of every correction made to the raw data (FLUID-ICU).</a:t>
-            </a:r>
-          </a:p>
-          <a:p>
-            <a:r>
-              <a:rPr lang="en-US" sz="1400" b="0" dirty="0"/>
-              <a:t>Median (IQR) for skewed data, mean (SD) for symmetric data. Skewed = long tail.</a:t>
-            </a:r>
-          </a:p>
-          <a:p>
-            <a:r>
-              <a:rPr lang="en-US" sz="1400" b="0" dirty="0"/>
-              <a:t>Table 1: baseline characteristics by group. Dots + box: show every patient, n (%): how categories are reported.</a:t>
-            </a:r>
-          </a:p>
-          <a:p>
-            <a:r>
-              <a:rPr lang="en-US" sz="1400" b="0" dirty="0"/>
-              <a:t>All terms are in the EN-VN glossary in Course/References.</a:t>
+              <a:t>All terms are in the English-Vietnamese glossary.</a:t>
             </a:r>
           </a:p>
         </p:txBody>
@@ -5039,31 +4301,13 @@
           <a:p>
             <a:r>
               <a:rPr lang="en-US" sz="1400" b="0" dirty="0"/>
-              <a:t>Session recap (2 minutes). Ask three volunteers (raise-hand button) to give one example for each card from today.</a:t>
+              <a:t>Recap (2 minutes). Ask three volunteers for one example per card.</a:t>
             </a:r>
           </a:p>
           <a:p>
             <a:r>
               <a:rPr lang="en-US" sz="1400" b="0" dirty="0"/>
-              <a:t>Design the data: the worked CRF item, the data dictionary, validation rules.</a:t>
-            </a:r>
-          </a:p>
-          <a:p>
-            <a:r>
-              <a:rPr lang="en-US" sz="1400" b="0" dirty="0"/>
-              <a:t>Keep it clean: FLUID-ICU showed what real data look like before cleaning and why the cleaning log matters.</a:t>
-            </a:r>
-          </a:p>
-          <a:p>
-            <a:r>
-              <a:rPr lang="en-US" sz="1400" b="0" dirty="0"/>
-              <a:t>Describe honestly: median vs mean, dots instead of dynamite plots, a Table 1 a reader understands without the text.</a:t>
-            </a:r>
-          </a:p>
-          <a:p>
-            <a:r>
-              <a:rPr lang="en-US" sz="1400" b="0" dirty="0"/>
-              <a:t>Next Saturday (Session 6): from the sample to an answer: confidence intervals, p-values, tests, regression, survival and missing data, all run live on FLUID-ICU.</a:t>
+              <a:t>Next Saturday: confidence intervals, p-values, tests, regression, survival and missing data, run live on FLUID-ICU.</a:t>
             </a:r>
           </a:p>
         </p:txBody>
@@ -5144,25 +4388,19 @@
           <a:p>
             <a:r>
               <a:rPr lang="en-US" sz="1400" b="0" dirty="0"/>
-              <a:t>Wrap-up: 5 minutes (22:25 to 22:30), including the key-words and recap slides.</a:t>
+              <a:t>Wrap-up (22:25-22:30).</a:t>
             </a:r>
           </a:p>
           <a:p>
             <a:r>
               <a:rPr lang="en-US" sz="1400" b="0" dirty="0"/>
-              <a:t>Exit question in the chat: name one data-quality problem found in the raw FLUID-ICU data and how the cleaning fixed it. Purpose: it checks understanding of today's core idea (clean with a script and a log, never by hand). Read the answers before Session 6 and open Session 6 with two or three of them.</a:t>
+              <a:t>Exit question: one data-quality problem in FLUID-ICU and how it was fixed. Read the answers and open Session 6 with two or three.</a:t>
             </a:r>
           </a:p>
           <a:p>
             <a:r>
               <a:rPr lang="en-US" sz="1400" b="0" dirty="0"/>
-              <a:t>Homework: finish the mini-CRF, data dictionary rows and data-management plan of your own proposal (Part 3, first half). Choose one of the five FLUID-ICU questions for your manuscript, tell the instructor, and read its results pack (Table 1, figures). Optional: Exercises 1, 3, 4 and 5 of the Session 5 exercise sheet.</a:t>
-            </a:r>
-          </a:p>
-          <a:p>
-            <a:r>
-              <a:rPr lang="en-US" sz="1400" b="0" dirty="0"/>
-              <a:t>Thank the class: today was a lot of new vocabulary. Next Saturday builds directly on it.</a:t>
+              <a:t>Homework: mini-CRF, dictionary rows and data-management plan for their own proposal. Optional: Exercises 1, 3, 4 and 5.</a:t>
             </a:r>
           </a:p>
         </p:txBody>
@@ -5243,7 +4481,7 @@
           <a:p>
             <a:r>
               <a:rPr lang="en-US" sz="1400" b="0" dirty="0"/>
-              <a:t>Extra: the slides after this point are optional. Use them if the class is ahead of time, or point participants to them for self-study (they are in the handout deck).</a:t>
+              <a:t>Extra slides: optional, for a fast class or self-study.</a:t>
             </a:r>
           </a:p>
         </p:txBody>
@@ -5324,43 +4562,13 @@
           <a:p>
             <a:r>
               <a:rPr lang="en-US" sz="1400" b="0" dirty="0"/>
-              <a:t>Extra: Teaching point: four habits that cost little and save studies.</a:t>
+              <a:t>Extra. Four cheap habits: codes not free text, a read-only raw file with dated copies, 3-2-1 backups, a data-sharing statement planned in the consent form.</a:t>
             </a:r>
           </a:p>
           <a:p>
             <a:r>
               <a:rPr lang="en-US" sz="1400" b="0" dirty="0"/>
-              <a:t>Coding: store categories as numeric codes defined in the data dictionary (1 = lung, 2 = urine...). Use a study ID for each patient. Names and hospital numbers stay in a separate, locked linking log.</a:t>
-            </a:r>
-          </a:p>
-          <a:p>
-            <a:r>
-              <a:rPr lang="en-US" sz="1400" b="0" dirty="0"/>
-              <a:t>Versions: the raw data file is never edited. It is set to read-only. Every cleaning step creates a new, dated copy (data_2026-03-12_v2) and a short log of what changed. Then any result can be traced back.</a:t>
-            </a:r>
-          </a:p>
-          <a:p>
-            <a:r>
-              <a:rPr lang="en-US" sz="1400" b="0" dirty="0"/>
-              <a:t>Backups: the 3-2-1 rule: three copies, on two different media, one off-site, encrypted. A backup you have never restored is only a hope.</a:t>
-            </a:r>
-          </a:p>
-          <a:p>
-            <a:r>
-              <a:rPr lang="en-US" sz="1400" b="0" dirty="0"/>
-              <a:t>Data-sharing statement: most journals now require one (Sessions 7-8). Example wording: 'De-identified participant data and the data dictionary will be available from the corresponding author on reasonable request after publication, subject to ethics approval.' Write it into the consent form and protocol now, or you may not be allowed to share later.</a:t>
-            </a:r>
-          </a:p>
-          <a:p>
-            <a:r>
-              <a:rPr lang="en-US" sz="1400" b="0" dirty="0"/>
-              <a:t>Ask: if your laptop were stolen tonight, would your study survive? Expected: an uncomfortable silence. Good.</a:t>
-            </a:r>
-          </a:p>
-          <a:p>
-            <a:r>
-              <a:rPr lang="en-US" sz="1400" b="0" dirty="0"/>
-              <a:t>Timing: 2 minutes.</a:t>
+              <a:t>Ask: if your laptop were stolen tonight, would your study survive?</a:t>
             </a:r>
           </a:p>
         </p:txBody>
@@ -5441,43 +4649,13 @@
           <a:p>
             <a:r>
               <a:rPr lang="en-US" sz="1400" b="0" dirty="0"/>
-              <a:t>Extra: Teaching point: three distortions you will see in posters, reports and papers. Top row misleading, bottom row fixed.</a:t>
+              <a:t>Extra. Top row misleading, bottom row fixed: a 3-D pie, a truncated axis (2 points looks like a tripling), dual axes. Bars start at zero.</a:t>
             </a:r>
           </a:p>
           <a:p>
             <a:r>
               <a:rPr lang="en-US" sz="1400" b="0" dirty="0"/>
-              <a:t>3-D pie: the tilt makes slices at the front look bigger. The eye cannot compare angles well. Ask: which slice is bigger, urine or abdomen? Then show the sorted bar chart: 25% vs 20%, instantly clear.</a:t>
-            </a:r>
-          </a:p>
-          <a:p>
-            <a:r>
-              <a:rPr lang="en-US" sz="1400" b="0" dirty="0"/>
-              <a:t>Truncated axis: the y-axis starts at 28.5%, so a 2-point difference in mortality (31% vs 29%) looks like a tripling. Bars must start at zero. (Line charts may zoom in, but say so.)</a:t>
-            </a:r>
-          </a:p>
-          <a:p>
-            <a:r>
-              <a:rPr lang="en-US" sz="1400" b="0" dirty="0"/>
-              <a:t>Dual axes: two different y-axes scaled by the author make any two lines cross wherever the author wants, suggesting 'hand hygiene went up, so infections went down'. Better: two panels sharing the time axis, and remember correlation is not causation (6.3).</a:t>
-            </a:r>
-          </a:p>
-          <a:p>
-            <a:r>
-              <a:rPr lang="en-US" sz="1400" b="0" dirty="0"/>
-              <a:t>All data here are simulated.</a:t>
-            </a:r>
-          </a:p>
-          <a:p>
-            <a:r>
-              <a:rPr lang="en-US" sz="1400" b="0" dirty="0"/>
-              <a:t>Ask: where have you seen a truncated axis recently? Expected: hospital dashboards, pharmaceutical advertisements, news.</a:t>
-            </a:r>
-          </a:p>
-          <a:p>
-            <a:r>
-              <a:rPr lang="en-US" sz="1400" b="0" dirty="0"/>
-              <a:t>Timing: 2 minutes.</a:t>
+              <a:t>Ask: where have you seen a truncated axis recently?</a:t>
             </a:r>
           </a:p>
         </p:txBody>
@@ -5558,7 +4736,7 @@
           <a:p>
             <a:r>
               <a:rPr lang="en-US" sz="1400" b="0" dirty="0"/>
-              <a:t>Copyright slide. Leave it on screen while participants leave the meeting.</a:t>
+              <a:t>Leave on screen while people leave the meeting.</a:t>
             </a:r>
           </a:p>
         </p:txBody>
@@ -5639,49 +4817,19 @@
           <a:p>
             <a:r>
               <a:rPr lang="en-US" sz="1400" b="0" dirty="0"/>
-              <a:t>Check your understanding (3 minutes). Launch a poll for each variable with six options (continuous, count, binary, nominal, ordinal, time-to-event), or call on one person per variable. Reveal the side panel only after each vote.</a:t>
+              <a:t>Check (3 minutes). One poll per variable, six options. Reveal after each vote.</a:t>
             </a:r>
           </a:p>
           <a:p>
             <a:r>
               <a:rPr lang="en-US" sz="1400" b="0" dirty="0"/>
-              <a:t>Heart rate: continuous.</a:t>
+              <a:t>GCS: ordinal, often analysed as a number. Time to extubation: time-to-event, because some patients are never extubated.</a:t>
             </a:r>
           </a:p>
           <a:p>
             <a:r>
               <a:rPr lang="en-US" sz="1400" b="0" dirty="0"/>
-              <a:t>GCS: ordinal. Ordered scores with unequal steps, often analysed like a number, which is acceptable if stated.</a:t>
-            </a:r>
-          </a:p>
-          <a:p>
-            <a:r>
-              <a:rPr lang="en-US" sz="1400" b="0" dirty="0"/>
-              <a:t>Blood group: nominal, no order.</a:t>
-            </a:r>
-          </a:p>
-          <a:p>
-            <a:r>
-              <a:rPr lang="en-US" sz="1400" b="0" dirty="0"/>
-              <a:t>Ventilated yes/no: binary.</a:t>
-            </a:r>
-          </a:p>
-          <a:p>
-            <a:r>
-              <a:rPr lang="en-US" sz="1400" b="0" dirty="0"/>
-              <a:t>Time to extubation: time-to-event, because some patients are never extubated (they die or are transferred) and must be censored.</a:t>
-            </a:r>
-          </a:p>
-          <a:p>
-            <a:r>
-              <a:rPr lang="en-US" sz="1400" b="0" dirty="0"/>
-              <a:t>If more than a third get GCS or time-to-extubation wrong, go back to the previous slide for one minute.</a:t>
-            </a:r>
-          </a:p>
-          <a:p>
-            <a:r>
-              <a:rPr lang="en-US" sz="1400" b="0" dirty="0"/>
-              <a:t>Why this matters: the type decides the CRF box, the summary (5.3) and the test (Session 6).</a:t>
+              <a:t>If a third get it wrong, go back one slide.</a:t>
             </a:r>
           </a:p>
         </p:txBody>
@@ -5762,49 +4910,19 @@
           <a:p>
             <a:r>
               <a:rPr lang="en-US" sz="1400" b="0" dirty="0"/>
-              <a:t>Teaching point: a CRF item is good when two different people, filling it for the same patient, would write the same answer.</a:t>
-            </a:r>
-          </a:p>
-          <a:p>
-            <a:r>
-              <a:rPr lang="en-US" sz="1400" b="1" dirty="0"/>
-              <a:t>Go through the left side and call on people to diagnose each problem before you reveal the red text:</a:t>
+              <a:t>A good CRF item: two people filling it for the same patient write the same answer.</a:t>
             </a:r>
           </a:p>
           <a:p>
             <a:r>
               <a:rPr lang="en-US" sz="1400" b="0" dirty="0"/>
-              <a:t>Fluid balance: no unit (ml? litres? ml/kg?), no time window (today? cumulative?). For our running example this single box decides the primary outcome of the whole study.</a:t>
+              <a:t>Ask the class to diagnose each left-hand item before you reveal it: no unit or time window, age without a date, incomplete options, two opinions in one question.</a:t>
             </a:r>
           </a:p>
           <a:p>
             <a:r>
               <a:rPr lang="en-US" sz="1400" b="0" dirty="0"/>
-              <a:t>Age: years or months, on which date? Better: collect date of birth and date of admission and let the computer calculate age.</a:t>
-            </a:r>
-          </a:p>
-          <a:p>
-            <a:r>
-              <a:rPr lang="en-US" sz="1400" b="0" dirty="0"/>
-              <a:t>Infection source: options are incomplete (no 'other', no 'unknown') and it is unclear whether you can tick more than one.</a:t>
-            </a:r>
-          </a:p>
-          <a:p>
-            <a:r>
-              <a:rPr lang="en-US" sz="1400" b="0" dirty="0"/>
-              <a:t>Did fluids work and did the patient improve: two questions in one (double-barrelled), and both are opinions. Replace with objective measures (lactate, mean arterial pressure, vasopressor dose).</a:t>
-            </a:r>
-          </a:p>
-          <a:p>
-            <a:r>
-              <a:rPr lang="en-US" sz="1400" b="0" dirty="0"/>
-              <a:t>Right side: unit and time window inside the question, boxes for digits including a +/- sign (fluid balance can be negative), fixed date format, tick one, 'other' and 'unknown' options, decimal place shown for lactate.</a:t>
-            </a:r>
-          </a:p>
-          <a:p>
-            <a:r>
-              <a:rPr lang="en-US" sz="1400" b="0" dirty="0"/>
-              <a:t>Ask: what is wrong with leaving a box blank? Expected: we cannot tell 'not done' from 'forgot' from 'zero'. That is why we add 'unknown / not done'.</a:t>
+              <a:t>Ask: what is wrong with a blank box? Expected: 'not done', 'forgot' and 'zero' look the same.</a:t>
             </a:r>
           </a:p>
         </p:txBody>
@@ -5885,49 +5003,19 @@
           <a:p>
             <a:r>
               <a:rPr lang="en-US" sz="1400" b="0" dirty="0"/>
-              <a:t>Worked example (3 minutes): build one CRF item together, the primary exposure of the course dataset.</a:t>
+              <a:t>Worked example (3 minutes): the FLUID-ICU exposure in five decisions.</a:t>
             </a:r>
           </a:p>
           <a:p>
             <a:r>
               <a:rPr lang="en-US" sz="1400" b="0" dirty="0"/>
-              <a:t>What: cumulative fluid balance = total fluid in (crystalloids, colloids, blood, drug diluents, enteral) minus total fluid out (urine, drains, losses). Decide whether insensible losses count. Write it in the data dictionary.</a:t>
+              <a:t>What: all fluid in minus all fluid out. When: ICU admission to end of day 3. Unit: ml/kg of admission weight. Format: a signed number. Missing: a 'not recorded' box.</a:t>
             </a:r>
           </a:p>
           <a:p>
             <a:r>
               <a:rPr lang="en-US" sz="1400" b="0" dirty="0"/>
-              <a:t>When: from ICU admission to the end of day 3 (the FLUID-ICU definition). A different window gives a different variable.</a:t>
-            </a:r>
-          </a:p>
-          <a:p>
-            <a:r>
-              <a:rPr lang="en-US" sz="1400" b="0" dirty="0"/>
-              <a:t>Unit: ml/kg of admission weight, so patients of different sizes can be compared. That means weight must also be on the CRF.</a:t>
-            </a:r>
-          </a:p>
-          <a:p>
-            <a:r>
-              <a:rPr lang="en-US" sz="1400" b="0" dirty="0"/>
-              <a:t>Format: a signed number with digit boxes. Fluid balance can be negative.</a:t>
-            </a:r>
-          </a:p>
-          <a:p>
-            <a:r>
-              <a:rPr lang="en-US" sz="1400" b="0" dirty="0"/>
-              <a:t>Missing: a 'not recorded' box and a reason, so a blank always means 'forgotten'.</a:t>
-            </a:r>
-          </a:p>
-          <a:p>
-            <a:r>
-              <a:rPr lang="en-US" sz="1400" b="0" dirty="0"/>
-              <a:t>Ask (call on two or three people, microphone on): what other item must the CRF now contain because of the unit? Expected: body weight at admission (and how it was obtained).</a:t>
-            </a:r>
-          </a:p>
-          <a:p>
-            <a:r>
-              <a:rPr lang="en-US" sz="1400" b="0" dirty="0"/>
-              <a:t>In the proposal builder at the end of this session, the instructor models the same steps for the running example, and you then do it for your own variables.</a:t>
+              <a:t>Ask: which item must the CRF now also contain? Expected: weight at admission.</a:t>
             </a:r>
           </a:p>
         </p:txBody>
@@ -6008,49 +5096,19 @@
           <a:p>
             <a:r>
               <a:rPr lang="en-US" sz="1400" b="0" dirty="0"/>
-              <a:t>Teaching point: five rules cover most CRF problems. Read the card titles, give one example each.</a:t>
+              <a:t>Read the five card titles with one example each.</a:t>
             </a:r>
           </a:p>
           <a:p>
             <a:r>
               <a:rPr lang="en-US" sz="1400" b="0" dirty="0"/>
-              <a:t>Only what you need: every item must answer an objective, describe the population, or adjust for a confounder. 'Nice to know' items make forms long and incomplete.</a:t>
+              <a:t>Common mistake: changing the form after data collection has started gives two different datasets.</a:t>
             </a:r>
           </a:p>
           <a:p>
             <a:r>
               <a:rPr lang="en-US" sz="1400" b="0" dirty="0"/>
-              <a:t>One question, one answer: avoid double-barrelled questions. Prefer measured values over opinions.</a:t>
-            </a:r>
-          </a:p>
-          <a:p>
-            <a:r>
-              <a:rPr lang="en-US" sz="1400" b="0" dirty="0"/>
-              <a:t>Units and timing: write the unit and the time point into the question.</a:t>
-            </a:r>
-          </a:p>
-          <a:p>
-            <a:r>
-              <a:rPr lang="en-US" sz="1400" b="0" dirty="0"/>
-              <a:t>Closed answers: tick boxes with codes are faster to fill and to analyse than free text. Always include 'other (specify)' and 'unknown / not done'.</a:t>
-            </a:r>
-          </a:p>
-          <a:p>
-            <a:r>
-              <a:rPr lang="en-US" sz="1400" b="0" dirty="0"/>
-              <a:t>Pilot it: give the form to two colleagues for the same five patients and compare. Disagreement shows you which item to rewrite.</a:t>
-            </a:r>
-          </a:p>
-          <a:p>
-            <a:r>
-              <a:rPr lang="en-US" sz="1400" b="0" dirty="0"/>
-              <a:t>Common mistake: designing the form after data collection has started. Changing a form mid-study creates two different datasets.</a:t>
-            </a:r>
-          </a:p>
-          <a:p>
-            <a:r>
-              <a:rPr lang="en-US" sz="1400" b="0" dirty="0"/>
-              <a:t>Ask (call on two or three people, microphone on): which rule is most often broken on forms in your unit? Expected answers: too long, no units, free text everywhere.</a:t>
+              <a:t>Ask: which rule is most often broken in your unit? Expected: too long, no units, free text.</a:t>
             </a:r>
           </a:p>
         </p:txBody>
@@ -6131,49 +5189,19 @@
           <a:p>
             <a:r>
               <a:rPr lang="en-US" sz="1400" b="0" dirty="0"/>
-              <a:t>Teaching point: the data dictionary (also called a codebook) explains every column of your dataset: short name, meaning, type, unit or codes, and allowed values.</a:t>
+              <a:t>The data dictionary: one row per variable, so anyone can understand the data without phoning you.</a:t>
             </a:r>
           </a:p>
           <a:p>
             <a:r>
               <a:rPr lang="en-US" sz="1400" b="0" dirty="0"/>
-              <a:t>Why it matters: in six months nobody will remember whether sex 1 meant male or female, or whether fb_d5 was ml or ml/kg. A statistician, a co-author or a reviewer must be able to understand your data without phoning you.</a:t>
+              <a:t>Read the fb_d5 row aloud. Its allowed range becomes the range check on the next slide. Note the 'unknown' code 9.</a:t>
             </a:r>
           </a:p>
           <a:p>
             <a:r>
               <a:rPr lang="en-US" sz="1400" b="0" dirty="0"/>
-              <a:t>Read one row aloud: fb_d5 is cumulative fluid balance at day 5, continuous, in ml/kg, allowed from -100 to 300. That allowed range becomes an automatic range check on the next slide.</a:t>
-            </a:r>
-          </a:p>
-          <a:p>
-            <a:r>
-              <a:rPr lang="en-US" sz="1400" b="0" dirty="0"/>
-              <a:t>Note the 'unknown' code (9) for source of infection. Missing and unknown are written down, not left blank.</a:t>
-            </a:r>
-          </a:p>
-          <a:p>
-            <a:r>
-              <a:rPr lang="en-US" sz="1400" b="0" dirty="0"/>
-              <a:t>Tip: short variable names with no spaces (fb_d5, not 'Fluid balance day 5') work in every software.</a:t>
-            </a:r>
-          </a:p>
-          <a:p>
-            <a:r>
-              <a:rPr lang="en-US" sz="1400" b="0" dirty="0"/>
-              <a:t>The proposal builder today asks you to write 3 to 5 rows like these for your own study (Exercise 8 of the Session 5 exercise sheet).</a:t>
-            </a:r>
-          </a:p>
-          <a:p>
-            <a:r>
-              <a:rPr lang="en-US" sz="1400" b="0" dirty="0"/>
-              <a:t>Ask (call on two or three people, microphone on): who has a data dictionary for an audit they ran? Usually very few. That is normal and easy to fix.</a:t>
-            </a:r>
-          </a:p>
-          <a:p>
-            <a:r>
-              <a:rPr lang="en-US" sz="1400" b="0" dirty="0"/>
-              <a:t>The table is editable: you can change a row live if the class suggests a better one.</a:t>
+              <a:t>Participants write 3 to 5 rows like these in Proposal builder 5.</a:t>
             </a:r>
           </a:p>
         </p:txBody>
@@ -16585,7 +15613,7 @@
                 <a:latin typeface="Arial"/>
                 <a:cs typeface="Arial"/>
               </a:rPr>
-              <a:t>Course/Data/cleaning_log.md: one row for every change made to the raw data.</a:t>
+              <a:t>cleaning_log.md: one row for every change made to the raw data.</a:t>
             </a:r>
           </a:p>
         </p:txBody>
@@ -17390,7 +16418,7 @@
                 <a:latin typeface="Arial"/>
                 <a:cs typeface="Arial"/>
               </a:rPr>
-              <a:t>In class we work through all five together. For your manuscript, you choose one.</a:t>
+              <a:t>In class we work through all five together. At the end of Session 6 you choose one.</a:t>
             </a:r>
           </a:p>
         </p:txBody>
@@ -18031,7 +17059,7 @@
                 <a:latin typeface="Arial"/>
                 <a:cs typeface="Arial"/>
               </a:rPr>
-              <a:t>We give you the results. You write the paper on the question you choose.</a:t>
+              <a:t>We give you the results. You write the Results section for the question you choose.</a:t>
             </a:r>
           </a:p>
         </p:txBody>
@@ -18319,7 +17347,7 @@
                 <a:latin typeface="Arial"/>
                 <a:cs typeface="Arial"/>
               </a:rPr>
-              <a:t>Open the Q1 results pack (PDF sent before the session), page 1</a:t>
+              <a:t>Open the Q1 results pack (Results_Pack_Q1.pdf, sent by email), page 1</a:t>
             </a:r>
           </a:p>
           <a:p>
@@ -30883,7 +29911,7 @@
                 <a:latin typeface="Arial"/>
                 <a:cs typeface="Arial"/>
               </a:rPr>
-              <a:t>Choose one question (Q1 to Q5) for your manuscript and read its results pack before Session 6</a:t>
+              <a:t>Look through the five results packs. You choose your question at the end of Session 6</a:t>
             </a:r>
           </a:p>
         </p:txBody>
